--- a/docs/PROGRESS_SLIDES_2026-05-14.pptx
+++ b/docs/PROGRESS_SLIDES_2026-05-14.pptx
@@ -5295,7 +5295,7 @@
         <p:spPr>
           <a:xfrm>
             <a:off x="457200" y="3291840"/>
-            <a:ext cx="8229600" cy="822960"/>
+            <a:ext cx="3977640" cy="868680"/>
           </a:xfrm>
           <a:prstGeom prst="rect">
             <a:avLst/>
@@ -5340,7 +5340,7 @@
         <p:spPr>
           <a:xfrm>
             <a:off x="640080" y="3401568"/>
-            <a:ext cx="7863840" cy="320040"/>
+            <a:ext cx="3611880" cy="292608"/>
           </a:xfrm>
           <a:prstGeom prst="rect">
             <a:avLst/>
@@ -5375,7 +5375,7 @@
         <p:spPr>
           <a:xfrm>
             <a:off x="640080" y="3675888"/>
-            <a:ext cx="7863840" cy="411480"/>
+            <a:ext cx="3611880" cy="457200"/>
           </a:xfrm>
           <a:prstGeom prst="rect">
             <a:avLst/>
@@ -5390,20 +5390,135 @@
           <a:p>
             <a:pPr algn="l"/>
             <a:r>
-              <a:rPr sz="1100" b="0">
+              <a:rPr sz="1000" b="0">
                 <a:solidFill>
                   <a:srgbClr val="2D3748"/>
                 </a:solidFill>
                 <a:latin typeface="Calibri"/>
               </a:rPr>
-              <a:t>Coordinator retries Researcher up to 3× when the Verifier rejects. After that, Adjudicator decides. Confidence below 0.6 escalates to a human queue.</a:t>
-            </a:r>
-          </a:p>
-        </p:txBody>
-      </p:sp>
-      <p:sp>
-        <p:nvSpPr>
-          <p:cNvPr id="22" name="TextBox 21"/>
+              <a:t>Researcher retries up to 3× on Verifier rejection. After that, Adjudicator decides. Confidence below 0.6 escalates to a human queue.</a:t>
+            </a:r>
+          </a:p>
+        </p:txBody>
+      </p:sp>
+      <p:sp>
+        <p:nvSpPr>
+          <p:cNvPr id="22" name="Rectangle 21"/>
+          <p:cNvSpPr/>
+          <p:nvPr/>
+        </p:nvSpPr>
+        <p:spPr>
+          <a:xfrm>
+            <a:off x="4709160" y="3291840"/>
+            <a:ext cx="3977640" cy="868680"/>
+          </a:xfrm>
+          <a:prstGeom prst="rect">
+            <a:avLst/>
+          </a:prstGeom>
+          <a:solidFill>
+            <a:srgbClr val="F7FAFC"/>
+          </a:solidFill>
+          <a:ln w="6350">
+            <a:solidFill>
+              <a:srgbClr val="C53030"/>
+            </a:solidFill>
+          </a:ln>
+        </p:spPr>
+        <p:style>
+          <a:lnRef idx="1">
+            <a:schemeClr val="accent1"/>
+          </a:lnRef>
+          <a:fillRef idx="3">
+            <a:schemeClr val="accent1"/>
+          </a:fillRef>
+          <a:effectRef idx="2">
+            <a:schemeClr val="accent1"/>
+          </a:effectRef>
+          <a:fontRef idx="minor">
+            <a:schemeClr val="lt1"/>
+          </a:fontRef>
+        </p:style>
+        <p:txBody>
+          <a:bodyPr rtlCol="0" anchor="ctr"/>
+          <a:lstStyle/>
+          <a:p>
+            <a:pPr algn="ctr"/>
+          </a:p>
+        </p:txBody>
+      </p:sp>
+      <p:sp>
+        <p:nvSpPr>
+          <p:cNvPr id="23" name="TextBox 22"/>
+          <p:cNvSpPr txBox="1"/>
+          <p:nvPr/>
+        </p:nvSpPr>
+        <p:spPr>
+          <a:xfrm>
+            <a:off x="4892040" y="3401568"/>
+            <a:ext cx="3611880" cy="292608"/>
+          </a:xfrm>
+          <a:prstGeom prst="rect">
+            <a:avLst/>
+          </a:prstGeom>
+          <a:noFill/>
+        </p:spPr>
+        <p:txBody>
+          <a:bodyPr wrap="square" lIns="0" rIns="0" tIns="0" bIns="0">
+            <a:spAutoFit/>
+          </a:bodyPr>
+          <a:lstStyle/>
+          <a:p>
+            <a:pPr algn="l"/>
+            <a:r>
+              <a:rPr sz="900" b="1">
+                <a:solidFill>
+                  <a:srgbClr val="C53030"/>
+                </a:solidFill>
+                <a:latin typeface="Calibri"/>
+              </a:rPr>
+              <a:t>DATA-LEAKAGE GUARDRAIL (D24)</a:t>
+            </a:r>
+          </a:p>
+        </p:txBody>
+      </p:sp>
+      <p:sp>
+        <p:nvSpPr>
+          <p:cNvPr id="24" name="TextBox 23"/>
+          <p:cNvSpPr txBox="1"/>
+          <p:nvPr/>
+        </p:nvSpPr>
+        <p:spPr>
+          <a:xfrm>
+            <a:off x="4892040" y="3675888"/>
+            <a:ext cx="3611880" cy="457200"/>
+          </a:xfrm>
+          <a:prstGeom prst="rect">
+            <a:avLst/>
+          </a:prstGeom>
+          <a:noFill/>
+        </p:spPr>
+        <p:txBody>
+          <a:bodyPr wrap="square" lIns="0" rIns="0" tIns="0" bIns="0">
+            <a:spAutoFit/>
+          </a:bodyPr>
+          <a:lstStyle/>
+          <a:p>
+            <a:pPr algn="l"/>
+            <a:r>
+              <a:rPr sz="1000" b="0">
+                <a:solidFill>
+                  <a:srgbClr val="2D3748"/>
+                </a:solidFill>
+                <a:latin typeface="Calibri"/>
+              </a:rPr>
+              <a:t>ODMI publications (data.europa.eu and mirrors) banned at five layers: search, fetch, validator, prompts, audit. An audit script catches anything that slips through.</a:t>
+            </a:r>
+          </a:p>
+        </p:txBody>
+      </p:sp>
+      <p:sp>
+        <p:nvSpPr>
+          <p:cNvPr id="25" name="TextBox 24"/>
           <p:cNvSpPr txBox="1"/>
           <p:nvPr/>
         </p:nvSpPr>

--- a/docs/PROGRESS_SLIDES_2026-05-14.pptx
+++ b/docs/PROGRESS_SLIDES_2026-05-14.pptx
@@ -12,6 +12,7 @@
     <p:sldId id="260" r:id="rId11"/>
     <p:sldId id="261" r:id="rId12"/>
     <p:sldId id="262" r:id="rId13"/>
+    <p:sldId id="263" r:id="rId14"/>
   </p:sldIdLst>
   <p:sldSz cx="9144000" cy="5143500" type="screen4x3"/>
   <p:notesSz cx="6858000" cy="9144000"/>
@@ -3625,7 +3626,7 @@
                 </a:solidFill>
                 <a:latin typeface="Calibri"/>
               </a:rPr>
-              <a:t>84</a:t>
+              <a:t>71</a:t>
             </a:r>
           </a:p>
         </p:txBody>
@@ -3660,7 +3661,7 @@
                 </a:solidFill>
                 <a:latin typeface="Calibri"/>
               </a:rPr>
-              <a:t>157 Researcher · 155 Verifier · 16 Adjudicator.</a:t>
+              <a:t>113 Researcher · 111 Verifier · 9 Adjudicator.</a:t>
             </a:r>
           </a:p>
         </p:txBody>
@@ -4011,7 +4012,7 @@
                 </a:solidFill>
                 <a:latin typeface="Calibri"/>
               </a:rPr>
-              <a:t>77%</a:t>
+              <a:t>79%</a:t>
             </a:r>
           </a:p>
         </p:txBody>
@@ -4046,7 +4047,7 @@
                 </a:solidFill>
                 <a:latin typeface="Calibri"/>
               </a:rPr>
-              <a:t>65 / 84 match against ODMI 2025.</a:t>
+              <a:t>56 / 71 match against ODMI 2025.</a:t>
             </a:r>
           </a:p>
         </p:txBody>
@@ -4397,7 +4398,7 @@
                 </a:solidFill>
                 <a:latin typeface="Calibri"/>
               </a:rPr>
-              <a:t>Researcher proposes, Verifier tries to disprove, Adjudicator steps in when retries are exhausted. Average runtime ~102s.</a:t>
+              <a:t>Researcher proposes, Verifier tries to disprove, Adjudicator steps in when retries are exhausted. Average runtime ~86s.</a:t>
             </a:r>
           </a:p>
         </p:txBody>
@@ -4590,7 +4591,7 @@
                 </a:solidFill>
                 <a:latin typeface="Calibri"/>
               </a:rPr>
-              <a:t>ODMI Agent Swarm  ·  Benjy Bream  ·  King's College London  ·  2 / 7</a:t>
+              <a:t>ODMI Agent Swarm  ·  Benjy Bream  ·  King's College London  ·  2 / 8</a:t>
             </a:r>
           </a:p>
         </p:txBody>
@@ -5037,7 +5038,7 @@
                 </a:solidFill>
                 <a:latin typeface="Calibri"/>
               </a:rPr>
-              <a:t>Same source URL. Adversarial prompt (default: find disproof). Returns pass / fail with counter-evidence if any.</a:t>
+              <a:t>Substring-checks the Researcher's quote, runs an independent search, and reasons adversarially (default strategy: find a way to disprove the claim). Returns pass / fail with counter-evidence.</a:t>
             </a:r>
           </a:p>
         </p:txBody>
@@ -5546,7 +5547,7 @@
                 </a:solidFill>
                 <a:latin typeface="Calibri"/>
               </a:rPr>
-              <a:t>ODMI Agent Swarm  ·  Benjy Bream  ·  King's College London  ·  3 / 7</a:t>
+              <a:t>ODMI Agent Swarm  ·  Benjy Bream  ·  King's College London  ·  3 / 8</a:t>
             </a:r>
           </a:p>
         </p:txBody>
@@ -5642,7 +5643,7 @@
                 </a:solidFill>
                 <a:latin typeface="Calibri"/>
               </a:rPr>
-              <a:t>FINALISED PAIRS · SUCCESS VS FAILURE</a:t>
+              <a:t>DATA-LEAKAGE CONTROLS · D24</a:t>
             </a:r>
           </a:p>
         </p:txBody>
@@ -5677,21 +5678,56 @@
                 </a:solidFill>
                 <a:latin typeface="Calibri"/>
               </a:rPr>
-              <a:t>Results so far, per country</a:t>
-            </a:r>
-          </a:p>
-        </p:txBody>
-      </p:sp>
-      <p:sp>
-        <p:nvSpPr>
-          <p:cNvPr id="5" name="Rectangle 4"/>
+              <a:t>Why ODMI publications are banned</a:t>
+            </a:r>
+          </a:p>
+        </p:txBody>
+      </p:sp>
+      <p:sp>
+        <p:nvSpPr>
+          <p:cNvPr id="5" name="TextBox 4"/>
+          <p:cNvSpPr txBox="1"/>
+          <p:nvPr/>
+        </p:nvSpPr>
+        <p:spPr>
+          <a:xfrm>
+            <a:off x="457200" y="1143000"/>
+            <a:ext cx="8229600" cy="411480"/>
+          </a:xfrm>
+          <a:prstGeom prst="rect">
+            <a:avLst/>
+          </a:prstGeom>
+          <a:noFill/>
+        </p:spPr>
+        <p:txBody>
+          <a:bodyPr wrap="square" lIns="0" rIns="0" tIns="0" bIns="0">
+            <a:spAutoFit/>
+          </a:bodyPr>
+          <a:lstStyle/>
+          <a:p>
+            <a:pPr algn="l"/>
+            <a:r>
+              <a:rPr sz="1100" b="0">
+                <a:solidFill>
+                  <a:srgbClr val="2D3748"/>
+                </a:solidFill>
+                <a:latin typeface="Calibri"/>
+              </a:rPr>
+              <a:t>The swarm is validated against ODMI's published merged_responses. Any URL that hosts, mirrors, or summarises ODMI's own answers leaks the signal we are predicting, so it must never reach the agents. Five layers enforce this:</a:t>
+            </a:r>
+          </a:p>
+        </p:txBody>
+      </p:sp>
+      <p:sp>
+        <p:nvSpPr>
+          <p:cNvPr id="6" name="Rectangle 5"/>
           <p:cNvSpPr/>
           <p:nvPr/>
         </p:nvSpPr>
         <p:spPr>
           <a:xfrm>
-            <a:off x="457200" y="1188720"/>
-            <a:ext cx="8229600" cy="2468880"/>
+            <a:off x="457200" y="1691640"/>
+            <a:ext cx="1514246" cy="2194560"/>
           </a:xfrm>
           <a:prstGeom prst="rect">
             <a:avLst/>
@@ -5727,20 +5763,136 @@
           </a:p>
         </p:txBody>
       </p:sp>
-      <p:cxnSp>
-        <p:nvCxnSpPr>
-          <p:cNvPr id="6" name="Connector 5"/>
-          <p:cNvCxnSpPr/>
-          <p:nvPr/>
-        </p:nvCxnSpPr>
-        <p:spPr>
-          <a:xfrm>
-            <a:off x="1143000" y="1463040"/>
-            <a:ext cx="0" cy="1600200"/>
-          </a:xfrm>
-          <a:prstGeom prst="line">
-            <a:avLst/>
-          </a:prstGeom>
+      <p:sp>
+        <p:nvSpPr>
+          <p:cNvPr id="7" name="Rectangle 6"/>
+          <p:cNvSpPr/>
+          <p:nvPr/>
+        </p:nvSpPr>
+        <p:spPr>
+          <a:xfrm>
+            <a:off x="457200" y="1691640"/>
+            <a:ext cx="1514246" cy="320040"/>
+          </a:xfrm>
+          <a:prstGeom prst="rect">
+            <a:avLst/>
+          </a:prstGeom>
+          <a:solidFill>
+            <a:srgbClr val="0D9488"/>
+          </a:solidFill>
+          <a:ln>
+            <a:noFill/>
+          </a:ln>
+        </p:spPr>
+        <p:style>
+          <a:lnRef idx="1">
+            <a:schemeClr val="accent1"/>
+          </a:lnRef>
+          <a:fillRef idx="3">
+            <a:schemeClr val="accent1"/>
+          </a:fillRef>
+          <a:effectRef idx="2">
+            <a:schemeClr val="accent1"/>
+          </a:effectRef>
+          <a:fontRef idx="minor">
+            <a:schemeClr val="lt1"/>
+          </a:fontRef>
+        </p:style>
+        <p:txBody>
+          <a:bodyPr rtlCol="0" anchor="ctr"/>
+          <a:lstStyle/>
+          <a:p>
+            <a:pPr algn="ctr"/>
+          </a:p>
+        </p:txBody>
+      </p:sp>
+      <p:sp>
+        <p:nvSpPr>
+          <p:cNvPr id="8" name="TextBox 7"/>
+          <p:cNvSpPr txBox="1"/>
+          <p:nvPr/>
+        </p:nvSpPr>
+        <p:spPr>
+          <a:xfrm>
+            <a:off x="640080" y="1737360"/>
+            <a:ext cx="1148486" cy="246888"/>
+          </a:xfrm>
+          <a:prstGeom prst="rect">
+            <a:avLst/>
+          </a:prstGeom>
+          <a:noFill/>
+        </p:spPr>
+        <p:txBody>
+          <a:bodyPr wrap="square" lIns="0" rIns="0" tIns="0" bIns="0">
+            <a:spAutoFit/>
+          </a:bodyPr>
+          <a:lstStyle/>
+          <a:p>
+            <a:pPr algn="l"/>
+            <a:r>
+              <a:rPr sz="1100" b="1">
+                <a:solidFill>
+                  <a:srgbClr val="FFFFFF"/>
+                </a:solidFill>
+                <a:latin typeface="Calibri"/>
+              </a:rPr>
+              <a:t>1.  SEARCH</a:t>
+            </a:r>
+          </a:p>
+        </p:txBody>
+      </p:sp>
+      <p:sp>
+        <p:nvSpPr>
+          <p:cNvPr id="9" name="TextBox 8"/>
+          <p:cNvSpPr txBox="1"/>
+          <p:nvPr/>
+        </p:nvSpPr>
+        <p:spPr>
+          <a:xfrm>
+            <a:off x="594360" y="2148840"/>
+            <a:ext cx="1239926" cy="1645920"/>
+          </a:xfrm>
+          <a:prstGeom prst="rect">
+            <a:avLst/>
+          </a:prstGeom>
+          <a:noFill/>
+        </p:spPr>
+        <p:txBody>
+          <a:bodyPr wrap="square" lIns="0" rIns="0" tIns="0" bIns="0">
+            <a:spAutoFit/>
+          </a:bodyPr>
+          <a:lstStyle/>
+          <a:p>
+            <a:pPr algn="l"/>
+            <a:r>
+              <a:rPr sz="950" b="0">
+                <a:solidFill>
+                  <a:srgbClr val="2D3748"/>
+                </a:solidFill>
+                <a:latin typeface="Calibri"/>
+              </a:rPr>
+              <a:t>Tavily exclude_domains · Brave −site: · post-filter drops any blocked URL before it reaches an agent.</a:t>
+            </a:r>
+          </a:p>
+        </p:txBody>
+      </p:sp>
+      <p:sp>
+        <p:nvSpPr>
+          <p:cNvPr id="10" name="Rectangle 9"/>
+          <p:cNvSpPr/>
+          <p:nvPr/>
+        </p:nvSpPr>
+        <p:spPr>
+          <a:xfrm>
+            <a:off x="2136038" y="1691640"/>
+            <a:ext cx="1514246" cy="2194560"/>
+          </a:xfrm>
+          <a:prstGeom prst="rect">
+            <a:avLst/>
+          </a:prstGeom>
+          <a:solidFill>
+            <a:srgbClr val="FFFFFF"/>
+          </a:solidFill>
           <a:ln w="6350">
             <a:solidFill>
               <a:srgbClr val="E2E8F0"/>
@@ -5748,34 +5900,157 @@
           </a:ln>
         </p:spPr>
         <p:style>
-          <a:lnRef idx="2">
+          <a:lnRef idx="1">
             <a:schemeClr val="accent1"/>
           </a:lnRef>
-          <a:fillRef idx="0">
+          <a:fillRef idx="3">
             <a:schemeClr val="accent1"/>
           </a:fillRef>
-          <a:effectRef idx="1">
+          <a:effectRef idx="2">
             <a:schemeClr val="accent1"/>
           </a:effectRef>
           <a:fontRef idx="minor">
-            <a:schemeClr val="tx1"/>
+            <a:schemeClr val="lt1"/>
           </a:fontRef>
         </p:style>
-      </p:cxnSp>
-      <p:cxnSp>
-        <p:nvCxnSpPr>
-          <p:cNvPr id="7" name="Connector 6"/>
-          <p:cNvCxnSpPr/>
-          <p:nvPr/>
-        </p:nvCxnSpPr>
-        <p:spPr>
-          <a:xfrm>
-            <a:off x="1143000" y="3063240"/>
-            <a:ext cx="7086600" cy="0"/>
-          </a:xfrm>
-          <a:prstGeom prst="line">
-            <a:avLst/>
-          </a:prstGeom>
+        <p:txBody>
+          <a:bodyPr rtlCol="0" anchor="ctr"/>
+          <a:lstStyle/>
+          <a:p>
+            <a:pPr algn="ctr"/>
+          </a:p>
+        </p:txBody>
+      </p:sp>
+      <p:sp>
+        <p:nvSpPr>
+          <p:cNvPr id="11" name="Rectangle 10"/>
+          <p:cNvSpPr/>
+          <p:nvPr/>
+        </p:nvSpPr>
+        <p:spPr>
+          <a:xfrm>
+            <a:off x="2136038" y="1691640"/>
+            <a:ext cx="1514246" cy="320040"/>
+          </a:xfrm>
+          <a:prstGeom prst="rect">
+            <a:avLst/>
+          </a:prstGeom>
+          <a:solidFill>
+            <a:srgbClr val="0F766E"/>
+          </a:solidFill>
+          <a:ln>
+            <a:noFill/>
+          </a:ln>
+        </p:spPr>
+        <p:style>
+          <a:lnRef idx="1">
+            <a:schemeClr val="accent1"/>
+          </a:lnRef>
+          <a:fillRef idx="3">
+            <a:schemeClr val="accent1"/>
+          </a:fillRef>
+          <a:effectRef idx="2">
+            <a:schemeClr val="accent1"/>
+          </a:effectRef>
+          <a:fontRef idx="minor">
+            <a:schemeClr val="lt1"/>
+          </a:fontRef>
+        </p:style>
+        <p:txBody>
+          <a:bodyPr rtlCol="0" anchor="ctr"/>
+          <a:lstStyle/>
+          <a:p>
+            <a:pPr algn="ctr"/>
+          </a:p>
+        </p:txBody>
+      </p:sp>
+      <p:sp>
+        <p:nvSpPr>
+          <p:cNvPr id="12" name="TextBox 11"/>
+          <p:cNvSpPr txBox="1"/>
+          <p:nvPr/>
+        </p:nvSpPr>
+        <p:spPr>
+          <a:xfrm>
+            <a:off x="2318918" y="1737360"/>
+            <a:ext cx="1148486" cy="246888"/>
+          </a:xfrm>
+          <a:prstGeom prst="rect">
+            <a:avLst/>
+          </a:prstGeom>
+          <a:noFill/>
+        </p:spPr>
+        <p:txBody>
+          <a:bodyPr wrap="square" lIns="0" rIns="0" tIns="0" bIns="0">
+            <a:spAutoFit/>
+          </a:bodyPr>
+          <a:lstStyle/>
+          <a:p>
+            <a:pPr algn="l"/>
+            <a:r>
+              <a:rPr sz="1100" b="1">
+                <a:solidFill>
+                  <a:srgbClr val="FFFFFF"/>
+                </a:solidFill>
+                <a:latin typeface="Calibri"/>
+              </a:rPr>
+              <a:t>2.  FETCH</a:t>
+            </a:r>
+          </a:p>
+        </p:txBody>
+      </p:sp>
+      <p:sp>
+        <p:nvSpPr>
+          <p:cNvPr id="13" name="TextBox 12"/>
+          <p:cNvSpPr txBox="1"/>
+          <p:nvPr/>
+        </p:nvSpPr>
+        <p:spPr>
+          <a:xfrm>
+            <a:off x="2273198" y="2148840"/>
+            <a:ext cx="1239926" cy="1645920"/>
+          </a:xfrm>
+          <a:prstGeom prst="rect">
+            <a:avLst/>
+          </a:prstGeom>
+          <a:noFill/>
+        </p:spPr>
+        <p:txBody>
+          <a:bodyPr wrap="square" lIns="0" rIns="0" tIns="0" bIns="0">
+            <a:spAutoFit/>
+          </a:bodyPr>
+          <a:lstStyle/>
+          <a:p>
+            <a:pPr algn="l"/>
+            <a:r>
+              <a:rPr sz="950" b="0">
+                <a:solidFill>
+                  <a:srgbClr val="2D3748"/>
+                </a:solidFill>
+                <a:latin typeface="Calibri"/>
+              </a:rPr>
+              <a:t>fetch_text and head_ok refuse blocked URLs with failure_mode="blocked_data_leakage". No network call.</a:t>
+            </a:r>
+          </a:p>
+        </p:txBody>
+      </p:sp>
+      <p:sp>
+        <p:nvSpPr>
+          <p:cNvPr id="14" name="Rectangle 13"/>
+          <p:cNvSpPr/>
+          <p:nvPr/>
+        </p:nvSpPr>
+        <p:spPr>
+          <a:xfrm>
+            <a:off x="3814876" y="1691640"/>
+            <a:ext cx="1514246" cy="2194560"/>
+          </a:xfrm>
+          <a:prstGeom prst="rect">
+            <a:avLst/>
+          </a:prstGeom>
+          <a:solidFill>
+            <a:srgbClr val="FFFFFF"/>
+          </a:solidFill>
           <a:ln w="6350">
             <a:solidFill>
               <a:srgbClr val="E2E8F0"/>
@@ -5783,2702 +6058,6 @@
           </a:ln>
         </p:spPr>
         <p:style>
-          <a:lnRef idx="2">
-            <a:schemeClr val="accent1"/>
-          </a:lnRef>
-          <a:fillRef idx="0">
-            <a:schemeClr val="accent1"/>
-          </a:fillRef>
-          <a:effectRef idx="1">
-            <a:schemeClr val="accent1"/>
-          </a:effectRef>
-          <a:fontRef idx="minor">
-            <a:schemeClr val="tx1"/>
-          </a:fontRef>
-        </p:style>
-      </p:cxnSp>
-      <p:sp>
-        <p:nvSpPr>
-          <p:cNvPr id="8" name="TextBox 7"/>
-          <p:cNvSpPr txBox="1"/>
-          <p:nvPr/>
-        </p:nvSpPr>
-        <p:spPr>
-          <a:xfrm>
-            <a:off x="685800" y="2971800"/>
-            <a:ext cx="411480" cy="182880"/>
-          </a:xfrm>
-          <a:prstGeom prst="rect">
-            <a:avLst/>
-          </a:prstGeom>
-          <a:noFill/>
-        </p:spPr>
-        <p:txBody>
-          <a:bodyPr wrap="square" lIns="0" rIns="0" tIns="0" bIns="0">
-            <a:spAutoFit/>
-          </a:bodyPr>
-          <a:lstStyle/>
-          <a:p>
-            <a:pPr algn="r"/>
-            <a:r>
-              <a:rPr sz="900" b="0">
-                <a:solidFill>
-                  <a:srgbClr val="718096"/>
-                </a:solidFill>
-                <a:latin typeface="Calibri"/>
-              </a:rPr>
-              <a:t>0</a:t>
-            </a:r>
-          </a:p>
-        </p:txBody>
-      </p:sp>
-      <p:sp>
-        <p:nvSpPr>
-          <p:cNvPr id="9" name="TextBox 8"/>
-          <p:cNvSpPr txBox="1"/>
-          <p:nvPr/>
-        </p:nvSpPr>
-        <p:spPr>
-          <a:xfrm>
-            <a:off x="685800" y="2950464"/>
-            <a:ext cx="411480" cy="182880"/>
-          </a:xfrm>
-          <a:prstGeom prst="rect">
-            <a:avLst/>
-          </a:prstGeom>
-          <a:noFill/>
-        </p:spPr>
-        <p:txBody>
-          <a:bodyPr wrap="square" lIns="0" rIns="0" tIns="0" bIns="0">
-            <a:spAutoFit/>
-          </a:bodyPr>
-          <a:lstStyle/>
-          <a:p>
-            <a:pPr algn="r"/>
-            <a:r>
-              <a:rPr sz="900" b="0">
-                <a:solidFill>
-                  <a:srgbClr val="718096"/>
-                </a:solidFill>
-                <a:latin typeface="Calibri"/>
-              </a:rPr>
-              <a:t>1</a:t>
-            </a:r>
-          </a:p>
-        </p:txBody>
-      </p:sp>
-      <p:sp>
-        <p:nvSpPr>
-          <p:cNvPr id="10" name="TextBox 9"/>
-          <p:cNvSpPr txBox="1"/>
-          <p:nvPr/>
-        </p:nvSpPr>
-        <p:spPr>
-          <a:xfrm>
-            <a:off x="685800" y="2929128"/>
-            <a:ext cx="411480" cy="182880"/>
-          </a:xfrm>
-          <a:prstGeom prst="rect">
-            <a:avLst/>
-          </a:prstGeom>
-          <a:noFill/>
-        </p:spPr>
-        <p:txBody>
-          <a:bodyPr wrap="square" lIns="0" rIns="0" tIns="0" bIns="0">
-            <a:spAutoFit/>
-          </a:bodyPr>
-          <a:lstStyle/>
-          <a:p>
-            <a:pPr algn="r"/>
-            <a:r>
-              <a:rPr sz="900" b="0">
-                <a:solidFill>
-                  <a:srgbClr val="718096"/>
-                </a:solidFill>
-                <a:latin typeface="Calibri"/>
-              </a:rPr>
-              <a:t>2</a:t>
-            </a:r>
-          </a:p>
-        </p:txBody>
-      </p:sp>
-      <p:sp>
-        <p:nvSpPr>
-          <p:cNvPr id="11" name="TextBox 10"/>
-          <p:cNvSpPr txBox="1"/>
-          <p:nvPr/>
-        </p:nvSpPr>
-        <p:spPr>
-          <a:xfrm>
-            <a:off x="685800" y="2907792"/>
-            <a:ext cx="411480" cy="182880"/>
-          </a:xfrm>
-          <a:prstGeom prst="rect">
-            <a:avLst/>
-          </a:prstGeom>
-          <a:noFill/>
-        </p:spPr>
-        <p:txBody>
-          <a:bodyPr wrap="square" lIns="0" rIns="0" tIns="0" bIns="0">
-            <a:spAutoFit/>
-          </a:bodyPr>
-          <a:lstStyle/>
-          <a:p>
-            <a:pPr algn="r"/>
-            <a:r>
-              <a:rPr sz="900" b="0">
-                <a:solidFill>
-                  <a:srgbClr val="718096"/>
-                </a:solidFill>
-                <a:latin typeface="Calibri"/>
-              </a:rPr>
-              <a:t>3</a:t>
-            </a:r>
-          </a:p>
-        </p:txBody>
-      </p:sp>
-      <p:sp>
-        <p:nvSpPr>
-          <p:cNvPr id="12" name="TextBox 11"/>
-          <p:cNvSpPr txBox="1"/>
-          <p:nvPr/>
-        </p:nvSpPr>
-        <p:spPr>
-          <a:xfrm>
-            <a:off x="685800" y="2886456"/>
-            <a:ext cx="411480" cy="182880"/>
-          </a:xfrm>
-          <a:prstGeom prst="rect">
-            <a:avLst/>
-          </a:prstGeom>
-          <a:noFill/>
-        </p:spPr>
-        <p:txBody>
-          <a:bodyPr wrap="square" lIns="0" rIns="0" tIns="0" bIns="0">
-            <a:spAutoFit/>
-          </a:bodyPr>
-          <a:lstStyle/>
-          <a:p>
-            <a:pPr algn="r"/>
-            <a:r>
-              <a:rPr sz="900" b="0">
-                <a:solidFill>
-                  <a:srgbClr val="718096"/>
-                </a:solidFill>
-                <a:latin typeface="Calibri"/>
-              </a:rPr>
-              <a:t>4</a:t>
-            </a:r>
-          </a:p>
-        </p:txBody>
-      </p:sp>
-      <p:sp>
-        <p:nvSpPr>
-          <p:cNvPr id="13" name="TextBox 12"/>
-          <p:cNvSpPr txBox="1"/>
-          <p:nvPr/>
-        </p:nvSpPr>
-        <p:spPr>
-          <a:xfrm>
-            <a:off x="685800" y="2865120"/>
-            <a:ext cx="411480" cy="182880"/>
-          </a:xfrm>
-          <a:prstGeom prst="rect">
-            <a:avLst/>
-          </a:prstGeom>
-          <a:noFill/>
-        </p:spPr>
-        <p:txBody>
-          <a:bodyPr wrap="square" lIns="0" rIns="0" tIns="0" bIns="0">
-            <a:spAutoFit/>
-          </a:bodyPr>
-          <a:lstStyle/>
-          <a:p>
-            <a:pPr algn="r"/>
-            <a:r>
-              <a:rPr sz="900" b="0">
-                <a:solidFill>
-                  <a:srgbClr val="718096"/>
-                </a:solidFill>
-                <a:latin typeface="Calibri"/>
-              </a:rPr>
-              <a:t>5</a:t>
-            </a:r>
-          </a:p>
-        </p:txBody>
-      </p:sp>
-      <p:sp>
-        <p:nvSpPr>
-          <p:cNvPr id="14" name="TextBox 13"/>
-          <p:cNvSpPr txBox="1"/>
-          <p:nvPr/>
-        </p:nvSpPr>
-        <p:spPr>
-          <a:xfrm>
-            <a:off x="685800" y="2843784"/>
-            <a:ext cx="411480" cy="182880"/>
-          </a:xfrm>
-          <a:prstGeom prst="rect">
-            <a:avLst/>
-          </a:prstGeom>
-          <a:noFill/>
-        </p:spPr>
-        <p:txBody>
-          <a:bodyPr wrap="square" lIns="0" rIns="0" tIns="0" bIns="0">
-            <a:spAutoFit/>
-          </a:bodyPr>
-          <a:lstStyle/>
-          <a:p>
-            <a:pPr algn="r"/>
-            <a:r>
-              <a:rPr sz="900" b="0">
-                <a:solidFill>
-                  <a:srgbClr val="718096"/>
-                </a:solidFill>
-                <a:latin typeface="Calibri"/>
-              </a:rPr>
-              <a:t>6</a:t>
-            </a:r>
-          </a:p>
-        </p:txBody>
-      </p:sp>
-      <p:sp>
-        <p:nvSpPr>
-          <p:cNvPr id="15" name="TextBox 14"/>
-          <p:cNvSpPr txBox="1"/>
-          <p:nvPr/>
-        </p:nvSpPr>
-        <p:spPr>
-          <a:xfrm>
-            <a:off x="685800" y="2822448"/>
-            <a:ext cx="411480" cy="182880"/>
-          </a:xfrm>
-          <a:prstGeom prst="rect">
-            <a:avLst/>
-          </a:prstGeom>
-          <a:noFill/>
-        </p:spPr>
-        <p:txBody>
-          <a:bodyPr wrap="square" lIns="0" rIns="0" tIns="0" bIns="0">
-            <a:spAutoFit/>
-          </a:bodyPr>
-          <a:lstStyle/>
-          <a:p>
-            <a:pPr algn="r"/>
-            <a:r>
-              <a:rPr sz="900" b="0">
-                <a:solidFill>
-                  <a:srgbClr val="718096"/>
-                </a:solidFill>
-                <a:latin typeface="Calibri"/>
-              </a:rPr>
-              <a:t>7</a:t>
-            </a:r>
-          </a:p>
-        </p:txBody>
-      </p:sp>
-      <p:sp>
-        <p:nvSpPr>
-          <p:cNvPr id="16" name="TextBox 15"/>
-          <p:cNvSpPr txBox="1"/>
-          <p:nvPr/>
-        </p:nvSpPr>
-        <p:spPr>
-          <a:xfrm>
-            <a:off x="685800" y="2801112"/>
-            <a:ext cx="411480" cy="182880"/>
-          </a:xfrm>
-          <a:prstGeom prst="rect">
-            <a:avLst/>
-          </a:prstGeom>
-          <a:noFill/>
-        </p:spPr>
-        <p:txBody>
-          <a:bodyPr wrap="square" lIns="0" rIns="0" tIns="0" bIns="0">
-            <a:spAutoFit/>
-          </a:bodyPr>
-          <a:lstStyle/>
-          <a:p>
-            <a:pPr algn="r"/>
-            <a:r>
-              <a:rPr sz="900" b="0">
-                <a:solidFill>
-                  <a:srgbClr val="718096"/>
-                </a:solidFill>
-                <a:latin typeface="Calibri"/>
-              </a:rPr>
-              <a:t>8</a:t>
-            </a:r>
-          </a:p>
-        </p:txBody>
-      </p:sp>
-      <p:sp>
-        <p:nvSpPr>
-          <p:cNvPr id="17" name="TextBox 16"/>
-          <p:cNvSpPr txBox="1"/>
-          <p:nvPr/>
-        </p:nvSpPr>
-        <p:spPr>
-          <a:xfrm>
-            <a:off x="685800" y="2779776"/>
-            <a:ext cx="411480" cy="182880"/>
-          </a:xfrm>
-          <a:prstGeom prst="rect">
-            <a:avLst/>
-          </a:prstGeom>
-          <a:noFill/>
-        </p:spPr>
-        <p:txBody>
-          <a:bodyPr wrap="square" lIns="0" rIns="0" tIns="0" bIns="0">
-            <a:spAutoFit/>
-          </a:bodyPr>
-          <a:lstStyle/>
-          <a:p>
-            <a:pPr algn="r"/>
-            <a:r>
-              <a:rPr sz="900" b="0">
-                <a:solidFill>
-                  <a:srgbClr val="718096"/>
-                </a:solidFill>
-                <a:latin typeface="Calibri"/>
-              </a:rPr>
-              <a:t>9</a:t>
-            </a:r>
-          </a:p>
-        </p:txBody>
-      </p:sp>
-      <p:sp>
-        <p:nvSpPr>
-          <p:cNvPr id="18" name="TextBox 17"/>
-          <p:cNvSpPr txBox="1"/>
-          <p:nvPr/>
-        </p:nvSpPr>
-        <p:spPr>
-          <a:xfrm>
-            <a:off x="685800" y="2758440"/>
-            <a:ext cx="411480" cy="182880"/>
-          </a:xfrm>
-          <a:prstGeom prst="rect">
-            <a:avLst/>
-          </a:prstGeom>
-          <a:noFill/>
-        </p:spPr>
-        <p:txBody>
-          <a:bodyPr wrap="square" lIns="0" rIns="0" tIns="0" bIns="0">
-            <a:spAutoFit/>
-          </a:bodyPr>
-          <a:lstStyle/>
-          <a:p>
-            <a:pPr algn="r"/>
-            <a:r>
-              <a:rPr sz="900" b="0">
-                <a:solidFill>
-                  <a:srgbClr val="718096"/>
-                </a:solidFill>
-                <a:latin typeface="Calibri"/>
-              </a:rPr>
-              <a:t>10</a:t>
-            </a:r>
-          </a:p>
-        </p:txBody>
-      </p:sp>
-      <p:sp>
-        <p:nvSpPr>
-          <p:cNvPr id="19" name="TextBox 18"/>
-          <p:cNvSpPr txBox="1"/>
-          <p:nvPr/>
-        </p:nvSpPr>
-        <p:spPr>
-          <a:xfrm>
-            <a:off x="685800" y="2737104"/>
-            <a:ext cx="411480" cy="182880"/>
-          </a:xfrm>
-          <a:prstGeom prst="rect">
-            <a:avLst/>
-          </a:prstGeom>
-          <a:noFill/>
-        </p:spPr>
-        <p:txBody>
-          <a:bodyPr wrap="square" lIns="0" rIns="0" tIns="0" bIns="0">
-            <a:spAutoFit/>
-          </a:bodyPr>
-          <a:lstStyle/>
-          <a:p>
-            <a:pPr algn="r"/>
-            <a:r>
-              <a:rPr sz="900" b="0">
-                <a:solidFill>
-                  <a:srgbClr val="718096"/>
-                </a:solidFill>
-                <a:latin typeface="Calibri"/>
-              </a:rPr>
-              <a:t>11</a:t>
-            </a:r>
-          </a:p>
-        </p:txBody>
-      </p:sp>
-      <p:sp>
-        <p:nvSpPr>
-          <p:cNvPr id="20" name="TextBox 19"/>
-          <p:cNvSpPr txBox="1"/>
-          <p:nvPr/>
-        </p:nvSpPr>
-        <p:spPr>
-          <a:xfrm>
-            <a:off x="685800" y="2715768"/>
-            <a:ext cx="411480" cy="182880"/>
-          </a:xfrm>
-          <a:prstGeom prst="rect">
-            <a:avLst/>
-          </a:prstGeom>
-          <a:noFill/>
-        </p:spPr>
-        <p:txBody>
-          <a:bodyPr wrap="square" lIns="0" rIns="0" tIns="0" bIns="0">
-            <a:spAutoFit/>
-          </a:bodyPr>
-          <a:lstStyle/>
-          <a:p>
-            <a:pPr algn="r"/>
-            <a:r>
-              <a:rPr sz="900" b="0">
-                <a:solidFill>
-                  <a:srgbClr val="718096"/>
-                </a:solidFill>
-                <a:latin typeface="Calibri"/>
-              </a:rPr>
-              <a:t>12</a:t>
-            </a:r>
-          </a:p>
-        </p:txBody>
-      </p:sp>
-      <p:sp>
-        <p:nvSpPr>
-          <p:cNvPr id="21" name="TextBox 20"/>
-          <p:cNvSpPr txBox="1"/>
-          <p:nvPr/>
-        </p:nvSpPr>
-        <p:spPr>
-          <a:xfrm>
-            <a:off x="685800" y="2694432"/>
-            <a:ext cx="411480" cy="182880"/>
-          </a:xfrm>
-          <a:prstGeom prst="rect">
-            <a:avLst/>
-          </a:prstGeom>
-          <a:noFill/>
-        </p:spPr>
-        <p:txBody>
-          <a:bodyPr wrap="square" lIns="0" rIns="0" tIns="0" bIns="0">
-            <a:spAutoFit/>
-          </a:bodyPr>
-          <a:lstStyle/>
-          <a:p>
-            <a:pPr algn="r"/>
-            <a:r>
-              <a:rPr sz="900" b="0">
-                <a:solidFill>
-                  <a:srgbClr val="718096"/>
-                </a:solidFill>
-                <a:latin typeface="Calibri"/>
-              </a:rPr>
-              <a:t>13</a:t>
-            </a:r>
-          </a:p>
-        </p:txBody>
-      </p:sp>
-      <p:sp>
-        <p:nvSpPr>
-          <p:cNvPr id="22" name="TextBox 21"/>
-          <p:cNvSpPr txBox="1"/>
-          <p:nvPr/>
-        </p:nvSpPr>
-        <p:spPr>
-          <a:xfrm>
-            <a:off x="685800" y="2673096"/>
-            <a:ext cx="411480" cy="182880"/>
-          </a:xfrm>
-          <a:prstGeom prst="rect">
-            <a:avLst/>
-          </a:prstGeom>
-          <a:noFill/>
-        </p:spPr>
-        <p:txBody>
-          <a:bodyPr wrap="square" lIns="0" rIns="0" tIns="0" bIns="0">
-            <a:spAutoFit/>
-          </a:bodyPr>
-          <a:lstStyle/>
-          <a:p>
-            <a:pPr algn="r"/>
-            <a:r>
-              <a:rPr sz="900" b="0">
-                <a:solidFill>
-                  <a:srgbClr val="718096"/>
-                </a:solidFill>
-                <a:latin typeface="Calibri"/>
-              </a:rPr>
-              <a:t>14</a:t>
-            </a:r>
-          </a:p>
-        </p:txBody>
-      </p:sp>
-      <p:sp>
-        <p:nvSpPr>
-          <p:cNvPr id="23" name="TextBox 22"/>
-          <p:cNvSpPr txBox="1"/>
-          <p:nvPr/>
-        </p:nvSpPr>
-        <p:spPr>
-          <a:xfrm>
-            <a:off x="685800" y="2651760"/>
-            <a:ext cx="411480" cy="182880"/>
-          </a:xfrm>
-          <a:prstGeom prst="rect">
-            <a:avLst/>
-          </a:prstGeom>
-          <a:noFill/>
-        </p:spPr>
-        <p:txBody>
-          <a:bodyPr wrap="square" lIns="0" rIns="0" tIns="0" bIns="0">
-            <a:spAutoFit/>
-          </a:bodyPr>
-          <a:lstStyle/>
-          <a:p>
-            <a:pPr algn="r"/>
-            <a:r>
-              <a:rPr sz="900" b="0">
-                <a:solidFill>
-                  <a:srgbClr val="718096"/>
-                </a:solidFill>
-                <a:latin typeface="Calibri"/>
-              </a:rPr>
-              <a:t>15</a:t>
-            </a:r>
-          </a:p>
-        </p:txBody>
-      </p:sp>
-      <p:sp>
-        <p:nvSpPr>
-          <p:cNvPr id="24" name="TextBox 23"/>
-          <p:cNvSpPr txBox="1"/>
-          <p:nvPr/>
-        </p:nvSpPr>
-        <p:spPr>
-          <a:xfrm>
-            <a:off x="685800" y="2630424"/>
-            <a:ext cx="411480" cy="182880"/>
-          </a:xfrm>
-          <a:prstGeom prst="rect">
-            <a:avLst/>
-          </a:prstGeom>
-          <a:noFill/>
-        </p:spPr>
-        <p:txBody>
-          <a:bodyPr wrap="square" lIns="0" rIns="0" tIns="0" bIns="0">
-            <a:spAutoFit/>
-          </a:bodyPr>
-          <a:lstStyle/>
-          <a:p>
-            <a:pPr algn="r"/>
-            <a:r>
-              <a:rPr sz="900" b="0">
-                <a:solidFill>
-                  <a:srgbClr val="718096"/>
-                </a:solidFill>
-                <a:latin typeface="Calibri"/>
-              </a:rPr>
-              <a:t>16</a:t>
-            </a:r>
-          </a:p>
-        </p:txBody>
-      </p:sp>
-      <p:sp>
-        <p:nvSpPr>
-          <p:cNvPr id="25" name="TextBox 24"/>
-          <p:cNvSpPr txBox="1"/>
-          <p:nvPr/>
-        </p:nvSpPr>
-        <p:spPr>
-          <a:xfrm>
-            <a:off x="685800" y="2609088"/>
-            <a:ext cx="411480" cy="182880"/>
-          </a:xfrm>
-          <a:prstGeom prst="rect">
-            <a:avLst/>
-          </a:prstGeom>
-          <a:noFill/>
-        </p:spPr>
-        <p:txBody>
-          <a:bodyPr wrap="square" lIns="0" rIns="0" tIns="0" bIns="0">
-            <a:spAutoFit/>
-          </a:bodyPr>
-          <a:lstStyle/>
-          <a:p>
-            <a:pPr algn="r"/>
-            <a:r>
-              <a:rPr sz="900" b="0">
-                <a:solidFill>
-                  <a:srgbClr val="718096"/>
-                </a:solidFill>
-                <a:latin typeface="Calibri"/>
-              </a:rPr>
-              <a:t>17</a:t>
-            </a:r>
-          </a:p>
-        </p:txBody>
-      </p:sp>
-      <p:sp>
-        <p:nvSpPr>
-          <p:cNvPr id="26" name="TextBox 25"/>
-          <p:cNvSpPr txBox="1"/>
-          <p:nvPr/>
-        </p:nvSpPr>
-        <p:spPr>
-          <a:xfrm>
-            <a:off x="685800" y="2587752"/>
-            <a:ext cx="411480" cy="182880"/>
-          </a:xfrm>
-          <a:prstGeom prst="rect">
-            <a:avLst/>
-          </a:prstGeom>
-          <a:noFill/>
-        </p:spPr>
-        <p:txBody>
-          <a:bodyPr wrap="square" lIns="0" rIns="0" tIns="0" bIns="0">
-            <a:spAutoFit/>
-          </a:bodyPr>
-          <a:lstStyle/>
-          <a:p>
-            <a:pPr algn="r"/>
-            <a:r>
-              <a:rPr sz="900" b="0">
-                <a:solidFill>
-                  <a:srgbClr val="718096"/>
-                </a:solidFill>
-                <a:latin typeface="Calibri"/>
-              </a:rPr>
-              <a:t>18</a:t>
-            </a:r>
-          </a:p>
-        </p:txBody>
-      </p:sp>
-      <p:sp>
-        <p:nvSpPr>
-          <p:cNvPr id="27" name="TextBox 26"/>
-          <p:cNvSpPr txBox="1"/>
-          <p:nvPr/>
-        </p:nvSpPr>
-        <p:spPr>
-          <a:xfrm>
-            <a:off x="685800" y="2566416"/>
-            <a:ext cx="411480" cy="182880"/>
-          </a:xfrm>
-          <a:prstGeom prst="rect">
-            <a:avLst/>
-          </a:prstGeom>
-          <a:noFill/>
-        </p:spPr>
-        <p:txBody>
-          <a:bodyPr wrap="square" lIns="0" rIns="0" tIns="0" bIns="0">
-            <a:spAutoFit/>
-          </a:bodyPr>
-          <a:lstStyle/>
-          <a:p>
-            <a:pPr algn="r"/>
-            <a:r>
-              <a:rPr sz="900" b="0">
-                <a:solidFill>
-                  <a:srgbClr val="718096"/>
-                </a:solidFill>
-                <a:latin typeface="Calibri"/>
-              </a:rPr>
-              <a:t>19</a:t>
-            </a:r>
-          </a:p>
-        </p:txBody>
-      </p:sp>
-      <p:sp>
-        <p:nvSpPr>
-          <p:cNvPr id="28" name="TextBox 27"/>
-          <p:cNvSpPr txBox="1"/>
-          <p:nvPr/>
-        </p:nvSpPr>
-        <p:spPr>
-          <a:xfrm>
-            <a:off x="685800" y="2545080"/>
-            <a:ext cx="411480" cy="182880"/>
-          </a:xfrm>
-          <a:prstGeom prst="rect">
-            <a:avLst/>
-          </a:prstGeom>
-          <a:noFill/>
-        </p:spPr>
-        <p:txBody>
-          <a:bodyPr wrap="square" lIns="0" rIns="0" tIns="0" bIns="0">
-            <a:spAutoFit/>
-          </a:bodyPr>
-          <a:lstStyle/>
-          <a:p>
-            <a:pPr algn="r"/>
-            <a:r>
-              <a:rPr sz="900" b="0">
-                <a:solidFill>
-                  <a:srgbClr val="718096"/>
-                </a:solidFill>
-                <a:latin typeface="Calibri"/>
-              </a:rPr>
-              <a:t>20</a:t>
-            </a:r>
-          </a:p>
-        </p:txBody>
-      </p:sp>
-      <p:sp>
-        <p:nvSpPr>
-          <p:cNvPr id="29" name="TextBox 28"/>
-          <p:cNvSpPr txBox="1"/>
-          <p:nvPr/>
-        </p:nvSpPr>
-        <p:spPr>
-          <a:xfrm>
-            <a:off x="685800" y="2523744"/>
-            <a:ext cx="411480" cy="182880"/>
-          </a:xfrm>
-          <a:prstGeom prst="rect">
-            <a:avLst/>
-          </a:prstGeom>
-          <a:noFill/>
-        </p:spPr>
-        <p:txBody>
-          <a:bodyPr wrap="square" lIns="0" rIns="0" tIns="0" bIns="0">
-            <a:spAutoFit/>
-          </a:bodyPr>
-          <a:lstStyle/>
-          <a:p>
-            <a:pPr algn="r"/>
-            <a:r>
-              <a:rPr sz="900" b="0">
-                <a:solidFill>
-                  <a:srgbClr val="718096"/>
-                </a:solidFill>
-                <a:latin typeface="Calibri"/>
-              </a:rPr>
-              <a:t>21</a:t>
-            </a:r>
-          </a:p>
-        </p:txBody>
-      </p:sp>
-      <p:sp>
-        <p:nvSpPr>
-          <p:cNvPr id="30" name="TextBox 29"/>
-          <p:cNvSpPr txBox="1"/>
-          <p:nvPr/>
-        </p:nvSpPr>
-        <p:spPr>
-          <a:xfrm>
-            <a:off x="685800" y="2502408"/>
-            <a:ext cx="411480" cy="182880"/>
-          </a:xfrm>
-          <a:prstGeom prst="rect">
-            <a:avLst/>
-          </a:prstGeom>
-          <a:noFill/>
-        </p:spPr>
-        <p:txBody>
-          <a:bodyPr wrap="square" lIns="0" rIns="0" tIns="0" bIns="0">
-            <a:spAutoFit/>
-          </a:bodyPr>
-          <a:lstStyle/>
-          <a:p>
-            <a:pPr algn="r"/>
-            <a:r>
-              <a:rPr sz="900" b="0">
-                <a:solidFill>
-                  <a:srgbClr val="718096"/>
-                </a:solidFill>
-                <a:latin typeface="Calibri"/>
-              </a:rPr>
-              <a:t>22</a:t>
-            </a:r>
-          </a:p>
-        </p:txBody>
-      </p:sp>
-      <p:sp>
-        <p:nvSpPr>
-          <p:cNvPr id="31" name="TextBox 30"/>
-          <p:cNvSpPr txBox="1"/>
-          <p:nvPr/>
-        </p:nvSpPr>
-        <p:spPr>
-          <a:xfrm>
-            <a:off x="685800" y="2481073"/>
-            <a:ext cx="411480" cy="182880"/>
-          </a:xfrm>
-          <a:prstGeom prst="rect">
-            <a:avLst/>
-          </a:prstGeom>
-          <a:noFill/>
-        </p:spPr>
-        <p:txBody>
-          <a:bodyPr wrap="square" lIns="0" rIns="0" tIns="0" bIns="0">
-            <a:spAutoFit/>
-          </a:bodyPr>
-          <a:lstStyle/>
-          <a:p>
-            <a:pPr algn="r"/>
-            <a:r>
-              <a:rPr sz="900" b="0">
-                <a:solidFill>
-                  <a:srgbClr val="718096"/>
-                </a:solidFill>
-                <a:latin typeface="Calibri"/>
-              </a:rPr>
-              <a:t>23</a:t>
-            </a:r>
-          </a:p>
-        </p:txBody>
-      </p:sp>
-      <p:sp>
-        <p:nvSpPr>
-          <p:cNvPr id="32" name="TextBox 31"/>
-          <p:cNvSpPr txBox="1"/>
-          <p:nvPr/>
-        </p:nvSpPr>
-        <p:spPr>
-          <a:xfrm>
-            <a:off x="685800" y="2459736"/>
-            <a:ext cx="411480" cy="182880"/>
-          </a:xfrm>
-          <a:prstGeom prst="rect">
-            <a:avLst/>
-          </a:prstGeom>
-          <a:noFill/>
-        </p:spPr>
-        <p:txBody>
-          <a:bodyPr wrap="square" lIns="0" rIns="0" tIns="0" bIns="0">
-            <a:spAutoFit/>
-          </a:bodyPr>
-          <a:lstStyle/>
-          <a:p>
-            <a:pPr algn="r"/>
-            <a:r>
-              <a:rPr sz="900" b="0">
-                <a:solidFill>
-                  <a:srgbClr val="718096"/>
-                </a:solidFill>
-                <a:latin typeface="Calibri"/>
-              </a:rPr>
-              <a:t>24</a:t>
-            </a:r>
-          </a:p>
-        </p:txBody>
-      </p:sp>
-      <p:sp>
-        <p:nvSpPr>
-          <p:cNvPr id="33" name="TextBox 32"/>
-          <p:cNvSpPr txBox="1"/>
-          <p:nvPr/>
-        </p:nvSpPr>
-        <p:spPr>
-          <a:xfrm>
-            <a:off x="685800" y="2438400"/>
-            <a:ext cx="411480" cy="182880"/>
-          </a:xfrm>
-          <a:prstGeom prst="rect">
-            <a:avLst/>
-          </a:prstGeom>
-          <a:noFill/>
-        </p:spPr>
-        <p:txBody>
-          <a:bodyPr wrap="square" lIns="0" rIns="0" tIns="0" bIns="0">
-            <a:spAutoFit/>
-          </a:bodyPr>
-          <a:lstStyle/>
-          <a:p>
-            <a:pPr algn="r"/>
-            <a:r>
-              <a:rPr sz="900" b="0">
-                <a:solidFill>
-                  <a:srgbClr val="718096"/>
-                </a:solidFill>
-                <a:latin typeface="Calibri"/>
-              </a:rPr>
-              <a:t>25</a:t>
-            </a:r>
-          </a:p>
-        </p:txBody>
-      </p:sp>
-      <p:sp>
-        <p:nvSpPr>
-          <p:cNvPr id="34" name="TextBox 33"/>
-          <p:cNvSpPr txBox="1"/>
-          <p:nvPr/>
-        </p:nvSpPr>
-        <p:spPr>
-          <a:xfrm>
-            <a:off x="685800" y="2417064"/>
-            <a:ext cx="411480" cy="182880"/>
-          </a:xfrm>
-          <a:prstGeom prst="rect">
-            <a:avLst/>
-          </a:prstGeom>
-          <a:noFill/>
-        </p:spPr>
-        <p:txBody>
-          <a:bodyPr wrap="square" lIns="0" rIns="0" tIns="0" bIns="0">
-            <a:spAutoFit/>
-          </a:bodyPr>
-          <a:lstStyle/>
-          <a:p>
-            <a:pPr algn="r"/>
-            <a:r>
-              <a:rPr sz="900" b="0">
-                <a:solidFill>
-                  <a:srgbClr val="718096"/>
-                </a:solidFill>
-                <a:latin typeface="Calibri"/>
-              </a:rPr>
-              <a:t>26</a:t>
-            </a:r>
-          </a:p>
-        </p:txBody>
-      </p:sp>
-      <p:sp>
-        <p:nvSpPr>
-          <p:cNvPr id="35" name="TextBox 34"/>
-          <p:cNvSpPr txBox="1"/>
-          <p:nvPr/>
-        </p:nvSpPr>
-        <p:spPr>
-          <a:xfrm>
-            <a:off x="685800" y="2395728"/>
-            <a:ext cx="411480" cy="182880"/>
-          </a:xfrm>
-          <a:prstGeom prst="rect">
-            <a:avLst/>
-          </a:prstGeom>
-          <a:noFill/>
-        </p:spPr>
-        <p:txBody>
-          <a:bodyPr wrap="square" lIns="0" rIns="0" tIns="0" bIns="0">
-            <a:spAutoFit/>
-          </a:bodyPr>
-          <a:lstStyle/>
-          <a:p>
-            <a:pPr algn="r"/>
-            <a:r>
-              <a:rPr sz="900" b="0">
-                <a:solidFill>
-                  <a:srgbClr val="718096"/>
-                </a:solidFill>
-                <a:latin typeface="Calibri"/>
-              </a:rPr>
-              <a:t>27</a:t>
-            </a:r>
-          </a:p>
-        </p:txBody>
-      </p:sp>
-      <p:sp>
-        <p:nvSpPr>
-          <p:cNvPr id="36" name="TextBox 35"/>
-          <p:cNvSpPr txBox="1"/>
-          <p:nvPr/>
-        </p:nvSpPr>
-        <p:spPr>
-          <a:xfrm>
-            <a:off x="685800" y="2374392"/>
-            <a:ext cx="411480" cy="182880"/>
-          </a:xfrm>
-          <a:prstGeom prst="rect">
-            <a:avLst/>
-          </a:prstGeom>
-          <a:noFill/>
-        </p:spPr>
-        <p:txBody>
-          <a:bodyPr wrap="square" lIns="0" rIns="0" tIns="0" bIns="0">
-            <a:spAutoFit/>
-          </a:bodyPr>
-          <a:lstStyle/>
-          <a:p>
-            <a:pPr algn="r"/>
-            <a:r>
-              <a:rPr sz="900" b="0">
-                <a:solidFill>
-                  <a:srgbClr val="718096"/>
-                </a:solidFill>
-                <a:latin typeface="Calibri"/>
-              </a:rPr>
-              <a:t>28</a:t>
-            </a:r>
-          </a:p>
-        </p:txBody>
-      </p:sp>
-      <p:sp>
-        <p:nvSpPr>
-          <p:cNvPr id="37" name="TextBox 36"/>
-          <p:cNvSpPr txBox="1"/>
-          <p:nvPr/>
-        </p:nvSpPr>
-        <p:spPr>
-          <a:xfrm>
-            <a:off x="685800" y="2353056"/>
-            <a:ext cx="411480" cy="182880"/>
-          </a:xfrm>
-          <a:prstGeom prst="rect">
-            <a:avLst/>
-          </a:prstGeom>
-          <a:noFill/>
-        </p:spPr>
-        <p:txBody>
-          <a:bodyPr wrap="square" lIns="0" rIns="0" tIns="0" bIns="0">
-            <a:spAutoFit/>
-          </a:bodyPr>
-          <a:lstStyle/>
-          <a:p>
-            <a:pPr algn="r"/>
-            <a:r>
-              <a:rPr sz="900" b="0">
-                <a:solidFill>
-                  <a:srgbClr val="718096"/>
-                </a:solidFill>
-                <a:latin typeface="Calibri"/>
-              </a:rPr>
-              <a:t>29</a:t>
-            </a:r>
-          </a:p>
-        </p:txBody>
-      </p:sp>
-      <p:sp>
-        <p:nvSpPr>
-          <p:cNvPr id="38" name="TextBox 37"/>
-          <p:cNvSpPr txBox="1"/>
-          <p:nvPr/>
-        </p:nvSpPr>
-        <p:spPr>
-          <a:xfrm>
-            <a:off x="685800" y="2331720"/>
-            <a:ext cx="411480" cy="182880"/>
-          </a:xfrm>
-          <a:prstGeom prst="rect">
-            <a:avLst/>
-          </a:prstGeom>
-          <a:noFill/>
-        </p:spPr>
-        <p:txBody>
-          <a:bodyPr wrap="square" lIns="0" rIns="0" tIns="0" bIns="0">
-            <a:spAutoFit/>
-          </a:bodyPr>
-          <a:lstStyle/>
-          <a:p>
-            <a:pPr algn="r"/>
-            <a:r>
-              <a:rPr sz="900" b="0">
-                <a:solidFill>
-                  <a:srgbClr val="718096"/>
-                </a:solidFill>
-                <a:latin typeface="Calibri"/>
-              </a:rPr>
-              <a:t>30</a:t>
-            </a:r>
-          </a:p>
-        </p:txBody>
-      </p:sp>
-      <p:sp>
-        <p:nvSpPr>
-          <p:cNvPr id="39" name="TextBox 38"/>
-          <p:cNvSpPr txBox="1"/>
-          <p:nvPr/>
-        </p:nvSpPr>
-        <p:spPr>
-          <a:xfrm>
-            <a:off x="685800" y="2310384"/>
-            <a:ext cx="411480" cy="182880"/>
-          </a:xfrm>
-          <a:prstGeom prst="rect">
-            <a:avLst/>
-          </a:prstGeom>
-          <a:noFill/>
-        </p:spPr>
-        <p:txBody>
-          <a:bodyPr wrap="square" lIns="0" rIns="0" tIns="0" bIns="0">
-            <a:spAutoFit/>
-          </a:bodyPr>
-          <a:lstStyle/>
-          <a:p>
-            <a:pPr algn="r"/>
-            <a:r>
-              <a:rPr sz="900" b="0">
-                <a:solidFill>
-                  <a:srgbClr val="718096"/>
-                </a:solidFill>
-                <a:latin typeface="Calibri"/>
-              </a:rPr>
-              <a:t>31</a:t>
-            </a:r>
-          </a:p>
-        </p:txBody>
-      </p:sp>
-      <p:sp>
-        <p:nvSpPr>
-          <p:cNvPr id="40" name="TextBox 39"/>
-          <p:cNvSpPr txBox="1"/>
-          <p:nvPr/>
-        </p:nvSpPr>
-        <p:spPr>
-          <a:xfrm>
-            <a:off x="685800" y="2289048"/>
-            <a:ext cx="411480" cy="182880"/>
-          </a:xfrm>
-          <a:prstGeom prst="rect">
-            <a:avLst/>
-          </a:prstGeom>
-          <a:noFill/>
-        </p:spPr>
-        <p:txBody>
-          <a:bodyPr wrap="square" lIns="0" rIns="0" tIns="0" bIns="0">
-            <a:spAutoFit/>
-          </a:bodyPr>
-          <a:lstStyle/>
-          <a:p>
-            <a:pPr algn="r"/>
-            <a:r>
-              <a:rPr sz="900" b="0">
-                <a:solidFill>
-                  <a:srgbClr val="718096"/>
-                </a:solidFill>
-                <a:latin typeface="Calibri"/>
-              </a:rPr>
-              <a:t>32</a:t>
-            </a:r>
-          </a:p>
-        </p:txBody>
-      </p:sp>
-      <p:sp>
-        <p:nvSpPr>
-          <p:cNvPr id="41" name="TextBox 40"/>
-          <p:cNvSpPr txBox="1"/>
-          <p:nvPr/>
-        </p:nvSpPr>
-        <p:spPr>
-          <a:xfrm>
-            <a:off x="685800" y="2267712"/>
-            <a:ext cx="411480" cy="182880"/>
-          </a:xfrm>
-          <a:prstGeom prst="rect">
-            <a:avLst/>
-          </a:prstGeom>
-          <a:noFill/>
-        </p:spPr>
-        <p:txBody>
-          <a:bodyPr wrap="square" lIns="0" rIns="0" tIns="0" bIns="0">
-            <a:spAutoFit/>
-          </a:bodyPr>
-          <a:lstStyle/>
-          <a:p>
-            <a:pPr algn="r"/>
-            <a:r>
-              <a:rPr sz="900" b="0">
-                <a:solidFill>
-                  <a:srgbClr val="718096"/>
-                </a:solidFill>
-                <a:latin typeface="Calibri"/>
-              </a:rPr>
-              <a:t>33</a:t>
-            </a:r>
-          </a:p>
-        </p:txBody>
-      </p:sp>
-      <p:sp>
-        <p:nvSpPr>
-          <p:cNvPr id="42" name="TextBox 41"/>
-          <p:cNvSpPr txBox="1"/>
-          <p:nvPr/>
-        </p:nvSpPr>
-        <p:spPr>
-          <a:xfrm>
-            <a:off x="685800" y="2246376"/>
-            <a:ext cx="411480" cy="182880"/>
-          </a:xfrm>
-          <a:prstGeom prst="rect">
-            <a:avLst/>
-          </a:prstGeom>
-          <a:noFill/>
-        </p:spPr>
-        <p:txBody>
-          <a:bodyPr wrap="square" lIns="0" rIns="0" tIns="0" bIns="0">
-            <a:spAutoFit/>
-          </a:bodyPr>
-          <a:lstStyle/>
-          <a:p>
-            <a:pPr algn="r"/>
-            <a:r>
-              <a:rPr sz="900" b="0">
-                <a:solidFill>
-                  <a:srgbClr val="718096"/>
-                </a:solidFill>
-                <a:latin typeface="Calibri"/>
-              </a:rPr>
-              <a:t>34</a:t>
-            </a:r>
-          </a:p>
-        </p:txBody>
-      </p:sp>
-      <p:sp>
-        <p:nvSpPr>
-          <p:cNvPr id="43" name="TextBox 42"/>
-          <p:cNvSpPr txBox="1"/>
-          <p:nvPr/>
-        </p:nvSpPr>
-        <p:spPr>
-          <a:xfrm>
-            <a:off x="685800" y="2225040"/>
-            <a:ext cx="411480" cy="182880"/>
-          </a:xfrm>
-          <a:prstGeom prst="rect">
-            <a:avLst/>
-          </a:prstGeom>
-          <a:noFill/>
-        </p:spPr>
-        <p:txBody>
-          <a:bodyPr wrap="square" lIns="0" rIns="0" tIns="0" bIns="0">
-            <a:spAutoFit/>
-          </a:bodyPr>
-          <a:lstStyle/>
-          <a:p>
-            <a:pPr algn="r"/>
-            <a:r>
-              <a:rPr sz="900" b="0">
-                <a:solidFill>
-                  <a:srgbClr val="718096"/>
-                </a:solidFill>
-                <a:latin typeface="Calibri"/>
-              </a:rPr>
-              <a:t>35</a:t>
-            </a:r>
-          </a:p>
-        </p:txBody>
-      </p:sp>
-      <p:sp>
-        <p:nvSpPr>
-          <p:cNvPr id="44" name="TextBox 43"/>
-          <p:cNvSpPr txBox="1"/>
-          <p:nvPr/>
-        </p:nvSpPr>
-        <p:spPr>
-          <a:xfrm>
-            <a:off x="685800" y="2203704"/>
-            <a:ext cx="411480" cy="182880"/>
-          </a:xfrm>
-          <a:prstGeom prst="rect">
-            <a:avLst/>
-          </a:prstGeom>
-          <a:noFill/>
-        </p:spPr>
-        <p:txBody>
-          <a:bodyPr wrap="square" lIns="0" rIns="0" tIns="0" bIns="0">
-            <a:spAutoFit/>
-          </a:bodyPr>
-          <a:lstStyle/>
-          <a:p>
-            <a:pPr algn="r"/>
-            <a:r>
-              <a:rPr sz="900" b="0">
-                <a:solidFill>
-                  <a:srgbClr val="718096"/>
-                </a:solidFill>
-                <a:latin typeface="Calibri"/>
-              </a:rPr>
-              <a:t>36</a:t>
-            </a:r>
-          </a:p>
-        </p:txBody>
-      </p:sp>
-      <p:sp>
-        <p:nvSpPr>
-          <p:cNvPr id="45" name="TextBox 44"/>
-          <p:cNvSpPr txBox="1"/>
-          <p:nvPr/>
-        </p:nvSpPr>
-        <p:spPr>
-          <a:xfrm>
-            <a:off x="685800" y="2182368"/>
-            <a:ext cx="411480" cy="182880"/>
-          </a:xfrm>
-          <a:prstGeom prst="rect">
-            <a:avLst/>
-          </a:prstGeom>
-          <a:noFill/>
-        </p:spPr>
-        <p:txBody>
-          <a:bodyPr wrap="square" lIns="0" rIns="0" tIns="0" bIns="0">
-            <a:spAutoFit/>
-          </a:bodyPr>
-          <a:lstStyle/>
-          <a:p>
-            <a:pPr algn="r"/>
-            <a:r>
-              <a:rPr sz="900" b="0">
-                <a:solidFill>
-                  <a:srgbClr val="718096"/>
-                </a:solidFill>
-                <a:latin typeface="Calibri"/>
-              </a:rPr>
-              <a:t>37</a:t>
-            </a:r>
-          </a:p>
-        </p:txBody>
-      </p:sp>
-      <p:sp>
-        <p:nvSpPr>
-          <p:cNvPr id="46" name="TextBox 45"/>
-          <p:cNvSpPr txBox="1"/>
-          <p:nvPr/>
-        </p:nvSpPr>
-        <p:spPr>
-          <a:xfrm>
-            <a:off x="685800" y="2161032"/>
-            <a:ext cx="411480" cy="182880"/>
-          </a:xfrm>
-          <a:prstGeom prst="rect">
-            <a:avLst/>
-          </a:prstGeom>
-          <a:noFill/>
-        </p:spPr>
-        <p:txBody>
-          <a:bodyPr wrap="square" lIns="0" rIns="0" tIns="0" bIns="0">
-            <a:spAutoFit/>
-          </a:bodyPr>
-          <a:lstStyle/>
-          <a:p>
-            <a:pPr algn="r"/>
-            <a:r>
-              <a:rPr sz="900" b="0">
-                <a:solidFill>
-                  <a:srgbClr val="718096"/>
-                </a:solidFill>
-                <a:latin typeface="Calibri"/>
-              </a:rPr>
-              <a:t>38</a:t>
-            </a:r>
-          </a:p>
-        </p:txBody>
-      </p:sp>
-      <p:sp>
-        <p:nvSpPr>
-          <p:cNvPr id="47" name="TextBox 46"/>
-          <p:cNvSpPr txBox="1"/>
-          <p:nvPr/>
-        </p:nvSpPr>
-        <p:spPr>
-          <a:xfrm>
-            <a:off x="685800" y="2139696"/>
-            <a:ext cx="411480" cy="182880"/>
-          </a:xfrm>
-          <a:prstGeom prst="rect">
-            <a:avLst/>
-          </a:prstGeom>
-          <a:noFill/>
-        </p:spPr>
-        <p:txBody>
-          <a:bodyPr wrap="square" lIns="0" rIns="0" tIns="0" bIns="0">
-            <a:spAutoFit/>
-          </a:bodyPr>
-          <a:lstStyle/>
-          <a:p>
-            <a:pPr algn="r"/>
-            <a:r>
-              <a:rPr sz="900" b="0">
-                <a:solidFill>
-                  <a:srgbClr val="718096"/>
-                </a:solidFill>
-                <a:latin typeface="Calibri"/>
-              </a:rPr>
-              <a:t>39</a:t>
-            </a:r>
-          </a:p>
-        </p:txBody>
-      </p:sp>
-      <p:sp>
-        <p:nvSpPr>
-          <p:cNvPr id="48" name="TextBox 47"/>
-          <p:cNvSpPr txBox="1"/>
-          <p:nvPr/>
-        </p:nvSpPr>
-        <p:spPr>
-          <a:xfrm>
-            <a:off x="685800" y="2118360"/>
-            <a:ext cx="411480" cy="182880"/>
-          </a:xfrm>
-          <a:prstGeom prst="rect">
-            <a:avLst/>
-          </a:prstGeom>
-          <a:noFill/>
-        </p:spPr>
-        <p:txBody>
-          <a:bodyPr wrap="square" lIns="0" rIns="0" tIns="0" bIns="0">
-            <a:spAutoFit/>
-          </a:bodyPr>
-          <a:lstStyle/>
-          <a:p>
-            <a:pPr algn="r"/>
-            <a:r>
-              <a:rPr sz="900" b="0">
-                <a:solidFill>
-                  <a:srgbClr val="718096"/>
-                </a:solidFill>
-                <a:latin typeface="Calibri"/>
-              </a:rPr>
-              <a:t>40</a:t>
-            </a:r>
-          </a:p>
-        </p:txBody>
-      </p:sp>
-      <p:sp>
-        <p:nvSpPr>
-          <p:cNvPr id="49" name="TextBox 48"/>
-          <p:cNvSpPr txBox="1"/>
-          <p:nvPr/>
-        </p:nvSpPr>
-        <p:spPr>
-          <a:xfrm>
-            <a:off x="685800" y="2097024"/>
-            <a:ext cx="411480" cy="182880"/>
-          </a:xfrm>
-          <a:prstGeom prst="rect">
-            <a:avLst/>
-          </a:prstGeom>
-          <a:noFill/>
-        </p:spPr>
-        <p:txBody>
-          <a:bodyPr wrap="square" lIns="0" rIns="0" tIns="0" bIns="0">
-            <a:spAutoFit/>
-          </a:bodyPr>
-          <a:lstStyle/>
-          <a:p>
-            <a:pPr algn="r"/>
-            <a:r>
-              <a:rPr sz="900" b="0">
-                <a:solidFill>
-                  <a:srgbClr val="718096"/>
-                </a:solidFill>
-                <a:latin typeface="Calibri"/>
-              </a:rPr>
-              <a:t>41</a:t>
-            </a:r>
-          </a:p>
-        </p:txBody>
-      </p:sp>
-      <p:sp>
-        <p:nvSpPr>
-          <p:cNvPr id="50" name="TextBox 49"/>
-          <p:cNvSpPr txBox="1"/>
-          <p:nvPr/>
-        </p:nvSpPr>
-        <p:spPr>
-          <a:xfrm>
-            <a:off x="685800" y="2075688"/>
-            <a:ext cx="411480" cy="182880"/>
-          </a:xfrm>
-          <a:prstGeom prst="rect">
-            <a:avLst/>
-          </a:prstGeom>
-          <a:noFill/>
-        </p:spPr>
-        <p:txBody>
-          <a:bodyPr wrap="square" lIns="0" rIns="0" tIns="0" bIns="0">
-            <a:spAutoFit/>
-          </a:bodyPr>
-          <a:lstStyle/>
-          <a:p>
-            <a:pPr algn="r"/>
-            <a:r>
-              <a:rPr sz="900" b="0">
-                <a:solidFill>
-                  <a:srgbClr val="718096"/>
-                </a:solidFill>
-                <a:latin typeface="Calibri"/>
-              </a:rPr>
-              <a:t>42</a:t>
-            </a:r>
-          </a:p>
-        </p:txBody>
-      </p:sp>
-      <p:sp>
-        <p:nvSpPr>
-          <p:cNvPr id="51" name="TextBox 50"/>
-          <p:cNvSpPr txBox="1"/>
-          <p:nvPr/>
-        </p:nvSpPr>
-        <p:spPr>
-          <a:xfrm>
-            <a:off x="685800" y="2054352"/>
-            <a:ext cx="411480" cy="182880"/>
-          </a:xfrm>
-          <a:prstGeom prst="rect">
-            <a:avLst/>
-          </a:prstGeom>
-          <a:noFill/>
-        </p:spPr>
-        <p:txBody>
-          <a:bodyPr wrap="square" lIns="0" rIns="0" tIns="0" bIns="0">
-            <a:spAutoFit/>
-          </a:bodyPr>
-          <a:lstStyle/>
-          <a:p>
-            <a:pPr algn="r"/>
-            <a:r>
-              <a:rPr sz="900" b="0">
-                <a:solidFill>
-                  <a:srgbClr val="718096"/>
-                </a:solidFill>
-                <a:latin typeface="Calibri"/>
-              </a:rPr>
-              <a:t>43</a:t>
-            </a:r>
-          </a:p>
-        </p:txBody>
-      </p:sp>
-      <p:sp>
-        <p:nvSpPr>
-          <p:cNvPr id="52" name="TextBox 51"/>
-          <p:cNvSpPr txBox="1"/>
-          <p:nvPr/>
-        </p:nvSpPr>
-        <p:spPr>
-          <a:xfrm>
-            <a:off x="685800" y="2033016"/>
-            <a:ext cx="411480" cy="182880"/>
-          </a:xfrm>
-          <a:prstGeom prst="rect">
-            <a:avLst/>
-          </a:prstGeom>
-          <a:noFill/>
-        </p:spPr>
-        <p:txBody>
-          <a:bodyPr wrap="square" lIns="0" rIns="0" tIns="0" bIns="0">
-            <a:spAutoFit/>
-          </a:bodyPr>
-          <a:lstStyle/>
-          <a:p>
-            <a:pPr algn="r"/>
-            <a:r>
-              <a:rPr sz="900" b="0">
-                <a:solidFill>
-                  <a:srgbClr val="718096"/>
-                </a:solidFill>
-                <a:latin typeface="Calibri"/>
-              </a:rPr>
-              <a:t>44</a:t>
-            </a:r>
-          </a:p>
-        </p:txBody>
-      </p:sp>
-      <p:sp>
-        <p:nvSpPr>
-          <p:cNvPr id="53" name="TextBox 52"/>
-          <p:cNvSpPr txBox="1"/>
-          <p:nvPr/>
-        </p:nvSpPr>
-        <p:spPr>
-          <a:xfrm>
-            <a:off x="685800" y="2011680"/>
-            <a:ext cx="411480" cy="182880"/>
-          </a:xfrm>
-          <a:prstGeom prst="rect">
-            <a:avLst/>
-          </a:prstGeom>
-          <a:noFill/>
-        </p:spPr>
-        <p:txBody>
-          <a:bodyPr wrap="square" lIns="0" rIns="0" tIns="0" bIns="0">
-            <a:spAutoFit/>
-          </a:bodyPr>
-          <a:lstStyle/>
-          <a:p>
-            <a:pPr algn="r"/>
-            <a:r>
-              <a:rPr sz="900" b="0">
-                <a:solidFill>
-                  <a:srgbClr val="718096"/>
-                </a:solidFill>
-                <a:latin typeface="Calibri"/>
-              </a:rPr>
-              <a:t>45</a:t>
-            </a:r>
-          </a:p>
-        </p:txBody>
-      </p:sp>
-      <p:sp>
-        <p:nvSpPr>
-          <p:cNvPr id="54" name="TextBox 53"/>
-          <p:cNvSpPr txBox="1"/>
-          <p:nvPr/>
-        </p:nvSpPr>
-        <p:spPr>
-          <a:xfrm>
-            <a:off x="685800" y="1990345"/>
-            <a:ext cx="411480" cy="182880"/>
-          </a:xfrm>
-          <a:prstGeom prst="rect">
-            <a:avLst/>
-          </a:prstGeom>
-          <a:noFill/>
-        </p:spPr>
-        <p:txBody>
-          <a:bodyPr wrap="square" lIns="0" rIns="0" tIns="0" bIns="0">
-            <a:spAutoFit/>
-          </a:bodyPr>
-          <a:lstStyle/>
-          <a:p>
-            <a:pPr algn="r"/>
-            <a:r>
-              <a:rPr sz="900" b="0">
-                <a:solidFill>
-                  <a:srgbClr val="718096"/>
-                </a:solidFill>
-                <a:latin typeface="Calibri"/>
-              </a:rPr>
-              <a:t>46</a:t>
-            </a:r>
-          </a:p>
-        </p:txBody>
-      </p:sp>
-      <p:sp>
-        <p:nvSpPr>
-          <p:cNvPr id="55" name="TextBox 54"/>
-          <p:cNvSpPr txBox="1"/>
-          <p:nvPr/>
-        </p:nvSpPr>
-        <p:spPr>
-          <a:xfrm>
-            <a:off x="685800" y="1969008"/>
-            <a:ext cx="411480" cy="182880"/>
-          </a:xfrm>
-          <a:prstGeom prst="rect">
-            <a:avLst/>
-          </a:prstGeom>
-          <a:noFill/>
-        </p:spPr>
-        <p:txBody>
-          <a:bodyPr wrap="square" lIns="0" rIns="0" tIns="0" bIns="0">
-            <a:spAutoFit/>
-          </a:bodyPr>
-          <a:lstStyle/>
-          <a:p>
-            <a:pPr algn="r"/>
-            <a:r>
-              <a:rPr sz="900" b="0">
-                <a:solidFill>
-                  <a:srgbClr val="718096"/>
-                </a:solidFill>
-                <a:latin typeface="Calibri"/>
-              </a:rPr>
-              <a:t>47</a:t>
-            </a:r>
-          </a:p>
-        </p:txBody>
-      </p:sp>
-      <p:sp>
-        <p:nvSpPr>
-          <p:cNvPr id="56" name="TextBox 55"/>
-          <p:cNvSpPr txBox="1"/>
-          <p:nvPr/>
-        </p:nvSpPr>
-        <p:spPr>
-          <a:xfrm>
-            <a:off x="685800" y="1947672"/>
-            <a:ext cx="411480" cy="182880"/>
-          </a:xfrm>
-          <a:prstGeom prst="rect">
-            <a:avLst/>
-          </a:prstGeom>
-          <a:noFill/>
-        </p:spPr>
-        <p:txBody>
-          <a:bodyPr wrap="square" lIns="0" rIns="0" tIns="0" bIns="0">
-            <a:spAutoFit/>
-          </a:bodyPr>
-          <a:lstStyle/>
-          <a:p>
-            <a:pPr algn="r"/>
-            <a:r>
-              <a:rPr sz="900" b="0">
-                <a:solidFill>
-                  <a:srgbClr val="718096"/>
-                </a:solidFill>
-                <a:latin typeface="Calibri"/>
-              </a:rPr>
-              <a:t>48</a:t>
-            </a:r>
-          </a:p>
-        </p:txBody>
-      </p:sp>
-      <p:sp>
-        <p:nvSpPr>
-          <p:cNvPr id="57" name="TextBox 56"/>
-          <p:cNvSpPr txBox="1"/>
-          <p:nvPr/>
-        </p:nvSpPr>
-        <p:spPr>
-          <a:xfrm>
-            <a:off x="685800" y="1926336"/>
-            <a:ext cx="411480" cy="182880"/>
-          </a:xfrm>
-          <a:prstGeom prst="rect">
-            <a:avLst/>
-          </a:prstGeom>
-          <a:noFill/>
-        </p:spPr>
-        <p:txBody>
-          <a:bodyPr wrap="square" lIns="0" rIns="0" tIns="0" bIns="0">
-            <a:spAutoFit/>
-          </a:bodyPr>
-          <a:lstStyle/>
-          <a:p>
-            <a:pPr algn="r"/>
-            <a:r>
-              <a:rPr sz="900" b="0">
-                <a:solidFill>
-                  <a:srgbClr val="718096"/>
-                </a:solidFill>
-                <a:latin typeface="Calibri"/>
-              </a:rPr>
-              <a:t>49</a:t>
-            </a:r>
-          </a:p>
-        </p:txBody>
-      </p:sp>
-      <p:sp>
-        <p:nvSpPr>
-          <p:cNvPr id="58" name="TextBox 57"/>
-          <p:cNvSpPr txBox="1"/>
-          <p:nvPr/>
-        </p:nvSpPr>
-        <p:spPr>
-          <a:xfrm>
-            <a:off x="685800" y="1905000"/>
-            <a:ext cx="411480" cy="182880"/>
-          </a:xfrm>
-          <a:prstGeom prst="rect">
-            <a:avLst/>
-          </a:prstGeom>
-          <a:noFill/>
-        </p:spPr>
-        <p:txBody>
-          <a:bodyPr wrap="square" lIns="0" rIns="0" tIns="0" bIns="0">
-            <a:spAutoFit/>
-          </a:bodyPr>
-          <a:lstStyle/>
-          <a:p>
-            <a:pPr algn="r"/>
-            <a:r>
-              <a:rPr sz="900" b="0">
-                <a:solidFill>
-                  <a:srgbClr val="718096"/>
-                </a:solidFill>
-                <a:latin typeface="Calibri"/>
-              </a:rPr>
-              <a:t>50</a:t>
-            </a:r>
-          </a:p>
-        </p:txBody>
-      </p:sp>
-      <p:sp>
-        <p:nvSpPr>
-          <p:cNvPr id="59" name="TextBox 58"/>
-          <p:cNvSpPr txBox="1"/>
-          <p:nvPr/>
-        </p:nvSpPr>
-        <p:spPr>
-          <a:xfrm>
-            <a:off x="685800" y="1883664"/>
-            <a:ext cx="411480" cy="182880"/>
-          </a:xfrm>
-          <a:prstGeom prst="rect">
-            <a:avLst/>
-          </a:prstGeom>
-          <a:noFill/>
-        </p:spPr>
-        <p:txBody>
-          <a:bodyPr wrap="square" lIns="0" rIns="0" tIns="0" bIns="0">
-            <a:spAutoFit/>
-          </a:bodyPr>
-          <a:lstStyle/>
-          <a:p>
-            <a:pPr algn="r"/>
-            <a:r>
-              <a:rPr sz="900" b="0">
-                <a:solidFill>
-                  <a:srgbClr val="718096"/>
-                </a:solidFill>
-                <a:latin typeface="Calibri"/>
-              </a:rPr>
-              <a:t>51</a:t>
-            </a:r>
-          </a:p>
-        </p:txBody>
-      </p:sp>
-      <p:sp>
-        <p:nvSpPr>
-          <p:cNvPr id="60" name="TextBox 59"/>
-          <p:cNvSpPr txBox="1"/>
-          <p:nvPr/>
-        </p:nvSpPr>
-        <p:spPr>
-          <a:xfrm>
-            <a:off x="685800" y="1862328"/>
-            <a:ext cx="411480" cy="182880"/>
-          </a:xfrm>
-          <a:prstGeom prst="rect">
-            <a:avLst/>
-          </a:prstGeom>
-          <a:noFill/>
-        </p:spPr>
-        <p:txBody>
-          <a:bodyPr wrap="square" lIns="0" rIns="0" tIns="0" bIns="0">
-            <a:spAutoFit/>
-          </a:bodyPr>
-          <a:lstStyle/>
-          <a:p>
-            <a:pPr algn="r"/>
-            <a:r>
-              <a:rPr sz="900" b="0">
-                <a:solidFill>
-                  <a:srgbClr val="718096"/>
-                </a:solidFill>
-                <a:latin typeface="Calibri"/>
-              </a:rPr>
-              <a:t>52</a:t>
-            </a:r>
-          </a:p>
-        </p:txBody>
-      </p:sp>
-      <p:sp>
-        <p:nvSpPr>
-          <p:cNvPr id="61" name="TextBox 60"/>
-          <p:cNvSpPr txBox="1"/>
-          <p:nvPr/>
-        </p:nvSpPr>
-        <p:spPr>
-          <a:xfrm>
-            <a:off x="685800" y="1840992"/>
-            <a:ext cx="411480" cy="182880"/>
-          </a:xfrm>
-          <a:prstGeom prst="rect">
-            <a:avLst/>
-          </a:prstGeom>
-          <a:noFill/>
-        </p:spPr>
-        <p:txBody>
-          <a:bodyPr wrap="square" lIns="0" rIns="0" tIns="0" bIns="0">
-            <a:spAutoFit/>
-          </a:bodyPr>
-          <a:lstStyle/>
-          <a:p>
-            <a:pPr algn="r"/>
-            <a:r>
-              <a:rPr sz="900" b="0">
-                <a:solidFill>
-                  <a:srgbClr val="718096"/>
-                </a:solidFill>
-                <a:latin typeface="Calibri"/>
-              </a:rPr>
-              <a:t>53</a:t>
-            </a:r>
-          </a:p>
-        </p:txBody>
-      </p:sp>
-      <p:sp>
-        <p:nvSpPr>
-          <p:cNvPr id="62" name="TextBox 61"/>
-          <p:cNvSpPr txBox="1"/>
-          <p:nvPr/>
-        </p:nvSpPr>
-        <p:spPr>
-          <a:xfrm>
-            <a:off x="685800" y="1819656"/>
-            <a:ext cx="411480" cy="182880"/>
-          </a:xfrm>
-          <a:prstGeom prst="rect">
-            <a:avLst/>
-          </a:prstGeom>
-          <a:noFill/>
-        </p:spPr>
-        <p:txBody>
-          <a:bodyPr wrap="square" lIns="0" rIns="0" tIns="0" bIns="0">
-            <a:spAutoFit/>
-          </a:bodyPr>
-          <a:lstStyle/>
-          <a:p>
-            <a:pPr algn="r"/>
-            <a:r>
-              <a:rPr sz="900" b="0">
-                <a:solidFill>
-                  <a:srgbClr val="718096"/>
-                </a:solidFill>
-                <a:latin typeface="Calibri"/>
-              </a:rPr>
-              <a:t>54</a:t>
-            </a:r>
-          </a:p>
-        </p:txBody>
-      </p:sp>
-      <p:sp>
-        <p:nvSpPr>
-          <p:cNvPr id="63" name="TextBox 62"/>
-          <p:cNvSpPr txBox="1"/>
-          <p:nvPr/>
-        </p:nvSpPr>
-        <p:spPr>
-          <a:xfrm>
-            <a:off x="685800" y="1798320"/>
-            <a:ext cx="411480" cy="182880"/>
-          </a:xfrm>
-          <a:prstGeom prst="rect">
-            <a:avLst/>
-          </a:prstGeom>
-          <a:noFill/>
-        </p:spPr>
-        <p:txBody>
-          <a:bodyPr wrap="square" lIns="0" rIns="0" tIns="0" bIns="0">
-            <a:spAutoFit/>
-          </a:bodyPr>
-          <a:lstStyle/>
-          <a:p>
-            <a:pPr algn="r"/>
-            <a:r>
-              <a:rPr sz="900" b="0">
-                <a:solidFill>
-                  <a:srgbClr val="718096"/>
-                </a:solidFill>
-                <a:latin typeface="Calibri"/>
-              </a:rPr>
-              <a:t>55</a:t>
-            </a:r>
-          </a:p>
-        </p:txBody>
-      </p:sp>
-      <p:sp>
-        <p:nvSpPr>
-          <p:cNvPr id="64" name="TextBox 63"/>
-          <p:cNvSpPr txBox="1"/>
-          <p:nvPr/>
-        </p:nvSpPr>
-        <p:spPr>
-          <a:xfrm>
-            <a:off x="685800" y="1776984"/>
-            <a:ext cx="411480" cy="182880"/>
-          </a:xfrm>
-          <a:prstGeom prst="rect">
-            <a:avLst/>
-          </a:prstGeom>
-          <a:noFill/>
-        </p:spPr>
-        <p:txBody>
-          <a:bodyPr wrap="square" lIns="0" rIns="0" tIns="0" bIns="0">
-            <a:spAutoFit/>
-          </a:bodyPr>
-          <a:lstStyle/>
-          <a:p>
-            <a:pPr algn="r"/>
-            <a:r>
-              <a:rPr sz="900" b="0">
-                <a:solidFill>
-                  <a:srgbClr val="718096"/>
-                </a:solidFill>
-                <a:latin typeface="Calibri"/>
-              </a:rPr>
-              <a:t>56</a:t>
-            </a:r>
-          </a:p>
-        </p:txBody>
-      </p:sp>
-      <p:sp>
-        <p:nvSpPr>
-          <p:cNvPr id="65" name="TextBox 64"/>
-          <p:cNvSpPr txBox="1"/>
-          <p:nvPr/>
-        </p:nvSpPr>
-        <p:spPr>
-          <a:xfrm>
-            <a:off x="685800" y="1755648"/>
-            <a:ext cx="411480" cy="182880"/>
-          </a:xfrm>
-          <a:prstGeom prst="rect">
-            <a:avLst/>
-          </a:prstGeom>
-          <a:noFill/>
-        </p:spPr>
-        <p:txBody>
-          <a:bodyPr wrap="square" lIns="0" rIns="0" tIns="0" bIns="0">
-            <a:spAutoFit/>
-          </a:bodyPr>
-          <a:lstStyle/>
-          <a:p>
-            <a:pPr algn="r"/>
-            <a:r>
-              <a:rPr sz="900" b="0">
-                <a:solidFill>
-                  <a:srgbClr val="718096"/>
-                </a:solidFill>
-                <a:latin typeface="Calibri"/>
-              </a:rPr>
-              <a:t>57</a:t>
-            </a:r>
-          </a:p>
-        </p:txBody>
-      </p:sp>
-      <p:sp>
-        <p:nvSpPr>
-          <p:cNvPr id="66" name="TextBox 65"/>
-          <p:cNvSpPr txBox="1"/>
-          <p:nvPr/>
-        </p:nvSpPr>
-        <p:spPr>
-          <a:xfrm>
-            <a:off x="685800" y="1734312"/>
-            <a:ext cx="411480" cy="182880"/>
-          </a:xfrm>
-          <a:prstGeom prst="rect">
-            <a:avLst/>
-          </a:prstGeom>
-          <a:noFill/>
-        </p:spPr>
-        <p:txBody>
-          <a:bodyPr wrap="square" lIns="0" rIns="0" tIns="0" bIns="0">
-            <a:spAutoFit/>
-          </a:bodyPr>
-          <a:lstStyle/>
-          <a:p>
-            <a:pPr algn="r"/>
-            <a:r>
-              <a:rPr sz="900" b="0">
-                <a:solidFill>
-                  <a:srgbClr val="718096"/>
-                </a:solidFill>
-                <a:latin typeface="Calibri"/>
-              </a:rPr>
-              <a:t>58</a:t>
-            </a:r>
-          </a:p>
-        </p:txBody>
-      </p:sp>
-      <p:sp>
-        <p:nvSpPr>
-          <p:cNvPr id="67" name="TextBox 66"/>
-          <p:cNvSpPr txBox="1"/>
-          <p:nvPr/>
-        </p:nvSpPr>
-        <p:spPr>
-          <a:xfrm>
-            <a:off x="685800" y="1712976"/>
-            <a:ext cx="411480" cy="182880"/>
-          </a:xfrm>
-          <a:prstGeom prst="rect">
-            <a:avLst/>
-          </a:prstGeom>
-          <a:noFill/>
-        </p:spPr>
-        <p:txBody>
-          <a:bodyPr wrap="square" lIns="0" rIns="0" tIns="0" bIns="0">
-            <a:spAutoFit/>
-          </a:bodyPr>
-          <a:lstStyle/>
-          <a:p>
-            <a:pPr algn="r"/>
-            <a:r>
-              <a:rPr sz="900" b="0">
-                <a:solidFill>
-                  <a:srgbClr val="718096"/>
-                </a:solidFill>
-                <a:latin typeface="Calibri"/>
-              </a:rPr>
-              <a:t>59</a:t>
-            </a:r>
-          </a:p>
-        </p:txBody>
-      </p:sp>
-      <p:sp>
-        <p:nvSpPr>
-          <p:cNvPr id="68" name="TextBox 67"/>
-          <p:cNvSpPr txBox="1"/>
-          <p:nvPr/>
-        </p:nvSpPr>
-        <p:spPr>
-          <a:xfrm>
-            <a:off x="685800" y="1691640"/>
-            <a:ext cx="411480" cy="182880"/>
-          </a:xfrm>
-          <a:prstGeom prst="rect">
-            <a:avLst/>
-          </a:prstGeom>
-          <a:noFill/>
-        </p:spPr>
-        <p:txBody>
-          <a:bodyPr wrap="square" lIns="0" rIns="0" tIns="0" bIns="0">
-            <a:spAutoFit/>
-          </a:bodyPr>
-          <a:lstStyle/>
-          <a:p>
-            <a:pPr algn="r"/>
-            <a:r>
-              <a:rPr sz="900" b="0">
-                <a:solidFill>
-                  <a:srgbClr val="718096"/>
-                </a:solidFill>
-                <a:latin typeface="Calibri"/>
-              </a:rPr>
-              <a:t>60</a:t>
-            </a:r>
-          </a:p>
-        </p:txBody>
-      </p:sp>
-      <p:sp>
-        <p:nvSpPr>
-          <p:cNvPr id="69" name="TextBox 68"/>
-          <p:cNvSpPr txBox="1"/>
-          <p:nvPr/>
-        </p:nvSpPr>
-        <p:spPr>
-          <a:xfrm>
-            <a:off x="685800" y="1670304"/>
-            <a:ext cx="411480" cy="182880"/>
-          </a:xfrm>
-          <a:prstGeom prst="rect">
-            <a:avLst/>
-          </a:prstGeom>
-          <a:noFill/>
-        </p:spPr>
-        <p:txBody>
-          <a:bodyPr wrap="square" lIns="0" rIns="0" tIns="0" bIns="0">
-            <a:spAutoFit/>
-          </a:bodyPr>
-          <a:lstStyle/>
-          <a:p>
-            <a:pPr algn="r"/>
-            <a:r>
-              <a:rPr sz="900" b="0">
-                <a:solidFill>
-                  <a:srgbClr val="718096"/>
-                </a:solidFill>
-                <a:latin typeface="Calibri"/>
-              </a:rPr>
-              <a:t>61</a:t>
-            </a:r>
-          </a:p>
-        </p:txBody>
-      </p:sp>
-      <p:sp>
-        <p:nvSpPr>
-          <p:cNvPr id="70" name="TextBox 69"/>
-          <p:cNvSpPr txBox="1"/>
-          <p:nvPr/>
-        </p:nvSpPr>
-        <p:spPr>
-          <a:xfrm>
-            <a:off x="685800" y="1648968"/>
-            <a:ext cx="411480" cy="182880"/>
-          </a:xfrm>
-          <a:prstGeom prst="rect">
-            <a:avLst/>
-          </a:prstGeom>
-          <a:noFill/>
-        </p:spPr>
-        <p:txBody>
-          <a:bodyPr wrap="square" lIns="0" rIns="0" tIns="0" bIns="0">
-            <a:spAutoFit/>
-          </a:bodyPr>
-          <a:lstStyle/>
-          <a:p>
-            <a:pPr algn="r"/>
-            <a:r>
-              <a:rPr sz="900" b="0">
-                <a:solidFill>
-                  <a:srgbClr val="718096"/>
-                </a:solidFill>
-                <a:latin typeface="Calibri"/>
-              </a:rPr>
-              <a:t>62</a:t>
-            </a:r>
-          </a:p>
-        </p:txBody>
-      </p:sp>
-      <p:sp>
-        <p:nvSpPr>
-          <p:cNvPr id="71" name="TextBox 70"/>
-          <p:cNvSpPr txBox="1"/>
-          <p:nvPr/>
-        </p:nvSpPr>
-        <p:spPr>
-          <a:xfrm>
-            <a:off x="685800" y="1627632"/>
-            <a:ext cx="411480" cy="182880"/>
-          </a:xfrm>
-          <a:prstGeom prst="rect">
-            <a:avLst/>
-          </a:prstGeom>
-          <a:noFill/>
-        </p:spPr>
-        <p:txBody>
-          <a:bodyPr wrap="square" lIns="0" rIns="0" tIns="0" bIns="0">
-            <a:spAutoFit/>
-          </a:bodyPr>
-          <a:lstStyle/>
-          <a:p>
-            <a:pPr algn="r"/>
-            <a:r>
-              <a:rPr sz="900" b="0">
-                <a:solidFill>
-                  <a:srgbClr val="718096"/>
-                </a:solidFill>
-                <a:latin typeface="Calibri"/>
-              </a:rPr>
-              <a:t>63</a:t>
-            </a:r>
-          </a:p>
-        </p:txBody>
-      </p:sp>
-      <p:sp>
-        <p:nvSpPr>
-          <p:cNvPr id="72" name="TextBox 71"/>
-          <p:cNvSpPr txBox="1"/>
-          <p:nvPr/>
-        </p:nvSpPr>
-        <p:spPr>
-          <a:xfrm>
-            <a:off x="685800" y="1606296"/>
-            <a:ext cx="411480" cy="182880"/>
-          </a:xfrm>
-          <a:prstGeom prst="rect">
-            <a:avLst/>
-          </a:prstGeom>
-          <a:noFill/>
-        </p:spPr>
-        <p:txBody>
-          <a:bodyPr wrap="square" lIns="0" rIns="0" tIns="0" bIns="0">
-            <a:spAutoFit/>
-          </a:bodyPr>
-          <a:lstStyle/>
-          <a:p>
-            <a:pPr algn="r"/>
-            <a:r>
-              <a:rPr sz="900" b="0">
-                <a:solidFill>
-                  <a:srgbClr val="718096"/>
-                </a:solidFill>
-                <a:latin typeface="Calibri"/>
-              </a:rPr>
-              <a:t>64</a:t>
-            </a:r>
-          </a:p>
-        </p:txBody>
-      </p:sp>
-      <p:sp>
-        <p:nvSpPr>
-          <p:cNvPr id="73" name="TextBox 72"/>
-          <p:cNvSpPr txBox="1"/>
-          <p:nvPr/>
-        </p:nvSpPr>
-        <p:spPr>
-          <a:xfrm>
-            <a:off x="685800" y="1584960"/>
-            <a:ext cx="411480" cy="182880"/>
-          </a:xfrm>
-          <a:prstGeom prst="rect">
-            <a:avLst/>
-          </a:prstGeom>
-          <a:noFill/>
-        </p:spPr>
-        <p:txBody>
-          <a:bodyPr wrap="square" lIns="0" rIns="0" tIns="0" bIns="0">
-            <a:spAutoFit/>
-          </a:bodyPr>
-          <a:lstStyle/>
-          <a:p>
-            <a:pPr algn="r"/>
-            <a:r>
-              <a:rPr sz="900" b="0">
-                <a:solidFill>
-                  <a:srgbClr val="718096"/>
-                </a:solidFill>
-                <a:latin typeface="Calibri"/>
-              </a:rPr>
-              <a:t>65</a:t>
-            </a:r>
-          </a:p>
-        </p:txBody>
-      </p:sp>
-      <p:sp>
-        <p:nvSpPr>
-          <p:cNvPr id="74" name="TextBox 73"/>
-          <p:cNvSpPr txBox="1"/>
-          <p:nvPr/>
-        </p:nvSpPr>
-        <p:spPr>
-          <a:xfrm>
-            <a:off x="685800" y="1563624"/>
-            <a:ext cx="411480" cy="182880"/>
-          </a:xfrm>
-          <a:prstGeom prst="rect">
-            <a:avLst/>
-          </a:prstGeom>
-          <a:noFill/>
-        </p:spPr>
-        <p:txBody>
-          <a:bodyPr wrap="square" lIns="0" rIns="0" tIns="0" bIns="0">
-            <a:spAutoFit/>
-          </a:bodyPr>
-          <a:lstStyle/>
-          <a:p>
-            <a:pPr algn="r"/>
-            <a:r>
-              <a:rPr sz="900" b="0">
-                <a:solidFill>
-                  <a:srgbClr val="718096"/>
-                </a:solidFill>
-                <a:latin typeface="Calibri"/>
-              </a:rPr>
-              <a:t>66</a:t>
-            </a:r>
-          </a:p>
-        </p:txBody>
-      </p:sp>
-      <p:sp>
-        <p:nvSpPr>
-          <p:cNvPr id="75" name="TextBox 74"/>
-          <p:cNvSpPr txBox="1"/>
-          <p:nvPr/>
-        </p:nvSpPr>
-        <p:spPr>
-          <a:xfrm>
-            <a:off x="685800" y="1542288"/>
-            <a:ext cx="411480" cy="182880"/>
-          </a:xfrm>
-          <a:prstGeom prst="rect">
-            <a:avLst/>
-          </a:prstGeom>
-          <a:noFill/>
-        </p:spPr>
-        <p:txBody>
-          <a:bodyPr wrap="square" lIns="0" rIns="0" tIns="0" bIns="0">
-            <a:spAutoFit/>
-          </a:bodyPr>
-          <a:lstStyle/>
-          <a:p>
-            <a:pPr algn="r"/>
-            <a:r>
-              <a:rPr sz="900" b="0">
-                <a:solidFill>
-                  <a:srgbClr val="718096"/>
-                </a:solidFill>
-                <a:latin typeface="Calibri"/>
-              </a:rPr>
-              <a:t>67</a:t>
-            </a:r>
-          </a:p>
-        </p:txBody>
-      </p:sp>
-      <p:sp>
-        <p:nvSpPr>
-          <p:cNvPr id="76" name="TextBox 75"/>
-          <p:cNvSpPr txBox="1"/>
-          <p:nvPr/>
-        </p:nvSpPr>
-        <p:spPr>
-          <a:xfrm>
-            <a:off x="685800" y="1520952"/>
-            <a:ext cx="411480" cy="182880"/>
-          </a:xfrm>
-          <a:prstGeom prst="rect">
-            <a:avLst/>
-          </a:prstGeom>
-          <a:noFill/>
-        </p:spPr>
-        <p:txBody>
-          <a:bodyPr wrap="square" lIns="0" rIns="0" tIns="0" bIns="0">
-            <a:spAutoFit/>
-          </a:bodyPr>
-          <a:lstStyle/>
-          <a:p>
-            <a:pPr algn="r"/>
-            <a:r>
-              <a:rPr sz="900" b="0">
-                <a:solidFill>
-                  <a:srgbClr val="718096"/>
-                </a:solidFill>
-                <a:latin typeface="Calibri"/>
-              </a:rPr>
-              <a:t>68</a:t>
-            </a:r>
-          </a:p>
-        </p:txBody>
-      </p:sp>
-      <p:sp>
-        <p:nvSpPr>
-          <p:cNvPr id="77" name="TextBox 76"/>
-          <p:cNvSpPr txBox="1"/>
-          <p:nvPr/>
-        </p:nvSpPr>
-        <p:spPr>
-          <a:xfrm>
-            <a:off x="685800" y="1499616"/>
-            <a:ext cx="411480" cy="182880"/>
-          </a:xfrm>
-          <a:prstGeom prst="rect">
-            <a:avLst/>
-          </a:prstGeom>
-          <a:noFill/>
-        </p:spPr>
-        <p:txBody>
-          <a:bodyPr wrap="square" lIns="0" rIns="0" tIns="0" bIns="0">
-            <a:spAutoFit/>
-          </a:bodyPr>
-          <a:lstStyle/>
-          <a:p>
-            <a:pPr algn="r"/>
-            <a:r>
-              <a:rPr sz="900" b="0">
-                <a:solidFill>
-                  <a:srgbClr val="718096"/>
-                </a:solidFill>
-                <a:latin typeface="Calibri"/>
-              </a:rPr>
-              <a:t>69</a:t>
-            </a:r>
-          </a:p>
-        </p:txBody>
-      </p:sp>
-      <p:sp>
-        <p:nvSpPr>
-          <p:cNvPr id="78" name="TextBox 77"/>
-          <p:cNvSpPr txBox="1"/>
-          <p:nvPr/>
-        </p:nvSpPr>
-        <p:spPr>
-          <a:xfrm>
-            <a:off x="685800" y="1478280"/>
-            <a:ext cx="411480" cy="182880"/>
-          </a:xfrm>
-          <a:prstGeom prst="rect">
-            <a:avLst/>
-          </a:prstGeom>
-          <a:noFill/>
-        </p:spPr>
-        <p:txBody>
-          <a:bodyPr wrap="square" lIns="0" rIns="0" tIns="0" bIns="0">
-            <a:spAutoFit/>
-          </a:bodyPr>
-          <a:lstStyle/>
-          <a:p>
-            <a:pPr algn="r"/>
-            <a:r>
-              <a:rPr sz="900" b="0">
-                <a:solidFill>
-                  <a:srgbClr val="718096"/>
-                </a:solidFill>
-                <a:latin typeface="Calibri"/>
-              </a:rPr>
-              <a:t>70</a:t>
-            </a:r>
-          </a:p>
-        </p:txBody>
-      </p:sp>
-      <p:sp>
-        <p:nvSpPr>
-          <p:cNvPr id="79" name="TextBox 78"/>
-          <p:cNvSpPr txBox="1"/>
-          <p:nvPr/>
-        </p:nvSpPr>
-        <p:spPr>
-          <a:xfrm>
-            <a:off x="685800" y="1456944"/>
-            <a:ext cx="411480" cy="182880"/>
-          </a:xfrm>
-          <a:prstGeom prst="rect">
-            <a:avLst/>
-          </a:prstGeom>
-          <a:noFill/>
-        </p:spPr>
-        <p:txBody>
-          <a:bodyPr wrap="square" lIns="0" rIns="0" tIns="0" bIns="0">
-            <a:spAutoFit/>
-          </a:bodyPr>
-          <a:lstStyle/>
-          <a:p>
-            <a:pPr algn="r"/>
-            <a:r>
-              <a:rPr sz="900" b="0">
-                <a:solidFill>
-                  <a:srgbClr val="718096"/>
-                </a:solidFill>
-                <a:latin typeface="Calibri"/>
-              </a:rPr>
-              <a:t>71</a:t>
-            </a:r>
-          </a:p>
-        </p:txBody>
-      </p:sp>
-      <p:sp>
-        <p:nvSpPr>
-          <p:cNvPr id="80" name="TextBox 79"/>
-          <p:cNvSpPr txBox="1"/>
-          <p:nvPr/>
-        </p:nvSpPr>
-        <p:spPr>
-          <a:xfrm>
-            <a:off x="685800" y="1435608"/>
-            <a:ext cx="411480" cy="182880"/>
-          </a:xfrm>
-          <a:prstGeom prst="rect">
-            <a:avLst/>
-          </a:prstGeom>
-          <a:noFill/>
-        </p:spPr>
-        <p:txBody>
-          <a:bodyPr wrap="square" lIns="0" rIns="0" tIns="0" bIns="0">
-            <a:spAutoFit/>
-          </a:bodyPr>
-          <a:lstStyle/>
-          <a:p>
-            <a:pPr algn="r"/>
-            <a:r>
-              <a:rPr sz="900" b="0">
-                <a:solidFill>
-                  <a:srgbClr val="718096"/>
-                </a:solidFill>
-                <a:latin typeface="Calibri"/>
-              </a:rPr>
-              <a:t>72</a:t>
-            </a:r>
-          </a:p>
-        </p:txBody>
-      </p:sp>
-      <p:sp>
-        <p:nvSpPr>
-          <p:cNvPr id="81" name="TextBox 80"/>
-          <p:cNvSpPr txBox="1"/>
-          <p:nvPr/>
-        </p:nvSpPr>
-        <p:spPr>
-          <a:xfrm>
-            <a:off x="685800" y="1414272"/>
-            <a:ext cx="411480" cy="182880"/>
-          </a:xfrm>
-          <a:prstGeom prst="rect">
-            <a:avLst/>
-          </a:prstGeom>
-          <a:noFill/>
-        </p:spPr>
-        <p:txBody>
-          <a:bodyPr wrap="square" lIns="0" rIns="0" tIns="0" bIns="0">
-            <a:spAutoFit/>
-          </a:bodyPr>
-          <a:lstStyle/>
-          <a:p>
-            <a:pPr algn="r"/>
-            <a:r>
-              <a:rPr sz="900" b="0">
-                <a:solidFill>
-                  <a:srgbClr val="718096"/>
-                </a:solidFill>
-                <a:latin typeface="Calibri"/>
-              </a:rPr>
-              <a:t>73</a:t>
-            </a:r>
-          </a:p>
-        </p:txBody>
-      </p:sp>
-      <p:sp>
-        <p:nvSpPr>
-          <p:cNvPr id="82" name="TextBox 81"/>
-          <p:cNvSpPr txBox="1"/>
-          <p:nvPr/>
-        </p:nvSpPr>
-        <p:spPr>
-          <a:xfrm>
-            <a:off x="685800" y="1392936"/>
-            <a:ext cx="411480" cy="182880"/>
-          </a:xfrm>
-          <a:prstGeom prst="rect">
-            <a:avLst/>
-          </a:prstGeom>
-          <a:noFill/>
-        </p:spPr>
-        <p:txBody>
-          <a:bodyPr wrap="square" lIns="0" rIns="0" tIns="0" bIns="0">
-            <a:spAutoFit/>
-          </a:bodyPr>
-          <a:lstStyle/>
-          <a:p>
-            <a:pPr algn="r"/>
-            <a:r>
-              <a:rPr sz="900" b="0">
-                <a:solidFill>
-                  <a:srgbClr val="718096"/>
-                </a:solidFill>
-                <a:latin typeface="Calibri"/>
-              </a:rPr>
-              <a:t>74</a:t>
-            </a:r>
-          </a:p>
-        </p:txBody>
-      </p:sp>
-      <p:sp>
-        <p:nvSpPr>
-          <p:cNvPr id="83" name="TextBox 82"/>
-          <p:cNvSpPr txBox="1"/>
-          <p:nvPr/>
-        </p:nvSpPr>
-        <p:spPr>
-          <a:xfrm>
-            <a:off x="685800" y="1371600"/>
-            <a:ext cx="411480" cy="182880"/>
-          </a:xfrm>
-          <a:prstGeom prst="rect">
-            <a:avLst/>
-          </a:prstGeom>
-          <a:noFill/>
-        </p:spPr>
-        <p:txBody>
-          <a:bodyPr wrap="square" lIns="0" rIns="0" tIns="0" bIns="0">
-            <a:spAutoFit/>
-          </a:bodyPr>
-          <a:lstStyle/>
-          <a:p>
-            <a:pPr algn="r"/>
-            <a:r>
-              <a:rPr sz="900" b="0">
-                <a:solidFill>
-                  <a:srgbClr val="718096"/>
-                </a:solidFill>
-                <a:latin typeface="Calibri"/>
-              </a:rPr>
-              <a:t>75</a:t>
-            </a:r>
-          </a:p>
-        </p:txBody>
-      </p:sp>
-      <p:sp>
-        <p:nvSpPr>
-          <p:cNvPr id="84" name="Rectangle 83"/>
-          <p:cNvSpPr/>
-          <p:nvPr/>
-        </p:nvSpPr>
-        <p:spPr>
-          <a:xfrm>
-            <a:off x="1584769" y="2999232"/>
-            <a:ext cx="968121" cy="64008"/>
-          </a:xfrm>
-          <a:prstGeom prst="rect">
-            <a:avLst/>
-          </a:prstGeom>
-          <a:solidFill>
-            <a:srgbClr val="38A169"/>
-          </a:solidFill>
-          <a:ln>
-            <a:noFill/>
-          </a:ln>
-        </p:spPr>
-        <p:style>
           <a:lnRef idx="1">
             <a:schemeClr val="accent1"/>
           </a:lnRef>
@@ -8502,84 +6081,330 @@
       </p:sp>
       <p:sp>
         <p:nvSpPr>
-          <p:cNvPr id="85" name="TextBox 84"/>
-          <p:cNvSpPr txBox="1"/>
-          <p:nvPr/>
-        </p:nvSpPr>
-        <p:spPr>
-          <a:xfrm>
-            <a:off x="1219009" y="3136392"/>
-            <a:ext cx="1699641" cy="228600"/>
-          </a:xfrm>
-          <a:prstGeom prst="rect">
-            <a:avLst/>
-          </a:prstGeom>
-          <a:noFill/>
-        </p:spPr>
-        <p:txBody>
-          <a:bodyPr wrap="square" lIns="0" rIns="0" tIns="0" bIns="0">
-            <a:spAutoFit/>
-          </a:bodyPr>
+          <p:cNvPr id="15" name="Rectangle 14"/>
+          <p:cNvSpPr/>
+          <p:nvPr/>
+        </p:nvSpPr>
+        <p:spPr>
+          <a:xfrm>
+            <a:off x="3814876" y="1691640"/>
+            <a:ext cx="1514246" cy="320040"/>
+          </a:xfrm>
+          <a:prstGeom prst="rect">
+            <a:avLst/>
+          </a:prstGeom>
+          <a:solidFill>
+            <a:srgbClr val="1E3A5F"/>
+          </a:solidFill>
+          <a:ln>
+            <a:noFill/>
+          </a:ln>
+        </p:spPr>
+        <p:style>
+          <a:lnRef idx="1">
+            <a:schemeClr val="accent1"/>
+          </a:lnRef>
+          <a:fillRef idx="3">
+            <a:schemeClr val="accent1"/>
+          </a:fillRef>
+          <a:effectRef idx="2">
+            <a:schemeClr val="accent1"/>
+          </a:effectRef>
+          <a:fontRef idx="minor">
+            <a:schemeClr val="lt1"/>
+          </a:fontRef>
+        </p:style>
+        <p:txBody>
+          <a:bodyPr rtlCol="0" anchor="ctr"/>
           <a:lstStyle/>
           <a:p>
             <a:pPr algn="ctr"/>
-            <a:r>
-              <a:rPr sz="1200" b="1">
-                <a:solidFill>
-                  <a:srgbClr val="1A202C"/>
-                </a:solidFill>
-                <a:latin typeface="Calibri"/>
-              </a:rPr>
-              <a:t>DE</a:t>
-            </a:r>
-          </a:p>
-        </p:txBody>
-      </p:sp>
-      <p:sp>
-        <p:nvSpPr>
-          <p:cNvPr id="86" name="TextBox 85"/>
-          <p:cNvSpPr txBox="1"/>
-          <p:nvPr/>
-        </p:nvSpPr>
-        <p:spPr>
-          <a:xfrm>
-            <a:off x="1219009" y="3337560"/>
-            <a:ext cx="1699641" cy="201168"/>
-          </a:xfrm>
-          <a:prstGeom prst="rect">
-            <a:avLst/>
-          </a:prstGeom>
-          <a:noFill/>
-        </p:spPr>
-        <p:txBody>
-          <a:bodyPr wrap="square" lIns="0" rIns="0" tIns="0" bIns="0">
-            <a:spAutoFit/>
-          </a:bodyPr>
+          </a:p>
+        </p:txBody>
+      </p:sp>
+      <p:sp>
+        <p:nvSpPr>
+          <p:cNvPr id="16" name="TextBox 15"/>
+          <p:cNvSpPr txBox="1"/>
+          <p:nvPr/>
+        </p:nvSpPr>
+        <p:spPr>
+          <a:xfrm>
+            <a:off x="3997756" y="1737360"/>
+            <a:ext cx="1148486" cy="246888"/>
+          </a:xfrm>
+          <a:prstGeom prst="rect">
+            <a:avLst/>
+          </a:prstGeom>
+          <a:noFill/>
+        </p:spPr>
+        <p:txBody>
+          <a:bodyPr wrap="square" lIns="0" rIns="0" tIns="0" bIns="0">
+            <a:spAutoFit/>
+          </a:bodyPr>
+          <a:lstStyle/>
+          <a:p>
+            <a:pPr algn="l"/>
+            <a:r>
+              <a:rPr sz="1100" b="1">
+                <a:solidFill>
+                  <a:srgbClr val="FFFFFF"/>
+                </a:solidFill>
+                <a:latin typeface="Calibri"/>
+              </a:rPr>
+              <a:t>3.  VALIDATOR</a:t>
+            </a:r>
+          </a:p>
+        </p:txBody>
+      </p:sp>
+      <p:sp>
+        <p:nvSpPr>
+          <p:cNvPr id="17" name="TextBox 16"/>
+          <p:cNvSpPr txBox="1"/>
+          <p:nvPr/>
+        </p:nvSpPr>
+        <p:spPr>
+          <a:xfrm>
+            <a:off x="3952036" y="2148840"/>
+            <a:ext cx="1239926" cy="1645920"/>
+          </a:xfrm>
+          <a:prstGeom prst="rect">
+            <a:avLst/>
+          </a:prstGeom>
+          <a:noFill/>
+        </p:spPr>
+        <p:txBody>
+          <a:bodyPr wrap="square" lIns="0" rIns="0" tIns="0" bIns="0">
+            <a:spAutoFit/>
+          </a:bodyPr>
+          <a:lstStyle/>
+          <a:p>
+            <a:pPr algn="l"/>
+            <a:r>
+              <a:rPr sz="950" b="0">
+                <a:solidFill>
+                  <a:srgbClr val="2D3748"/>
+                </a:solidFill>
+                <a:latin typeface="Calibri"/>
+              </a:rPr>
+              <a:t>trust_score forced to 0.0 for blocked URLs. data.europa.eu removed from the trusted domain seed list.</a:t>
+            </a:r>
+          </a:p>
+        </p:txBody>
+      </p:sp>
+      <p:sp>
+        <p:nvSpPr>
+          <p:cNvPr id="18" name="Rectangle 17"/>
+          <p:cNvSpPr/>
+          <p:nvPr/>
+        </p:nvSpPr>
+        <p:spPr>
+          <a:xfrm>
+            <a:off x="5493714" y="1691640"/>
+            <a:ext cx="1514246" cy="2194560"/>
+          </a:xfrm>
+          <a:prstGeom prst="rect">
+            <a:avLst/>
+          </a:prstGeom>
+          <a:solidFill>
+            <a:srgbClr val="FFFFFF"/>
+          </a:solidFill>
+          <a:ln w="6350">
+            <a:solidFill>
+              <a:srgbClr val="E2E8F0"/>
+            </a:solidFill>
+          </a:ln>
+        </p:spPr>
+        <p:style>
+          <a:lnRef idx="1">
+            <a:schemeClr val="accent1"/>
+          </a:lnRef>
+          <a:fillRef idx="3">
+            <a:schemeClr val="accent1"/>
+          </a:fillRef>
+          <a:effectRef idx="2">
+            <a:schemeClr val="accent1"/>
+          </a:effectRef>
+          <a:fontRef idx="minor">
+            <a:schemeClr val="lt1"/>
+          </a:fontRef>
+        </p:style>
+        <p:txBody>
+          <a:bodyPr rtlCol="0" anchor="ctr"/>
           <a:lstStyle/>
           <a:p>
             <a:pPr algn="ctr"/>
-            <a:r>
-              <a:rPr sz="900" b="0">
-                <a:solidFill>
-                  <a:srgbClr val="718096"/>
-                </a:solidFill>
-                <a:latin typeface="Calibri"/>
-              </a:rPr>
-              <a:t>3 / 3</a:t>
-            </a:r>
-          </a:p>
-        </p:txBody>
-      </p:sp>
-      <p:sp>
-        <p:nvSpPr>
-          <p:cNvPr id="87" name="Rectangle 86"/>
+          </a:p>
+        </p:txBody>
+      </p:sp>
+      <p:sp>
+        <p:nvSpPr>
+          <p:cNvPr id="19" name="Rectangle 18"/>
           <p:cNvSpPr/>
           <p:nvPr/>
         </p:nvSpPr>
         <p:spPr>
           <a:xfrm>
-            <a:off x="3344989" y="2679192"/>
-            <a:ext cx="968121" cy="384048"/>
+            <a:off x="5493714" y="1691640"/>
+            <a:ext cx="1514246" cy="320040"/>
+          </a:xfrm>
+          <a:prstGeom prst="rect">
+            <a:avLst/>
+          </a:prstGeom>
+          <a:solidFill>
+            <a:srgbClr val="D69E2E"/>
+          </a:solidFill>
+          <a:ln>
+            <a:noFill/>
+          </a:ln>
+        </p:spPr>
+        <p:style>
+          <a:lnRef idx="1">
+            <a:schemeClr val="accent1"/>
+          </a:lnRef>
+          <a:fillRef idx="3">
+            <a:schemeClr val="accent1"/>
+          </a:fillRef>
+          <a:effectRef idx="2">
+            <a:schemeClr val="accent1"/>
+          </a:effectRef>
+          <a:fontRef idx="minor">
+            <a:schemeClr val="lt1"/>
+          </a:fontRef>
+        </p:style>
+        <p:txBody>
+          <a:bodyPr rtlCol="0" anchor="ctr"/>
+          <a:lstStyle/>
+          <a:p>
+            <a:pPr algn="ctr"/>
+          </a:p>
+        </p:txBody>
+      </p:sp>
+      <p:sp>
+        <p:nvSpPr>
+          <p:cNvPr id="20" name="TextBox 19"/>
+          <p:cNvSpPr txBox="1"/>
+          <p:nvPr/>
+        </p:nvSpPr>
+        <p:spPr>
+          <a:xfrm>
+            <a:off x="5676594" y="1737360"/>
+            <a:ext cx="1148486" cy="246888"/>
+          </a:xfrm>
+          <a:prstGeom prst="rect">
+            <a:avLst/>
+          </a:prstGeom>
+          <a:noFill/>
+        </p:spPr>
+        <p:txBody>
+          <a:bodyPr wrap="square" lIns="0" rIns="0" tIns="0" bIns="0">
+            <a:spAutoFit/>
+          </a:bodyPr>
+          <a:lstStyle/>
+          <a:p>
+            <a:pPr algn="l"/>
+            <a:r>
+              <a:rPr sz="1100" b="1">
+                <a:solidFill>
+                  <a:srgbClr val="FFFFFF"/>
+                </a:solidFill>
+                <a:latin typeface="Calibri"/>
+              </a:rPr>
+              <a:t>4.  PROMPTS</a:t>
+            </a:r>
+          </a:p>
+        </p:txBody>
+      </p:sp>
+      <p:sp>
+        <p:nvSpPr>
+          <p:cNvPr id="21" name="TextBox 20"/>
+          <p:cNvSpPr txBox="1"/>
+          <p:nvPr/>
+        </p:nvSpPr>
+        <p:spPr>
+          <a:xfrm>
+            <a:off x="5630874" y="2148840"/>
+            <a:ext cx="1239926" cy="1645920"/>
+          </a:xfrm>
+          <a:prstGeom prst="rect">
+            <a:avLst/>
+          </a:prstGeom>
+          <a:noFill/>
+        </p:spPr>
+        <p:txBody>
+          <a:bodyPr wrap="square" lIns="0" rIns="0" tIns="0" bIns="0">
+            <a:spAutoFit/>
+          </a:bodyPr>
+          <a:lstStyle/>
+          <a:p>
+            <a:pPr algn="l"/>
+            <a:r>
+              <a:rPr sz="950" b="0">
+                <a:solidFill>
+                  <a:srgbClr val="2D3748"/>
+                </a:solidFill>
+                <a:latin typeface="Calibri"/>
+              </a:rPr>
+              <a:t>Researcher V2, all four Verifier V2 strategies, and Adjudicator V2 carry an explicit forbidden_odmi_source rule.</a:t>
+            </a:r>
+          </a:p>
+        </p:txBody>
+      </p:sp>
+      <p:sp>
+        <p:nvSpPr>
+          <p:cNvPr id="22" name="Rectangle 21"/>
+          <p:cNvSpPr/>
+          <p:nvPr/>
+        </p:nvSpPr>
+        <p:spPr>
+          <a:xfrm>
+            <a:off x="7172552" y="1691640"/>
+            <a:ext cx="1514246" cy="2194560"/>
+          </a:xfrm>
+          <a:prstGeom prst="rect">
+            <a:avLst/>
+          </a:prstGeom>
+          <a:solidFill>
+            <a:srgbClr val="FFFFFF"/>
+          </a:solidFill>
+          <a:ln w="6350">
+            <a:solidFill>
+              <a:srgbClr val="E2E8F0"/>
+            </a:solidFill>
+          </a:ln>
+        </p:spPr>
+        <p:style>
+          <a:lnRef idx="1">
+            <a:schemeClr val="accent1"/>
+          </a:lnRef>
+          <a:fillRef idx="3">
+            <a:schemeClr val="accent1"/>
+          </a:fillRef>
+          <a:effectRef idx="2">
+            <a:schemeClr val="accent1"/>
+          </a:effectRef>
+          <a:fontRef idx="minor">
+            <a:schemeClr val="lt1"/>
+          </a:fontRef>
+        </p:style>
+        <p:txBody>
+          <a:bodyPr rtlCol="0" anchor="ctr"/>
+          <a:lstStyle/>
+          <a:p>
+            <a:pPr algn="ctr"/>
+          </a:p>
+        </p:txBody>
+      </p:sp>
+      <p:sp>
+        <p:nvSpPr>
+          <p:cNvPr id="23" name="Rectangle 22"/>
+          <p:cNvSpPr/>
+          <p:nvPr/>
+        </p:nvSpPr>
+        <p:spPr>
+          <a:xfrm>
+            <a:off x="7172552" y="1691640"/>
+            <a:ext cx="1514246" cy="320040"/>
           </a:xfrm>
           <a:prstGeom prst="rect">
             <a:avLst/>
@@ -8615,23 +6440,95 @@
       </p:sp>
       <p:sp>
         <p:nvSpPr>
-          <p:cNvPr id="88" name="Rectangle 87"/>
+          <p:cNvPr id="24" name="TextBox 23"/>
+          <p:cNvSpPr txBox="1"/>
+          <p:nvPr/>
+        </p:nvSpPr>
+        <p:spPr>
+          <a:xfrm>
+            <a:off x="7355432" y="1737360"/>
+            <a:ext cx="1148486" cy="246888"/>
+          </a:xfrm>
+          <a:prstGeom prst="rect">
+            <a:avLst/>
+          </a:prstGeom>
+          <a:noFill/>
+        </p:spPr>
+        <p:txBody>
+          <a:bodyPr wrap="square" lIns="0" rIns="0" tIns="0" bIns="0">
+            <a:spAutoFit/>
+          </a:bodyPr>
+          <a:lstStyle/>
+          <a:p>
+            <a:pPr algn="l"/>
+            <a:r>
+              <a:rPr sz="1100" b="1">
+                <a:solidFill>
+                  <a:srgbClr val="FFFFFF"/>
+                </a:solidFill>
+                <a:latin typeface="Calibri"/>
+              </a:rPr>
+              <a:t>5.  AUDIT</a:t>
+            </a:r>
+          </a:p>
+        </p:txBody>
+      </p:sp>
+      <p:sp>
+        <p:nvSpPr>
+          <p:cNvPr id="25" name="TextBox 24"/>
+          <p:cNvSpPr txBox="1"/>
+          <p:nvPr/>
+        </p:nvSpPr>
+        <p:spPr>
+          <a:xfrm>
+            <a:off x="7309712" y="2148840"/>
+            <a:ext cx="1239926" cy="1645920"/>
+          </a:xfrm>
+          <a:prstGeom prst="rect">
+            <a:avLst/>
+          </a:prstGeom>
+          <a:noFill/>
+        </p:spPr>
+        <p:txBody>
+          <a:bodyPr wrap="square" lIns="0" rIns="0" tIns="0" bIns="0">
+            <a:spAutoFit/>
+          </a:bodyPr>
+          <a:lstStyle/>
+          <a:p>
+            <a:pPr algn="l"/>
+            <a:r>
+              <a:rPr sz="950" b="0">
+                <a:solidFill>
+                  <a:srgbClr val="2D3748"/>
+                </a:solidFill>
+                <a:latin typeface="Calibri"/>
+              </a:rPr>
+              <a:t>scripts/check_data_leakage.py scans every URL column in the swarm tables. Exits non-zero on any hit. --purge deletes tainted pair_runs.</a:t>
+            </a:r>
+          </a:p>
+        </p:txBody>
+      </p:sp>
+      <p:sp>
+        <p:nvSpPr>
+          <p:cNvPr id="26" name="Rectangle 25"/>
           <p:cNvSpPr/>
           <p:nvPr/>
         </p:nvSpPr>
         <p:spPr>
           <a:xfrm>
-            <a:off x="3344989" y="1463040"/>
-            <a:ext cx="968121" cy="1216152"/>
+            <a:off x="457200" y="4069080"/>
+            <a:ext cx="8229600" cy="502920"/>
           </a:xfrm>
           <a:prstGeom prst="rect">
             <a:avLst/>
           </a:prstGeom>
           <a:solidFill>
-            <a:srgbClr val="38A169"/>
+            <a:srgbClr val="F7FAFC"/>
           </a:solidFill>
-          <a:ln>
-            <a:noFill/>
+          <a:ln w="6350">
+            <a:solidFill>
+              <a:srgbClr val="C53030"/>
+            </a:solidFill>
           </a:ln>
         </p:spPr>
         <p:style>
@@ -8658,353 +6555,14 @@
       </p:sp>
       <p:sp>
         <p:nvSpPr>
-          <p:cNvPr id="89" name="TextBox 88"/>
-          <p:cNvSpPr txBox="1"/>
-          <p:nvPr/>
-        </p:nvSpPr>
-        <p:spPr>
-          <a:xfrm>
-            <a:off x="2979229" y="3136392"/>
-            <a:ext cx="1699641" cy="228600"/>
-          </a:xfrm>
-          <a:prstGeom prst="rect">
-            <a:avLst/>
-          </a:prstGeom>
-          <a:noFill/>
-        </p:spPr>
-        <p:txBody>
-          <a:bodyPr wrap="square" lIns="0" rIns="0" tIns="0" bIns="0">
-            <a:spAutoFit/>
-          </a:bodyPr>
-          <a:lstStyle/>
-          <a:p>
-            <a:pPr algn="ctr"/>
-            <a:r>
-              <a:rPr sz="1200" b="1">
-                <a:solidFill>
-                  <a:srgbClr val="1A202C"/>
-                </a:solidFill>
-                <a:latin typeface="Calibri"/>
-              </a:rPr>
-              <a:t>FR</a:t>
-            </a:r>
-          </a:p>
-        </p:txBody>
-      </p:sp>
-      <p:sp>
-        <p:nvSpPr>
-          <p:cNvPr id="90" name="TextBox 89"/>
-          <p:cNvSpPr txBox="1"/>
-          <p:nvPr/>
-        </p:nvSpPr>
-        <p:spPr>
-          <a:xfrm>
-            <a:off x="2979229" y="3337560"/>
-            <a:ext cx="1699641" cy="201168"/>
-          </a:xfrm>
-          <a:prstGeom prst="rect">
-            <a:avLst/>
-          </a:prstGeom>
-          <a:noFill/>
-        </p:spPr>
-        <p:txBody>
-          <a:bodyPr wrap="square" lIns="0" rIns="0" tIns="0" bIns="0">
-            <a:spAutoFit/>
-          </a:bodyPr>
-          <a:lstStyle/>
-          <a:p>
-            <a:pPr algn="ctr"/>
-            <a:r>
-              <a:rPr sz="900" b="0">
-                <a:solidFill>
-                  <a:srgbClr val="718096"/>
-                </a:solidFill>
-                <a:latin typeface="Calibri"/>
-              </a:rPr>
-              <a:t>57 / 75</a:t>
-            </a:r>
-          </a:p>
-        </p:txBody>
-      </p:sp>
-      <p:sp>
-        <p:nvSpPr>
-          <p:cNvPr id="91" name="Rectangle 90"/>
-          <p:cNvSpPr/>
-          <p:nvPr/>
-        </p:nvSpPr>
-        <p:spPr>
-          <a:xfrm>
-            <a:off x="5105209" y="2999232"/>
-            <a:ext cx="968121" cy="64008"/>
-          </a:xfrm>
-          <a:prstGeom prst="rect">
-            <a:avLst/>
-          </a:prstGeom>
-          <a:solidFill>
-            <a:srgbClr val="38A169"/>
-          </a:solidFill>
-          <a:ln>
-            <a:noFill/>
-          </a:ln>
-        </p:spPr>
-        <p:style>
-          <a:lnRef idx="1">
-            <a:schemeClr val="accent1"/>
-          </a:lnRef>
-          <a:fillRef idx="3">
-            <a:schemeClr val="accent1"/>
-          </a:fillRef>
-          <a:effectRef idx="2">
-            <a:schemeClr val="accent1"/>
-          </a:effectRef>
-          <a:fontRef idx="minor">
-            <a:schemeClr val="lt1"/>
-          </a:fontRef>
-        </p:style>
-        <p:txBody>
-          <a:bodyPr rtlCol="0" anchor="ctr"/>
-          <a:lstStyle/>
-          <a:p>
-            <a:pPr algn="ctr"/>
-          </a:p>
-        </p:txBody>
-      </p:sp>
-      <p:sp>
-        <p:nvSpPr>
-          <p:cNvPr id="92" name="TextBox 91"/>
-          <p:cNvSpPr txBox="1"/>
-          <p:nvPr/>
-        </p:nvSpPr>
-        <p:spPr>
-          <a:xfrm>
-            <a:off x="4739449" y="3136392"/>
-            <a:ext cx="1699641" cy="228600"/>
-          </a:xfrm>
-          <a:prstGeom prst="rect">
-            <a:avLst/>
-          </a:prstGeom>
-          <a:noFill/>
-        </p:spPr>
-        <p:txBody>
-          <a:bodyPr wrap="square" lIns="0" rIns="0" tIns="0" bIns="0">
-            <a:spAutoFit/>
-          </a:bodyPr>
-          <a:lstStyle/>
-          <a:p>
-            <a:pPr algn="ctr"/>
-            <a:r>
-              <a:rPr sz="1200" b="1">
-                <a:solidFill>
-                  <a:srgbClr val="1A202C"/>
-                </a:solidFill>
-                <a:latin typeface="Calibri"/>
-              </a:rPr>
-              <a:t>NL</a:t>
-            </a:r>
-          </a:p>
-        </p:txBody>
-      </p:sp>
-      <p:sp>
-        <p:nvSpPr>
-          <p:cNvPr id="93" name="TextBox 92"/>
-          <p:cNvSpPr txBox="1"/>
-          <p:nvPr/>
-        </p:nvSpPr>
-        <p:spPr>
-          <a:xfrm>
-            <a:off x="4739449" y="3337560"/>
-            <a:ext cx="1699641" cy="201168"/>
-          </a:xfrm>
-          <a:prstGeom prst="rect">
-            <a:avLst/>
-          </a:prstGeom>
-          <a:noFill/>
-        </p:spPr>
-        <p:txBody>
-          <a:bodyPr wrap="square" lIns="0" rIns="0" tIns="0" bIns="0">
-            <a:spAutoFit/>
-          </a:bodyPr>
-          <a:lstStyle/>
-          <a:p>
-            <a:pPr algn="ctr"/>
-            <a:r>
-              <a:rPr sz="900" b="0">
-                <a:solidFill>
-                  <a:srgbClr val="718096"/>
-                </a:solidFill>
-                <a:latin typeface="Calibri"/>
-              </a:rPr>
-              <a:t>3 / 3</a:t>
-            </a:r>
-          </a:p>
-        </p:txBody>
-      </p:sp>
-      <p:sp>
-        <p:nvSpPr>
-          <p:cNvPr id="94" name="Rectangle 93"/>
-          <p:cNvSpPr/>
-          <p:nvPr/>
-        </p:nvSpPr>
-        <p:spPr>
-          <a:xfrm>
-            <a:off x="6865429" y="3020568"/>
-            <a:ext cx="968121" cy="42672"/>
-          </a:xfrm>
-          <a:prstGeom prst="rect">
-            <a:avLst/>
-          </a:prstGeom>
-          <a:solidFill>
-            <a:srgbClr val="38A169"/>
-          </a:solidFill>
-          <a:ln>
-            <a:noFill/>
-          </a:ln>
-        </p:spPr>
-        <p:style>
-          <a:lnRef idx="1">
-            <a:schemeClr val="accent1"/>
-          </a:lnRef>
-          <a:fillRef idx="3">
-            <a:schemeClr val="accent1"/>
-          </a:fillRef>
-          <a:effectRef idx="2">
-            <a:schemeClr val="accent1"/>
-          </a:effectRef>
-          <a:fontRef idx="minor">
-            <a:schemeClr val="lt1"/>
-          </a:fontRef>
-        </p:style>
-        <p:txBody>
-          <a:bodyPr rtlCol="0" anchor="ctr"/>
-          <a:lstStyle/>
-          <a:p>
-            <a:pPr algn="ctr"/>
-          </a:p>
-        </p:txBody>
-      </p:sp>
-      <p:sp>
-        <p:nvSpPr>
-          <p:cNvPr id="95" name="TextBox 94"/>
-          <p:cNvSpPr txBox="1"/>
-          <p:nvPr/>
-        </p:nvSpPr>
-        <p:spPr>
-          <a:xfrm>
-            <a:off x="6499669" y="3136392"/>
-            <a:ext cx="1699641" cy="228600"/>
-          </a:xfrm>
-          <a:prstGeom prst="rect">
-            <a:avLst/>
-          </a:prstGeom>
-          <a:noFill/>
-        </p:spPr>
-        <p:txBody>
-          <a:bodyPr wrap="square" lIns="0" rIns="0" tIns="0" bIns="0">
-            <a:spAutoFit/>
-          </a:bodyPr>
-          <a:lstStyle/>
-          <a:p>
-            <a:pPr algn="ctr"/>
-            <a:r>
-              <a:rPr sz="1200" b="1">
-                <a:solidFill>
-                  <a:srgbClr val="1A202C"/>
-                </a:solidFill>
-                <a:latin typeface="Calibri"/>
-              </a:rPr>
-              <a:t>RO</a:t>
-            </a:r>
-          </a:p>
-        </p:txBody>
-      </p:sp>
-      <p:sp>
-        <p:nvSpPr>
-          <p:cNvPr id="96" name="TextBox 95"/>
-          <p:cNvSpPr txBox="1"/>
-          <p:nvPr/>
-        </p:nvSpPr>
-        <p:spPr>
-          <a:xfrm>
-            <a:off x="6499669" y="3337560"/>
-            <a:ext cx="1699641" cy="201168"/>
-          </a:xfrm>
-          <a:prstGeom prst="rect">
-            <a:avLst/>
-          </a:prstGeom>
-          <a:noFill/>
-        </p:spPr>
-        <p:txBody>
-          <a:bodyPr wrap="square" lIns="0" rIns="0" tIns="0" bIns="0">
-            <a:spAutoFit/>
-          </a:bodyPr>
-          <a:lstStyle/>
-          <a:p>
-            <a:pPr algn="ctr"/>
-            <a:r>
-              <a:rPr sz="900" b="0">
-                <a:solidFill>
-                  <a:srgbClr val="718096"/>
-                </a:solidFill>
-                <a:latin typeface="Calibri"/>
-              </a:rPr>
-              <a:t>2 / 2</a:t>
-            </a:r>
-          </a:p>
-        </p:txBody>
-      </p:sp>
-      <p:sp>
-        <p:nvSpPr>
-          <p:cNvPr id="97" name="Rectangle 96"/>
-          <p:cNvSpPr/>
-          <p:nvPr/>
-        </p:nvSpPr>
-        <p:spPr>
-          <a:xfrm>
-            <a:off x="548640" y="3822192"/>
-            <a:ext cx="164592" cy="164592"/>
-          </a:xfrm>
-          <a:prstGeom prst="rect">
-            <a:avLst/>
-          </a:prstGeom>
-          <a:solidFill>
-            <a:srgbClr val="38A169"/>
-          </a:solidFill>
-          <a:ln>
-            <a:noFill/>
-          </a:ln>
-        </p:spPr>
-        <p:style>
-          <a:lnRef idx="1">
-            <a:schemeClr val="accent1"/>
-          </a:lnRef>
-          <a:fillRef idx="3">
-            <a:schemeClr val="accent1"/>
-          </a:fillRef>
-          <a:effectRef idx="2">
-            <a:schemeClr val="accent1"/>
-          </a:effectRef>
-          <a:fontRef idx="minor">
-            <a:schemeClr val="lt1"/>
-          </a:fontRef>
-        </p:style>
-        <p:txBody>
-          <a:bodyPr rtlCol="0" anchor="ctr"/>
-          <a:lstStyle/>
-          <a:p>
-            <a:pPr algn="ctr"/>
-          </a:p>
-        </p:txBody>
-      </p:sp>
-      <p:sp>
-        <p:nvSpPr>
-          <p:cNvPr id="98" name="TextBox 97"/>
-          <p:cNvSpPr txBox="1"/>
-          <p:nvPr/>
-        </p:nvSpPr>
-        <p:spPr>
-          <a:xfrm>
-            <a:off x="804672" y="3794760"/>
-            <a:ext cx="3291840" cy="228600"/>
+          <p:cNvPr id="27" name="TextBox 26"/>
+          <p:cNvSpPr txBox="1"/>
+          <p:nvPr/>
+        </p:nvSpPr>
+        <p:spPr>
+          <a:xfrm>
+            <a:off x="640080" y="4160520"/>
+            <a:ext cx="7863840" cy="365760"/>
           </a:xfrm>
           <a:prstGeom prst="rect">
             <a:avLst/>
@@ -9019,176 +6577,20 @@
           <a:p>
             <a:pPr algn="l"/>
             <a:r>
-              <a:rPr sz="1000" b="0">
+              <a:rPr sz="1050" b="0">
                 <a:solidFill>
                   <a:srgbClr val="2D3748"/>
                 </a:solidFill>
                 <a:latin typeface="Calibri"/>
               </a:rPr>
-              <a:t>Matches ODMI 2025</a:t>
-            </a:r>
-          </a:p>
-        </p:txBody>
-      </p:sp>
-      <p:sp>
-        <p:nvSpPr>
-          <p:cNvPr id="99" name="Rectangle 98"/>
-          <p:cNvSpPr/>
-          <p:nvPr/>
-        </p:nvSpPr>
-        <p:spPr>
-          <a:xfrm>
-            <a:off x="3840480" y="3822192"/>
-            <a:ext cx="164592" cy="164592"/>
-          </a:xfrm>
-          <a:prstGeom prst="rect">
-            <a:avLst/>
-          </a:prstGeom>
-          <a:solidFill>
-            <a:srgbClr val="C53030"/>
-          </a:solidFill>
-          <a:ln>
-            <a:noFill/>
-          </a:ln>
-        </p:spPr>
-        <p:style>
-          <a:lnRef idx="1">
-            <a:schemeClr val="accent1"/>
-          </a:lnRef>
-          <a:fillRef idx="3">
-            <a:schemeClr val="accent1"/>
-          </a:fillRef>
-          <a:effectRef idx="2">
-            <a:schemeClr val="accent1"/>
-          </a:effectRef>
-          <a:fontRef idx="minor">
-            <a:schemeClr val="lt1"/>
-          </a:fontRef>
-        </p:style>
-        <p:txBody>
-          <a:bodyPr rtlCol="0" anchor="ctr"/>
-          <a:lstStyle/>
-          <a:p>
-            <a:pPr algn="ctr"/>
-          </a:p>
-        </p:txBody>
-      </p:sp>
-      <p:sp>
-        <p:nvSpPr>
-          <p:cNvPr id="100" name="TextBox 99"/>
-          <p:cNvSpPr txBox="1"/>
-          <p:nvPr/>
-        </p:nvSpPr>
-        <p:spPr>
-          <a:xfrm>
-            <a:off x="4096512" y="3794760"/>
-            <a:ext cx="3657600" cy="228600"/>
-          </a:xfrm>
-          <a:prstGeom prst="rect">
-            <a:avLst/>
-          </a:prstGeom>
-          <a:noFill/>
-        </p:spPr>
-        <p:txBody>
-          <a:bodyPr wrap="square" lIns="0" rIns="0" tIns="0" bIns="0">
-            <a:spAutoFit/>
-          </a:bodyPr>
-          <a:lstStyle/>
-          <a:p>
-            <a:pPr algn="l"/>
-            <a:r>
-              <a:rPr sz="1000" b="0">
-                <a:solidFill>
-                  <a:srgbClr val="2D3748"/>
-                </a:solidFill>
-                <a:latin typeface="Calibri"/>
-              </a:rPr>
-              <a:t>Differs from ODMI 2025</a:t>
-            </a:r>
-          </a:p>
-        </p:txBody>
-      </p:sp>
-      <p:sp>
-        <p:nvSpPr>
-          <p:cNvPr id="101" name="Rectangle 100"/>
-          <p:cNvSpPr/>
-          <p:nvPr/>
-        </p:nvSpPr>
-        <p:spPr>
-          <a:xfrm>
-            <a:off x="457200" y="4233672"/>
-            <a:ext cx="73152" cy="548640"/>
-          </a:xfrm>
-          <a:prstGeom prst="rect">
-            <a:avLst/>
-          </a:prstGeom>
-          <a:solidFill>
-            <a:srgbClr val="D69E2E"/>
-          </a:solidFill>
-          <a:ln>
-            <a:noFill/>
-          </a:ln>
-        </p:spPr>
-        <p:style>
-          <a:lnRef idx="1">
-            <a:schemeClr val="accent1"/>
-          </a:lnRef>
-          <a:fillRef idx="3">
-            <a:schemeClr val="accent1"/>
-          </a:fillRef>
-          <a:effectRef idx="2">
-            <a:schemeClr val="accent1"/>
-          </a:effectRef>
-          <a:fontRef idx="minor">
-            <a:schemeClr val="lt1"/>
-          </a:fontRef>
-        </p:style>
-        <p:txBody>
-          <a:bodyPr rtlCol="0" anchor="ctr"/>
-          <a:lstStyle/>
-          <a:p>
-            <a:pPr algn="ctr"/>
-          </a:p>
-        </p:txBody>
-      </p:sp>
-      <p:sp>
-        <p:nvSpPr>
-          <p:cNvPr id="102" name="TextBox 101"/>
-          <p:cNvSpPr txBox="1"/>
-          <p:nvPr/>
-        </p:nvSpPr>
-        <p:spPr>
-          <a:xfrm>
-            <a:off x="640080" y="4270248"/>
-            <a:ext cx="7955280" cy="502920"/>
-          </a:xfrm>
-          <a:prstGeom prst="rect">
-            <a:avLst/>
-          </a:prstGeom>
-          <a:noFill/>
-        </p:spPr>
-        <p:txBody>
-          <a:bodyPr wrap="square" lIns="0" rIns="0" tIns="0" bIns="0">
-            <a:spAutoFit/>
-          </a:bodyPr>
-          <a:lstStyle/>
-          <a:p>
-            <a:pPr algn="l"/>
-            <a:r>
-              <a:rPr sz="1000" b="0">
-                <a:solidFill>
-                  <a:srgbClr val="2D3748"/>
-                </a:solidFill>
-                <a:latin typeface="Calibri"/>
-              </a:rPr>
-              <a:t>Comparison is to ODMI's 2025 merged_responses. The current sample is small and Policy-dimension heavy. ODMI's assessments are one cycle old, so where the swarm differs that does not automatically mean the swarm is wrong: the country may have changed since the assessment. Each disagreement is worth a human glance.</a:t>
-            </a:r>
-          </a:p>
-        </p:txBody>
-      </p:sp>
-      <p:sp>
-        <p:nvSpPr>
-          <p:cNvPr id="103" name="TextBox 102"/>
+              <a:t>Each layer fails in a different way. The audit catches whatever the four runtime layers miss; 30 historical violations were purged when D24 landed.</a:t>
+            </a:r>
+          </a:p>
+        </p:txBody>
+      </p:sp>
+      <p:sp>
+        <p:nvSpPr>
+          <p:cNvPr id="28" name="TextBox 27"/>
           <p:cNvSpPr txBox="1"/>
           <p:nvPr/>
         </p:nvSpPr>
@@ -9216,7 +6618,7 @@
                 </a:solidFill>
                 <a:latin typeface="Calibri"/>
               </a:rPr>
-              <a:t>ODMI Agent Swarm  ·  Benjy Bream  ·  King's College London  ·  4 / 7</a:t>
+              <a:t>ODMI Agent Swarm  ·  Benjy Bream  ·  King's College London  ·  4 / 8</a:t>
             </a:r>
           </a:p>
         </p:txBody>
@@ -9312,7 +6714,7 @@
                 </a:solidFill>
                 <a:latin typeface="Calibri"/>
               </a:rPr>
-              <a:t>WHAT I'LL DEMO LIVE</a:t>
+              <a:t>FINALISED PAIRS · SUCCESS VS FAILURE</a:t>
             </a:r>
           </a:p>
         </p:txBody>
@@ -9347,7 +6749,7 @@
                 </a:solidFill>
                 <a:latin typeface="Calibri"/>
               </a:rPr>
-              <a:t>Best bits of the dashboard</a:t>
+              <a:t>Results so far, per country</a:t>
             </a:r>
           </a:p>
         </p:txBody>
@@ -9360,8 +6762,8 @@
         </p:nvSpPr>
         <p:spPr>
           <a:xfrm>
-            <a:off x="457200" y="1234440"/>
-            <a:ext cx="4160520" cy="1691640"/>
+            <a:off x="457200" y="1188720"/>
+            <a:ext cx="8229600" cy="2468880"/>
           </a:xfrm>
           <a:prstGeom prst="rect">
             <a:avLst/>
@@ -9397,188 +6799,20 @@
           </a:p>
         </p:txBody>
       </p:sp>
-      <p:sp>
-        <p:nvSpPr>
-          <p:cNvPr id="6" name="Rectangle 5"/>
-          <p:cNvSpPr/>
-          <p:nvPr/>
-        </p:nvSpPr>
-        <p:spPr>
-          <a:xfrm>
-            <a:off x="457200" y="1234440"/>
-            <a:ext cx="73152" cy="1691640"/>
-          </a:xfrm>
-          <a:prstGeom prst="rect">
-            <a:avLst/>
-          </a:prstGeom>
-          <a:solidFill>
-            <a:srgbClr val="0D9488"/>
-          </a:solidFill>
-          <a:ln>
-            <a:noFill/>
-          </a:ln>
-        </p:spPr>
-        <p:style>
-          <a:lnRef idx="1">
-            <a:schemeClr val="accent1"/>
-          </a:lnRef>
-          <a:fillRef idx="3">
-            <a:schemeClr val="accent1"/>
-          </a:fillRef>
-          <a:effectRef idx="2">
-            <a:schemeClr val="accent1"/>
-          </a:effectRef>
-          <a:fontRef idx="minor">
-            <a:schemeClr val="lt1"/>
-          </a:fontRef>
-        </p:style>
-        <p:txBody>
-          <a:bodyPr rtlCol="0" anchor="ctr"/>
-          <a:lstStyle/>
-          <a:p>
-            <a:pPr algn="ctr"/>
-          </a:p>
-        </p:txBody>
-      </p:sp>
-      <p:sp>
-        <p:nvSpPr>
-          <p:cNvPr id="7" name="Oval 6"/>
-          <p:cNvSpPr/>
-          <p:nvPr/>
-        </p:nvSpPr>
-        <p:spPr>
-          <a:xfrm>
-            <a:off x="731520" y="1463040"/>
-            <a:ext cx="502920" cy="502920"/>
-          </a:xfrm>
-          <a:prstGeom prst="ellipse">
-            <a:avLst/>
-          </a:prstGeom>
-          <a:solidFill>
-            <a:srgbClr val="0D9488"/>
-          </a:solidFill>
-          <a:ln>
-            <a:noFill/>
-          </a:ln>
-        </p:spPr>
-        <p:style>
-          <a:lnRef idx="1">
-            <a:schemeClr val="accent1"/>
-          </a:lnRef>
-          <a:fillRef idx="3">
-            <a:schemeClr val="accent1"/>
-          </a:fillRef>
-          <a:effectRef idx="2">
-            <a:schemeClr val="accent1"/>
-          </a:effectRef>
-          <a:fontRef idx="minor">
-            <a:schemeClr val="lt1"/>
-          </a:fontRef>
-        </p:style>
-        <p:txBody>
-          <a:bodyPr rtlCol="0" anchor="ctr"/>
-          <a:lstStyle/>
-          <a:p>
-            <a:pPr algn="ctr"/>
-            <a:r>
-              <a:rPr sz="1800" b="1">
-                <a:solidFill>
-                  <a:srgbClr val="FFFFFF"/>
-                </a:solidFill>
-                <a:latin typeface="Calibri"/>
-              </a:rPr>
-              <a:t>▶</a:t>
-            </a:r>
-          </a:p>
-        </p:txBody>
-      </p:sp>
-      <p:sp>
-        <p:nvSpPr>
-          <p:cNvPr id="8" name="TextBox 7"/>
-          <p:cNvSpPr txBox="1"/>
-          <p:nvPr/>
-        </p:nvSpPr>
-        <p:spPr>
-          <a:xfrm>
-            <a:off x="1371600" y="1490472"/>
-            <a:ext cx="3063240" cy="365760"/>
-          </a:xfrm>
-          <a:prstGeom prst="rect">
-            <a:avLst/>
-          </a:prstGeom>
-          <a:noFill/>
-        </p:spPr>
-        <p:txBody>
-          <a:bodyPr wrap="square" lIns="0" rIns="0" tIns="0" bIns="0">
-            <a:spAutoFit/>
-          </a:bodyPr>
-          <a:lstStyle/>
-          <a:p>
-            <a:pPr algn="l"/>
-            <a:r>
-              <a:rPr sz="1500" b="1">
-                <a:solidFill>
-                  <a:srgbClr val="1A202C"/>
-                </a:solidFill>
-                <a:latin typeface="Calibri"/>
-              </a:rPr>
-              <a:t>Run Console</a:t>
-            </a:r>
-          </a:p>
-        </p:txBody>
-      </p:sp>
-      <p:sp>
-        <p:nvSpPr>
-          <p:cNvPr id="9" name="TextBox 8"/>
-          <p:cNvSpPr txBox="1"/>
-          <p:nvPr/>
-        </p:nvSpPr>
-        <p:spPr>
-          <a:xfrm>
-            <a:off x="1371600" y="1874520"/>
-            <a:ext cx="3063240" cy="960120"/>
-          </a:xfrm>
-          <a:prstGeom prst="rect">
-            <a:avLst/>
-          </a:prstGeom>
-          <a:noFill/>
-        </p:spPr>
-        <p:txBody>
-          <a:bodyPr wrap="square" lIns="0" rIns="0" tIns="0" bIns="0">
-            <a:spAutoFit/>
-          </a:bodyPr>
-          <a:lstStyle/>
-          <a:p>
-            <a:pPr algn="l"/>
-            <a:r>
-              <a:rPr sz="1050" b="0">
-                <a:solidFill>
-                  <a:srgbClr val="2D3748"/>
-                </a:solidFill>
-                <a:latin typeface="Calibri"/>
-              </a:rPr>
-              <a:t>Multiselect questions × countries, pick the Verifier strategy and the model triple, dispatch a batch. Cost is estimated before the run starts.</a:t>
-            </a:r>
-          </a:p>
-        </p:txBody>
-      </p:sp>
-      <p:sp>
-        <p:nvSpPr>
-          <p:cNvPr id="10" name="Rectangle 9"/>
-          <p:cNvSpPr/>
-          <p:nvPr/>
-        </p:nvSpPr>
-        <p:spPr>
-          <a:xfrm>
-            <a:off x="4754880" y="1234440"/>
-            <a:ext cx="4160520" cy="1691640"/>
-          </a:xfrm>
-          <a:prstGeom prst="rect">
-            <a:avLst/>
-          </a:prstGeom>
-          <a:solidFill>
-            <a:srgbClr val="FFFFFF"/>
-          </a:solidFill>
+      <p:cxnSp>
+        <p:nvCxnSpPr>
+          <p:cNvPr id="6" name="Connector 5"/>
+          <p:cNvCxnSpPr/>
+          <p:nvPr/>
+        </p:nvCxnSpPr>
+        <p:spPr>
+          <a:xfrm>
+            <a:off x="1143000" y="1463040"/>
+            <a:ext cx="0" cy="1600200"/>
+          </a:xfrm>
+          <a:prstGeom prst="line">
+            <a:avLst/>
+          </a:prstGeom>
           <a:ln w="6350">
             <a:solidFill>
               <a:srgbClr val="E2E8F0"/>
@@ -9586,209 +6820,34 @@
           </a:ln>
         </p:spPr>
         <p:style>
-          <a:lnRef idx="1">
+          <a:lnRef idx="2">
             <a:schemeClr val="accent1"/>
           </a:lnRef>
-          <a:fillRef idx="3">
+          <a:fillRef idx="0">
             <a:schemeClr val="accent1"/>
           </a:fillRef>
-          <a:effectRef idx="2">
+          <a:effectRef idx="1">
             <a:schemeClr val="accent1"/>
           </a:effectRef>
           <a:fontRef idx="minor">
-            <a:schemeClr val="lt1"/>
+            <a:schemeClr val="tx1"/>
           </a:fontRef>
         </p:style>
-        <p:txBody>
-          <a:bodyPr rtlCol="0" anchor="ctr"/>
-          <a:lstStyle/>
-          <a:p>
-            <a:pPr algn="ctr"/>
-          </a:p>
-        </p:txBody>
-      </p:sp>
-      <p:sp>
-        <p:nvSpPr>
-          <p:cNvPr id="11" name="Rectangle 10"/>
-          <p:cNvSpPr/>
-          <p:nvPr/>
-        </p:nvSpPr>
-        <p:spPr>
-          <a:xfrm>
-            <a:off x="4754880" y="1234440"/>
-            <a:ext cx="73152" cy="1691640"/>
-          </a:xfrm>
-          <a:prstGeom prst="rect">
-            <a:avLst/>
-          </a:prstGeom>
-          <a:solidFill>
-            <a:srgbClr val="1E3A5F"/>
-          </a:solidFill>
-          <a:ln>
-            <a:noFill/>
-          </a:ln>
-        </p:spPr>
-        <p:style>
-          <a:lnRef idx="1">
-            <a:schemeClr val="accent1"/>
-          </a:lnRef>
-          <a:fillRef idx="3">
-            <a:schemeClr val="accent1"/>
-          </a:fillRef>
-          <a:effectRef idx="2">
-            <a:schemeClr val="accent1"/>
-          </a:effectRef>
-          <a:fontRef idx="minor">
-            <a:schemeClr val="lt1"/>
-          </a:fontRef>
-        </p:style>
-        <p:txBody>
-          <a:bodyPr rtlCol="0" anchor="ctr"/>
-          <a:lstStyle/>
-          <a:p>
-            <a:pPr algn="ctr"/>
-          </a:p>
-        </p:txBody>
-      </p:sp>
-      <p:sp>
-        <p:nvSpPr>
-          <p:cNvPr id="12" name="Oval 11"/>
-          <p:cNvSpPr/>
-          <p:nvPr/>
-        </p:nvSpPr>
-        <p:spPr>
-          <a:xfrm>
-            <a:off x="5029200" y="1463040"/>
-            <a:ext cx="502920" cy="502920"/>
-          </a:xfrm>
-          <a:prstGeom prst="ellipse">
-            <a:avLst/>
-          </a:prstGeom>
-          <a:solidFill>
-            <a:srgbClr val="1E3A5F"/>
-          </a:solidFill>
-          <a:ln>
-            <a:noFill/>
-          </a:ln>
-        </p:spPr>
-        <p:style>
-          <a:lnRef idx="1">
-            <a:schemeClr val="accent1"/>
-          </a:lnRef>
-          <a:fillRef idx="3">
-            <a:schemeClr val="accent1"/>
-          </a:fillRef>
-          <a:effectRef idx="2">
-            <a:schemeClr val="accent1"/>
-          </a:effectRef>
-          <a:fontRef idx="minor">
-            <a:schemeClr val="lt1"/>
-          </a:fontRef>
-        </p:style>
-        <p:txBody>
-          <a:bodyPr rtlCol="0" anchor="ctr"/>
-          <a:lstStyle/>
-          <a:p>
-            <a:pPr algn="ctr"/>
-            <a:r>
-              <a:rPr sz="1800" b="1">
-                <a:solidFill>
-                  <a:srgbClr val="FFFFFF"/>
-                </a:solidFill>
-                <a:latin typeface="Calibri"/>
-              </a:rPr>
-              <a:t>📋</a:t>
-            </a:r>
-          </a:p>
-        </p:txBody>
-      </p:sp>
-      <p:sp>
-        <p:nvSpPr>
-          <p:cNvPr id="13" name="TextBox 12"/>
-          <p:cNvSpPr txBox="1"/>
-          <p:nvPr/>
-        </p:nvSpPr>
-        <p:spPr>
-          <a:xfrm>
-            <a:off x="5669280" y="1490472"/>
-            <a:ext cx="3063240" cy="365760"/>
-          </a:xfrm>
-          <a:prstGeom prst="rect">
-            <a:avLst/>
-          </a:prstGeom>
-          <a:noFill/>
-        </p:spPr>
-        <p:txBody>
-          <a:bodyPr wrap="square" lIns="0" rIns="0" tIns="0" bIns="0">
-            <a:spAutoFit/>
-          </a:bodyPr>
-          <a:lstStyle/>
-          <a:p>
-            <a:pPr algn="l"/>
-            <a:r>
-              <a:rPr sz="1500" b="1">
-                <a:solidFill>
-                  <a:srgbClr val="1A202C"/>
-                </a:solidFill>
-                <a:latin typeface="Calibri"/>
-              </a:rPr>
-              <a:t>Results · Cards view with ODMI side-by-side</a:t>
-            </a:r>
-          </a:p>
-        </p:txBody>
-      </p:sp>
-      <p:sp>
-        <p:nvSpPr>
-          <p:cNvPr id="14" name="TextBox 13"/>
-          <p:cNvSpPr txBox="1"/>
-          <p:nvPr/>
-        </p:nvSpPr>
-        <p:spPr>
-          <a:xfrm>
-            <a:off x="5669280" y="1874520"/>
-            <a:ext cx="3063240" cy="960120"/>
-          </a:xfrm>
-          <a:prstGeom prst="rect">
-            <a:avLst/>
-          </a:prstGeom>
-          <a:noFill/>
-        </p:spPr>
-        <p:txBody>
-          <a:bodyPr wrap="square" lIns="0" rIns="0" tIns="0" bIns="0">
-            <a:spAutoFit/>
-          </a:bodyPr>
-          <a:lstStyle/>
-          <a:p>
-            <a:pPr algn="l"/>
-            <a:r>
-              <a:rPr sz="1050" b="0">
-                <a:solidFill>
-                  <a:srgbClr val="2D3748"/>
-                </a:solidFill>
-                <a:latin typeface="Calibri"/>
-              </a:rPr>
-              <a:t>One card per finalised pair: question, swarm answer with evidence quote, clickable source URL, plus ODMI's recorded answer and explanation. Match / differ badge at a glance.</a:t>
-            </a:r>
-          </a:p>
-        </p:txBody>
-      </p:sp>
-      <p:sp>
-        <p:nvSpPr>
-          <p:cNvPr id="15" name="Rectangle 14"/>
-          <p:cNvSpPr/>
-          <p:nvPr/>
-        </p:nvSpPr>
-        <p:spPr>
-          <a:xfrm>
-            <a:off x="457200" y="3063240"/>
-            <a:ext cx="4160520" cy="1691640"/>
-          </a:xfrm>
-          <a:prstGeom prst="rect">
-            <a:avLst/>
-          </a:prstGeom>
-          <a:solidFill>
-            <a:srgbClr val="FFFFFF"/>
-          </a:solidFill>
+      </p:cxnSp>
+      <p:cxnSp>
+        <p:nvCxnSpPr>
+          <p:cNvPr id="7" name="Connector 6"/>
+          <p:cNvCxnSpPr/>
+          <p:nvPr/>
+        </p:nvCxnSpPr>
+        <p:spPr>
+          <a:xfrm>
+            <a:off x="1143000" y="3063240"/>
+            <a:ext cx="7086600" cy="0"/>
+          </a:xfrm>
+          <a:prstGeom prst="line">
+            <a:avLst/>
+          </a:prstGeom>
           <a:ln w="6350">
             <a:solidFill>
               <a:srgbClr val="E2E8F0"/>
@@ -9796,37 +6855,2235 @@
           </a:ln>
         </p:spPr>
         <p:style>
-          <a:lnRef idx="1">
+          <a:lnRef idx="2">
             <a:schemeClr val="accent1"/>
           </a:lnRef>
-          <a:fillRef idx="3">
+          <a:fillRef idx="0">
             <a:schemeClr val="accent1"/>
           </a:fillRef>
-          <a:effectRef idx="2">
+          <a:effectRef idx="1">
             <a:schemeClr val="accent1"/>
           </a:effectRef>
           <a:fontRef idx="minor">
-            <a:schemeClr val="lt1"/>
+            <a:schemeClr val="tx1"/>
           </a:fontRef>
         </p:style>
-        <p:txBody>
-          <a:bodyPr rtlCol="0" anchor="ctr"/>
-          <a:lstStyle/>
-          <a:p>
-            <a:pPr algn="ctr"/>
-          </a:p>
-        </p:txBody>
-      </p:sp>
-      <p:sp>
-        <p:nvSpPr>
-          <p:cNvPr id="16" name="Rectangle 15"/>
+      </p:cxnSp>
+      <p:sp>
+        <p:nvSpPr>
+          <p:cNvPr id="8" name="TextBox 7"/>
+          <p:cNvSpPr txBox="1"/>
+          <p:nvPr/>
+        </p:nvSpPr>
+        <p:spPr>
+          <a:xfrm>
+            <a:off x="685800" y="2971800"/>
+            <a:ext cx="411480" cy="182880"/>
+          </a:xfrm>
+          <a:prstGeom prst="rect">
+            <a:avLst/>
+          </a:prstGeom>
+          <a:noFill/>
+        </p:spPr>
+        <p:txBody>
+          <a:bodyPr wrap="square" lIns="0" rIns="0" tIns="0" bIns="0">
+            <a:spAutoFit/>
+          </a:bodyPr>
+          <a:lstStyle/>
+          <a:p>
+            <a:pPr algn="r"/>
+            <a:r>
+              <a:rPr sz="900" b="0">
+                <a:solidFill>
+                  <a:srgbClr val="718096"/>
+                </a:solidFill>
+                <a:latin typeface="Calibri"/>
+              </a:rPr>
+              <a:t>0</a:t>
+            </a:r>
+          </a:p>
+        </p:txBody>
+      </p:sp>
+      <p:sp>
+        <p:nvSpPr>
+          <p:cNvPr id="9" name="TextBox 8"/>
+          <p:cNvSpPr txBox="1"/>
+          <p:nvPr/>
+        </p:nvSpPr>
+        <p:spPr>
+          <a:xfrm>
+            <a:off x="685800" y="2945991"/>
+            <a:ext cx="411480" cy="182880"/>
+          </a:xfrm>
+          <a:prstGeom prst="rect">
+            <a:avLst/>
+          </a:prstGeom>
+          <a:noFill/>
+        </p:spPr>
+        <p:txBody>
+          <a:bodyPr wrap="square" lIns="0" rIns="0" tIns="0" bIns="0">
+            <a:spAutoFit/>
+          </a:bodyPr>
+          <a:lstStyle/>
+          <a:p>
+            <a:pPr algn="r"/>
+            <a:r>
+              <a:rPr sz="900" b="0">
+                <a:solidFill>
+                  <a:srgbClr val="718096"/>
+                </a:solidFill>
+                <a:latin typeface="Calibri"/>
+              </a:rPr>
+              <a:t>1</a:t>
+            </a:r>
+          </a:p>
+        </p:txBody>
+      </p:sp>
+      <p:sp>
+        <p:nvSpPr>
+          <p:cNvPr id="10" name="TextBox 9"/>
+          <p:cNvSpPr txBox="1"/>
+          <p:nvPr/>
+        </p:nvSpPr>
+        <p:spPr>
+          <a:xfrm>
+            <a:off x="685800" y="2920181"/>
+            <a:ext cx="411480" cy="182880"/>
+          </a:xfrm>
+          <a:prstGeom prst="rect">
+            <a:avLst/>
+          </a:prstGeom>
+          <a:noFill/>
+        </p:spPr>
+        <p:txBody>
+          <a:bodyPr wrap="square" lIns="0" rIns="0" tIns="0" bIns="0">
+            <a:spAutoFit/>
+          </a:bodyPr>
+          <a:lstStyle/>
+          <a:p>
+            <a:pPr algn="r"/>
+            <a:r>
+              <a:rPr sz="900" b="0">
+                <a:solidFill>
+                  <a:srgbClr val="718096"/>
+                </a:solidFill>
+                <a:latin typeface="Calibri"/>
+              </a:rPr>
+              <a:t>2</a:t>
+            </a:r>
+          </a:p>
+        </p:txBody>
+      </p:sp>
+      <p:sp>
+        <p:nvSpPr>
+          <p:cNvPr id="11" name="TextBox 10"/>
+          <p:cNvSpPr txBox="1"/>
+          <p:nvPr/>
+        </p:nvSpPr>
+        <p:spPr>
+          <a:xfrm>
+            <a:off x="685800" y="2894371"/>
+            <a:ext cx="411480" cy="182880"/>
+          </a:xfrm>
+          <a:prstGeom prst="rect">
+            <a:avLst/>
+          </a:prstGeom>
+          <a:noFill/>
+        </p:spPr>
+        <p:txBody>
+          <a:bodyPr wrap="square" lIns="0" rIns="0" tIns="0" bIns="0">
+            <a:spAutoFit/>
+          </a:bodyPr>
+          <a:lstStyle/>
+          <a:p>
+            <a:pPr algn="r"/>
+            <a:r>
+              <a:rPr sz="900" b="0">
+                <a:solidFill>
+                  <a:srgbClr val="718096"/>
+                </a:solidFill>
+                <a:latin typeface="Calibri"/>
+              </a:rPr>
+              <a:t>3</a:t>
+            </a:r>
+          </a:p>
+        </p:txBody>
+      </p:sp>
+      <p:sp>
+        <p:nvSpPr>
+          <p:cNvPr id="12" name="TextBox 11"/>
+          <p:cNvSpPr txBox="1"/>
+          <p:nvPr/>
+        </p:nvSpPr>
+        <p:spPr>
+          <a:xfrm>
+            <a:off x="685800" y="2868562"/>
+            <a:ext cx="411480" cy="182880"/>
+          </a:xfrm>
+          <a:prstGeom prst="rect">
+            <a:avLst/>
+          </a:prstGeom>
+          <a:noFill/>
+        </p:spPr>
+        <p:txBody>
+          <a:bodyPr wrap="square" lIns="0" rIns="0" tIns="0" bIns="0">
+            <a:spAutoFit/>
+          </a:bodyPr>
+          <a:lstStyle/>
+          <a:p>
+            <a:pPr algn="r"/>
+            <a:r>
+              <a:rPr sz="900" b="0">
+                <a:solidFill>
+                  <a:srgbClr val="718096"/>
+                </a:solidFill>
+                <a:latin typeface="Calibri"/>
+              </a:rPr>
+              <a:t>4</a:t>
+            </a:r>
+          </a:p>
+        </p:txBody>
+      </p:sp>
+      <p:sp>
+        <p:nvSpPr>
+          <p:cNvPr id="13" name="TextBox 12"/>
+          <p:cNvSpPr txBox="1"/>
+          <p:nvPr/>
+        </p:nvSpPr>
+        <p:spPr>
+          <a:xfrm>
+            <a:off x="685800" y="2842752"/>
+            <a:ext cx="411480" cy="182880"/>
+          </a:xfrm>
+          <a:prstGeom prst="rect">
+            <a:avLst/>
+          </a:prstGeom>
+          <a:noFill/>
+        </p:spPr>
+        <p:txBody>
+          <a:bodyPr wrap="square" lIns="0" rIns="0" tIns="0" bIns="0">
+            <a:spAutoFit/>
+          </a:bodyPr>
+          <a:lstStyle/>
+          <a:p>
+            <a:pPr algn="r"/>
+            <a:r>
+              <a:rPr sz="900" b="0">
+                <a:solidFill>
+                  <a:srgbClr val="718096"/>
+                </a:solidFill>
+                <a:latin typeface="Calibri"/>
+              </a:rPr>
+              <a:t>5</a:t>
+            </a:r>
+          </a:p>
+        </p:txBody>
+      </p:sp>
+      <p:sp>
+        <p:nvSpPr>
+          <p:cNvPr id="14" name="TextBox 13"/>
+          <p:cNvSpPr txBox="1"/>
+          <p:nvPr/>
+        </p:nvSpPr>
+        <p:spPr>
+          <a:xfrm>
+            <a:off x="685800" y="2816942"/>
+            <a:ext cx="411480" cy="182880"/>
+          </a:xfrm>
+          <a:prstGeom prst="rect">
+            <a:avLst/>
+          </a:prstGeom>
+          <a:noFill/>
+        </p:spPr>
+        <p:txBody>
+          <a:bodyPr wrap="square" lIns="0" rIns="0" tIns="0" bIns="0">
+            <a:spAutoFit/>
+          </a:bodyPr>
+          <a:lstStyle/>
+          <a:p>
+            <a:pPr algn="r"/>
+            <a:r>
+              <a:rPr sz="900" b="0">
+                <a:solidFill>
+                  <a:srgbClr val="718096"/>
+                </a:solidFill>
+                <a:latin typeface="Calibri"/>
+              </a:rPr>
+              <a:t>6</a:t>
+            </a:r>
+          </a:p>
+        </p:txBody>
+      </p:sp>
+      <p:sp>
+        <p:nvSpPr>
+          <p:cNvPr id="15" name="TextBox 14"/>
+          <p:cNvSpPr txBox="1"/>
+          <p:nvPr/>
+        </p:nvSpPr>
+        <p:spPr>
+          <a:xfrm>
+            <a:off x="685800" y="2791133"/>
+            <a:ext cx="411480" cy="182880"/>
+          </a:xfrm>
+          <a:prstGeom prst="rect">
+            <a:avLst/>
+          </a:prstGeom>
+          <a:noFill/>
+        </p:spPr>
+        <p:txBody>
+          <a:bodyPr wrap="square" lIns="0" rIns="0" tIns="0" bIns="0">
+            <a:spAutoFit/>
+          </a:bodyPr>
+          <a:lstStyle/>
+          <a:p>
+            <a:pPr algn="r"/>
+            <a:r>
+              <a:rPr sz="900" b="0">
+                <a:solidFill>
+                  <a:srgbClr val="718096"/>
+                </a:solidFill>
+                <a:latin typeface="Calibri"/>
+              </a:rPr>
+              <a:t>7</a:t>
+            </a:r>
+          </a:p>
+        </p:txBody>
+      </p:sp>
+      <p:sp>
+        <p:nvSpPr>
+          <p:cNvPr id="16" name="TextBox 15"/>
+          <p:cNvSpPr txBox="1"/>
+          <p:nvPr/>
+        </p:nvSpPr>
+        <p:spPr>
+          <a:xfrm>
+            <a:off x="685800" y="2765323"/>
+            <a:ext cx="411480" cy="182880"/>
+          </a:xfrm>
+          <a:prstGeom prst="rect">
+            <a:avLst/>
+          </a:prstGeom>
+          <a:noFill/>
+        </p:spPr>
+        <p:txBody>
+          <a:bodyPr wrap="square" lIns="0" rIns="0" tIns="0" bIns="0">
+            <a:spAutoFit/>
+          </a:bodyPr>
+          <a:lstStyle/>
+          <a:p>
+            <a:pPr algn="r"/>
+            <a:r>
+              <a:rPr sz="900" b="0">
+                <a:solidFill>
+                  <a:srgbClr val="718096"/>
+                </a:solidFill>
+                <a:latin typeface="Calibri"/>
+              </a:rPr>
+              <a:t>8</a:t>
+            </a:r>
+          </a:p>
+        </p:txBody>
+      </p:sp>
+      <p:sp>
+        <p:nvSpPr>
+          <p:cNvPr id="17" name="TextBox 16"/>
+          <p:cNvSpPr txBox="1"/>
+          <p:nvPr/>
+        </p:nvSpPr>
+        <p:spPr>
+          <a:xfrm>
+            <a:off x="685800" y="2739513"/>
+            <a:ext cx="411480" cy="182880"/>
+          </a:xfrm>
+          <a:prstGeom prst="rect">
+            <a:avLst/>
+          </a:prstGeom>
+          <a:noFill/>
+        </p:spPr>
+        <p:txBody>
+          <a:bodyPr wrap="square" lIns="0" rIns="0" tIns="0" bIns="0">
+            <a:spAutoFit/>
+          </a:bodyPr>
+          <a:lstStyle/>
+          <a:p>
+            <a:pPr algn="r"/>
+            <a:r>
+              <a:rPr sz="900" b="0">
+                <a:solidFill>
+                  <a:srgbClr val="718096"/>
+                </a:solidFill>
+                <a:latin typeface="Calibri"/>
+              </a:rPr>
+              <a:t>9</a:t>
+            </a:r>
+          </a:p>
+        </p:txBody>
+      </p:sp>
+      <p:sp>
+        <p:nvSpPr>
+          <p:cNvPr id="18" name="TextBox 17"/>
+          <p:cNvSpPr txBox="1"/>
+          <p:nvPr/>
+        </p:nvSpPr>
+        <p:spPr>
+          <a:xfrm>
+            <a:off x="685800" y="2713704"/>
+            <a:ext cx="411480" cy="182880"/>
+          </a:xfrm>
+          <a:prstGeom prst="rect">
+            <a:avLst/>
+          </a:prstGeom>
+          <a:noFill/>
+        </p:spPr>
+        <p:txBody>
+          <a:bodyPr wrap="square" lIns="0" rIns="0" tIns="0" bIns="0">
+            <a:spAutoFit/>
+          </a:bodyPr>
+          <a:lstStyle/>
+          <a:p>
+            <a:pPr algn="r"/>
+            <a:r>
+              <a:rPr sz="900" b="0">
+                <a:solidFill>
+                  <a:srgbClr val="718096"/>
+                </a:solidFill>
+                <a:latin typeface="Calibri"/>
+              </a:rPr>
+              <a:t>10</a:t>
+            </a:r>
+          </a:p>
+        </p:txBody>
+      </p:sp>
+      <p:sp>
+        <p:nvSpPr>
+          <p:cNvPr id="19" name="TextBox 18"/>
+          <p:cNvSpPr txBox="1"/>
+          <p:nvPr/>
+        </p:nvSpPr>
+        <p:spPr>
+          <a:xfrm>
+            <a:off x="685800" y="2687894"/>
+            <a:ext cx="411480" cy="182880"/>
+          </a:xfrm>
+          <a:prstGeom prst="rect">
+            <a:avLst/>
+          </a:prstGeom>
+          <a:noFill/>
+        </p:spPr>
+        <p:txBody>
+          <a:bodyPr wrap="square" lIns="0" rIns="0" tIns="0" bIns="0">
+            <a:spAutoFit/>
+          </a:bodyPr>
+          <a:lstStyle/>
+          <a:p>
+            <a:pPr algn="r"/>
+            <a:r>
+              <a:rPr sz="900" b="0">
+                <a:solidFill>
+                  <a:srgbClr val="718096"/>
+                </a:solidFill>
+                <a:latin typeface="Calibri"/>
+              </a:rPr>
+              <a:t>11</a:t>
+            </a:r>
+          </a:p>
+        </p:txBody>
+      </p:sp>
+      <p:sp>
+        <p:nvSpPr>
+          <p:cNvPr id="20" name="TextBox 19"/>
+          <p:cNvSpPr txBox="1"/>
+          <p:nvPr/>
+        </p:nvSpPr>
+        <p:spPr>
+          <a:xfrm>
+            <a:off x="685800" y="2662084"/>
+            <a:ext cx="411480" cy="182880"/>
+          </a:xfrm>
+          <a:prstGeom prst="rect">
+            <a:avLst/>
+          </a:prstGeom>
+          <a:noFill/>
+        </p:spPr>
+        <p:txBody>
+          <a:bodyPr wrap="square" lIns="0" rIns="0" tIns="0" bIns="0">
+            <a:spAutoFit/>
+          </a:bodyPr>
+          <a:lstStyle/>
+          <a:p>
+            <a:pPr algn="r"/>
+            <a:r>
+              <a:rPr sz="900" b="0">
+                <a:solidFill>
+                  <a:srgbClr val="718096"/>
+                </a:solidFill>
+                <a:latin typeface="Calibri"/>
+              </a:rPr>
+              <a:t>12</a:t>
+            </a:r>
+          </a:p>
+        </p:txBody>
+      </p:sp>
+      <p:sp>
+        <p:nvSpPr>
+          <p:cNvPr id="21" name="TextBox 20"/>
+          <p:cNvSpPr txBox="1"/>
+          <p:nvPr/>
+        </p:nvSpPr>
+        <p:spPr>
+          <a:xfrm>
+            <a:off x="685800" y="2636275"/>
+            <a:ext cx="411480" cy="182880"/>
+          </a:xfrm>
+          <a:prstGeom prst="rect">
+            <a:avLst/>
+          </a:prstGeom>
+          <a:noFill/>
+        </p:spPr>
+        <p:txBody>
+          <a:bodyPr wrap="square" lIns="0" rIns="0" tIns="0" bIns="0">
+            <a:spAutoFit/>
+          </a:bodyPr>
+          <a:lstStyle/>
+          <a:p>
+            <a:pPr algn="r"/>
+            <a:r>
+              <a:rPr sz="900" b="0">
+                <a:solidFill>
+                  <a:srgbClr val="718096"/>
+                </a:solidFill>
+                <a:latin typeface="Calibri"/>
+              </a:rPr>
+              <a:t>13</a:t>
+            </a:r>
+          </a:p>
+        </p:txBody>
+      </p:sp>
+      <p:sp>
+        <p:nvSpPr>
+          <p:cNvPr id="22" name="TextBox 21"/>
+          <p:cNvSpPr txBox="1"/>
+          <p:nvPr/>
+        </p:nvSpPr>
+        <p:spPr>
+          <a:xfrm>
+            <a:off x="685800" y="2610465"/>
+            <a:ext cx="411480" cy="182880"/>
+          </a:xfrm>
+          <a:prstGeom prst="rect">
+            <a:avLst/>
+          </a:prstGeom>
+          <a:noFill/>
+        </p:spPr>
+        <p:txBody>
+          <a:bodyPr wrap="square" lIns="0" rIns="0" tIns="0" bIns="0">
+            <a:spAutoFit/>
+          </a:bodyPr>
+          <a:lstStyle/>
+          <a:p>
+            <a:pPr algn="r"/>
+            <a:r>
+              <a:rPr sz="900" b="0">
+                <a:solidFill>
+                  <a:srgbClr val="718096"/>
+                </a:solidFill>
+                <a:latin typeface="Calibri"/>
+              </a:rPr>
+              <a:t>14</a:t>
+            </a:r>
+          </a:p>
+        </p:txBody>
+      </p:sp>
+      <p:sp>
+        <p:nvSpPr>
+          <p:cNvPr id="23" name="TextBox 22"/>
+          <p:cNvSpPr txBox="1"/>
+          <p:nvPr/>
+        </p:nvSpPr>
+        <p:spPr>
+          <a:xfrm>
+            <a:off x="685800" y="2584655"/>
+            <a:ext cx="411480" cy="182880"/>
+          </a:xfrm>
+          <a:prstGeom prst="rect">
+            <a:avLst/>
+          </a:prstGeom>
+          <a:noFill/>
+        </p:spPr>
+        <p:txBody>
+          <a:bodyPr wrap="square" lIns="0" rIns="0" tIns="0" bIns="0">
+            <a:spAutoFit/>
+          </a:bodyPr>
+          <a:lstStyle/>
+          <a:p>
+            <a:pPr algn="r"/>
+            <a:r>
+              <a:rPr sz="900" b="0">
+                <a:solidFill>
+                  <a:srgbClr val="718096"/>
+                </a:solidFill>
+                <a:latin typeface="Calibri"/>
+              </a:rPr>
+              <a:t>15</a:t>
+            </a:r>
+          </a:p>
+        </p:txBody>
+      </p:sp>
+      <p:sp>
+        <p:nvSpPr>
+          <p:cNvPr id="24" name="TextBox 23"/>
+          <p:cNvSpPr txBox="1"/>
+          <p:nvPr/>
+        </p:nvSpPr>
+        <p:spPr>
+          <a:xfrm>
+            <a:off x="685800" y="2558846"/>
+            <a:ext cx="411480" cy="182880"/>
+          </a:xfrm>
+          <a:prstGeom prst="rect">
+            <a:avLst/>
+          </a:prstGeom>
+          <a:noFill/>
+        </p:spPr>
+        <p:txBody>
+          <a:bodyPr wrap="square" lIns="0" rIns="0" tIns="0" bIns="0">
+            <a:spAutoFit/>
+          </a:bodyPr>
+          <a:lstStyle/>
+          <a:p>
+            <a:pPr algn="r"/>
+            <a:r>
+              <a:rPr sz="900" b="0">
+                <a:solidFill>
+                  <a:srgbClr val="718096"/>
+                </a:solidFill>
+                <a:latin typeface="Calibri"/>
+              </a:rPr>
+              <a:t>16</a:t>
+            </a:r>
+          </a:p>
+        </p:txBody>
+      </p:sp>
+      <p:sp>
+        <p:nvSpPr>
+          <p:cNvPr id="25" name="TextBox 24"/>
+          <p:cNvSpPr txBox="1"/>
+          <p:nvPr/>
+        </p:nvSpPr>
+        <p:spPr>
+          <a:xfrm>
+            <a:off x="685800" y="2533036"/>
+            <a:ext cx="411480" cy="182880"/>
+          </a:xfrm>
+          <a:prstGeom prst="rect">
+            <a:avLst/>
+          </a:prstGeom>
+          <a:noFill/>
+        </p:spPr>
+        <p:txBody>
+          <a:bodyPr wrap="square" lIns="0" rIns="0" tIns="0" bIns="0">
+            <a:spAutoFit/>
+          </a:bodyPr>
+          <a:lstStyle/>
+          <a:p>
+            <a:pPr algn="r"/>
+            <a:r>
+              <a:rPr sz="900" b="0">
+                <a:solidFill>
+                  <a:srgbClr val="718096"/>
+                </a:solidFill>
+                <a:latin typeface="Calibri"/>
+              </a:rPr>
+              <a:t>17</a:t>
+            </a:r>
+          </a:p>
+        </p:txBody>
+      </p:sp>
+      <p:sp>
+        <p:nvSpPr>
+          <p:cNvPr id="26" name="TextBox 25"/>
+          <p:cNvSpPr txBox="1"/>
+          <p:nvPr/>
+        </p:nvSpPr>
+        <p:spPr>
+          <a:xfrm>
+            <a:off x="685800" y="2507226"/>
+            <a:ext cx="411480" cy="182880"/>
+          </a:xfrm>
+          <a:prstGeom prst="rect">
+            <a:avLst/>
+          </a:prstGeom>
+          <a:noFill/>
+        </p:spPr>
+        <p:txBody>
+          <a:bodyPr wrap="square" lIns="0" rIns="0" tIns="0" bIns="0">
+            <a:spAutoFit/>
+          </a:bodyPr>
+          <a:lstStyle/>
+          <a:p>
+            <a:pPr algn="r"/>
+            <a:r>
+              <a:rPr sz="900" b="0">
+                <a:solidFill>
+                  <a:srgbClr val="718096"/>
+                </a:solidFill>
+                <a:latin typeface="Calibri"/>
+              </a:rPr>
+              <a:t>18</a:t>
+            </a:r>
+          </a:p>
+        </p:txBody>
+      </p:sp>
+      <p:sp>
+        <p:nvSpPr>
+          <p:cNvPr id="27" name="TextBox 26"/>
+          <p:cNvSpPr txBox="1"/>
+          <p:nvPr/>
+        </p:nvSpPr>
+        <p:spPr>
+          <a:xfrm>
+            <a:off x="685800" y="2481417"/>
+            <a:ext cx="411480" cy="182880"/>
+          </a:xfrm>
+          <a:prstGeom prst="rect">
+            <a:avLst/>
+          </a:prstGeom>
+          <a:noFill/>
+        </p:spPr>
+        <p:txBody>
+          <a:bodyPr wrap="square" lIns="0" rIns="0" tIns="0" bIns="0">
+            <a:spAutoFit/>
+          </a:bodyPr>
+          <a:lstStyle/>
+          <a:p>
+            <a:pPr algn="r"/>
+            <a:r>
+              <a:rPr sz="900" b="0">
+                <a:solidFill>
+                  <a:srgbClr val="718096"/>
+                </a:solidFill>
+                <a:latin typeface="Calibri"/>
+              </a:rPr>
+              <a:t>19</a:t>
+            </a:r>
+          </a:p>
+        </p:txBody>
+      </p:sp>
+      <p:sp>
+        <p:nvSpPr>
+          <p:cNvPr id="28" name="TextBox 27"/>
+          <p:cNvSpPr txBox="1"/>
+          <p:nvPr/>
+        </p:nvSpPr>
+        <p:spPr>
+          <a:xfrm>
+            <a:off x="685800" y="2455607"/>
+            <a:ext cx="411480" cy="182880"/>
+          </a:xfrm>
+          <a:prstGeom prst="rect">
+            <a:avLst/>
+          </a:prstGeom>
+          <a:noFill/>
+        </p:spPr>
+        <p:txBody>
+          <a:bodyPr wrap="square" lIns="0" rIns="0" tIns="0" bIns="0">
+            <a:spAutoFit/>
+          </a:bodyPr>
+          <a:lstStyle/>
+          <a:p>
+            <a:pPr algn="r"/>
+            <a:r>
+              <a:rPr sz="900" b="0">
+                <a:solidFill>
+                  <a:srgbClr val="718096"/>
+                </a:solidFill>
+                <a:latin typeface="Calibri"/>
+              </a:rPr>
+              <a:t>20</a:t>
+            </a:r>
+          </a:p>
+        </p:txBody>
+      </p:sp>
+      <p:sp>
+        <p:nvSpPr>
+          <p:cNvPr id="29" name="TextBox 28"/>
+          <p:cNvSpPr txBox="1"/>
+          <p:nvPr/>
+        </p:nvSpPr>
+        <p:spPr>
+          <a:xfrm>
+            <a:off x="685800" y="2429797"/>
+            <a:ext cx="411480" cy="182880"/>
+          </a:xfrm>
+          <a:prstGeom prst="rect">
+            <a:avLst/>
+          </a:prstGeom>
+          <a:noFill/>
+        </p:spPr>
+        <p:txBody>
+          <a:bodyPr wrap="square" lIns="0" rIns="0" tIns="0" bIns="0">
+            <a:spAutoFit/>
+          </a:bodyPr>
+          <a:lstStyle/>
+          <a:p>
+            <a:pPr algn="r"/>
+            <a:r>
+              <a:rPr sz="900" b="0">
+                <a:solidFill>
+                  <a:srgbClr val="718096"/>
+                </a:solidFill>
+                <a:latin typeface="Calibri"/>
+              </a:rPr>
+              <a:t>21</a:t>
+            </a:r>
+          </a:p>
+        </p:txBody>
+      </p:sp>
+      <p:sp>
+        <p:nvSpPr>
+          <p:cNvPr id="30" name="TextBox 29"/>
+          <p:cNvSpPr txBox="1"/>
+          <p:nvPr/>
+        </p:nvSpPr>
+        <p:spPr>
+          <a:xfrm>
+            <a:off x="685800" y="2403988"/>
+            <a:ext cx="411480" cy="182880"/>
+          </a:xfrm>
+          <a:prstGeom prst="rect">
+            <a:avLst/>
+          </a:prstGeom>
+          <a:noFill/>
+        </p:spPr>
+        <p:txBody>
+          <a:bodyPr wrap="square" lIns="0" rIns="0" tIns="0" bIns="0">
+            <a:spAutoFit/>
+          </a:bodyPr>
+          <a:lstStyle/>
+          <a:p>
+            <a:pPr algn="r"/>
+            <a:r>
+              <a:rPr sz="900" b="0">
+                <a:solidFill>
+                  <a:srgbClr val="718096"/>
+                </a:solidFill>
+                <a:latin typeface="Calibri"/>
+              </a:rPr>
+              <a:t>22</a:t>
+            </a:r>
+          </a:p>
+        </p:txBody>
+      </p:sp>
+      <p:sp>
+        <p:nvSpPr>
+          <p:cNvPr id="31" name="TextBox 30"/>
+          <p:cNvSpPr txBox="1"/>
+          <p:nvPr/>
+        </p:nvSpPr>
+        <p:spPr>
+          <a:xfrm>
+            <a:off x="685800" y="2378178"/>
+            <a:ext cx="411480" cy="182880"/>
+          </a:xfrm>
+          <a:prstGeom prst="rect">
+            <a:avLst/>
+          </a:prstGeom>
+          <a:noFill/>
+        </p:spPr>
+        <p:txBody>
+          <a:bodyPr wrap="square" lIns="0" rIns="0" tIns="0" bIns="0">
+            <a:spAutoFit/>
+          </a:bodyPr>
+          <a:lstStyle/>
+          <a:p>
+            <a:pPr algn="r"/>
+            <a:r>
+              <a:rPr sz="900" b="0">
+                <a:solidFill>
+                  <a:srgbClr val="718096"/>
+                </a:solidFill>
+                <a:latin typeface="Calibri"/>
+              </a:rPr>
+              <a:t>23</a:t>
+            </a:r>
+          </a:p>
+        </p:txBody>
+      </p:sp>
+      <p:sp>
+        <p:nvSpPr>
+          <p:cNvPr id="32" name="TextBox 31"/>
+          <p:cNvSpPr txBox="1"/>
+          <p:nvPr/>
+        </p:nvSpPr>
+        <p:spPr>
+          <a:xfrm>
+            <a:off x="685800" y="2352368"/>
+            <a:ext cx="411480" cy="182880"/>
+          </a:xfrm>
+          <a:prstGeom prst="rect">
+            <a:avLst/>
+          </a:prstGeom>
+          <a:noFill/>
+        </p:spPr>
+        <p:txBody>
+          <a:bodyPr wrap="square" lIns="0" rIns="0" tIns="0" bIns="0">
+            <a:spAutoFit/>
+          </a:bodyPr>
+          <a:lstStyle/>
+          <a:p>
+            <a:pPr algn="r"/>
+            <a:r>
+              <a:rPr sz="900" b="0">
+                <a:solidFill>
+                  <a:srgbClr val="718096"/>
+                </a:solidFill>
+                <a:latin typeface="Calibri"/>
+              </a:rPr>
+              <a:t>24</a:t>
+            </a:r>
+          </a:p>
+        </p:txBody>
+      </p:sp>
+      <p:sp>
+        <p:nvSpPr>
+          <p:cNvPr id="33" name="TextBox 32"/>
+          <p:cNvSpPr txBox="1"/>
+          <p:nvPr/>
+        </p:nvSpPr>
+        <p:spPr>
+          <a:xfrm>
+            <a:off x="685800" y="2326559"/>
+            <a:ext cx="411480" cy="182880"/>
+          </a:xfrm>
+          <a:prstGeom prst="rect">
+            <a:avLst/>
+          </a:prstGeom>
+          <a:noFill/>
+        </p:spPr>
+        <p:txBody>
+          <a:bodyPr wrap="square" lIns="0" rIns="0" tIns="0" bIns="0">
+            <a:spAutoFit/>
+          </a:bodyPr>
+          <a:lstStyle/>
+          <a:p>
+            <a:pPr algn="r"/>
+            <a:r>
+              <a:rPr sz="900" b="0">
+                <a:solidFill>
+                  <a:srgbClr val="718096"/>
+                </a:solidFill>
+                <a:latin typeface="Calibri"/>
+              </a:rPr>
+              <a:t>25</a:t>
+            </a:r>
+          </a:p>
+        </p:txBody>
+      </p:sp>
+      <p:sp>
+        <p:nvSpPr>
+          <p:cNvPr id="34" name="TextBox 33"/>
+          <p:cNvSpPr txBox="1"/>
+          <p:nvPr/>
+        </p:nvSpPr>
+        <p:spPr>
+          <a:xfrm>
+            <a:off x="685800" y="2300749"/>
+            <a:ext cx="411480" cy="182880"/>
+          </a:xfrm>
+          <a:prstGeom prst="rect">
+            <a:avLst/>
+          </a:prstGeom>
+          <a:noFill/>
+        </p:spPr>
+        <p:txBody>
+          <a:bodyPr wrap="square" lIns="0" rIns="0" tIns="0" bIns="0">
+            <a:spAutoFit/>
+          </a:bodyPr>
+          <a:lstStyle/>
+          <a:p>
+            <a:pPr algn="r"/>
+            <a:r>
+              <a:rPr sz="900" b="0">
+                <a:solidFill>
+                  <a:srgbClr val="718096"/>
+                </a:solidFill>
+                <a:latin typeface="Calibri"/>
+              </a:rPr>
+              <a:t>26</a:t>
+            </a:r>
+          </a:p>
+        </p:txBody>
+      </p:sp>
+      <p:sp>
+        <p:nvSpPr>
+          <p:cNvPr id="35" name="TextBox 34"/>
+          <p:cNvSpPr txBox="1"/>
+          <p:nvPr/>
+        </p:nvSpPr>
+        <p:spPr>
+          <a:xfrm>
+            <a:off x="685800" y="2274939"/>
+            <a:ext cx="411480" cy="182880"/>
+          </a:xfrm>
+          <a:prstGeom prst="rect">
+            <a:avLst/>
+          </a:prstGeom>
+          <a:noFill/>
+        </p:spPr>
+        <p:txBody>
+          <a:bodyPr wrap="square" lIns="0" rIns="0" tIns="0" bIns="0">
+            <a:spAutoFit/>
+          </a:bodyPr>
+          <a:lstStyle/>
+          <a:p>
+            <a:pPr algn="r"/>
+            <a:r>
+              <a:rPr sz="900" b="0">
+                <a:solidFill>
+                  <a:srgbClr val="718096"/>
+                </a:solidFill>
+                <a:latin typeface="Calibri"/>
+              </a:rPr>
+              <a:t>27</a:t>
+            </a:r>
+          </a:p>
+        </p:txBody>
+      </p:sp>
+      <p:sp>
+        <p:nvSpPr>
+          <p:cNvPr id="36" name="TextBox 35"/>
+          <p:cNvSpPr txBox="1"/>
+          <p:nvPr/>
+        </p:nvSpPr>
+        <p:spPr>
+          <a:xfrm>
+            <a:off x="685800" y="2249130"/>
+            <a:ext cx="411480" cy="182880"/>
+          </a:xfrm>
+          <a:prstGeom prst="rect">
+            <a:avLst/>
+          </a:prstGeom>
+          <a:noFill/>
+        </p:spPr>
+        <p:txBody>
+          <a:bodyPr wrap="square" lIns="0" rIns="0" tIns="0" bIns="0">
+            <a:spAutoFit/>
+          </a:bodyPr>
+          <a:lstStyle/>
+          <a:p>
+            <a:pPr algn="r"/>
+            <a:r>
+              <a:rPr sz="900" b="0">
+                <a:solidFill>
+                  <a:srgbClr val="718096"/>
+                </a:solidFill>
+                <a:latin typeface="Calibri"/>
+              </a:rPr>
+              <a:t>28</a:t>
+            </a:r>
+          </a:p>
+        </p:txBody>
+      </p:sp>
+      <p:sp>
+        <p:nvSpPr>
+          <p:cNvPr id="37" name="TextBox 36"/>
+          <p:cNvSpPr txBox="1"/>
+          <p:nvPr/>
+        </p:nvSpPr>
+        <p:spPr>
+          <a:xfrm>
+            <a:off x="685800" y="2223320"/>
+            <a:ext cx="411480" cy="182880"/>
+          </a:xfrm>
+          <a:prstGeom prst="rect">
+            <a:avLst/>
+          </a:prstGeom>
+          <a:noFill/>
+        </p:spPr>
+        <p:txBody>
+          <a:bodyPr wrap="square" lIns="0" rIns="0" tIns="0" bIns="0">
+            <a:spAutoFit/>
+          </a:bodyPr>
+          <a:lstStyle/>
+          <a:p>
+            <a:pPr algn="r"/>
+            <a:r>
+              <a:rPr sz="900" b="0">
+                <a:solidFill>
+                  <a:srgbClr val="718096"/>
+                </a:solidFill>
+                <a:latin typeface="Calibri"/>
+              </a:rPr>
+              <a:t>29</a:t>
+            </a:r>
+          </a:p>
+        </p:txBody>
+      </p:sp>
+      <p:sp>
+        <p:nvSpPr>
+          <p:cNvPr id="38" name="TextBox 37"/>
+          <p:cNvSpPr txBox="1"/>
+          <p:nvPr/>
+        </p:nvSpPr>
+        <p:spPr>
+          <a:xfrm>
+            <a:off x="685800" y="2197510"/>
+            <a:ext cx="411480" cy="182880"/>
+          </a:xfrm>
+          <a:prstGeom prst="rect">
+            <a:avLst/>
+          </a:prstGeom>
+          <a:noFill/>
+        </p:spPr>
+        <p:txBody>
+          <a:bodyPr wrap="square" lIns="0" rIns="0" tIns="0" bIns="0">
+            <a:spAutoFit/>
+          </a:bodyPr>
+          <a:lstStyle/>
+          <a:p>
+            <a:pPr algn="r"/>
+            <a:r>
+              <a:rPr sz="900" b="0">
+                <a:solidFill>
+                  <a:srgbClr val="718096"/>
+                </a:solidFill>
+                <a:latin typeface="Calibri"/>
+              </a:rPr>
+              <a:t>30</a:t>
+            </a:r>
+          </a:p>
+        </p:txBody>
+      </p:sp>
+      <p:sp>
+        <p:nvSpPr>
+          <p:cNvPr id="39" name="TextBox 38"/>
+          <p:cNvSpPr txBox="1"/>
+          <p:nvPr/>
+        </p:nvSpPr>
+        <p:spPr>
+          <a:xfrm>
+            <a:off x="685800" y="2171700"/>
+            <a:ext cx="411480" cy="182880"/>
+          </a:xfrm>
+          <a:prstGeom prst="rect">
+            <a:avLst/>
+          </a:prstGeom>
+          <a:noFill/>
+        </p:spPr>
+        <p:txBody>
+          <a:bodyPr wrap="square" lIns="0" rIns="0" tIns="0" bIns="0">
+            <a:spAutoFit/>
+          </a:bodyPr>
+          <a:lstStyle/>
+          <a:p>
+            <a:pPr algn="r"/>
+            <a:r>
+              <a:rPr sz="900" b="0">
+                <a:solidFill>
+                  <a:srgbClr val="718096"/>
+                </a:solidFill>
+                <a:latin typeface="Calibri"/>
+              </a:rPr>
+              <a:t>31</a:t>
+            </a:r>
+          </a:p>
+        </p:txBody>
+      </p:sp>
+      <p:sp>
+        <p:nvSpPr>
+          <p:cNvPr id="40" name="TextBox 39"/>
+          <p:cNvSpPr txBox="1"/>
+          <p:nvPr/>
+        </p:nvSpPr>
+        <p:spPr>
+          <a:xfrm>
+            <a:off x="685800" y="2145891"/>
+            <a:ext cx="411480" cy="182880"/>
+          </a:xfrm>
+          <a:prstGeom prst="rect">
+            <a:avLst/>
+          </a:prstGeom>
+          <a:noFill/>
+        </p:spPr>
+        <p:txBody>
+          <a:bodyPr wrap="square" lIns="0" rIns="0" tIns="0" bIns="0">
+            <a:spAutoFit/>
+          </a:bodyPr>
+          <a:lstStyle/>
+          <a:p>
+            <a:pPr algn="r"/>
+            <a:r>
+              <a:rPr sz="900" b="0">
+                <a:solidFill>
+                  <a:srgbClr val="718096"/>
+                </a:solidFill>
+                <a:latin typeface="Calibri"/>
+              </a:rPr>
+              <a:t>32</a:t>
+            </a:r>
+          </a:p>
+        </p:txBody>
+      </p:sp>
+      <p:sp>
+        <p:nvSpPr>
+          <p:cNvPr id="41" name="TextBox 40"/>
+          <p:cNvSpPr txBox="1"/>
+          <p:nvPr/>
+        </p:nvSpPr>
+        <p:spPr>
+          <a:xfrm>
+            <a:off x="685800" y="2120081"/>
+            <a:ext cx="411480" cy="182880"/>
+          </a:xfrm>
+          <a:prstGeom prst="rect">
+            <a:avLst/>
+          </a:prstGeom>
+          <a:noFill/>
+        </p:spPr>
+        <p:txBody>
+          <a:bodyPr wrap="square" lIns="0" rIns="0" tIns="0" bIns="0">
+            <a:spAutoFit/>
+          </a:bodyPr>
+          <a:lstStyle/>
+          <a:p>
+            <a:pPr algn="r"/>
+            <a:r>
+              <a:rPr sz="900" b="0">
+                <a:solidFill>
+                  <a:srgbClr val="718096"/>
+                </a:solidFill>
+                <a:latin typeface="Calibri"/>
+              </a:rPr>
+              <a:t>33</a:t>
+            </a:r>
+          </a:p>
+        </p:txBody>
+      </p:sp>
+      <p:sp>
+        <p:nvSpPr>
+          <p:cNvPr id="42" name="TextBox 41"/>
+          <p:cNvSpPr txBox="1"/>
+          <p:nvPr/>
+        </p:nvSpPr>
+        <p:spPr>
+          <a:xfrm>
+            <a:off x="685800" y="2094271"/>
+            <a:ext cx="411480" cy="182880"/>
+          </a:xfrm>
+          <a:prstGeom prst="rect">
+            <a:avLst/>
+          </a:prstGeom>
+          <a:noFill/>
+        </p:spPr>
+        <p:txBody>
+          <a:bodyPr wrap="square" lIns="0" rIns="0" tIns="0" bIns="0">
+            <a:spAutoFit/>
+          </a:bodyPr>
+          <a:lstStyle/>
+          <a:p>
+            <a:pPr algn="r"/>
+            <a:r>
+              <a:rPr sz="900" b="0">
+                <a:solidFill>
+                  <a:srgbClr val="718096"/>
+                </a:solidFill>
+                <a:latin typeface="Calibri"/>
+              </a:rPr>
+              <a:t>34</a:t>
+            </a:r>
+          </a:p>
+        </p:txBody>
+      </p:sp>
+      <p:sp>
+        <p:nvSpPr>
+          <p:cNvPr id="43" name="TextBox 42"/>
+          <p:cNvSpPr txBox="1"/>
+          <p:nvPr/>
+        </p:nvSpPr>
+        <p:spPr>
+          <a:xfrm>
+            <a:off x="685800" y="2068462"/>
+            <a:ext cx="411480" cy="182880"/>
+          </a:xfrm>
+          <a:prstGeom prst="rect">
+            <a:avLst/>
+          </a:prstGeom>
+          <a:noFill/>
+        </p:spPr>
+        <p:txBody>
+          <a:bodyPr wrap="square" lIns="0" rIns="0" tIns="0" bIns="0">
+            <a:spAutoFit/>
+          </a:bodyPr>
+          <a:lstStyle/>
+          <a:p>
+            <a:pPr algn="r"/>
+            <a:r>
+              <a:rPr sz="900" b="0">
+                <a:solidFill>
+                  <a:srgbClr val="718096"/>
+                </a:solidFill>
+                <a:latin typeface="Calibri"/>
+              </a:rPr>
+              <a:t>35</a:t>
+            </a:r>
+          </a:p>
+        </p:txBody>
+      </p:sp>
+      <p:sp>
+        <p:nvSpPr>
+          <p:cNvPr id="44" name="TextBox 43"/>
+          <p:cNvSpPr txBox="1"/>
+          <p:nvPr/>
+        </p:nvSpPr>
+        <p:spPr>
+          <a:xfrm>
+            <a:off x="685800" y="2042652"/>
+            <a:ext cx="411480" cy="182880"/>
+          </a:xfrm>
+          <a:prstGeom prst="rect">
+            <a:avLst/>
+          </a:prstGeom>
+          <a:noFill/>
+        </p:spPr>
+        <p:txBody>
+          <a:bodyPr wrap="square" lIns="0" rIns="0" tIns="0" bIns="0">
+            <a:spAutoFit/>
+          </a:bodyPr>
+          <a:lstStyle/>
+          <a:p>
+            <a:pPr algn="r"/>
+            <a:r>
+              <a:rPr sz="900" b="0">
+                <a:solidFill>
+                  <a:srgbClr val="718096"/>
+                </a:solidFill>
+                <a:latin typeface="Calibri"/>
+              </a:rPr>
+              <a:t>36</a:t>
+            </a:r>
+          </a:p>
+        </p:txBody>
+      </p:sp>
+      <p:sp>
+        <p:nvSpPr>
+          <p:cNvPr id="45" name="TextBox 44"/>
+          <p:cNvSpPr txBox="1"/>
+          <p:nvPr/>
+        </p:nvSpPr>
+        <p:spPr>
+          <a:xfrm>
+            <a:off x="685800" y="2016842"/>
+            <a:ext cx="411480" cy="182880"/>
+          </a:xfrm>
+          <a:prstGeom prst="rect">
+            <a:avLst/>
+          </a:prstGeom>
+          <a:noFill/>
+        </p:spPr>
+        <p:txBody>
+          <a:bodyPr wrap="square" lIns="0" rIns="0" tIns="0" bIns="0">
+            <a:spAutoFit/>
+          </a:bodyPr>
+          <a:lstStyle/>
+          <a:p>
+            <a:pPr algn="r"/>
+            <a:r>
+              <a:rPr sz="900" b="0">
+                <a:solidFill>
+                  <a:srgbClr val="718096"/>
+                </a:solidFill>
+                <a:latin typeface="Calibri"/>
+              </a:rPr>
+              <a:t>37</a:t>
+            </a:r>
+          </a:p>
+        </p:txBody>
+      </p:sp>
+      <p:sp>
+        <p:nvSpPr>
+          <p:cNvPr id="46" name="TextBox 45"/>
+          <p:cNvSpPr txBox="1"/>
+          <p:nvPr/>
+        </p:nvSpPr>
+        <p:spPr>
+          <a:xfrm>
+            <a:off x="685800" y="1991033"/>
+            <a:ext cx="411480" cy="182880"/>
+          </a:xfrm>
+          <a:prstGeom prst="rect">
+            <a:avLst/>
+          </a:prstGeom>
+          <a:noFill/>
+        </p:spPr>
+        <p:txBody>
+          <a:bodyPr wrap="square" lIns="0" rIns="0" tIns="0" bIns="0">
+            <a:spAutoFit/>
+          </a:bodyPr>
+          <a:lstStyle/>
+          <a:p>
+            <a:pPr algn="r"/>
+            <a:r>
+              <a:rPr sz="900" b="0">
+                <a:solidFill>
+                  <a:srgbClr val="718096"/>
+                </a:solidFill>
+                <a:latin typeface="Calibri"/>
+              </a:rPr>
+              <a:t>38</a:t>
+            </a:r>
+          </a:p>
+        </p:txBody>
+      </p:sp>
+      <p:sp>
+        <p:nvSpPr>
+          <p:cNvPr id="47" name="TextBox 46"/>
+          <p:cNvSpPr txBox="1"/>
+          <p:nvPr/>
+        </p:nvSpPr>
+        <p:spPr>
+          <a:xfrm>
+            <a:off x="685800" y="1965223"/>
+            <a:ext cx="411480" cy="182880"/>
+          </a:xfrm>
+          <a:prstGeom prst="rect">
+            <a:avLst/>
+          </a:prstGeom>
+          <a:noFill/>
+        </p:spPr>
+        <p:txBody>
+          <a:bodyPr wrap="square" lIns="0" rIns="0" tIns="0" bIns="0">
+            <a:spAutoFit/>
+          </a:bodyPr>
+          <a:lstStyle/>
+          <a:p>
+            <a:pPr algn="r"/>
+            <a:r>
+              <a:rPr sz="900" b="0">
+                <a:solidFill>
+                  <a:srgbClr val="718096"/>
+                </a:solidFill>
+                <a:latin typeface="Calibri"/>
+              </a:rPr>
+              <a:t>39</a:t>
+            </a:r>
+          </a:p>
+        </p:txBody>
+      </p:sp>
+      <p:sp>
+        <p:nvSpPr>
+          <p:cNvPr id="48" name="TextBox 47"/>
+          <p:cNvSpPr txBox="1"/>
+          <p:nvPr/>
+        </p:nvSpPr>
+        <p:spPr>
+          <a:xfrm>
+            <a:off x="685800" y="1939413"/>
+            <a:ext cx="411480" cy="182880"/>
+          </a:xfrm>
+          <a:prstGeom prst="rect">
+            <a:avLst/>
+          </a:prstGeom>
+          <a:noFill/>
+        </p:spPr>
+        <p:txBody>
+          <a:bodyPr wrap="square" lIns="0" rIns="0" tIns="0" bIns="0">
+            <a:spAutoFit/>
+          </a:bodyPr>
+          <a:lstStyle/>
+          <a:p>
+            <a:pPr algn="r"/>
+            <a:r>
+              <a:rPr sz="900" b="0">
+                <a:solidFill>
+                  <a:srgbClr val="718096"/>
+                </a:solidFill>
+                <a:latin typeface="Calibri"/>
+              </a:rPr>
+              <a:t>40</a:t>
+            </a:r>
+          </a:p>
+        </p:txBody>
+      </p:sp>
+      <p:sp>
+        <p:nvSpPr>
+          <p:cNvPr id="49" name="TextBox 48"/>
+          <p:cNvSpPr txBox="1"/>
+          <p:nvPr/>
+        </p:nvSpPr>
+        <p:spPr>
+          <a:xfrm>
+            <a:off x="685800" y="1913604"/>
+            <a:ext cx="411480" cy="182880"/>
+          </a:xfrm>
+          <a:prstGeom prst="rect">
+            <a:avLst/>
+          </a:prstGeom>
+          <a:noFill/>
+        </p:spPr>
+        <p:txBody>
+          <a:bodyPr wrap="square" lIns="0" rIns="0" tIns="0" bIns="0">
+            <a:spAutoFit/>
+          </a:bodyPr>
+          <a:lstStyle/>
+          <a:p>
+            <a:pPr algn="r"/>
+            <a:r>
+              <a:rPr sz="900" b="0">
+                <a:solidFill>
+                  <a:srgbClr val="718096"/>
+                </a:solidFill>
+                <a:latin typeface="Calibri"/>
+              </a:rPr>
+              <a:t>41</a:t>
+            </a:r>
+          </a:p>
+        </p:txBody>
+      </p:sp>
+      <p:sp>
+        <p:nvSpPr>
+          <p:cNvPr id="50" name="TextBox 49"/>
+          <p:cNvSpPr txBox="1"/>
+          <p:nvPr/>
+        </p:nvSpPr>
+        <p:spPr>
+          <a:xfrm>
+            <a:off x="685800" y="1887794"/>
+            <a:ext cx="411480" cy="182880"/>
+          </a:xfrm>
+          <a:prstGeom prst="rect">
+            <a:avLst/>
+          </a:prstGeom>
+          <a:noFill/>
+        </p:spPr>
+        <p:txBody>
+          <a:bodyPr wrap="square" lIns="0" rIns="0" tIns="0" bIns="0">
+            <a:spAutoFit/>
+          </a:bodyPr>
+          <a:lstStyle/>
+          <a:p>
+            <a:pPr algn="r"/>
+            <a:r>
+              <a:rPr sz="900" b="0">
+                <a:solidFill>
+                  <a:srgbClr val="718096"/>
+                </a:solidFill>
+                <a:latin typeface="Calibri"/>
+              </a:rPr>
+              <a:t>42</a:t>
+            </a:r>
+          </a:p>
+        </p:txBody>
+      </p:sp>
+      <p:sp>
+        <p:nvSpPr>
+          <p:cNvPr id="51" name="TextBox 50"/>
+          <p:cNvSpPr txBox="1"/>
+          <p:nvPr/>
+        </p:nvSpPr>
+        <p:spPr>
+          <a:xfrm>
+            <a:off x="685800" y="1861984"/>
+            <a:ext cx="411480" cy="182880"/>
+          </a:xfrm>
+          <a:prstGeom prst="rect">
+            <a:avLst/>
+          </a:prstGeom>
+          <a:noFill/>
+        </p:spPr>
+        <p:txBody>
+          <a:bodyPr wrap="square" lIns="0" rIns="0" tIns="0" bIns="0">
+            <a:spAutoFit/>
+          </a:bodyPr>
+          <a:lstStyle/>
+          <a:p>
+            <a:pPr algn="r"/>
+            <a:r>
+              <a:rPr sz="900" b="0">
+                <a:solidFill>
+                  <a:srgbClr val="718096"/>
+                </a:solidFill>
+                <a:latin typeface="Calibri"/>
+              </a:rPr>
+              <a:t>43</a:t>
+            </a:r>
+          </a:p>
+        </p:txBody>
+      </p:sp>
+      <p:sp>
+        <p:nvSpPr>
+          <p:cNvPr id="52" name="TextBox 51"/>
+          <p:cNvSpPr txBox="1"/>
+          <p:nvPr/>
+        </p:nvSpPr>
+        <p:spPr>
+          <a:xfrm>
+            <a:off x="685800" y="1836175"/>
+            <a:ext cx="411480" cy="182880"/>
+          </a:xfrm>
+          <a:prstGeom prst="rect">
+            <a:avLst/>
+          </a:prstGeom>
+          <a:noFill/>
+        </p:spPr>
+        <p:txBody>
+          <a:bodyPr wrap="square" lIns="0" rIns="0" tIns="0" bIns="0">
+            <a:spAutoFit/>
+          </a:bodyPr>
+          <a:lstStyle/>
+          <a:p>
+            <a:pPr algn="r"/>
+            <a:r>
+              <a:rPr sz="900" b="0">
+                <a:solidFill>
+                  <a:srgbClr val="718096"/>
+                </a:solidFill>
+                <a:latin typeface="Calibri"/>
+              </a:rPr>
+              <a:t>44</a:t>
+            </a:r>
+          </a:p>
+        </p:txBody>
+      </p:sp>
+      <p:sp>
+        <p:nvSpPr>
+          <p:cNvPr id="53" name="TextBox 52"/>
+          <p:cNvSpPr txBox="1"/>
+          <p:nvPr/>
+        </p:nvSpPr>
+        <p:spPr>
+          <a:xfrm>
+            <a:off x="685800" y="1810365"/>
+            <a:ext cx="411480" cy="182880"/>
+          </a:xfrm>
+          <a:prstGeom prst="rect">
+            <a:avLst/>
+          </a:prstGeom>
+          <a:noFill/>
+        </p:spPr>
+        <p:txBody>
+          <a:bodyPr wrap="square" lIns="0" rIns="0" tIns="0" bIns="0">
+            <a:spAutoFit/>
+          </a:bodyPr>
+          <a:lstStyle/>
+          <a:p>
+            <a:pPr algn="r"/>
+            <a:r>
+              <a:rPr sz="900" b="0">
+                <a:solidFill>
+                  <a:srgbClr val="718096"/>
+                </a:solidFill>
+                <a:latin typeface="Calibri"/>
+              </a:rPr>
+              <a:t>45</a:t>
+            </a:r>
+          </a:p>
+        </p:txBody>
+      </p:sp>
+      <p:sp>
+        <p:nvSpPr>
+          <p:cNvPr id="54" name="TextBox 53"/>
+          <p:cNvSpPr txBox="1"/>
+          <p:nvPr/>
+        </p:nvSpPr>
+        <p:spPr>
+          <a:xfrm>
+            <a:off x="685800" y="1784555"/>
+            <a:ext cx="411480" cy="182880"/>
+          </a:xfrm>
+          <a:prstGeom prst="rect">
+            <a:avLst/>
+          </a:prstGeom>
+          <a:noFill/>
+        </p:spPr>
+        <p:txBody>
+          <a:bodyPr wrap="square" lIns="0" rIns="0" tIns="0" bIns="0">
+            <a:spAutoFit/>
+          </a:bodyPr>
+          <a:lstStyle/>
+          <a:p>
+            <a:pPr algn="r"/>
+            <a:r>
+              <a:rPr sz="900" b="0">
+                <a:solidFill>
+                  <a:srgbClr val="718096"/>
+                </a:solidFill>
+                <a:latin typeface="Calibri"/>
+              </a:rPr>
+              <a:t>46</a:t>
+            </a:r>
+          </a:p>
+        </p:txBody>
+      </p:sp>
+      <p:sp>
+        <p:nvSpPr>
+          <p:cNvPr id="55" name="TextBox 54"/>
+          <p:cNvSpPr txBox="1"/>
+          <p:nvPr/>
+        </p:nvSpPr>
+        <p:spPr>
+          <a:xfrm>
+            <a:off x="685800" y="1758746"/>
+            <a:ext cx="411480" cy="182880"/>
+          </a:xfrm>
+          <a:prstGeom prst="rect">
+            <a:avLst/>
+          </a:prstGeom>
+          <a:noFill/>
+        </p:spPr>
+        <p:txBody>
+          <a:bodyPr wrap="square" lIns="0" rIns="0" tIns="0" bIns="0">
+            <a:spAutoFit/>
+          </a:bodyPr>
+          <a:lstStyle/>
+          <a:p>
+            <a:pPr algn="r"/>
+            <a:r>
+              <a:rPr sz="900" b="0">
+                <a:solidFill>
+                  <a:srgbClr val="718096"/>
+                </a:solidFill>
+                <a:latin typeface="Calibri"/>
+              </a:rPr>
+              <a:t>47</a:t>
+            </a:r>
+          </a:p>
+        </p:txBody>
+      </p:sp>
+      <p:sp>
+        <p:nvSpPr>
+          <p:cNvPr id="56" name="TextBox 55"/>
+          <p:cNvSpPr txBox="1"/>
+          <p:nvPr/>
+        </p:nvSpPr>
+        <p:spPr>
+          <a:xfrm>
+            <a:off x="685800" y="1732936"/>
+            <a:ext cx="411480" cy="182880"/>
+          </a:xfrm>
+          <a:prstGeom prst="rect">
+            <a:avLst/>
+          </a:prstGeom>
+          <a:noFill/>
+        </p:spPr>
+        <p:txBody>
+          <a:bodyPr wrap="square" lIns="0" rIns="0" tIns="0" bIns="0">
+            <a:spAutoFit/>
+          </a:bodyPr>
+          <a:lstStyle/>
+          <a:p>
+            <a:pPr algn="r"/>
+            <a:r>
+              <a:rPr sz="900" b="0">
+                <a:solidFill>
+                  <a:srgbClr val="718096"/>
+                </a:solidFill>
+                <a:latin typeface="Calibri"/>
+              </a:rPr>
+              <a:t>48</a:t>
+            </a:r>
+          </a:p>
+        </p:txBody>
+      </p:sp>
+      <p:sp>
+        <p:nvSpPr>
+          <p:cNvPr id="57" name="TextBox 56"/>
+          <p:cNvSpPr txBox="1"/>
+          <p:nvPr/>
+        </p:nvSpPr>
+        <p:spPr>
+          <a:xfrm>
+            <a:off x="685800" y="1707126"/>
+            <a:ext cx="411480" cy="182880"/>
+          </a:xfrm>
+          <a:prstGeom prst="rect">
+            <a:avLst/>
+          </a:prstGeom>
+          <a:noFill/>
+        </p:spPr>
+        <p:txBody>
+          <a:bodyPr wrap="square" lIns="0" rIns="0" tIns="0" bIns="0">
+            <a:spAutoFit/>
+          </a:bodyPr>
+          <a:lstStyle/>
+          <a:p>
+            <a:pPr algn="r"/>
+            <a:r>
+              <a:rPr sz="900" b="0">
+                <a:solidFill>
+                  <a:srgbClr val="718096"/>
+                </a:solidFill>
+                <a:latin typeface="Calibri"/>
+              </a:rPr>
+              <a:t>49</a:t>
+            </a:r>
+          </a:p>
+        </p:txBody>
+      </p:sp>
+      <p:sp>
+        <p:nvSpPr>
+          <p:cNvPr id="58" name="TextBox 57"/>
+          <p:cNvSpPr txBox="1"/>
+          <p:nvPr/>
+        </p:nvSpPr>
+        <p:spPr>
+          <a:xfrm>
+            <a:off x="685800" y="1681317"/>
+            <a:ext cx="411480" cy="182880"/>
+          </a:xfrm>
+          <a:prstGeom prst="rect">
+            <a:avLst/>
+          </a:prstGeom>
+          <a:noFill/>
+        </p:spPr>
+        <p:txBody>
+          <a:bodyPr wrap="square" lIns="0" rIns="0" tIns="0" bIns="0">
+            <a:spAutoFit/>
+          </a:bodyPr>
+          <a:lstStyle/>
+          <a:p>
+            <a:pPr algn="r"/>
+            <a:r>
+              <a:rPr sz="900" b="0">
+                <a:solidFill>
+                  <a:srgbClr val="718096"/>
+                </a:solidFill>
+                <a:latin typeface="Calibri"/>
+              </a:rPr>
+              <a:t>50</a:t>
+            </a:r>
+          </a:p>
+        </p:txBody>
+      </p:sp>
+      <p:sp>
+        <p:nvSpPr>
+          <p:cNvPr id="59" name="TextBox 58"/>
+          <p:cNvSpPr txBox="1"/>
+          <p:nvPr/>
+        </p:nvSpPr>
+        <p:spPr>
+          <a:xfrm>
+            <a:off x="685800" y="1655507"/>
+            <a:ext cx="411480" cy="182880"/>
+          </a:xfrm>
+          <a:prstGeom prst="rect">
+            <a:avLst/>
+          </a:prstGeom>
+          <a:noFill/>
+        </p:spPr>
+        <p:txBody>
+          <a:bodyPr wrap="square" lIns="0" rIns="0" tIns="0" bIns="0">
+            <a:spAutoFit/>
+          </a:bodyPr>
+          <a:lstStyle/>
+          <a:p>
+            <a:pPr algn="r"/>
+            <a:r>
+              <a:rPr sz="900" b="0">
+                <a:solidFill>
+                  <a:srgbClr val="718096"/>
+                </a:solidFill>
+                <a:latin typeface="Calibri"/>
+              </a:rPr>
+              <a:t>51</a:t>
+            </a:r>
+          </a:p>
+        </p:txBody>
+      </p:sp>
+      <p:sp>
+        <p:nvSpPr>
+          <p:cNvPr id="60" name="TextBox 59"/>
+          <p:cNvSpPr txBox="1"/>
+          <p:nvPr/>
+        </p:nvSpPr>
+        <p:spPr>
+          <a:xfrm>
+            <a:off x="685800" y="1629697"/>
+            <a:ext cx="411480" cy="182880"/>
+          </a:xfrm>
+          <a:prstGeom prst="rect">
+            <a:avLst/>
+          </a:prstGeom>
+          <a:noFill/>
+        </p:spPr>
+        <p:txBody>
+          <a:bodyPr wrap="square" lIns="0" rIns="0" tIns="0" bIns="0">
+            <a:spAutoFit/>
+          </a:bodyPr>
+          <a:lstStyle/>
+          <a:p>
+            <a:pPr algn="r"/>
+            <a:r>
+              <a:rPr sz="900" b="0">
+                <a:solidFill>
+                  <a:srgbClr val="718096"/>
+                </a:solidFill>
+                <a:latin typeface="Calibri"/>
+              </a:rPr>
+              <a:t>52</a:t>
+            </a:r>
+          </a:p>
+        </p:txBody>
+      </p:sp>
+      <p:sp>
+        <p:nvSpPr>
+          <p:cNvPr id="61" name="TextBox 60"/>
+          <p:cNvSpPr txBox="1"/>
+          <p:nvPr/>
+        </p:nvSpPr>
+        <p:spPr>
+          <a:xfrm>
+            <a:off x="685800" y="1603888"/>
+            <a:ext cx="411480" cy="182880"/>
+          </a:xfrm>
+          <a:prstGeom prst="rect">
+            <a:avLst/>
+          </a:prstGeom>
+          <a:noFill/>
+        </p:spPr>
+        <p:txBody>
+          <a:bodyPr wrap="square" lIns="0" rIns="0" tIns="0" bIns="0">
+            <a:spAutoFit/>
+          </a:bodyPr>
+          <a:lstStyle/>
+          <a:p>
+            <a:pPr algn="r"/>
+            <a:r>
+              <a:rPr sz="900" b="0">
+                <a:solidFill>
+                  <a:srgbClr val="718096"/>
+                </a:solidFill>
+                <a:latin typeface="Calibri"/>
+              </a:rPr>
+              <a:t>53</a:t>
+            </a:r>
+          </a:p>
+        </p:txBody>
+      </p:sp>
+      <p:sp>
+        <p:nvSpPr>
+          <p:cNvPr id="62" name="TextBox 61"/>
+          <p:cNvSpPr txBox="1"/>
+          <p:nvPr/>
+        </p:nvSpPr>
+        <p:spPr>
+          <a:xfrm>
+            <a:off x="685800" y="1578078"/>
+            <a:ext cx="411480" cy="182880"/>
+          </a:xfrm>
+          <a:prstGeom prst="rect">
+            <a:avLst/>
+          </a:prstGeom>
+          <a:noFill/>
+        </p:spPr>
+        <p:txBody>
+          <a:bodyPr wrap="square" lIns="0" rIns="0" tIns="0" bIns="0">
+            <a:spAutoFit/>
+          </a:bodyPr>
+          <a:lstStyle/>
+          <a:p>
+            <a:pPr algn="r"/>
+            <a:r>
+              <a:rPr sz="900" b="0">
+                <a:solidFill>
+                  <a:srgbClr val="718096"/>
+                </a:solidFill>
+                <a:latin typeface="Calibri"/>
+              </a:rPr>
+              <a:t>54</a:t>
+            </a:r>
+          </a:p>
+        </p:txBody>
+      </p:sp>
+      <p:sp>
+        <p:nvSpPr>
+          <p:cNvPr id="63" name="TextBox 62"/>
+          <p:cNvSpPr txBox="1"/>
+          <p:nvPr/>
+        </p:nvSpPr>
+        <p:spPr>
+          <a:xfrm>
+            <a:off x="685800" y="1552268"/>
+            <a:ext cx="411480" cy="182880"/>
+          </a:xfrm>
+          <a:prstGeom prst="rect">
+            <a:avLst/>
+          </a:prstGeom>
+          <a:noFill/>
+        </p:spPr>
+        <p:txBody>
+          <a:bodyPr wrap="square" lIns="0" rIns="0" tIns="0" bIns="0">
+            <a:spAutoFit/>
+          </a:bodyPr>
+          <a:lstStyle/>
+          <a:p>
+            <a:pPr algn="r"/>
+            <a:r>
+              <a:rPr sz="900" b="0">
+                <a:solidFill>
+                  <a:srgbClr val="718096"/>
+                </a:solidFill>
+                <a:latin typeface="Calibri"/>
+              </a:rPr>
+              <a:t>55</a:t>
+            </a:r>
+          </a:p>
+        </p:txBody>
+      </p:sp>
+      <p:sp>
+        <p:nvSpPr>
+          <p:cNvPr id="64" name="TextBox 63"/>
+          <p:cNvSpPr txBox="1"/>
+          <p:nvPr/>
+        </p:nvSpPr>
+        <p:spPr>
+          <a:xfrm>
+            <a:off x="685800" y="1526459"/>
+            <a:ext cx="411480" cy="182880"/>
+          </a:xfrm>
+          <a:prstGeom prst="rect">
+            <a:avLst/>
+          </a:prstGeom>
+          <a:noFill/>
+        </p:spPr>
+        <p:txBody>
+          <a:bodyPr wrap="square" lIns="0" rIns="0" tIns="0" bIns="0">
+            <a:spAutoFit/>
+          </a:bodyPr>
+          <a:lstStyle/>
+          <a:p>
+            <a:pPr algn="r"/>
+            <a:r>
+              <a:rPr sz="900" b="0">
+                <a:solidFill>
+                  <a:srgbClr val="718096"/>
+                </a:solidFill>
+                <a:latin typeface="Calibri"/>
+              </a:rPr>
+              <a:t>56</a:t>
+            </a:r>
+          </a:p>
+        </p:txBody>
+      </p:sp>
+      <p:sp>
+        <p:nvSpPr>
+          <p:cNvPr id="65" name="TextBox 64"/>
+          <p:cNvSpPr txBox="1"/>
+          <p:nvPr/>
+        </p:nvSpPr>
+        <p:spPr>
+          <a:xfrm>
+            <a:off x="685800" y="1500649"/>
+            <a:ext cx="411480" cy="182880"/>
+          </a:xfrm>
+          <a:prstGeom prst="rect">
+            <a:avLst/>
+          </a:prstGeom>
+          <a:noFill/>
+        </p:spPr>
+        <p:txBody>
+          <a:bodyPr wrap="square" lIns="0" rIns="0" tIns="0" bIns="0">
+            <a:spAutoFit/>
+          </a:bodyPr>
+          <a:lstStyle/>
+          <a:p>
+            <a:pPr algn="r"/>
+            <a:r>
+              <a:rPr sz="900" b="0">
+                <a:solidFill>
+                  <a:srgbClr val="718096"/>
+                </a:solidFill>
+                <a:latin typeface="Calibri"/>
+              </a:rPr>
+              <a:t>57</a:t>
+            </a:r>
+          </a:p>
+        </p:txBody>
+      </p:sp>
+      <p:sp>
+        <p:nvSpPr>
+          <p:cNvPr id="66" name="TextBox 65"/>
+          <p:cNvSpPr txBox="1"/>
+          <p:nvPr/>
+        </p:nvSpPr>
+        <p:spPr>
+          <a:xfrm>
+            <a:off x="685800" y="1474839"/>
+            <a:ext cx="411480" cy="182880"/>
+          </a:xfrm>
+          <a:prstGeom prst="rect">
+            <a:avLst/>
+          </a:prstGeom>
+          <a:noFill/>
+        </p:spPr>
+        <p:txBody>
+          <a:bodyPr wrap="square" lIns="0" rIns="0" tIns="0" bIns="0">
+            <a:spAutoFit/>
+          </a:bodyPr>
+          <a:lstStyle/>
+          <a:p>
+            <a:pPr algn="r"/>
+            <a:r>
+              <a:rPr sz="900" b="0">
+                <a:solidFill>
+                  <a:srgbClr val="718096"/>
+                </a:solidFill>
+                <a:latin typeface="Calibri"/>
+              </a:rPr>
+              <a:t>58</a:t>
+            </a:r>
+          </a:p>
+        </p:txBody>
+      </p:sp>
+      <p:sp>
+        <p:nvSpPr>
+          <p:cNvPr id="67" name="TextBox 66"/>
+          <p:cNvSpPr txBox="1"/>
+          <p:nvPr/>
+        </p:nvSpPr>
+        <p:spPr>
+          <a:xfrm>
+            <a:off x="685800" y="1449030"/>
+            <a:ext cx="411480" cy="182880"/>
+          </a:xfrm>
+          <a:prstGeom prst="rect">
+            <a:avLst/>
+          </a:prstGeom>
+          <a:noFill/>
+        </p:spPr>
+        <p:txBody>
+          <a:bodyPr wrap="square" lIns="0" rIns="0" tIns="0" bIns="0">
+            <a:spAutoFit/>
+          </a:bodyPr>
+          <a:lstStyle/>
+          <a:p>
+            <a:pPr algn="r"/>
+            <a:r>
+              <a:rPr sz="900" b="0">
+                <a:solidFill>
+                  <a:srgbClr val="718096"/>
+                </a:solidFill>
+                <a:latin typeface="Calibri"/>
+              </a:rPr>
+              <a:t>59</a:t>
+            </a:r>
+          </a:p>
+        </p:txBody>
+      </p:sp>
+      <p:sp>
+        <p:nvSpPr>
+          <p:cNvPr id="68" name="TextBox 67"/>
+          <p:cNvSpPr txBox="1"/>
+          <p:nvPr/>
+        </p:nvSpPr>
+        <p:spPr>
+          <a:xfrm>
+            <a:off x="685800" y="1423220"/>
+            <a:ext cx="411480" cy="182880"/>
+          </a:xfrm>
+          <a:prstGeom prst="rect">
+            <a:avLst/>
+          </a:prstGeom>
+          <a:noFill/>
+        </p:spPr>
+        <p:txBody>
+          <a:bodyPr wrap="square" lIns="0" rIns="0" tIns="0" bIns="0">
+            <a:spAutoFit/>
+          </a:bodyPr>
+          <a:lstStyle/>
+          <a:p>
+            <a:pPr algn="r"/>
+            <a:r>
+              <a:rPr sz="900" b="0">
+                <a:solidFill>
+                  <a:srgbClr val="718096"/>
+                </a:solidFill>
+                <a:latin typeface="Calibri"/>
+              </a:rPr>
+              <a:t>60</a:t>
+            </a:r>
+          </a:p>
+        </p:txBody>
+      </p:sp>
+      <p:sp>
+        <p:nvSpPr>
+          <p:cNvPr id="69" name="TextBox 68"/>
+          <p:cNvSpPr txBox="1"/>
+          <p:nvPr/>
+        </p:nvSpPr>
+        <p:spPr>
+          <a:xfrm>
+            <a:off x="685800" y="1397410"/>
+            <a:ext cx="411480" cy="182880"/>
+          </a:xfrm>
+          <a:prstGeom prst="rect">
+            <a:avLst/>
+          </a:prstGeom>
+          <a:noFill/>
+        </p:spPr>
+        <p:txBody>
+          <a:bodyPr wrap="square" lIns="0" rIns="0" tIns="0" bIns="0">
+            <a:spAutoFit/>
+          </a:bodyPr>
+          <a:lstStyle/>
+          <a:p>
+            <a:pPr algn="r"/>
+            <a:r>
+              <a:rPr sz="900" b="0">
+                <a:solidFill>
+                  <a:srgbClr val="718096"/>
+                </a:solidFill>
+                <a:latin typeface="Calibri"/>
+              </a:rPr>
+              <a:t>61</a:t>
+            </a:r>
+          </a:p>
+        </p:txBody>
+      </p:sp>
+      <p:sp>
+        <p:nvSpPr>
+          <p:cNvPr id="70" name="TextBox 69"/>
+          <p:cNvSpPr txBox="1"/>
+          <p:nvPr/>
+        </p:nvSpPr>
+        <p:spPr>
+          <a:xfrm>
+            <a:off x="685800" y="1371600"/>
+            <a:ext cx="411480" cy="182880"/>
+          </a:xfrm>
+          <a:prstGeom prst="rect">
+            <a:avLst/>
+          </a:prstGeom>
+          <a:noFill/>
+        </p:spPr>
+        <p:txBody>
+          <a:bodyPr wrap="square" lIns="0" rIns="0" tIns="0" bIns="0">
+            <a:spAutoFit/>
+          </a:bodyPr>
+          <a:lstStyle/>
+          <a:p>
+            <a:pPr algn="r"/>
+            <a:r>
+              <a:rPr sz="900" b="0">
+                <a:solidFill>
+                  <a:srgbClr val="718096"/>
+                </a:solidFill>
+                <a:latin typeface="Calibri"/>
+              </a:rPr>
+              <a:t>62</a:t>
+            </a:r>
+          </a:p>
+        </p:txBody>
+      </p:sp>
+      <p:sp>
+        <p:nvSpPr>
+          <p:cNvPr id="71" name="Rectangle 70"/>
           <p:cNvSpPr/>
           <p:nvPr/>
         </p:nvSpPr>
         <p:spPr>
           <a:xfrm>
-            <a:off x="457200" y="3063240"/>
-            <a:ext cx="73152" cy="1691640"/>
+            <a:off x="1584769" y="2985811"/>
+            <a:ext cx="968121" cy="77429"/>
           </a:xfrm>
           <a:prstGeom prst="rect">
             <a:avLst/>
@@ -9862,16 +9119,129 @@
       </p:sp>
       <p:sp>
         <p:nvSpPr>
-          <p:cNvPr id="17" name="Oval 16"/>
+          <p:cNvPr id="72" name="TextBox 71"/>
+          <p:cNvSpPr txBox="1"/>
+          <p:nvPr/>
+        </p:nvSpPr>
+        <p:spPr>
+          <a:xfrm>
+            <a:off x="1219009" y="3136392"/>
+            <a:ext cx="1699641" cy="228600"/>
+          </a:xfrm>
+          <a:prstGeom prst="rect">
+            <a:avLst/>
+          </a:prstGeom>
+          <a:noFill/>
+        </p:spPr>
+        <p:txBody>
+          <a:bodyPr wrap="square" lIns="0" rIns="0" tIns="0" bIns="0">
+            <a:spAutoFit/>
+          </a:bodyPr>
+          <a:lstStyle/>
+          <a:p>
+            <a:pPr algn="ctr"/>
+            <a:r>
+              <a:rPr sz="1200" b="1">
+                <a:solidFill>
+                  <a:srgbClr val="1A202C"/>
+                </a:solidFill>
+                <a:latin typeface="Calibri"/>
+              </a:rPr>
+              <a:t>DE</a:t>
+            </a:r>
+          </a:p>
+        </p:txBody>
+      </p:sp>
+      <p:sp>
+        <p:nvSpPr>
+          <p:cNvPr id="73" name="TextBox 72"/>
+          <p:cNvSpPr txBox="1"/>
+          <p:nvPr/>
+        </p:nvSpPr>
+        <p:spPr>
+          <a:xfrm>
+            <a:off x="1219009" y="3337560"/>
+            <a:ext cx="1699641" cy="201168"/>
+          </a:xfrm>
+          <a:prstGeom prst="rect">
+            <a:avLst/>
+          </a:prstGeom>
+          <a:noFill/>
+        </p:spPr>
+        <p:txBody>
+          <a:bodyPr wrap="square" lIns="0" rIns="0" tIns="0" bIns="0">
+            <a:spAutoFit/>
+          </a:bodyPr>
+          <a:lstStyle/>
+          <a:p>
+            <a:pPr algn="ctr"/>
+            <a:r>
+              <a:rPr sz="900" b="0">
+                <a:solidFill>
+                  <a:srgbClr val="718096"/>
+                </a:solidFill>
+                <a:latin typeface="Calibri"/>
+              </a:rPr>
+              <a:t>3 / 3</a:t>
+            </a:r>
+          </a:p>
+        </p:txBody>
+      </p:sp>
+      <p:sp>
+        <p:nvSpPr>
+          <p:cNvPr id="74" name="Rectangle 73"/>
           <p:cNvSpPr/>
           <p:nvPr/>
         </p:nvSpPr>
         <p:spPr>
           <a:xfrm>
-            <a:off x="731520" y="3291840"/>
-            <a:ext cx="502920" cy="502920"/>
-          </a:xfrm>
-          <a:prstGeom prst="ellipse">
+            <a:off x="3344989" y="2701905"/>
+            <a:ext cx="968121" cy="361335"/>
+          </a:xfrm>
+          <a:prstGeom prst="rect">
+            <a:avLst/>
+          </a:prstGeom>
+          <a:solidFill>
+            <a:srgbClr val="C53030"/>
+          </a:solidFill>
+          <a:ln>
+            <a:noFill/>
+          </a:ln>
+        </p:spPr>
+        <p:style>
+          <a:lnRef idx="1">
+            <a:schemeClr val="accent1"/>
+          </a:lnRef>
+          <a:fillRef idx="3">
+            <a:schemeClr val="accent1"/>
+          </a:fillRef>
+          <a:effectRef idx="2">
+            <a:schemeClr val="accent1"/>
+          </a:effectRef>
+          <a:fontRef idx="minor">
+            <a:schemeClr val="lt1"/>
+          </a:fontRef>
+        </p:style>
+        <p:txBody>
+          <a:bodyPr rtlCol="0" anchor="ctr"/>
+          <a:lstStyle/>
+          <a:p>
+            <a:pPr algn="ctr"/>
+          </a:p>
+        </p:txBody>
+      </p:sp>
+      <p:sp>
+        <p:nvSpPr>
+          <p:cNvPr id="75" name="Rectangle 74"/>
+          <p:cNvSpPr/>
+          <p:nvPr/>
+        </p:nvSpPr>
+        <p:spPr>
+          <a:xfrm>
+            <a:off x="3344989" y="1463041"/>
+            <a:ext cx="968121" cy="1238864"/>
+          </a:xfrm>
+          <a:prstGeom prst="rect">
             <a:avLst/>
           </a:prstGeom>
           <a:solidFill>
@@ -9900,109 +9270,98 @@
           <a:lstStyle/>
           <a:p>
             <a:pPr algn="ctr"/>
-            <a:r>
-              <a:rPr sz="1800" b="1">
-                <a:solidFill>
-                  <a:srgbClr val="FFFFFF"/>
-                </a:solidFill>
-                <a:latin typeface="Calibri"/>
-              </a:rPr>
-              <a:t>📊</a:t>
-            </a:r>
-          </a:p>
-        </p:txBody>
-      </p:sp>
-      <p:sp>
-        <p:nvSpPr>
-          <p:cNvPr id="18" name="TextBox 17"/>
-          <p:cNvSpPr txBox="1"/>
-          <p:nvPr/>
-        </p:nvSpPr>
-        <p:spPr>
-          <a:xfrm>
-            <a:off x="1371600" y="3319272"/>
-            <a:ext cx="3063240" cy="365760"/>
-          </a:xfrm>
-          <a:prstGeom prst="rect">
-            <a:avLst/>
-          </a:prstGeom>
-          <a:noFill/>
-        </p:spPr>
-        <p:txBody>
-          <a:bodyPr wrap="square" lIns="0" rIns="0" tIns="0" bIns="0">
-            <a:spAutoFit/>
-          </a:bodyPr>
-          <a:lstStyle/>
-          <a:p>
-            <a:pPr algn="l"/>
-            <a:r>
-              <a:rPr sz="1500" b="1">
+          </a:p>
+        </p:txBody>
+      </p:sp>
+      <p:sp>
+        <p:nvSpPr>
+          <p:cNvPr id="76" name="TextBox 75"/>
+          <p:cNvSpPr txBox="1"/>
+          <p:nvPr/>
+        </p:nvSpPr>
+        <p:spPr>
+          <a:xfrm>
+            <a:off x="2979229" y="3136392"/>
+            <a:ext cx="1699641" cy="228600"/>
+          </a:xfrm>
+          <a:prstGeom prst="rect">
+            <a:avLst/>
+          </a:prstGeom>
+          <a:noFill/>
+        </p:spPr>
+        <p:txBody>
+          <a:bodyPr wrap="square" lIns="0" rIns="0" tIns="0" bIns="0">
+            <a:spAutoFit/>
+          </a:bodyPr>
+          <a:lstStyle/>
+          <a:p>
+            <a:pPr algn="ctr"/>
+            <a:r>
+              <a:rPr sz="1200" b="1">
                 <a:solidFill>
                   <a:srgbClr val="1A202C"/>
                 </a:solidFill>
                 <a:latin typeface="Calibri"/>
               </a:rPr>
-              <a:t>Accuracy chart vs ODMI</a:t>
-            </a:r>
-          </a:p>
-        </p:txBody>
-      </p:sp>
-      <p:sp>
-        <p:nvSpPr>
-          <p:cNvPr id="19" name="TextBox 18"/>
-          <p:cNvSpPr txBox="1"/>
-          <p:nvPr/>
-        </p:nvSpPr>
-        <p:spPr>
-          <a:xfrm>
-            <a:off x="1371600" y="3703320"/>
-            <a:ext cx="3063240" cy="960120"/>
-          </a:xfrm>
-          <a:prstGeom prst="rect">
-            <a:avLst/>
-          </a:prstGeom>
-          <a:noFill/>
-        </p:spPr>
-        <p:txBody>
-          <a:bodyPr wrap="square" lIns="0" rIns="0" tIns="0" bIns="0">
-            <a:spAutoFit/>
-          </a:bodyPr>
-          <a:lstStyle/>
-          <a:p>
-            <a:pPr algn="l"/>
-            <a:r>
-              <a:rPr sz="1050" b="0">
-                <a:solidFill>
-                  <a:srgbClr val="2D3748"/>
-                </a:solidFill>
-                <a:latin typeface="Calibri"/>
-              </a:rPr>
-              <a:t>Per-country stacked bar of pairs that match ODMI 2025 versus those that differ. Headline accuracy KPI is read straight off the comparison.</a:t>
-            </a:r>
-          </a:p>
-        </p:txBody>
-      </p:sp>
-      <p:sp>
-        <p:nvSpPr>
-          <p:cNvPr id="20" name="Rectangle 19"/>
+              <a:t>FR</a:t>
+            </a:r>
+          </a:p>
+        </p:txBody>
+      </p:sp>
+      <p:sp>
+        <p:nvSpPr>
+          <p:cNvPr id="77" name="TextBox 76"/>
+          <p:cNvSpPr txBox="1"/>
+          <p:nvPr/>
+        </p:nvSpPr>
+        <p:spPr>
+          <a:xfrm>
+            <a:off x="2979229" y="3337560"/>
+            <a:ext cx="1699641" cy="201168"/>
+          </a:xfrm>
+          <a:prstGeom prst="rect">
+            <a:avLst/>
+          </a:prstGeom>
+          <a:noFill/>
+        </p:spPr>
+        <p:txBody>
+          <a:bodyPr wrap="square" lIns="0" rIns="0" tIns="0" bIns="0">
+            <a:spAutoFit/>
+          </a:bodyPr>
+          <a:lstStyle/>
+          <a:p>
+            <a:pPr algn="ctr"/>
+            <a:r>
+              <a:rPr sz="900" b="0">
+                <a:solidFill>
+                  <a:srgbClr val="718096"/>
+                </a:solidFill>
+                <a:latin typeface="Calibri"/>
+              </a:rPr>
+              <a:t>48 / 62</a:t>
+            </a:r>
+          </a:p>
+        </p:txBody>
+      </p:sp>
+      <p:sp>
+        <p:nvSpPr>
+          <p:cNvPr id="78" name="Rectangle 77"/>
           <p:cNvSpPr/>
           <p:nvPr/>
         </p:nvSpPr>
         <p:spPr>
           <a:xfrm>
-            <a:off x="4754880" y="3063240"/>
-            <a:ext cx="4160520" cy="1691640"/>
+            <a:off x="5105209" y="2985811"/>
+            <a:ext cx="968121" cy="77429"/>
           </a:xfrm>
           <a:prstGeom prst="rect">
             <a:avLst/>
           </a:prstGeom>
           <a:solidFill>
-            <a:srgbClr val="FFFFFF"/>
+            <a:srgbClr val="38A169"/>
           </a:solidFill>
-          <a:ln w="6350">
-            <a:solidFill>
-              <a:srgbClr val="E2E8F0"/>
-            </a:solidFill>
+          <a:ln>
+            <a:noFill/>
           </a:ln>
         </p:spPr>
         <p:style>
@@ -10029,20 +9388,90 @@
       </p:sp>
       <p:sp>
         <p:nvSpPr>
-          <p:cNvPr id="21" name="Rectangle 20"/>
+          <p:cNvPr id="79" name="TextBox 78"/>
+          <p:cNvSpPr txBox="1"/>
+          <p:nvPr/>
+        </p:nvSpPr>
+        <p:spPr>
+          <a:xfrm>
+            <a:off x="4739449" y="3136392"/>
+            <a:ext cx="1699641" cy="228600"/>
+          </a:xfrm>
+          <a:prstGeom prst="rect">
+            <a:avLst/>
+          </a:prstGeom>
+          <a:noFill/>
+        </p:spPr>
+        <p:txBody>
+          <a:bodyPr wrap="square" lIns="0" rIns="0" tIns="0" bIns="0">
+            <a:spAutoFit/>
+          </a:bodyPr>
+          <a:lstStyle/>
+          <a:p>
+            <a:pPr algn="ctr"/>
+            <a:r>
+              <a:rPr sz="1200" b="1">
+                <a:solidFill>
+                  <a:srgbClr val="1A202C"/>
+                </a:solidFill>
+                <a:latin typeface="Calibri"/>
+              </a:rPr>
+              <a:t>NL</a:t>
+            </a:r>
+          </a:p>
+        </p:txBody>
+      </p:sp>
+      <p:sp>
+        <p:nvSpPr>
+          <p:cNvPr id="80" name="TextBox 79"/>
+          <p:cNvSpPr txBox="1"/>
+          <p:nvPr/>
+        </p:nvSpPr>
+        <p:spPr>
+          <a:xfrm>
+            <a:off x="4739449" y="3337560"/>
+            <a:ext cx="1699641" cy="201168"/>
+          </a:xfrm>
+          <a:prstGeom prst="rect">
+            <a:avLst/>
+          </a:prstGeom>
+          <a:noFill/>
+        </p:spPr>
+        <p:txBody>
+          <a:bodyPr wrap="square" lIns="0" rIns="0" tIns="0" bIns="0">
+            <a:spAutoFit/>
+          </a:bodyPr>
+          <a:lstStyle/>
+          <a:p>
+            <a:pPr algn="ctr"/>
+            <a:r>
+              <a:rPr sz="900" b="0">
+                <a:solidFill>
+                  <a:srgbClr val="718096"/>
+                </a:solidFill>
+                <a:latin typeface="Calibri"/>
+              </a:rPr>
+              <a:t>3 / 3</a:t>
+            </a:r>
+          </a:p>
+        </p:txBody>
+      </p:sp>
+      <p:sp>
+        <p:nvSpPr>
+          <p:cNvPr id="81" name="Rectangle 80"/>
           <p:cNvSpPr/>
           <p:nvPr/>
         </p:nvSpPr>
         <p:spPr>
           <a:xfrm>
-            <a:off x="4754880" y="3063240"/>
-            <a:ext cx="73152" cy="1691640"/>
+            <a:off x="6865429" y="3011621"/>
+            <a:ext cx="968121" cy="51619"/>
           </a:xfrm>
           <a:prstGeom prst="rect">
             <a:avLst/>
           </a:prstGeom>
           <a:solidFill>
-            <a:srgbClr val="0F766E"/>
+            <a:srgbClr val="38A169"/>
           </a:solidFill>
           <a:ln>
             <a:noFill/>
@@ -10072,20 +9501,90 @@
       </p:sp>
       <p:sp>
         <p:nvSpPr>
-          <p:cNvPr id="22" name="Oval 21"/>
+          <p:cNvPr id="82" name="TextBox 81"/>
+          <p:cNvSpPr txBox="1"/>
+          <p:nvPr/>
+        </p:nvSpPr>
+        <p:spPr>
+          <a:xfrm>
+            <a:off x="6499669" y="3136392"/>
+            <a:ext cx="1699641" cy="228600"/>
+          </a:xfrm>
+          <a:prstGeom prst="rect">
+            <a:avLst/>
+          </a:prstGeom>
+          <a:noFill/>
+        </p:spPr>
+        <p:txBody>
+          <a:bodyPr wrap="square" lIns="0" rIns="0" tIns="0" bIns="0">
+            <a:spAutoFit/>
+          </a:bodyPr>
+          <a:lstStyle/>
+          <a:p>
+            <a:pPr algn="ctr"/>
+            <a:r>
+              <a:rPr sz="1200" b="1">
+                <a:solidFill>
+                  <a:srgbClr val="1A202C"/>
+                </a:solidFill>
+                <a:latin typeface="Calibri"/>
+              </a:rPr>
+              <a:t>RO</a:t>
+            </a:r>
+          </a:p>
+        </p:txBody>
+      </p:sp>
+      <p:sp>
+        <p:nvSpPr>
+          <p:cNvPr id="83" name="TextBox 82"/>
+          <p:cNvSpPr txBox="1"/>
+          <p:nvPr/>
+        </p:nvSpPr>
+        <p:spPr>
+          <a:xfrm>
+            <a:off x="6499669" y="3337560"/>
+            <a:ext cx="1699641" cy="201168"/>
+          </a:xfrm>
+          <a:prstGeom prst="rect">
+            <a:avLst/>
+          </a:prstGeom>
+          <a:noFill/>
+        </p:spPr>
+        <p:txBody>
+          <a:bodyPr wrap="square" lIns="0" rIns="0" tIns="0" bIns="0">
+            <a:spAutoFit/>
+          </a:bodyPr>
+          <a:lstStyle/>
+          <a:p>
+            <a:pPr algn="ctr"/>
+            <a:r>
+              <a:rPr sz="900" b="0">
+                <a:solidFill>
+                  <a:srgbClr val="718096"/>
+                </a:solidFill>
+                <a:latin typeface="Calibri"/>
+              </a:rPr>
+              <a:t>2 / 2</a:t>
+            </a:r>
+          </a:p>
+        </p:txBody>
+      </p:sp>
+      <p:sp>
+        <p:nvSpPr>
+          <p:cNvPr id="84" name="Rectangle 83"/>
           <p:cNvSpPr/>
           <p:nvPr/>
         </p:nvSpPr>
         <p:spPr>
           <a:xfrm>
-            <a:off x="5029200" y="3291840"/>
-            <a:ext cx="502920" cy="502920"/>
-          </a:xfrm>
-          <a:prstGeom prst="ellipse">
+            <a:off x="548640" y="3822192"/>
+            <a:ext cx="164592" cy="164592"/>
+          </a:xfrm>
+          <a:prstGeom prst="rect">
             <a:avLst/>
           </a:prstGeom>
           <a:solidFill>
-            <a:srgbClr val="0F766E"/>
+            <a:srgbClr val="38A169"/>
           </a:solidFill>
           <a:ln>
             <a:noFill/>
@@ -10110,28 +9609,19 @@
           <a:lstStyle/>
           <a:p>
             <a:pPr algn="ctr"/>
-            <a:r>
-              <a:rPr sz="1800" b="1">
-                <a:solidFill>
-                  <a:srgbClr val="FFFFFF"/>
-                </a:solidFill>
-                <a:latin typeface="Calibri"/>
-              </a:rPr>
-              <a:t>💷</a:t>
-            </a:r>
-          </a:p>
-        </p:txBody>
-      </p:sp>
-      <p:sp>
-        <p:nvSpPr>
-          <p:cNvPr id="23" name="TextBox 22"/>
-          <p:cNvSpPr txBox="1"/>
-          <p:nvPr/>
-        </p:nvSpPr>
-        <p:spPr>
-          <a:xfrm>
-            <a:off x="5669280" y="3319272"/>
-            <a:ext cx="3063240" cy="365760"/>
+          </a:p>
+        </p:txBody>
+      </p:sp>
+      <p:sp>
+        <p:nvSpPr>
+          <p:cNvPr id="85" name="TextBox 84"/>
+          <p:cNvSpPr txBox="1"/>
+          <p:nvPr/>
+        </p:nvSpPr>
+        <p:spPr>
+          <a:xfrm>
+            <a:off x="804672" y="3794760"/>
+            <a:ext cx="3291840" cy="228600"/>
           </a:xfrm>
           <a:prstGeom prst="rect">
             <a:avLst/>
@@ -10146,27 +9636,70 @@
           <a:p>
             <a:pPr algn="l"/>
             <a:r>
-              <a:rPr sz="1500" b="1">
-                <a:solidFill>
-                  <a:srgbClr val="1A202C"/>
-                </a:solidFill>
-                <a:latin typeface="Calibri"/>
-              </a:rPr>
-              <a:t>Cost tracking and rolling budget</a:t>
-            </a:r>
-          </a:p>
-        </p:txBody>
-      </p:sp>
-      <p:sp>
-        <p:nvSpPr>
-          <p:cNvPr id="24" name="TextBox 23"/>
-          <p:cNvSpPr txBox="1"/>
-          <p:nvPr/>
-        </p:nvSpPr>
-        <p:spPr>
-          <a:xfrm>
-            <a:off x="5669280" y="3703320"/>
-            <a:ext cx="3063240" cy="960120"/>
+              <a:rPr sz="1000" b="0">
+                <a:solidFill>
+                  <a:srgbClr val="2D3748"/>
+                </a:solidFill>
+                <a:latin typeface="Calibri"/>
+              </a:rPr>
+              <a:t>Matches ODMI 2025</a:t>
+            </a:r>
+          </a:p>
+        </p:txBody>
+      </p:sp>
+      <p:sp>
+        <p:nvSpPr>
+          <p:cNvPr id="86" name="Rectangle 85"/>
+          <p:cNvSpPr/>
+          <p:nvPr/>
+        </p:nvSpPr>
+        <p:spPr>
+          <a:xfrm>
+            <a:off x="3840480" y="3822192"/>
+            <a:ext cx="164592" cy="164592"/>
+          </a:xfrm>
+          <a:prstGeom prst="rect">
+            <a:avLst/>
+          </a:prstGeom>
+          <a:solidFill>
+            <a:srgbClr val="C53030"/>
+          </a:solidFill>
+          <a:ln>
+            <a:noFill/>
+          </a:ln>
+        </p:spPr>
+        <p:style>
+          <a:lnRef idx="1">
+            <a:schemeClr val="accent1"/>
+          </a:lnRef>
+          <a:fillRef idx="3">
+            <a:schemeClr val="accent1"/>
+          </a:fillRef>
+          <a:effectRef idx="2">
+            <a:schemeClr val="accent1"/>
+          </a:effectRef>
+          <a:fontRef idx="minor">
+            <a:schemeClr val="lt1"/>
+          </a:fontRef>
+        </p:style>
+        <p:txBody>
+          <a:bodyPr rtlCol="0" anchor="ctr"/>
+          <a:lstStyle/>
+          <a:p>
+            <a:pPr algn="ctr"/>
+          </a:p>
+        </p:txBody>
+      </p:sp>
+      <p:sp>
+        <p:nvSpPr>
+          <p:cNvPr id="87" name="TextBox 86"/>
+          <p:cNvSpPr txBox="1"/>
+          <p:nvPr/>
+        </p:nvSpPr>
+        <p:spPr>
+          <a:xfrm>
+            <a:off x="4096512" y="3794760"/>
+            <a:ext cx="3657600" cy="228600"/>
           </a:xfrm>
           <a:prstGeom prst="rect">
             <a:avLst/>
@@ -10181,20 +9714,98 @@
           <a:p>
             <a:pPr algn="l"/>
             <a:r>
-              <a:rPr sz="1050" b="0">
+              <a:rPr sz="1000" b="0">
                 <a:solidFill>
                   <a:srgbClr val="2D3748"/>
                 </a:solidFill>
                 <a:latin typeface="Calibri"/>
               </a:rPr>
-              <a:t>Costs page shows the 5-hour rolling spend, per-model breakdown, and per-strategy averages. Rate-limit hits and soft-limit progress on every page's sidebar.</a:t>
-            </a:r>
-          </a:p>
-        </p:txBody>
-      </p:sp>
-      <p:sp>
-        <p:nvSpPr>
-          <p:cNvPr id="25" name="TextBox 24"/>
+              <a:t>Differs from ODMI 2025</a:t>
+            </a:r>
+          </a:p>
+        </p:txBody>
+      </p:sp>
+      <p:sp>
+        <p:nvSpPr>
+          <p:cNvPr id="88" name="Rectangle 87"/>
+          <p:cNvSpPr/>
+          <p:nvPr/>
+        </p:nvSpPr>
+        <p:spPr>
+          <a:xfrm>
+            <a:off x="457200" y="4233672"/>
+            <a:ext cx="73152" cy="548640"/>
+          </a:xfrm>
+          <a:prstGeom prst="rect">
+            <a:avLst/>
+          </a:prstGeom>
+          <a:solidFill>
+            <a:srgbClr val="D69E2E"/>
+          </a:solidFill>
+          <a:ln>
+            <a:noFill/>
+          </a:ln>
+        </p:spPr>
+        <p:style>
+          <a:lnRef idx="1">
+            <a:schemeClr val="accent1"/>
+          </a:lnRef>
+          <a:fillRef idx="3">
+            <a:schemeClr val="accent1"/>
+          </a:fillRef>
+          <a:effectRef idx="2">
+            <a:schemeClr val="accent1"/>
+          </a:effectRef>
+          <a:fontRef idx="minor">
+            <a:schemeClr val="lt1"/>
+          </a:fontRef>
+        </p:style>
+        <p:txBody>
+          <a:bodyPr rtlCol="0" anchor="ctr"/>
+          <a:lstStyle/>
+          <a:p>
+            <a:pPr algn="ctr"/>
+          </a:p>
+        </p:txBody>
+      </p:sp>
+      <p:sp>
+        <p:nvSpPr>
+          <p:cNvPr id="89" name="TextBox 88"/>
+          <p:cNvSpPr txBox="1"/>
+          <p:nvPr/>
+        </p:nvSpPr>
+        <p:spPr>
+          <a:xfrm>
+            <a:off x="640080" y="4270248"/>
+            <a:ext cx="7955280" cy="502920"/>
+          </a:xfrm>
+          <a:prstGeom prst="rect">
+            <a:avLst/>
+          </a:prstGeom>
+          <a:noFill/>
+        </p:spPr>
+        <p:txBody>
+          <a:bodyPr wrap="square" lIns="0" rIns="0" tIns="0" bIns="0">
+            <a:spAutoFit/>
+          </a:bodyPr>
+          <a:lstStyle/>
+          <a:p>
+            <a:pPr algn="l"/>
+            <a:r>
+              <a:rPr sz="1000" b="0">
+                <a:solidFill>
+                  <a:srgbClr val="2D3748"/>
+                </a:solidFill>
+                <a:latin typeface="Calibri"/>
+              </a:rPr>
+              <a:t>Comparison is to ODMI's 2025 merged_responses. The current sample is small and Policy-dimension heavy. ODMI's assessments are one cycle old, so where the swarm differs that does not automatically mean the swarm is wrong: the country may have changed since the assessment. Each disagreement is worth a human glance.</a:t>
+            </a:r>
+          </a:p>
+        </p:txBody>
+      </p:sp>
+      <p:sp>
+        <p:nvSpPr>
+          <p:cNvPr id="90" name="TextBox 89"/>
           <p:cNvSpPr txBox="1"/>
           <p:nvPr/>
         </p:nvSpPr>
@@ -10222,7 +9833,7 @@
                 </a:solidFill>
                 <a:latin typeface="Calibri"/>
               </a:rPr>
-              <a:t>ODMI Agent Swarm  ·  Benjy Bream  ·  King's College London  ·  5 / 7</a:t>
+              <a:t>ODMI Agent Swarm  ·  Benjy Bream  ·  King's College London  ·  5 / 8</a:t>
             </a:r>
           </a:p>
         </p:txBody>
@@ -10318,7 +9929,7 @@
                 </a:solidFill>
                 <a:latin typeface="Calibri"/>
               </a:rPr>
-              <a:t>SWARM IN ACTION</a:t>
+              <a:t>WHAT I'LL DEMO LIVE</a:t>
             </a:r>
           </a:p>
         </p:txBody>
@@ -10353,38 +9964,854 @@
                 </a:solidFill>
                 <a:latin typeface="Calibri"/>
               </a:rPr>
-              <a:t>Run Console — live view while the swarm runs</a:t>
-            </a:r>
-          </a:p>
-        </p:txBody>
-      </p:sp>
-      <p:pic>
-        <p:nvPicPr>
-          <p:cNvPr id="5" name="Picture 4" descr="swarm_in_action.png"/>
-          <p:cNvPicPr>
-            <a:picLocks noChangeAspect="1"/>
-          </p:cNvPicPr>
-          <p:nvPr/>
-        </p:nvPicPr>
-        <p:blipFill>
-          <a:blip r:embed="rId2"/>
-          <a:stretch>
-            <a:fillRect/>
-          </a:stretch>
-        </p:blipFill>
-        <p:spPr>
-          <a:xfrm>
-            <a:off x="457200" y="1051560"/>
-            <a:ext cx="8229600" cy="3794760"/>
-          </a:xfrm>
-          <a:prstGeom prst="rect">
-            <a:avLst/>
-          </a:prstGeom>
-        </p:spPr>
-      </p:pic>
-      <p:sp>
-        <p:nvSpPr>
-          <p:cNvPr id="6" name="TextBox 5"/>
+              <a:t>Best bits of the dashboard</a:t>
+            </a:r>
+          </a:p>
+        </p:txBody>
+      </p:sp>
+      <p:sp>
+        <p:nvSpPr>
+          <p:cNvPr id="5" name="Rectangle 4"/>
+          <p:cNvSpPr/>
+          <p:nvPr/>
+        </p:nvSpPr>
+        <p:spPr>
+          <a:xfrm>
+            <a:off x="457200" y="1234440"/>
+            <a:ext cx="4160520" cy="1691640"/>
+          </a:xfrm>
+          <a:prstGeom prst="rect">
+            <a:avLst/>
+          </a:prstGeom>
+          <a:solidFill>
+            <a:srgbClr val="FFFFFF"/>
+          </a:solidFill>
+          <a:ln w="6350">
+            <a:solidFill>
+              <a:srgbClr val="E2E8F0"/>
+            </a:solidFill>
+          </a:ln>
+        </p:spPr>
+        <p:style>
+          <a:lnRef idx="1">
+            <a:schemeClr val="accent1"/>
+          </a:lnRef>
+          <a:fillRef idx="3">
+            <a:schemeClr val="accent1"/>
+          </a:fillRef>
+          <a:effectRef idx="2">
+            <a:schemeClr val="accent1"/>
+          </a:effectRef>
+          <a:fontRef idx="minor">
+            <a:schemeClr val="lt1"/>
+          </a:fontRef>
+        </p:style>
+        <p:txBody>
+          <a:bodyPr rtlCol="0" anchor="ctr"/>
+          <a:lstStyle/>
+          <a:p>
+            <a:pPr algn="ctr"/>
+          </a:p>
+        </p:txBody>
+      </p:sp>
+      <p:sp>
+        <p:nvSpPr>
+          <p:cNvPr id="6" name="Rectangle 5"/>
+          <p:cNvSpPr/>
+          <p:nvPr/>
+        </p:nvSpPr>
+        <p:spPr>
+          <a:xfrm>
+            <a:off x="457200" y="1234440"/>
+            <a:ext cx="73152" cy="1691640"/>
+          </a:xfrm>
+          <a:prstGeom prst="rect">
+            <a:avLst/>
+          </a:prstGeom>
+          <a:solidFill>
+            <a:srgbClr val="0D9488"/>
+          </a:solidFill>
+          <a:ln>
+            <a:noFill/>
+          </a:ln>
+        </p:spPr>
+        <p:style>
+          <a:lnRef idx="1">
+            <a:schemeClr val="accent1"/>
+          </a:lnRef>
+          <a:fillRef idx="3">
+            <a:schemeClr val="accent1"/>
+          </a:fillRef>
+          <a:effectRef idx="2">
+            <a:schemeClr val="accent1"/>
+          </a:effectRef>
+          <a:fontRef idx="minor">
+            <a:schemeClr val="lt1"/>
+          </a:fontRef>
+        </p:style>
+        <p:txBody>
+          <a:bodyPr rtlCol="0" anchor="ctr"/>
+          <a:lstStyle/>
+          <a:p>
+            <a:pPr algn="ctr"/>
+          </a:p>
+        </p:txBody>
+      </p:sp>
+      <p:sp>
+        <p:nvSpPr>
+          <p:cNvPr id="7" name="Oval 6"/>
+          <p:cNvSpPr/>
+          <p:nvPr/>
+        </p:nvSpPr>
+        <p:spPr>
+          <a:xfrm>
+            <a:off x="731520" y="1463040"/>
+            <a:ext cx="502920" cy="502920"/>
+          </a:xfrm>
+          <a:prstGeom prst="ellipse">
+            <a:avLst/>
+          </a:prstGeom>
+          <a:solidFill>
+            <a:srgbClr val="0D9488"/>
+          </a:solidFill>
+          <a:ln>
+            <a:noFill/>
+          </a:ln>
+        </p:spPr>
+        <p:style>
+          <a:lnRef idx="1">
+            <a:schemeClr val="accent1"/>
+          </a:lnRef>
+          <a:fillRef idx="3">
+            <a:schemeClr val="accent1"/>
+          </a:fillRef>
+          <a:effectRef idx="2">
+            <a:schemeClr val="accent1"/>
+          </a:effectRef>
+          <a:fontRef idx="minor">
+            <a:schemeClr val="lt1"/>
+          </a:fontRef>
+        </p:style>
+        <p:txBody>
+          <a:bodyPr rtlCol="0" anchor="ctr"/>
+          <a:lstStyle/>
+          <a:p>
+            <a:pPr algn="ctr"/>
+            <a:r>
+              <a:rPr sz="1800" b="1">
+                <a:solidFill>
+                  <a:srgbClr val="FFFFFF"/>
+                </a:solidFill>
+                <a:latin typeface="Calibri"/>
+              </a:rPr>
+              <a:t>▶</a:t>
+            </a:r>
+          </a:p>
+        </p:txBody>
+      </p:sp>
+      <p:sp>
+        <p:nvSpPr>
+          <p:cNvPr id="8" name="TextBox 7"/>
+          <p:cNvSpPr txBox="1"/>
+          <p:nvPr/>
+        </p:nvSpPr>
+        <p:spPr>
+          <a:xfrm>
+            <a:off x="1371600" y="1490472"/>
+            <a:ext cx="3063240" cy="365760"/>
+          </a:xfrm>
+          <a:prstGeom prst="rect">
+            <a:avLst/>
+          </a:prstGeom>
+          <a:noFill/>
+        </p:spPr>
+        <p:txBody>
+          <a:bodyPr wrap="square" lIns="0" rIns="0" tIns="0" bIns="0">
+            <a:spAutoFit/>
+          </a:bodyPr>
+          <a:lstStyle/>
+          <a:p>
+            <a:pPr algn="l"/>
+            <a:r>
+              <a:rPr sz="1500" b="1">
+                <a:solidFill>
+                  <a:srgbClr val="1A202C"/>
+                </a:solidFill>
+                <a:latin typeface="Calibri"/>
+              </a:rPr>
+              <a:t>Run Console</a:t>
+            </a:r>
+          </a:p>
+        </p:txBody>
+      </p:sp>
+      <p:sp>
+        <p:nvSpPr>
+          <p:cNvPr id="9" name="TextBox 8"/>
+          <p:cNvSpPr txBox="1"/>
+          <p:nvPr/>
+        </p:nvSpPr>
+        <p:spPr>
+          <a:xfrm>
+            <a:off x="1371600" y="1874520"/>
+            <a:ext cx="3063240" cy="960120"/>
+          </a:xfrm>
+          <a:prstGeom prst="rect">
+            <a:avLst/>
+          </a:prstGeom>
+          <a:noFill/>
+        </p:spPr>
+        <p:txBody>
+          <a:bodyPr wrap="square" lIns="0" rIns="0" tIns="0" bIns="0">
+            <a:spAutoFit/>
+          </a:bodyPr>
+          <a:lstStyle/>
+          <a:p>
+            <a:pPr algn="l"/>
+            <a:r>
+              <a:rPr sz="1050" b="0">
+                <a:solidFill>
+                  <a:srgbClr val="2D3748"/>
+                </a:solidFill>
+                <a:latin typeface="Calibri"/>
+              </a:rPr>
+              <a:t>Multiselect questions × countries, pick the Verifier strategy and the model triple, dispatch a batch. Cost is estimated before the run starts.</a:t>
+            </a:r>
+          </a:p>
+        </p:txBody>
+      </p:sp>
+      <p:sp>
+        <p:nvSpPr>
+          <p:cNvPr id="10" name="Rectangle 9"/>
+          <p:cNvSpPr/>
+          <p:nvPr/>
+        </p:nvSpPr>
+        <p:spPr>
+          <a:xfrm>
+            <a:off x="4754880" y="1234440"/>
+            <a:ext cx="4160520" cy="1691640"/>
+          </a:xfrm>
+          <a:prstGeom prst="rect">
+            <a:avLst/>
+          </a:prstGeom>
+          <a:solidFill>
+            <a:srgbClr val="FFFFFF"/>
+          </a:solidFill>
+          <a:ln w="6350">
+            <a:solidFill>
+              <a:srgbClr val="E2E8F0"/>
+            </a:solidFill>
+          </a:ln>
+        </p:spPr>
+        <p:style>
+          <a:lnRef idx="1">
+            <a:schemeClr val="accent1"/>
+          </a:lnRef>
+          <a:fillRef idx="3">
+            <a:schemeClr val="accent1"/>
+          </a:fillRef>
+          <a:effectRef idx="2">
+            <a:schemeClr val="accent1"/>
+          </a:effectRef>
+          <a:fontRef idx="minor">
+            <a:schemeClr val="lt1"/>
+          </a:fontRef>
+        </p:style>
+        <p:txBody>
+          <a:bodyPr rtlCol="0" anchor="ctr"/>
+          <a:lstStyle/>
+          <a:p>
+            <a:pPr algn="ctr"/>
+          </a:p>
+        </p:txBody>
+      </p:sp>
+      <p:sp>
+        <p:nvSpPr>
+          <p:cNvPr id="11" name="Rectangle 10"/>
+          <p:cNvSpPr/>
+          <p:nvPr/>
+        </p:nvSpPr>
+        <p:spPr>
+          <a:xfrm>
+            <a:off x="4754880" y="1234440"/>
+            <a:ext cx="73152" cy="1691640"/>
+          </a:xfrm>
+          <a:prstGeom prst="rect">
+            <a:avLst/>
+          </a:prstGeom>
+          <a:solidFill>
+            <a:srgbClr val="1E3A5F"/>
+          </a:solidFill>
+          <a:ln>
+            <a:noFill/>
+          </a:ln>
+        </p:spPr>
+        <p:style>
+          <a:lnRef idx="1">
+            <a:schemeClr val="accent1"/>
+          </a:lnRef>
+          <a:fillRef idx="3">
+            <a:schemeClr val="accent1"/>
+          </a:fillRef>
+          <a:effectRef idx="2">
+            <a:schemeClr val="accent1"/>
+          </a:effectRef>
+          <a:fontRef idx="minor">
+            <a:schemeClr val="lt1"/>
+          </a:fontRef>
+        </p:style>
+        <p:txBody>
+          <a:bodyPr rtlCol="0" anchor="ctr"/>
+          <a:lstStyle/>
+          <a:p>
+            <a:pPr algn="ctr"/>
+          </a:p>
+        </p:txBody>
+      </p:sp>
+      <p:sp>
+        <p:nvSpPr>
+          <p:cNvPr id="12" name="Oval 11"/>
+          <p:cNvSpPr/>
+          <p:nvPr/>
+        </p:nvSpPr>
+        <p:spPr>
+          <a:xfrm>
+            <a:off x="5029200" y="1463040"/>
+            <a:ext cx="502920" cy="502920"/>
+          </a:xfrm>
+          <a:prstGeom prst="ellipse">
+            <a:avLst/>
+          </a:prstGeom>
+          <a:solidFill>
+            <a:srgbClr val="1E3A5F"/>
+          </a:solidFill>
+          <a:ln>
+            <a:noFill/>
+          </a:ln>
+        </p:spPr>
+        <p:style>
+          <a:lnRef idx="1">
+            <a:schemeClr val="accent1"/>
+          </a:lnRef>
+          <a:fillRef idx="3">
+            <a:schemeClr val="accent1"/>
+          </a:fillRef>
+          <a:effectRef idx="2">
+            <a:schemeClr val="accent1"/>
+          </a:effectRef>
+          <a:fontRef idx="minor">
+            <a:schemeClr val="lt1"/>
+          </a:fontRef>
+        </p:style>
+        <p:txBody>
+          <a:bodyPr rtlCol="0" anchor="ctr"/>
+          <a:lstStyle/>
+          <a:p>
+            <a:pPr algn="ctr"/>
+            <a:r>
+              <a:rPr sz="1800" b="1">
+                <a:solidFill>
+                  <a:srgbClr val="FFFFFF"/>
+                </a:solidFill>
+                <a:latin typeface="Calibri"/>
+              </a:rPr>
+              <a:t>📋</a:t>
+            </a:r>
+          </a:p>
+        </p:txBody>
+      </p:sp>
+      <p:sp>
+        <p:nvSpPr>
+          <p:cNvPr id="13" name="TextBox 12"/>
+          <p:cNvSpPr txBox="1"/>
+          <p:nvPr/>
+        </p:nvSpPr>
+        <p:spPr>
+          <a:xfrm>
+            <a:off x="5669280" y="1490472"/>
+            <a:ext cx="3063240" cy="365760"/>
+          </a:xfrm>
+          <a:prstGeom prst="rect">
+            <a:avLst/>
+          </a:prstGeom>
+          <a:noFill/>
+        </p:spPr>
+        <p:txBody>
+          <a:bodyPr wrap="square" lIns="0" rIns="0" tIns="0" bIns="0">
+            <a:spAutoFit/>
+          </a:bodyPr>
+          <a:lstStyle/>
+          <a:p>
+            <a:pPr algn="l"/>
+            <a:r>
+              <a:rPr sz="1500" b="1">
+                <a:solidFill>
+                  <a:srgbClr val="1A202C"/>
+                </a:solidFill>
+                <a:latin typeface="Calibri"/>
+              </a:rPr>
+              <a:t>Results · Cards view with ODMI side-by-side</a:t>
+            </a:r>
+          </a:p>
+        </p:txBody>
+      </p:sp>
+      <p:sp>
+        <p:nvSpPr>
+          <p:cNvPr id="14" name="TextBox 13"/>
+          <p:cNvSpPr txBox="1"/>
+          <p:nvPr/>
+        </p:nvSpPr>
+        <p:spPr>
+          <a:xfrm>
+            <a:off x="5669280" y="1874520"/>
+            <a:ext cx="3063240" cy="960120"/>
+          </a:xfrm>
+          <a:prstGeom prst="rect">
+            <a:avLst/>
+          </a:prstGeom>
+          <a:noFill/>
+        </p:spPr>
+        <p:txBody>
+          <a:bodyPr wrap="square" lIns="0" rIns="0" tIns="0" bIns="0">
+            <a:spAutoFit/>
+          </a:bodyPr>
+          <a:lstStyle/>
+          <a:p>
+            <a:pPr algn="l"/>
+            <a:r>
+              <a:rPr sz="1050" b="0">
+                <a:solidFill>
+                  <a:srgbClr val="2D3748"/>
+                </a:solidFill>
+                <a:latin typeface="Calibri"/>
+              </a:rPr>
+              <a:t>One card per finalised pair: question, swarm answer with evidence quote, clickable source URL, plus ODMI's recorded answer and explanation. Match / differ badge at a glance.</a:t>
+            </a:r>
+          </a:p>
+        </p:txBody>
+      </p:sp>
+      <p:sp>
+        <p:nvSpPr>
+          <p:cNvPr id="15" name="Rectangle 14"/>
+          <p:cNvSpPr/>
+          <p:nvPr/>
+        </p:nvSpPr>
+        <p:spPr>
+          <a:xfrm>
+            <a:off x="457200" y="3063240"/>
+            <a:ext cx="4160520" cy="1691640"/>
+          </a:xfrm>
+          <a:prstGeom prst="rect">
+            <a:avLst/>
+          </a:prstGeom>
+          <a:solidFill>
+            <a:srgbClr val="FFFFFF"/>
+          </a:solidFill>
+          <a:ln w="6350">
+            <a:solidFill>
+              <a:srgbClr val="E2E8F0"/>
+            </a:solidFill>
+          </a:ln>
+        </p:spPr>
+        <p:style>
+          <a:lnRef idx="1">
+            <a:schemeClr val="accent1"/>
+          </a:lnRef>
+          <a:fillRef idx="3">
+            <a:schemeClr val="accent1"/>
+          </a:fillRef>
+          <a:effectRef idx="2">
+            <a:schemeClr val="accent1"/>
+          </a:effectRef>
+          <a:fontRef idx="minor">
+            <a:schemeClr val="lt1"/>
+          </a:fontRef>
+        </p:style>
+        <p:txBody>
+          <a:bodyPr rtlCol="0" anchor="ctr"/>
+          <a:lstStyle/>
+          <a:p>
+            <a:pPr algn="ctr"/>
+          </a:p>
+        </p:txBody>
+      </p:sp>
+      <p:sp>
+        <p:nvSpPr>
+          <p:cNvPr id="16" name="Rectangle 15"/>
+          <p:cNvSpPr/>
+          <p:nvPr/>
+        </p:nvSpPr>
+        <p:spPr>
+          <a:xfrm>
+            <a:off x="457200" y="3063240"/>
+            <a:ext cx="73152" cy="1691640"/>
+          </a:xfrm>
+          <a:prstGeom prst="rect">
+            <a:avLst/>
+          </a:prstGeom>
+          <a:solidFill>
+            <a:srgbClr val="38A169"/>
+          </a:solidFill>
+          <a:ln>
+            <a:noFill/>
+          </a:ln>
+        </p:spPr>
+        <p:style>
+          <a:lnRef idx="1">
+            <a:schemeClr val="accent1"/>
+          </a:lnRef>
+          <a:fillRef idx="3">
+            <a:schemeClr val="accent1"/>
+          </a:fillRef>
+          <a:effectRef idx="2">
+            <a:schemeClr val="accent1"/>
+          </a:effectRef>
+          <a:fontRef idx="minor">
+            <a:schemeClr val="lt1"/>
+          </a:fontRef>
+        </p:style>
+        <p:txBody>
+          <a:bodyPr rtlCol="0" anchor="ctr"/>
+          <a:lstStyle/>
+          <a:p>
+            <a:pPr algn="ctr"/>
+          </a:p>
+        </p:txBody>
+      </p:sp>
+      <p:sp>
+        <p:nvSpPr>
+          <p:cNvPr id="17" name="Oval 16"/>
+          <p:cNvSpPr/>
+          <p:nvPr/>
+        </p:nvSpPr>
+        <p:spPr>
+          <a:xfrm>
+            <a:off x="731520" y="3291840"/>
+            <a:ext cx="502920" cy="502920"/>
+          </a:xfrm>
+          <a:prstGeom prst="ellipse">
+            <a:avLst/>
+          </a:prstGeom>
+          <a:solidFill>
+            <a:srgbClr val="38A169"/>
+          </a:solidFill>
+          <a:ln>
+            <a:noFill/>
+          </a:ln>
+        </p:spPr>
+        <p:style>
+          <a:lnRef idx="1">
+            <a:schemeClr val="accent1"/>
+          </a:lnRef>
+          <a:fillRef idx="3">
+            <a:schemeClr val="accent1"/>
+          </a:fillRef>
+          <a:effectRef idx="2">
+            <a:schemeClr val="accent1"/>
+          </a:effectRef>
+          <a:fontRef idx="minor">
+            <a:schemeClr val="lt1"/>
+          </a:fontRef>
+        </p:style>
+        <p:txBody>
+          <a:bodyPr rtlCol="0" anchor="ctr"/>
+          <a:lstStyle/>
+          <a:p>
+            <a:pPr algn="ctr"/>
+            <a:r>
+              <a:rPr sz="1800" b="1">
+                <a:solidFill>
+                  <a:srgbClr val="FFFFFF"/>
+                </a:solidFill>
+                <a:latin typeface="Calibri"/>
+              </a:rPr>
+              <a:t>📊</a:t>
+            </a:r>
+          </a:p>
+        </p:txBody>
+      </p:sp>
+      <p:sp>
+        <p:nvSpPr>
+          <p:cNvPr id="18" name="TextBox 17"/>
+          <p:cNvSpPr txBox="1"/>
+          <p:nvPr/>
+        </p:nvSpPr>
+        <p:spPr>
+          <a:xfrm>
+            <a:off x="1371600" y="3319272"/>
+            <a:ext cx="3063240" cy="365760"/>
+          </a:xfrm>
+          <a:prstGeom prst="rect">
+            <a:avLst/>
+          </a:prstGeom>
+          <a:noFill/>
+        </p:spPr>
+        <p:txBody>
+          <a:bodyPr wrap="square" lIns="0" rIns="0" tIns="0" bIns="0">
+            <a:spAutoFit/>
+          </a:bodyPr>
+          <a:lstStyle/>
+          <a:p>
+            <a:pPr algn="l"/>
+            <a:r>
+              <a:rPr sz="1500" b="1">
+                <a:solidFill>
+                  <a:srgbClr val="1A202C"/>
+                </a:solidFill>
+                <a:latin typeface="Calibri"/>
+              </a:rPr>
+              <a:t>Accuracy chart vs ODMI</a:t>
+            </a:r>
+          </a:p>
+        </p:txBody>
+      </p:sp>
+      <p:sp>
+        <p:nvSpPr>
+          <p:cNvPr id="19" name="TextBox 18"/>
+          <p:cNvSpPr txBox="1"/>
+          <p:nvPr/>
+        </p:nvSpPr>
+        <p:spPr>
+          <a:xfrm>
+            <a:off x="1371600" y="3703320"/>
+            <a:ext cx="3063240" cy="960120"/>
+          </a:xfrm>
+          <a:prstGeom prst="rect">
+            <a:avLst/>
+          </a:prstGeom>
+          <a:noFill/>
+        </p:spPr>
+        <p:txBody>
+          <a:bodyPr wrap="square" lIns="0" rIns="0" tIns="0" bIns="0">
+            <a:spAutoFit/>
+          </a:bodyPr>
+          <a:lstStyle/>
+          <a:p>
+            <a:pPr algn="l"/>
+            <a:r>
+              <a:rPr sz="1050" b="0">
+                <a:solidFill>
+                  <a:srgbClr val="2D3748"/>
+                </a:solidFill>
+                <a:latin typeface="Calibri"/>
+              </a:rPr>
+              <a:t>Per-country stacked bar of pairs that match ODMI 2025 versus those that differ. Headline accuracy KPI is read straight off the comparison.</a:t>
+            </a:r>
+          </a:p>
+        </p:txBody>
+      </p:sp>
+      <p:sp>
+        <p:nvSpPr>
+          <p:cNvPr id="20" name="Rectangle 19"/>
+          <p:cNvSpPr/>
+          <p:nvPr/>
+        </p:nvSpPr>
+        <p:spPr>
+          <a:xfrm>
+            <a:off x="4754880" y="3063240"/>
+            <a:ext cx="4160520" cy="1691640"/>
+          </a:xfrm>
+          <a:prstGeom prst="rect">
+            <a:avLst/>
+          </a:prstGeom>
+          <a:solidFill>
+            <a:srgbClr val="FFFFFF"/>
+          </a:solidFill>
+          <a:ln w="6350">
+            <a:solidFill>
+              <a:srgbClr val="E2E8F0"/>
+            </a:solidFill>
+          </a:ln>
+        </p:spPr>
+        <p:style>
+          <a:lnRef idx="1">
+            <a:schemeClr val="accent1"/>
+          </a:lnRef>
+          <a:fillRef idx="3">
+            <a:schemeClr val="accent1"/>
+          </a:fillRef>
+          <a:effectRef idx="2">
+            <a:schemeClr val="accent1"/>
+          </a:effectRef>
+          <a:fontRef idx="minor">
+            <a:schemeClr val="lt1"/>
+          </a:fontRef>
+        </p:style>
+        <p:txBody>
+          <a:bodyPr rtlCol="0" anchor="ctr"/>
+          <a:lstStyle/>
+          <a:p>
+            <a:pPr algn="ctr"/>
+          </a:p>
+        </p:txBody>
+      </p:sp>
+      <p:sp>
+        <p:nvSpPr>
+          <p:cNvPr id="21" name="Rectangle 20"/>
+          <p:cNvSpPr/>
+          <p:nvPr/>
+        </p:nvSpPr>
+        <p:spPr>
+          <a:xfrm>
+            <a:off x="4754880" y="3063240"/>
+            <a:ext cx="73152" cy="1691640"/>
+          </a:xfrm>
+          <a:prstGeom prst="rect">
+            <a:avLst/>
+          </a:prstGeom>
+          <a:solidFill>
+            <a:srgbClr val="0F766E"/>
+          </a:solidFill>
+          <a:ln>
+            <a:noFill/>
+          </a:ln>
+        </p:spPr>
+        <p:style>
+          <a:lnRef idx="1">
+            <a:schemeClr val="accent1"/>
+          </a:lnRef>
+          <a:fillRef idx="3">
+            <a:schemeClr val="accent1"/>
+          </a:fillRef>
+          <a:effectRef idx="2">
+            <a:schemeClr val="accent1"/>
+          </a:effectRef>
+          <a:fontRef idx="minor">
+            <a:schemeClr val="lt1"/>
+          </a:fontRef>
+        </p:style>
+        <p:txBody>
+          <a:bodyPr rtlCol="0" anchor="ctr"/>
+          <a:lstStyle/>
+          <a:p>
+            <a:pPr algn="ctr"/>
+          </a:p>
+        </p:txBody>
+      </p:sp>
+      <p:sp>
+        <p:nvSpPr>
+          <p:cNvPr id="22" name="Oval 21"/>
+          <p:cNvSpPr/>
+          <p:nvPr/>
+        </p:nvSpPr>
+        <p:spPr>
+          <a:xfrm>
+            <a:off x="5029200" y="3291840"/>
+            <a:ext cx="502920" cy="502920"/>
+          </a:xfrm>
+          <a:prstGeom prst="ellipse">
+            <a:avLst/>
+          </a:prstGeom>
+          <a:solidFill>
+            <a:srgbClr val="0F766E"/>
+          </a:solidFill>
+          <a:ln>
+            <a:noFill/>
+          </a:ln>
+        </p:spPr>
+        <p:style>
+          <a:lnRef idx="1">
+            <a:schemeClr val="accent1"/>
+          </a:lnRef>
+          <a:fillRef idx="3">
+            <a:schemeClr val="accent1"/>
+          </a:fillRef>
+          <a:effectRef idx="2">
+            <a:schemeClr val="accent1"/>
+          </a:effectRef>
+          <a:fontRef idx="minor">
+            <a:schemeClr val="lt1"/>
+          </a:fontRef>
+        </p:style>
+        <p:txBody>
+          <a:bodyPr rtlCol="0" anchor="ctr"/>
+          <a:lstStyle/>
+          <a:p>
+            <a:pPr algn="ctr"/>
+            <a:r>
+              <a:rPr sz="1800" b="1">
+                <a:solidFill>
+                  <a:srgbClr val="FFFFFF"/>
+                </a:solidFill>
+                <a:latin typeface="Calibri"/>
+              </a:rPr>
+              <a:t>💷</a:t>
+            </a:r>
+          </a:p>
+        </p:txBody>
+      </p:sp>
+      <p:sp>
+        <p:nvSpPr>
+          <p:cNvPr id="23" name="TextBox 22"/>
+          <p:cNvSpPr txBox="1"/>
+          <p:nvPr/>
+        </p:nvSpPr>
+        <p:spPr>
+          <a:xfrm>
+            <a:off x="5669280" y="3319272"/>
+            <a:ext cx="3063240" cy="365760"/>
+          </a:xfrm>
+          <a:prstGeom prst="rect">
+            <a:avLst/>
+          </a:prstGeom>
+          <a:noFill/>
+        </p:spPr>
+        <p:txBody>
+          <a:bodyPr wrap="square" lIns="0" rIns="0" tIns="0" bIns="0">
+            <a:spAutoFit/>
+          </a:bodyPr>
+          <a:lstStyle/>
+          <a:p>
+            <a:pPr algn="l"/>
+            <a:r>
+              <a:rPr sz="1500" b="1">
+                <a:solidFill>
+                  <a:srgbClr val="1A202C"/>
+                </a:solidFill>
+                <a:latin typeface="Calibri"/>
+              </a:rPr>
+              <a:t>Cost tracking and rolling budget</a:t>
+            </a:r>
+          </a:p>
+        </p:txBody>
+      </p:sp>
+      <p:sp>
+        <p:nvSpPr>
+          <p:cNvPr id="24" name="TextBox 23"/>
+          <p:cNvSpPr txBox="1"/>
+          <p:nvPr/>
+        </p:nvSpPr>
+        <p:spPr>
+          <a:xfrm>
+            <a:off x="5669280" y="3703320"/>
+            <a:ext cx="3063240" cy="960120"/>
+          </a:xfrm>
+          <a:prstGeom prst="rect">
+            <a:avLst/>
+          </a:prstGeom>
+          <a:noFill/>
+        </p:spPr>
+        <p:txBody>
+          <a:bodyPr wrap="square" lIns="0" rIns="0" tIns="0" bIns="0">
+            <a:spAutoFit/>
+          </a:bodyPr>
+          <a:lstStyle/>
+          <a:p>
+            <a:pPr algn="l"/>
+            <a:r>
+              <a:rPr sz="1050" b="0">
+                <a:solidFill>
+                  <a:srgbClr val="2D3748"/>
+                </a:solidFill>
+                <a:latin typeface="Calibri"/>
+              </a:rPr>
+              <a:t>Costs page shows the 5-hour rolling spend, per-model breakdown, and per-strategy averages. Rate-limit hits and soft-limit progress on every page's sidebar.</a:t>
+            </a:r>
+          </a:p>
+        </p:txBody>
+      </p:sp>
+      <p:sp>
+        <p:nvSpPr>
+          <p:cNvPr id="25" name="TextBox 24"/>
           <p:cNvSpPr txBox="1"/>
           <p:nvPr/>
         </p:nvSpPr>
@@ -10412,7 +10839,7 @@
                 </a:solidFill>
                 <a:latin typeface="Calibri"/>
               </a:rPr>
-              <a:t>ODMI Agent Swarm  ·  Benjy Bream  ·  King's College London  ·  6 / 7</a:t>
+              <a:t>ODMI Agent Swarm  ·  Benjy Bream  ·  King's College London  ·  6 / 8</a:t>
             </a:r>
           </a:p>
         </p:txBody>
@@ -10508,6 +10935,196 @@
                 </a:solidFill>
                 <a:latin typeface="Calibri"/>
               </a:rPr>
+              <a:t>SWARM IN ACTION</a:t>
+            </a:r>
+          </a:p>
+        </p:txBody>
+      </p:sp>
+      <p:sp>
+        <p:nvSpPr>
+          <p:cNvPr id="4" name="TextBox 3"/>
+          <p:cNvSpPr txBox="1"/>
+          <p:nvPr/>
+        </p:nvSpPr>
+        <p:spPr>
+          <a:xfrm>
+            <a:off x="457200" y="384048"/>
+            <a:ext cx="7772400" cy="502920"/>
+          </a:xfrm>
+          <a:prstGeom prst="rect">
+            <a:avLst/>
+          </a:prstGeom>
+          <a:noFill/>
+        </p:spPr>
+        <p:txBody>
+          <a:bodyPr wrap="square" lIns="0" rIns="0" tIns="0" bIns="0">
+            <a:spAutoFit/>
+          </a:bodyPr>
+          <a:lstStyle/>
+          <a:p>
+            <a:pPr algn="l"/>
+            <a:r>
+              <a:rPr sz="2400" b="1">
+                <a:solidFill>
+                  <a:srgbClr val="FFFFFF"/>
+                </a:solidFill>
+                <a:latin typeface="Calibri"/>
+              </a:rPr>
+              <a:t>Run Console — live view while the swarm runs</a:t>
+            </a:r>
+          </a:p>
+        </p:txBody>
+      </p:sp>
+      <p:pic>
+        <p:nvPicPr>
+          <p:cNvPr id="5" name="Picture 4" descr="swarm_in_action.png"/>
+          <p:cNvPicPr>
+            <a:picLocks noChangeAspect="1"/>
+          </p:cNvPicPr>
+          <p:nvPr/>
+        </p:nvPicPr>
+        <p:blipFill>
+          <a:blip r:embed="rId2"/>
+          <a:stretch>
+            <a:fillRect/>
+          </a:stretch>
+        </p:blipFill>
+        <p:spPr>
+          <a:xfrm>
+            <a:off x="457200" y="1051560"/>
+            <a:ext cx="8229600" cy="3794760"/>
+          </a:xfrm>
+          <a:prstGeom prst="rect">
+            <a:avLst/>
+          </a:prstGeom>
+        </p:spPr>
+      </p:pic>
+      <p:sp>
+        <p:nvSpPr>
+          <p:cNvPr id="6" name="TextBox 5"/>
+          <p:cNvSpPr txBox="1"/>
+          <p:nvPr/>
+        </p:nvSpPr>
+        <p:spPr>
+          <a:xfrm>
+            <a:off x="457200" y="4850892"/>
+            <a:ext cx="8229600" cy="182880"/>
+          </a:xfrm>
+          <a:prstGeom prst="rect">
+            <a:avLst/>
+          </a:prstGeom>
+          <a:noFill/>
+        </p:spPr>
+        <p:txBody>
+          <a:bodyPr wrap="square" lIns="0" rIns="0" tIns="0" bIns="0">
+            <a:spAutoFit/>
+          </a:bodyPr>
+          <a:lstStyle/>
+          <a:p>
+            <a:pPr algn="l"/>
+            <a:r>
+              <a:rPr sz="800" b="0">
+                <a:solidFill>
+                  <a:srgbClr val="718096"/>
+                </a:solidFill>
+                <a:latin typeface="Calibri"/>
+              </a:rPr>
+              <a:t>ODMI Agent Swarm  ·  Benjy Bream  ·  King's College London  ·  7 / 8</a:t>
+            </a:r>
+          </a:p>
+        </p:txBody>
+      </p:sp>
+    </p:spTree>
+  </p:cSld>
+  <p:clrMapOvr>
+    <a:masterClrMapping/>
+  </p:clrMapOvr>
+</p:sld>
+</file>
+
+<file path=ppt/slides/slide8.xml><?xml version="1.0" encoding="utf-8"?>
+<p:sld xmlns:a="http://schemas.openxmlformats.org/drawingml/2006/main" xmlns:p="http://schemas.openxmlformats.org/presentationml/2006/main" xmlns:r="http://schemas.openxmlformats.org/officeDocument/2006/relationships">
+  <p:cSld>
+    <p:spTree>
+      <p:nvGrpSpPr>
+        <p:cNvPr id="1" name=""/>
+        <p:cNvGrpSpPr/>
+        <p:nvPr/>
+      </p:nvGrpSpPr>
+      <p:grpSpPr/>
+      <p:sp>
+        <p:nvSpPr>
+          <p:cNvPr id="2" name="Rectangle 1"/>
+          <p:cNvSpPr/>
+          <p:nvPr/>
+        </p:nvSpPr>
+        <p:spPr>
+          <a:xfrm>
+            <a:off x="0" y="0"/>
+            <a:ext cx="9144000" cy="960120"/>
+          </a:xfrm>
+          <a:prstGeom prst="rect">
+            <a:avLst/>
+          </a:prstGeom>
+          <a:solidFill>
+            <a:srgbClr val="1A202C"/>
+          </a:solidFill>
+          <a:ln>
+            <a:noFill/>
+          </a:ln>
+        </p:spPr>
+        <p:style>
+          <a:lnRef idx="1">
+            <a:schemeClr val="accent1"/>
+          </a:lnRef>
+          <a:fillRef idx="3">
+            <a:schemeClr val="accent1"/>
+          </a:fillRef>
+          <a:effectRef idx="2">
+            <a:schemeClr val="accent1"/>
+          </a:effectRef>
+          <a:fontRef idx="minor">
+            <a:schemeClr val="lt1"/>
+          </a:fontRef>
+        </p:style>
+        <p:txBody>
+          <a:bodyPr rtlCol="0" anchor="ctr"/>
+          <a:lstStyle/>
+          <a:p>
+            <a:pPr algn="ctr"/>
+          </a:p>
+        </p:txBody>
+      </p:sp>
+      <p:sp>
+        <p:nvSpPr>
+          <p:cNvPr id="3" name="TextBox 2"/>
+          <p:cNvSpPr txBox="1"/>
+          <p:nvPr/>
+        </p:nvSpPr>
+        <p:spPr>
+          <a:xfrm>
+            <a:off x="457200" y="164592"/>
+            <a:ext cx="7772400" cy="228600"/>
+          </a:xfrm>
+          <a:prstGeom prst="rect">
+            <a:avLst/>
+          </a:prstGeom>
+          <a:noFill/>
+        </p:spPr>
+        <p:txBody>
+          <a:bodyPr wrap="square" lIns="0" rIns="0" tIns="0" bIns="0">
+            <a:spAutoFit/>
+          </a:bodyPr>
+          <a:lstStyle/>
+          <a:p>
+            <a:pPr algn="l"/>
+            <a:r>
+              <a:rPr sz="900" b="1">
+                <a:solidFill>
+                  <a:srgbClr val="14B8A6"/>
+                </a:solidFill>
+                <a:latin typeface="Calibri"/>
+              </a:rPr>
               <a:t>SHORT TERM AND LONG TERM</a:t>
             </a:r>
           </a:p>
@@ -11502,7 +12119,7 @@
                 </a:solidFill>
                 <a:latin typeface="Calibri"/>
               </a:rPr>
-              <a:t>ODMI Agent Swarm  ·  Benjy Bream  ·  King's College London  ·  7 / 7</a:t>
+              <a:t>ODMI Agent Swarm  ·  Benjy Bream  ·  King's College London  ·  8 / 8</a:t>
             </a:r>
           </a:p>
         </p:txBody>

--- a/docs/PROGRESS_SLIDES_2026-05-14.pptx
+++ b/docs/PROGRESS_SLIDES_2026-05-14.pptx
@@ -5,16 +5,15 @@
     <p:sldMasterId id="2147483648" r:id="rId1"/>
   </p:sldMasterIdLst>
   <p:sldIdLst>
-    <p:sldId id="256" r:id="rId7"/>
-    <p:sldId id="257" r:id="rId8"/>
-    <p:sldId id="258" r:id="rId9"/>
-    <p:sldId id="259" r:id="rId10"/>
-    <p:sldId id="260" r:id="rId11"/>
-    <p:sldId id="261" r:id="rId12"/>
-    <p:sldId id="262" r:id="rId13"/>
-    <p:sldId id="263" r:id="rId14"/>
+    <p:sldId id="256" r:id="rId2"/>
+    <p:sldId id="257" r:id="rId3"/>
+    <p:sldId id="262" r:id="rId4"/>
+    <p:sldId id="258" r:id="rId5"/>
+    <p:sldId id="260" r:id="rId6"/>
+    <p:sldId id="261" r:id="rId7"/>
+    <p:sldId id="263" r:id="rId8"/>
   </p:sldIdLst>
-  <p:sldSz cx="9144000" cy="5143500" type="screen4x3"/>
+  <p:sldSz cx="9144000" cy="5143500" type="screen16x9"/>
   <p:notesSz cx="6858000" cy="9144000"/>
   <p:defaultTextStyle>
     <a:defPPr>
@@ -111,6 +110,22 @@
       </a:defRPr>
     </a:lvl9pPr>
   </p:defaultTextStyle>
+  <p:extLst>
+    <p:ext uri="{EFAFB233-063F-42B5-8137-9DF3F51BA10A}">
+      <p15:sldGuideLst xmlns:p15="http://schemas.microsoft.com/office/powerpoint/2012/main">
+        <p15:guide id="1" orient="horz" pos="2160">
+          <p15:clr>
+            <a:srgbClr val="A4A3A4"/>
+          </p15:clr>
+        </p15:guide>
+        <p15:guide id="2" pos="2880">
+          <p15:clr>
+            <a:srgbClr val="A4A3A4"/>
+          </p15:clr>
+        </p15:guide>
+      </p15:sldGuideLst>
+    </p:ext>
+  </p:extLst>
 </p:presentation>
 </file>
 
@@ -152,10 +167,9 @@
           <a:lstStyle/>
           <a:p>
             <a:r>
-              <a:rPr lang="en-US" smtClean="0"/>
+              <a:rPr lang="en-US"/>
               <a:t>Click to edit Master title style</a:t>
             </a:r>
-            <a:endParaRPr lang="en-US"/>
           </a:p>
         </p:txBody>
       </p:sp>
@@ -271,10 +285,9 @@
           </a:lstStyle>
           <a:p>
             <a:r>
-              <a:rPr lang="en-US" smtClean="0"/>
+              <a:rPr lang="en-US"/>
               <a:t>Click to edit Master subtitle style</a:t>
             </a:r>
-            <a:endParaRPr lang="en-US"/>
           </a:p>
         </p:txBody>
       </p:sp>
@@ -295,7 +308,7 @@
           <a:p>
             <a:fld id="{5BCAD085-E8A6-8845-BD4E-CB4CCA059FC4}" type="datetimeFigureOut">
               <a:rPr lang="en-US" smtClean="0"/>
-              <a:t>1/27/13</a:t>
+              <a:t>5/14/26</a:t>
             </a:fld>
             <a:endParaRPr lang="en-US"/>
           </a:p>
@@ -389,10 +402,9 @@
           <a:lstStyle/>
           <a:p>
             <a:r>
-              <a:rPr lang="en-US" smtClean="0"/>
+              <a:rPr lang="en-US"/>
               <a:t>Click to edit Master title style</a:t>
             </a:r>
-            <a:endParaRPr lang="en-US"/>
           </a:p>
         </p:txBody>
       </p:sp>
@@ -413,38 +425,37 @@
           <a:p>
             <a:pPr lvl="0"/>
             <a:r>
-              <a:rPr lang="en-US" smtClean="0"/>
+              <a:rPr lang="en-US"/>
               <a:t>Click to edit Master text styles</a:t>
             </a:r>
           </a:p>
           <a:p>
             <a:pPr lvl="1"/>
             <a:r>
-              <a:rPr lang="en-US" smtClean="0"/>
+              <a:rPr lang="en-US"/>
               <a:t>Second level</a:t>
             </a:r>
           </a:p>
           <a:p>
             <a:pPr lvl="2"/>
             <a:r>
-              <a:rPr lang="en-US" smtClean="0"/>
+              <a:rPr lang="en-US"/>
               <a:t>Third level</a:t>
             </a:r>
           </a:p>
           <a:p>
             <a:pPr lvl="3"/>
             <a:r>
-              <a:rPr lang="en-US" smtClean="0"/>
+              <a:rPr lang="en-US"/>
               <a:t>Fourth level</a:t>
             </a:r>
           </a:p>
           <a:p>
             <a:pPr lvl="4"/>
             <a:r>
-              <a:rPr lang="en-US" smtClean="0"/>
+              <a:rPr lang="en-US"/>
               <a:t>Fifth level</a:t>
             </a:r>
-            <a:endParaRPr lang="en-US"/>
           </a:p>
         </p:txBody>
       </p:sp>
@@ -465,7 +476,7 @@
           <a:p>
             <a:fld id="{5BCAD085-E8A6-8845-BD4E-CB4CCA059FC4}" type="datetimeFigureOut">
               <a:rPr lang="en-US" smtClean="0"/>
-              <a:t>1/27/13</a:t>
+              <a:t>5/14/26</a:t>
             </a:fld>
             <a:endParaRPr lang="en-US"/>
           </a:p>
@@ -564,10 +575,9 @@
           <a:lstStyle/>
           <a:p>
             <a:r>
-              <a:rPr lang="en-US" smtClean="0"/>
+              <a:rPr lang="en-US"/>
               <a:t>Click to edit Master title style</a:t>
             </a:r>
-            <a:endParaRPr lang="en-US"/>
           </a:p>
         </p:txBody>
       </p:sp>
@@ -593,38 +603,37 @@
           <a:p>
             <a:pPr lvl="0"/>
             <a:r>
-              <a:rPr lang="en-US" smtClean="0"/>
+              <a:rPr lang="en-US"/>
               <a:t>Click to edit Master text styles</a:t>
             </a:r>
           </a:p>
           <a:p>
             <a:pPr lvl="1"/>
             <a:r>
-              <a:rPr lang="en-US" smtClean="0"/>
+              <a:rPr lang="en-US"/>
               <a:t>Second level</a:t>
             </a:r>
           </a:p>
           <a:p>
             <a:pPr lvl="2"/>
             <a:r>
-              <a:rPr lang="en-US" smtClean="0"/>
+              <a:rPr lang="en-US"/>
               <a:t>Third level</a:t>
             </a:r>
           </a:p>
           <a:p>
             <a:pPr lvl="3"/>
             <a:r>
-              <a:rPr lang="en-US" smtClean="0"/>
+              <a:rPr lang="en-US"/>
               <a:t>Fourth level</a:t>
             </a:r>
           </a:p>
           <a:p>
             <a:pPr lvl="4"/>
             <a:r>
-              <a:rPr lang="en-US" smtClean="0"/>
+              <a:rPr lang="en-US"/>
               <a:t>Fifth level</a:t>
             </a:r>
-            <a:endParaRPr lang="en-US"/>
           </a:p>
         </p:txBody>
       </p:sp>
@@ -645,7 +654,7 @@
           <a:p>
             <a:fld id="{5BCAD085-E8A6-8845-BD4E-CB4CCA059FC4}" type="datetimeFigureOut">
               <a:rPr lang="en-US" smtClean="0"/>
-              <a:t>1/27/13</a:t>
+              <a:t>5/14/26</a:t>
             </a:fld>
             <a:endParaRPr lang="en-US"/>
           </a:p>
@@ -739,10 +748,9 @@
           <a:lstStyle/>
           <a:p>
             <a:r>
-              <a:rPr lang="en-US" smtClean="0"/>
+              <a:rPr lang="en-US"/>
               <a:t>Click to edit Master title style</a:t>
             </a:r>
-            <a:endParaRPr lang="en-US"/>
           </a:p>
         </p:txBody>
       </p:sp>
@@ -763,38 +771,37 @@
           <a:p>
             <a:pPr lvl="0"/>
             <a:r>
-              <a:rPr lang="en-US" smtClean="0"/>
+              <a:rPr lang="en-US"/>
               <a:t>Click to edit Master text styles</a:t>
             </a:r>
           </a:p>
           <a:p>
             <a:pPr lvl="1"/>
             <a:r>
-              <a:rPr lang="en-US" smtClean="0"/>
+              <a:rPr lang="en-US"/>
               <a:t>Second level</a:t>
             </a:r>
           </a:p>
           <a:p>
             <a:pPr lvl="2"/>
             <a:r>
-              <a:rPr lang="en-US" smtClean="0"/>
+              <a:rPr lang="en-US"/>
               <a:t>Third level</a:t>
             </a:r>
           </a:p>
           <a:p>
             <a:pPr lvl="3"/>
             <a:r>
-              <a:rPr lang="en-US" smtClean="0"/>
+              <a:rPr lang="en-US"/>
               <a:t>Fourth level</a:t>
             </a:r>
           </a:p>
           <a:p>
             <a:pPr lvl="4"/>
             <a:r>
-              <a:rPr lang="en-US" smtClean="0"/>
+              <a:rPr lang="en-US"/>
               <a:t>Fifth level</a:t>
             </a:r>
-            <a:endParaRPr lang="en-US"/>
           </a:p>
         </p:txBody>
       </p:sp>
@@ -815,7 +822,7 @@
           <a:p>
             <a:fld id="{5BCAD085-E8A6-8845-BD4E-CB4CCA059FC4}" type="datetimeFigureOut">
               <a:rPr lang="en-US" smtClean="0"/>
-              <a:t>1/27/13</a:t>
+              <a:t>5/14/26</a:t>
             </a:fld>
             <a:endParaRPr lang="en-US"/>
           </a:p>
@@ -918,10 +925,9 @@
           </a:lstStyle>
           <a:p>
             <a:r>
-              <a:rPr lang="en-US" smtClean="0"/>
+              <a:rPr lang="en-US"/>
               <a:t>Click to edit Master title style</a:t>
             </a:r>
-            <a:endParaRPr lang="en-US"/>
           </a:p>
         </p:txBody>
       </p:sp>
@@ -1038,7 +1044,7 @@
           <a:p>
             <a:pPr lvl="0"/>
             <a:r>
-              <a:rPr lang="en-US" smtClean="0"/>
+              <a:rPr lang="en-US"/>
               <a:t>Click to edit Master text styles</a:t>
             </a:r>
           </a:p>
@@ -1061,7 +1067,7 @@
           <a:p>
             <a:fld id="{5BCAD085-E8A6-8845-BD4E-CB4CCA059FC4}" type="datetimeFigureOut">
               <a:rPr lang="en-US" smtClean="0"/>
-              <a:t>1/27/13</a:t>
+              <a:t>5/14/26</a:t>
             </a:fld>
             <a:endParaRPr lang="en-US"/>
           </a:p>
@@ -1155,10 +1161,9 @@
           <a:lstStyle/>
           <a:p>
             <a:r>
-              <a:rPr lang="en-US" smtClean="0"/>
+              <a:rPr lang="en-US"/>
               <a:t>Click to edit Master title style</a:t>
             </a:r>
-            <a:endParaRPr lang="en-US"/>
           </a:p>
         </p:txBody>
       </p:sp>
@@ -1212,38 +1217,37 @@
           <a:p>
             <a:pPr lvl="0"/>
             <a:r>
-              <a:rPr lang="en-US" smtClean="0"/>
+              <a:rPr lang="en-US"/>
               <a:t>Click to edit Master text styles</a:t>
             </a:r>
           </a:p>
           <a:p>
             <a:pPr lvl="1"/>
             <a:r>
-              <a:rPr lang="en-US" smtClean="0"/>
+              <a:rPr lang="en-US"/>
               <a:t>Second level</a:t>
             </a:r>
           </a:p>
           <a:p>
             <a:pPr lvl="2"/>
             <a:r>
-              <a:rPr lang="en-US" smtClean="0"/>
+              <a:rPr lang="en-US"/>
               <a:t>Third level</a:t>
             </a:r>
           </a:p>
           <a:p>
             <a:pPr lvl="3"/>
             <a:r>
-              <a:rPr lang="en-US" smtClean="0"/>
+              <a:rPr lang="en-US"/>
               <a:t>Fourth level</a:t>
             </a:r>
           </a:p>
           <a:p>
             <a:pPr lvl="4"/>
             <a:r>
-              <a:rPr lang="en-US" smtClean="0"/>
+              <a:rPr lang="en-US"/>
               <a:t>Fifth level</a:t>
             </a:r>
-            <a:endParaRPr lang="en-US"/>
           </a:p>
         </p:txBody>
       </p:sp>
@@ -1297,38 +1301,37 @@
           <a:p>
             <a:pPr lvl="0"/>
             <a:r>
-              <a:rPr lang="en-US" smtClean="0"/>
+              <a:rPr lang="en-US"/>
               <a:t>Click to edit Master text styles</a:t>
             </a:r>
           </a:p>
           <a:p>
             <a:pPr lvl="1"/>
             <a:r>
-              <a:rPr lang="en-US" smtClean="0"/>
+              <a:rPr lang="en-US"/>
               <a:t>Second level</a:t>
             </a:r>
           </a:p>
           <a:p>
             <a:pPr lvl="2"/>
             <a:r>
-              <a:rPr lang="en-US" smtClean="0"/>
+              <a:rPr lang="en-US"/>
               <a:t>Third level</a:t>
             </a:r>
           </a:p>
           <a:p>
             <a:pPr lvl="3"/>
             <a:r>
-              <a:rPr lang="en-US" smtClean="0"/>
+              <a:rPr lang="en-US"/>
               <a:t>Fourth level</a:t>
             </a:r>
           </a:p>
           <a:p>
             <a:pPr lvl="4"/>
             <a:r>
-              <a:rPr lang="en-US" smtClean="0"/>
+              <a:rPr lang="en-US"/>
               <a:t>Fifth level</a:t>
             </a:r>
-            <a:endParaRPr lang="en-US"/>
           </a:p>
         </p:txBody>
       </p:sp>
@@ -1349,7 +1352,7 @@
           <a:p>
             <a:fld id="{5BCAD085-E8A6-8845-BD4E-CB4CCA059FC4}" type="datetimeFigureOut">
               <a:rPr lang="en-US" smtClean="0"/>
-              <a:t>1/27/13</a:t>
+              <a:t>5/14/26</a:t>
             </a:fld>
             <a:endParaRPr lang="en-US"/>
           </a:p>
@@ -1447,10 +1450,9 @@
           </a:lstStyle>
           <a:p>
             <a:r>
-              <a:rPr lang="en-US" smtClean="0"/>
+              <a:rPr lang="en-US"/>
               <a:t>Click to edit Master title style</a:t>
             </a:r>
-            <a:endParaRPr lang="en-US"/>
           </a:p>
         </p:txBody>
       </p:sp>
@@ -1513,7 +1515,7 @@
           <a:p>
             <a:pPr lvl="0"/>
             <a:r>
-              <a:rPr lang="en-US" smtClean="0"/>
+              <a:rPr lang="en-US"/>
               <a:t>Click to edit Master text styles</a:t>
             </a:r>
           </a:p>
@@ -1569,38 +1571,37 @@
           <a:p>
             <a:pPr lvl="0"/>
             <a:r>
-              <a:rPr lang="en-US" smtClean="0"/>
+              <a:rPr lang="en-US"/>
               <a:t>Click to edit Master text styles</a:t>
             </a:r>
           </a:p>
           <a:p>
             <a:pPr lvl="1"/>
             <a:r>
-              <a:rPr lang="en-US" smtClean="0"/>
+              <a:rPr lang="en-US"/>
               <a:t>Second level</a:t>
             </a:r>
           </a:p>
           <a:p>
             <a:pPr lvl="2"/>
             <a:r>
-              <a:rPr lang="en-US" smtClean="0"/>
+              <a:rPr lang="en-US"/>
               <a:t>Third level</a:t>
             </a:r>
           </a:p>
           <a:p>
             <a:pPr lvl="3"/>
             <a:r>
-              <a:rPr lang="en-US" smtClean="0"/>
+              <a:rPr lang="en-US"/>
               <a:t>Fourth level</a:t>
             </a:r>
           </a:p>
           <a:p>
             <a:pPr lvl="4"/>
             <a:r>
-              <a:rPr lang="en-US" smtClean="0"/>
+              <a:rPr lang="en-US"/>
               <a:t>Fifth level</a:t>
             </a:r>
-            <a:endParaRPr lang="en-US"/>
           </a:p>
         </p:txBody>
       </p:sp>
@@ -1663,7 +1664,7 @@
           <a:p>
             <a:pPr lvl="0"/>
             <a:r>
-              <a:rPr lang="en-US" smtClean="0"/>
+              <a:rPr lang="en-US"/>
               <a:t>Click to edit Master text styles</a:t>
             </a:r>
           </a:p>
@@ -1719,38 +1720,37 @@
           <a:p>
             <a:pPr lvl="0"/>
             <a:r>
-              <a:rPr lang="en-US" smtClean="0"/>
+              <a:rPr lang="en-US"/>
               <a:t>Click to edit Master text styles</a:t>
             </a:r>
           </a:p>
           <a:p>
             <a:pPr lvl="1"/>
             <a:r>
-              <a:rPr lang="en-US" smtClean="0"/>
+              <a:rPr lang="en-US"/>
               <a:t>Second level</a:t>
             </a:r>
           </a:p>
           <a:p>
             <a:pPr lvl="2"/>
             <a:r>
-              <a:rPr lang="en-US" smtClean="0"/>
+              <a:rPr lang="en-US"/>
               <a:t>Third level</a:t>
             </a:r>
           </a:p>
           <a:p>
             <a:pPr lvl="3"/>
             <a:r>
-              <a:rPr lang="en-US" smtClean="0"/>
+              <a:rPr lang="en-US"/>
               <a:t>Fourth level</a:t>
             </a:r>
           </a:p>
           <a:p>
             <a:pPr lvl="4"/>
             <a:r>
-              <a:rPr lang="en-US" smtClean="0"/>
+              <a:rPr lang="en-US"/>
               <a:t>Fifth level</a:t>
             </a:r>
-            <a:endParaRPr lang="en-US"/>
           </a:p>
         </p:txBody>
       </p:sp>
@@ -1771,7 +1771,7 @@
           <a:p>
             <a:fld id="{5BCAD085-E8A6-8845-BD4E-CB4CCA059FC4}" type="datetimeFigureOut">
               <a:rPr lang="en-US" smtClean="0"/>
-              <a:t>1/27/13</a:t>
+              <a:t>5/14/26</a:t>
             </a:fld>
             <a:endParaRPr lang="en-US"/>
           </a:p>
@@ -1865,10 +1865,9 @@
           <a:lstStyle/>
           <a:p>
             <a:r>
-              <a:rPr lang="en-US" smtClean="0"/>
+              <a:rPr lang="en-US"/>
               <a:t>Click to edit Master title style</a:t>
             </a:r>
-            <a:endParaRPr lang="en-US"/>
           </a:p>
         </p:txBody>
       </p:sp>
@@ -1889,7 +1888,7 @@
           <a:p>
             <a:fld id="{5BCAD085-E8A6-8845-BD4E-CB4CCA059FC4}" type="datetimeFigureOut">
               <a:rPr lang="en-US" smtClean="0"/>
-              <a:t>1/27/13</a:t>
+              <a:t>5/14/26</a:t>
             </a:fld>
             <a:endParaRPr lang="en-US"/>
           </a:p>
@@ -1984,7 +1983,7 @@
           <a:p>
             <a:fld id="{5BCAD085-E8A6-8845-BD4E-CB4CCA059FC4}" type="datetimeFigureOut">
               <a:rPr lang="en-US" smtClean="0"/>
-              <a:t>1/27/13</a:t>
+              <a:t>5/14/26</a:t>
             </a:fld>
             <a:endParaRPr lang="en-US"/>
           </a:p>
@@ -2087,10 +2086,9 @@
           </a:lstStyle>
           <a:p>
             <a:r>
-              <a:rPr lang="en-US" smtClean="0"/>
+              <a:rPr lang="en-US"/>
               <a:t>Click to edit Master title style</a:t>
             </a:r>
-            <a:endParaRPr lang="en-US"/>
           </a:p>
         </p:txBody>
       </p:sp>
@@ -2144,38 +2142,37 @@
           <a:p>
             <a:pPr lvl="0"/>
             <a:r>
-              <a:rPr lang="en-US" smtClean="0"/>
+              <a:rPr lang="en-US"/>
               <a:t>Click to edit Master text styles</a:t>
             </a:r>
           </a:p>
           <a:p>
             <a:pPr lvl="1"/>
             <a:r>
-              <a:rPr lang="en-US" smtClean="0"/>
+              <a:rPr lang="en-US"/>
               <a:t>Second level</a:t>
             </a:r>
           </a:p>
           <a:p>
             <a:pPr lvl="2"/>
             <a:r>
-              <a:rPr lang="en-US" smtClean="0"/>
+              <a:rPr lang="en-US"/>
               <a:t>Third level</a:t>
             </a:r>
           </a:p>
           <a:p>
             <a:pPr lvl="3"/>
             <a:r>
-              <a:rPr lang="en-US" smtClean="0"/>
+              <a:rPr lang="en-US"/>
               <a:t>Fourth level</a:t>
             </a:r>
           </a:p>
           <a:p>
             <a:pPr lvl="4"/>
             <a:r>
-              <a:rPr lang="en-US" smtClean="0"/>
+              <a:rPr lang="en-US"/>
               <a:t>Fifth level</a:t>
             </a:r>
-            <a:endParaRPr lang="en-US"/>
           </a:p>
         </p:txBody>
       </p:sp>
@@ -2238,7 +2235,7 @@
           <a:p>
             <a:pPr lvl="0"/>
             <a:r>
-              <a:rPr lang="en-US" smtClean="0"/>
+              <a:rPr lang="en-US"/>
               <a:t>Click to edit Master text styles</a:t>
             </a:r>
           </a:p>
@@ -2261,7 +2258,7 @@
           <a:p>
             <a:fld id="{5BCAD085-E8A6-8845-BD4E-CB4CCA059FC4}" type="datetimeFigureOut">
               <a:rPr lang="en-US" smtClean="0"/>
-              <a:t>1/27/13</a:t>
+              <a:t>5/14/26</a:t>
             </a:fld>
             <a:endParaRPr lang="en-US"/>
           </a:p>
@@ -2364,10 +2361,9 @@
           </a:lstStyle>
           <a:p>
             <a:r>
-              <a:rPr lang="en-US" smtClean="0"/>
+              <a:rPr lang="en-US"/>
               <a:t>Click to edit Master title style</a:t>
             </a:r>
-            <a:endParaRPr lang="en-US"/>
           </a:p>
         </p:txBody>
       </p:sp>
@@ -2491,7 +2487,7 @@
           <a:p>
             <a:pPr lvl="0"/>
             <a:r>
-              <a:rPr lang="en-US" smtClean="0"/>
+              <a:rPr lang="en-US"/>
               <a:t>Click to edit Master text styles</a:t>
             </a:r>
           </a:p>
@@ -2514,7 +2510,7 @@
           <a:p>
             <a:fld id="{5BCAD085-E8A6-8845-BD4E-CB4CCA059FC4}" type="datetimeFigureOut">
               <a:rPr lang="en-US" smtClean="0"/>
-              <a:t>1/27/13</a:t>
+              <a:t>5/14/26</a:t>
             </a:fld>
             <a:endParaRPr lang="en-US"/>
           </a:p>
@@ -2623,10 +2619,9 @@
           <a:lstStyle/>
           <a:p>
             <a:r>
-              <a:rPr lang="en-US" smtClean="0"/>
+              <a:rPr lang="en-US"/>
               <a:t>Click to edit Master title style</a:t>
             </a:r>
-            <a:endParaRPr lang="en-US"/>
           </a:p>
         </p:txBody>
       </p:sp>
@@ -2657,38 +2652,37 @@
           <a:p>
             <a:pPr lvl="0"/>
             <a:r>
-              <a:rPr lang="en-US" smtClean="0"/>
+              <a:rPr lang="en-US"/>
               <a:t>Click to edit Master text styles</a:t>
             </a:r>
           </a:p>
           <a:p>
             <a:pPr lvl="1"/>
             <a:r>
-              <a:rPr lang="en-US" smtClean="0"/>
+              <a:rPr lang="en-US"/>
               <a:t>Second level</a:t>
             </a:r>
           </a:p>
           <a:p>
             <a:pPr lvl="2"/>
             <a:r>
-              <a:rPr lang="en-US" smtClean="0"/>
+              <a:rPr lang="en-US"/>
               <a:t>Third level</a:t>
             </a:r>
           </a:p>
           <a:p>
             <a:pPr lvl="3"/>
             <a:r>
-              <a:rPr lang="en-US" smtClean="0"/>
+              <a:rPr lang="en-US"/>
               <a:t>Fourth level</a:t>
             </a:r>
           </a:p>
           <a:p>
             <a:pPr lvl="4"/>
             <a:r>
-              <a:rPr lang="en-US" smtClean="0"/>
+              <a:rPr lang="en-US"/>
               <a:t>Fifth level</a:t>
             </a:r>
-            <a:endParaRPr lang="en-US"/>
           </a:p>
         </p:txBody>
       </p:sp>
@@ -2727,7 +2721,7 @@
           <a:p>
             <a:fld id="{5BCAD085-E8A6-8845-BD4E-CB4CCA059FC4}" type="datetimeFigureOut">
               <a:rPr lang="en-US" smtClean="0"/>
-              <a:t>1/27/13</a:t>
+              <a:t>5/14/26</a:t>
             </a:fld>
             <a:endParaRPr lang="en-US"/>
           </a:p>
@@ -3086,7 +3080,7 @@
 </file>
 
 <file path=ppt/slides/slide1.xml><?xml version="1.0" encoding="utf-8"?>
-<p:sld xmlns:a="http://schemas.openxmlformats.org/drawingml/2006/main" xmlns:p="http://schemas.openxmlformats.org/presentationml/2006/main" xmlns:r="http://schemas.openxmlformats.org/officeDocument/2006/relationships">
+<p:sld xmlns:a="http://schemas.openxmlformats.org/drawingml/2006/main" xmlns:r="http://schemas.openxmlformats.org/officeDocument/2006/relationships" xmlns:p="http://schemas.openxmlformats.org/presentationml/2006/main">
   <p:cSld>
     <p:spTree>
       <p:nvGrpSpPr>
@@ -3094,7 +3088,14 @@
         <p:cNvGrpSpPr/>
         <p:nvPr/>
       </p:nvGrpSpPr>
-      <p:grpSpPr/>
+      <p:grpSpPr>
+        <a:xfrm>
+          <a:off x="0" y="0"/>
+          <a:ext cx="0" cy="0"/>
+          <a:chOff x="0" y="0"/>
+          <a:chExt cx="0" cy="0"/>
+        </a:xfrm>
+      </p:grpSpPr>
       <p:sp>
         <p:nvSpPr>
           <p:cNvPr id="2" name="Rectangle 1"/>
@@ -3135,6 +3136,7 @@
           <a:lstStyle/>
           <a:p>
             <a:pPr algn="ctr"/>
+            <a:endParaRPr/>
           </a:p>
         </p:txBody>
       </p:sp>
@@ -3178,6 +3180,7 @@
           <a:lstStyle/>
           <a:p>
             <a:pPr algn="ctr"/>
+            <a:endParaRPr/>
           </a:p>
         </p:txBody>
       </p:sp>
@@ -3198,7 +3201,7 @@
           <a:noFill/>
         </p:spPr>
         <p:txBody>
-          <a:bodyPr wrap="square" lIns="0" rIns="0" tIns="0" bIns="0">
+          <a:bodyPr wrap="square" lIns="0" tIns="0" rIns="0" bIns="0">
             <a:spAutoFit/>
           </a:bodyPr>
           <a:lstStyle/>
@@ -3233,7 +3236,7 @@
           <a:noFill/>
         </p:spPr>
         <p:txBody>
-          <a:bodyPr wrap="square" lIns="0" rIns="0" tIns="0" bIns="0">
+          <a:bodyPr wrap="square" lIns="0" tIns="0" rIns="0" bIns="0">
             <a:spAutoFit/>
           </a:bodyPr>
           <a:lstStyle/>
@@ -3289,7 +3292,7 @@
           <a:noFill/>
         </p:spPr>
         <p:txBody>
-          <a:bodyPr wrap="square" lIns="0" rIns="0" tIns="0" bIns="0">
+          <a:bodyPr wrap="square" lIns="0" tIns="0" rIns="0" bIns="0">
             <a:spAutoFit/>
           </a:bodyPr>
           <a:lstStyle/>
@@ -3324,7 +3327,7 @@
           <a:noFill/>
         </p:spPr>
         <p:txBody>
-          <a:bodyPr wrap="square" lIns="0" rIns="0" tIns="0" bIns="0">
+          <a:bodyPr wrap="square" lIns="0" tIns="0" rIns="0" bIns="0">
             <a:spAutoFit/>
           </a:bodyPr>
           <a:lstStyle/>
@@ -3351,7 +3354,7 @@
 </file>
 
 <file path=ppt/slides/slide2.xml><?xml version="1.0" encoding="utf-8"?>
-<p:sld xmlns:a="http://schemas.openxmlformats.org/drawingml/2006/main" xmlns:p="http://schemas.openxmlformats.org/presentationml/2006/main" xmlns:r="http://schemas.openxmlformats.org/officeDocument/2006/relationships">
+<p:sld xmlns:a="http://schemas.openxmlformats.org/drawingml/2006/main" xmlns:r="http://schemas.openxmlformats.org/officeDocument/2006/relationships" xmlns:p="http://schemas.openxmlformats.org/presentationml/2006/main">
   <p:cSld>
     <p:spTree>
       <p:nvGrpSpPr>
@@ -3359,7 +3362,14 @@
         <p:cNvGrpSpPr/>
         <p:nvPr/>
       </p:nvGrpSpPr>
-      <p:grpSpPr/>
+      <p:grpSpPr>
+        <a:xfrm>
+          <a:off x="0" y="0"/>
+          <a:ext cx="0" cy="0"/>
+          <a:chOff x="0" y="0"/>
+          <a:chExt cx="0" cy="0"/>
+        </a:xfrm>
+      </p:grpSpPr>
       <p:sp>
         <p:nvSpPr>
           <p:cNvPr id="2" name="Rectangle 1"/>
@@ -3400,6 +3410,7 @@
           <a:lstStyle/>
           <a:p>
             <a:pPr algn="ctr"/>
+            <a:endParaRPr/>
           </a:p>
         </p:txBody>
       </p:sp>
@@ -3420,7 +3431,7 @@
           <a:noFill/>
         </p:spPr>
         <p:txBody>
-          <a:bodyPr wrap="square" lIns="0" rIns="0" tIns="0" bIns="0">
+          <a:bodyPr wrap="square" lIns="0" tIns="0" rIns="0" bIns="0">
             <a:spAutoFit/>
           </a:bodyPr>
           <a:lstStyle/>
@@ -3455,7 +3466,7 @@
           <a:noFill/>
         </p:spPr>
         <p:txBody>
-          <a:bodyPr wrap="square" lIns="0" rIns="0" tIns="0" bIns="0">
+          <a:bodyPr wrap="square" lIns="0" tIns="0" rIns="0" bIns="0">
             <a:spAutoFit/>
           </a:bodyPr>
           <a:lstStyle/>
@@ -3515,6 +3526,7 @@
           <a:lstStyle/>
           <a:p>
             <a:pPr algn="ctr"/>
+            <a:endParaRPr/>
           </a:p>
         </p:txBody>
       </p:sp>
@@ -3558,6 +3570,7 @@
           <a:lstStyle/>
           <a:p>
             <a:pPr algn="ctr"/>
+            <a:endParaRPr/>
           </a:p>
         </p:txBody>
       </p:sp>
@@ -3578,7 +3591,7 @@
           <a:noFill/>
         </p:spPr>
         <p:txBody>
-          <a:bodyPr wrap="square" lIns="0" rIns="0" tIns="0" bIns="0">
+          <a:bodyPr wrap="square" lIns="0" tIns="0" rIns="0" bIns="0">
             <a:spAutoFit/>
           </a:bodyPr>
           <a:lstStyle/>
@@ -3613,7 +3626,7 @@
           <a:noFill/>
         </p:spPr>
         <p:txBody>
-          <a:bodyPr wrap="square" lIns="0" rIns="0" tIns="0" bIns="0">
+          <a:bodyPr wrap="square" lIns="0" tIns="0" rIns="0" bIns="0">
             <a:spAutoFit/>
           </a:bodyPr>
           <a:lstStyle/>
@@ -3648,7 +3661,7 @@
           <a:noFill/>
         </p:spPr>
         <p:txBody>
-          <a:bodyPr wrap="square" lIns="0" rIns="0" tIns="0" bIns="0">
+          <a:bodyPr wrap="square" lIns="0" tIns="0" rIns="0" bIns="0">
             <a:spAutoFit/>
           </a:bodyPr>
           <a:lstStyle/>
@@ -3708,6 +3721,7 @@
           <a:lstStyle/>
           <a:p>
             <a:pPr algn="ctr"/>
+            <a:endParaRPr/>
           </a:p>
         </p:txBody>
       </p:sp>
@@ -3751,6 +3765,7 @@
           <a:lstStyle/>
           <a:p>
             <a:pPr algn="ctr"/>
+            <a:endParaRPr/>
           </a:p>
         </p:txBody>
       </p:sp>
@@ -3771,7 +3786,7 @@
           <a:noFill/>
         </p:spPr>
         <p:txBody>
-          <a:bodyPr wrap="square" lIns="0" rIns="0" tIns="0" bIns="0">
+          <a:bodyPr wrap="square" lIns="0" tIns="0" rIns="0" bIns="0">
             <a:spAutoFit/>
           </a:bodyPr>
           <a:lstStyle/>
@@ -3806,7 +3821,7 @@
           <a:noFill/>
         </p:spPr>
         <p:txBody>
-          <a:bodyPr wrap="square" lIns="0" rIns="0" tIns="0" bIns="0">
+          <a:bodyPr wrap="square" lIns="0" tIns="0" rIns="0" bIns="0">
             <a:spAutoFit/>
           </a:bodyPr>
           <a:lstStyle/>
@@ -3841,7 +3856,7 @@
           <a:noFill/>
         </p:spPr>
         <p:txBody>
-          <a:bodyPr wrap="square" lIns="0" rIns="0" tIns="0" bIns="0">
+          <a:bodyPr wrap="square" lIns="0" tIns="0" rIns="0" bIns="0">
             <a:spAutoFit/>
           </a:bodyPr>
           <a:lstStyle/>
@@ -3901,6 +3916,7 @@
           <a:lstStyle/>
           <a:p>
             <a:pPr algn="ctr"/>
+            <a:endParaRPr/>
           </a:p>
         </p:txBody>
       </p:sp>
@@ -3944,6 +3960,7 @@
           <a:lstStyle/>
           <a:p>
             <a:pPr algn="ctr"/>
+            <a:endParaRPr/>
           </a:p>
         </p:txBody>
       </p:sp>
@@ -3964,7 +3981,7 @@
           <a:noFill/>
         </p:spPr>
         <p:txBody>
-          <a:bodyPr wrap="square" lIns="0" rIns="0" tIns="0" bIns="0">
+          <a:bodyPr wrap="square" lIns="0" tIns="0" rIns="0" bIns="0">
             <a:spAutoFit/>
           </a:bodyPr>
           <a:lstStyle/>
@@ -3999,7 +4016,7 @@
           <a:noFill/>
         </p:spPr>
         <p:txBody>
-          <a:bodyPr wrap="square" lIns="0" rIns="0" tIns="0" bIns="0">
+          <a:bodyPr wrap="square" lIns="0" tIns="0" rIns="0" bIns="0">
             <a:spAutoFit/>
           </a:bodyPr>
           <a:lstStyle/>
@@ -4034,7 +4051,7 @@
           <a:noFill/>
         </p:spPr>
         <p:txBody>
-          <a:bodyPr wrap="square" lIns="0" rIns="0" tIns="0" bIns="0">
+          <a:bodyPr wrap="square" lIns="0" tIns="0" rIns="0" bIns="0">
             <a:spAutoFit/>
           </a:bodyPr>
           <a:lstStyle/>
@@ -4094,6 +4111,7 @@
           <a:lstStyle/>
           <a:p>
             <a:pPr algn="ctr"/>
+            <a:endParaRPr/>
           </a:p>
         </p:txBody>
       </p:sp>
@@ -4137,6 +4155,7 @@
           <a:lstStyle/>
           <a:p>
             <a:pPr algn="ctr"/>
+            <a:endParaRPr/>
           </a:p>
         </p:txBody>
       </p:sp>
@@ -4157,7 +4176,7 @@
           <a:noFill/>
         </p:spPr>
         <p:txBody>
-          <a:bodyPr wrap="square" lIns="0" rIns="0" tIns="0" bIns="0">
+          <a:bodyPr wrap="square" lIns="0" tIns="0" rIns="0" bIns="0">
             <a:spAutoFit/>
           </a:bodyPr>
           <a:lstStyle/>
@@ -4192,7 +4211,7 @@
           <a:noFill/>
         </p:spPr>
         <p:txBody>
-          <a:bodyPr wrap="square" lIns="0" rIns="0" tIns="0" bIns="0">
+          <a:bodyPr wrap="square" lIns="0" tIns="0" rIns="0" bIns="0">
             <a:spAutoFit/>
           </a:bodyPr>
           <a:lstStyle/>
@@ -4227,7 +4246,7 @@
           <a:noFill/>
         </p:spPr>
         <p:txBody>
-          <a:bodyPr wrap="square" lIns="0" rIns="0" tIns="0" bIns="0">
+          <a:bodyPr wrap="square" lIns="0" tIns="0" rIns="0" bIns="0">
             <a:spAutoFit/>
           </a:bodyPr>
           <a:lstStyle/>
@@ -4287,6 +4306,7 @@
           <a:lstStyle/>
           <a:p>
             <a:pPr algn="ctr"/>
+            <a:endParaRPr/>
           </a:p>
         </p:txBody>
       </p:sp>
@@ -4330,6 +4350,7 @@
           <a:lstStyle/>
           <a:p>
             <a:pPr algn="ctr"/>
+            <a:endParaRPr/>
           </a:p>
         </p:txBody>
       </p:sp>
@@ -4350,7 +4371,7 @@
           <a:noFill/>
         </p:spPr>
         <p:txBody>
-          <a:bodyPr wrap="square" lIns="0" rIns="0" tIns="0" bIns="0">
+          <a:bodyPr wrap="square" lIns="0" tIns="0" rIns="0" bIns="0">
             <a:spAutoFit/>
           </a:bodyPr>
           <a:lstStyle/>
@@ -4385,7 +4406,7 @@
           <a:noFill/>
         </p:spPr>
         <p:txBody>
-          <a:bodyPr wrap="square" lIns="0" rIns="0" tIns="0" bIns="0">
+          <a:bodyPr wrap="square" lIns="0" tIns="0" rIns="0" bIns="0">
             <a:spAutoFit/>
           </a:bodyPr>
           <a:lstStyle/>
@@ -4445,6 +4466,7 @@
           <a:lstStyle/>
           <a:p>
             <a:pPr algn="ctr"/>
+            <a:endParaRPr/>
           </a:p>
         </p:txBody>
       </p:sp>
@@ -4488,6 +4510,7 @@
           <a:lstStyle/>
           <a:p>
             <a:pPr algn="ctr"/>
+            <a:endParaRPr/>
           </a:p>
         </p:txBody>
       </p:sp>
@@ -4508,7 +4531,7 @@
           <a:noFill/>
         </p:spPr>
         <p:txBody>
-          <a:bodyPr wrap="square" lIns="0" rIns="0" tIns="0" bIns="0">
+          <a:bodyPr wrap="square" lIns="0" tIns="0" rIns="0" bIns="0">
             <a:spAutoFit/>
           </a:bodyPr>
           <a:lstStyle/>
@@ -4543,7 +4566,7 @@
           <a:noFill/>
         </p:spPr>
         <p:txBody>
-          <a:bodyPr wrap="square" lIns="0" rIns="0" tIns="0" bIns="0">
+          <a:bodyPr wrap="square" lIns="0" tIns="0" rIns="0" bIns="0">
             <a:spAutoFit/>
           </a:bodyPr>
           <a:lstStyle/>
@@ -4578,7 +4601,7 @@
           <a:noFill/>
         </p:spPr>
         <p:txBody>
-          <a:bodyPr wrap="square" lIns="0" rIns="0" tIns="0" bIns="0">
+          <a:bodyPr wrap="square" lIns="0" tIns="0" rIns="0" bIns="0">
             <a:spAutoFit/>
           </a:bodyPr>
           <a:lstStyle/>
@@ -4605,7 +4628,7 @@
 </file>
 
 <file path=ppt/slides/slide3.xml><?xml version="1.0" encoding="utf-8"?>
-<p:sld xmlns:a="http://schemas.openxmlformats.org/drawingml/2006/main" xmlns:p="http://schemas.openxmlformats.org/presentationml/2006/main" xmlns:r="http://schemas.openxmlformats.org/officeDocument/2006/relationships">
+<p:sld xmlns:a="http://schemas.openxmlformats.org/drawingml/2006/main" xmlns:r="http://schemas.openxmlformats.org/officeDocument/2006/relationships" xmlns:p="http://schemas.openxmlformats.org/presentationml/2006/main">
   <p:cSld>
     <p:spTree>
       <p:nvGrpSpPr>
@@ -4613,7 +4636,14 @@
         <p:cNvGrpSpPr/>
         <p:nvPr/>
       </p:nvGrpSpPr>
-      <p:grpSpPr/>
+      <p:grpSpPr>
+        <a:xfrm>
+          <a:off x="0" y="0"/>
+          <a:ext cx="0" cy="0"/>
+          <a:chOff x="0" y="0"/>
+          <a:chExt cx="0" cy="0"/>
+        </a:xfrm>
+      </p:grpSpPr>
       <p:sp>
         <p:nvSpPr>
           <p:cNvPr id="2" name="Rectangle 1"/>
@@ -4654,6 +4684,7 @@
           <a:lstStyle/>
           <a:p>
             <a:pPr algn="ctr"/>
+            <a:endParaRPr/>
           </a:p>
         </p:txBody>
       </p:sp>
@@ -4674,7 +4705,7 @@
           <a:noFill/>
         </p:spPr>
         <p:txBody>
-          <a:bodyPr wrap="square" lIns="0" rIns="0" tIns="0" bIns="0">
+          <a:bodyPr wrap="square" lIns="0" tIns="0" rIns="0" bIns="0">
             <a:spAutoFit/>
           </a:bodyPr>
           <a:lstStyle/>
@@ -4687,7 +4718,7 @@
                 </a:solidFill>
                 <a:latin typeface="Calibri"/>
               </a:rPr>
-              <a:t>COORDINATOR STATE MACHINE</a:t>
+              <a:t>SWARM IN ACTION</a:t>
             </a:r>
           </a:p>
         </p:txBody>
@@ -4709,7 +4740,7 @@
           <a:noFill/>
         </p:spPr>
         <p:txBody>
-          <a:bodyPr wrap="square" lIns="0" rIns="0" tIns="0" bIns="0">
+          <a:bodyPr wrap="square" lIns="0" tIns="0" rIns="0" bIns="0">
             <a:spAutoFit/>
           </a:bodyPr>
           <a:lstStyle/>
@@ -4722,804 +4753,38 @@
                 </a:solidFill>
                 <a:latin typeface="Calibri"/>
               </a:rPr>
-              <a:t>How the swarm answers one question</a:t>
-            </a:r>
-          </a:p>
-        </p:txBody>
-      </p:sp>
-      <p:sp>
-        <p:nvSpPr>
-          <p:cNvPr id="5" name="Rectangle 4"/>
-          <p:cNvSpPr/>
-          <p:nvPr/>
-        </p:nvSpPr>
-        <p:spPr>
-          <a:xfrm>
-            <a:off x="457200" y="1463040"/>
-            <a:ext cx="2468880" cy="1508760"/>
-          </a:xfrm>
-          <a:prstGeom prst="rect">
-            <a:avLst/>
-          </a:prstGeom>
-          <a:solidFill>
-            <a:srgbClr val="FFFFFF"/>
-          </a:solidFill>
-          <a:ln w="6350">
-            <a:solidFill>
-              <a:srgbClr val="E2E8F0"/>
-            </a:solidFill>
-          </a:ln>
-        </p:spPr>
-        <p:style>
-          <a:lnRef idx="1">
-            <a:schemeClr val="accent1"/>
-          </a:lnRef>
-          <a:fillRef idx="3">
-            <a:schemeClr val="accent1"/>
-          </a:fillRef>
-          <a:effectRef idx="2">
-            <a:schemeClr val="accent1"/>
-          </a:effectRef>
-          <a:fontRef idx="minor">
-            <a:schemeClr val="lt1"/>
-          </a:fontRef>
-        </p:style>
-        <p:txBody>
-          <a:bodyPr rtlCol="0" anchor="ctr"/>
-          <a:lstStyle/>
-          <a:p>
-            <a:pPr algn="ctr"/>
-          </a:p>
-        </p:txBody>
-      </p:sp>
-      <p:sp>
-        <p:nvSpPr>
-          <p:cNvPr id="6" name="Rectangle 5"/>
-          <p:cNvSpPr/>
-          <p:nvPr/>
-        </p:nvSpPr>
-        <p:spPr>
-          <a:xfrm>
-            <a:off x="457200" y="1463040"/>
-            <a:ext cx="2468880" cy="320040"/>
-          </a:xfrm>
-          <a:prstGeom prst="rect">
-            <a:avLst/>
-          </a:prstGeom>
-          <a:solidFill>
-            <a:srgbClr val="0D9488"/>
-          </a:solidFill>
-          <a:ln>
-            <a:noFill/>
-          </a:ln>
-        </p:spPr>
-        <p:style>
-          <a:lnRef idx="1">
-            <a:schemeClr val="accent1"/>
-          </a:lnRef>
-          <a:fillRef idx="3">
-            <a:schemeClr val="accent1"/>
-          </a:fillRef>
-          <a:effectRef idx="2">
-            <a:schemeClr val="accent1"/>
-          </a:effectRef>
-          <a:fontRef idx="minor">
-            <a:schemeClr val="lt1"/>
-          </a:fontRef>
-        </p:style>
-        <p:txBody>
-          <a:bodyPr rtlCol="0" anchor="ctr"/>
-          <a:lstStyle/>
-          <a:p>
-            <a:pPr algn="ctr"/>
-          </a:p>
-        </p:txBody>
-      </p:sp>
-      <p:sp>
-        <p:nvSpPr>
-          <p:cNvPr id="7" name="TextBox 6"/>
-          <p:cNvSpPr txBox="1"/>
-          <p:nvPr/>
-        </p:nvSpPr>
-        <p:spPr>
-          <a:xfrm>
-            <a:off x="640080" y="1508760"/>
-            <a:ext cx="2103120" cy="246888"/>
-          </a:xfrm>
-          <a:prstGeom prst="rect">
-            <a:avLst/>
-          </a:prstGeom>
-          <a:noFill/>
-        </p:spPr>
-        <p:txBody>
-          <a:bodyPr wrap="square" lIns="0" rIns="0" tIns="0" bIns="0">
-            <a:spAutoFit/>
-          </a:bodyPr>
-          <a:lstStyle/>
-          <a:p>
-            <a:pPr algn="l"/>
-            <a:r>
-              <a:rPr sz="1200" b="1">
-                <a:solidFill>
-                  <a:srgbClr val="FFFFFF"/>
-                </a:solidFill>
-                <a:latin typeface="Calibri"/>
-              </a:rPr>
-              <a:t>RESEARCHER</a:t>
-            </a:r>
-          </a:p>
-        </p:txBody>
-      </p:sp>
-      <p:sp>
-        <p:nvSpPr>
-          <p:cNvPr id="8" name="TextBox 7"/>
-          <p:cNvSpPr txBox="1"/>
-          <p:nvPr/>
-        </p:nvSpPr>
-        <p:spPr>
-          <a:xfrm>
-            <a:off x="640080" y="1920240"/>
-            <a:ext cx="2103120" cy="960120"/>
-          </a:xfrm>
-          <a:prstGeom prst="rect">
-            <a:avLst/>
-          </a:prstGeom>
-          <a:noFill/>
-        </p:spPr>
-        <p:txBody>
-          <a:bodyPr wrap="square" lIns="0" rIns="0" tIns="0" bIns="0">
-            <a:spAutoFit/>
-          </a:bodyPr>
-          <a:lstStyle/>
-          <a:p>
-            <a:pPr algn="l"/>
-            <a:r>
-              <a:rPr sz="1050" b="0">
-                <a:solidFill>
-                  <a:srgbClr val="2D3748"/>
-                </a:solidFill>
-                <a:latin typeface="Calibri"/>
-              </a:rPr>
-              <a:t>Tavily search → fetch URL → reason → return {answer, source_url, evidence_quote, confidence}.</a:t>
-            </a:r>
-          </a:p>
-        </p:txBody>
-      </p:sp>
-      <p:sp>
-        <p:nvSpPr>
-          <p:cNvPr id="9" name="Rectangle 8"/>
-          <p:cNvSpPr/>
-          <p:nvPr/>
-        </p:nvSpPr>
-        <p:spPr>
-          <a:xfrm>
-            <a:off x="3337560" y="1463040"/>
-            <a:ext cx="2468880" cy="1508760"/>
-          </a:xfrm>
-          <a:prstGeom prst="rect">
-            <a:avLst/>
-          </a:prstGeom>
-          <a:solidFill>
-            <a:srgbClr val="FFFFFF"/>
-          </a:solidFill>
-          <a:ln w="6350">
-            <a:solidFill>
-              <a:srgbClr val="E2E8F0"/>
-            </a:solidFill>
-          </a:ln>
-        </p:spPr>
-        <p:style>
-          <a:lnRef idx="1">
-            <a:schemeClr val="accent1"/>
-          </a:lnRef>
-          <a:fillRef idx="3">
-            <a:schemeClr val="accent1"/>
-          </a:fillRef>
-          <a:effectRef idx="2">
-            <a:schemeClr val="accent1"/>
-          </a:effectRef>
-          <a:fontRef idx="minor">
-            <a:schemeClr val="lt1"/>
-          </a:fontRef>
-        </p:style>
-        <p:txBody>
-          <a:bodyPr rtlCol="0" anchor="ctr"/>
-          <a:lstStyle/>
-          <a:p>
-            <a:pPr algn="ctr"/>
-          </a:p>
-        </p:txBody>
-      </p:sp>
-      <p:sp>
-        <p:nvSpPr>
-          <p:cNvPr id="10" name="Rectangle 9"/>
-          <p:cNvSpPr/>
-          <p:nvPr/>
-        </p:nvSpPr>
-        <p:spPr>
-          <a:xfrm>
-            <a:off x="3337560" y="1463040"/>
-            <a:ext cx="2468880" cy="320040"/>
-          </a:xfrm>
-          <a:prstGeom prst="rect">
-            <a:avLst/>
-          </a:prstGeom>
-          <a:solidFill>
-            <a:srgbClr val="1E3A5F"/>
-          </a:solidFill>
-          <a:ln>
-            <a:noFill/>
-          </a:ln>
-        </p:spPr>
-        <p:style>
-          <a:lnRef idx="1">
-            <a:schemeClr val="accent1"/>
-          </a:lnRef>
-          <a:fillRef idx="3">
-            <a:schemeClr val="accent1"/>
-          </a:fillRef>
-          <a:effectRef idx="2">
-            <a:schemeClr val="accent1"/>
-          </a:effectRef>
-          <a:fontRef idx="minor">
-            <a:schemeClr val="lt1"/>
-          </a:fontRef>
-        </p:style>
-        <p:txBody>
-          <a:bodyPr rtlCol="0" anchor="ctr"/>
-          <a:lstStyle/>
-          <a:p>
-            <a:pPr algn="ctr"/>
-          </a:p>
-        </p:txBody>
-      </p:sp>
-      <p:sp>
-        <p:nvSpPr>
-          <p:cNvPr id="11" name="TextBox 10"/>
-          <p:cNvSpPr txBox="1"/>
-          <p:nvPr/>
-        </p:nvSpPr>
-        <p:spPr>
-          <a:xfrm>
-            <a:off x="3520440" y="1508760"/>
-            <a:ext cx="2103120" cy="246888"/>
-          </a:xfrm>
-          <a:prstGeom prst="rect">
-            <a:avLst/>
-          </a:prstGeom>
-          <a:noFill/>
-        </p:spPr>
-        <p:txBody>
-          <a:bodyPr wrap="square" lIns="0" rIns="0" tIns="0" bIns="0">
-            <a:spAutoFit/>
-          </a:bodyPr>
-          <a:lstStyle/>
-          <a:p>
-            <a:pPr algn="l"/>
-            <a:r>
-              <a:rPr sz="1200" b="1">
-                <a:solidFill>
-                  <a:srgbClr val="FFFFFF"/>
-                </a:solidFill>
-                <a:latin typeface="Calibri"/>
-              </a:rPr>
-              <a:t>VERIFIER</a:t>
-            </a:r>
-          </a:p>
-        </p:txBody>
-      </p:sp>
-      <p:sp>
-        <p:nvSpPr>
-          <p:cNvPr id="12" name="TextBox 11"/>
-          <p:cNvSpPr txBox="1"/>
-          <p:nvPr/>
-        </p:nvSpPr>
-        <p:spPr>
-          <a:xfrm>
-            <a:off x="3520440" y="1920240"/>
-            <a:ext cx="2103120" cy="960120"/>
-          </a:xfrm>
-          <a:prstGeom prst="rect">
-            <a:avLst/>
-          </a:prstGeom>
-          <a:noFill/>
-        </p:spPr>
-        <p:txBody>
-          <a:bodyPr wrap="square" lIns="0" rIns="0" tIns="0" bIns="0">
-            <a:spAutoFit/>
-          </a:bodyPr>
-          <a:lstStyle/>
-          <a:p>
-            <a:pPr algn="l"/>
-            <a:r>
-              <a:rPr sz="1050" b="0">
-                <a:solidFill>
-                  <a:srgbClr val="2D3748"/>
-                </a:solidFill>
-                <a:latin typeface="Calibri"/>
-              </a:rPr>
-              <a:t>Substring-checks the Researcher's quote, runs an independent search, and reasons adversarially (default strategy: find a way to disprove the claim). Returns pass / fail with counter-evidence.</a:t>
-            </a:r>
-          </a:p>
-        </p:txBody>
-      </p:sp>
-      <p:sp>
-        <p:nvSpPr>
-          <p:cNvPr id="13" name="Rectangle 12"/>
-          <p:cNvSpPr/>
-          <p:nvPr/>
-        </p:nvSpPr>
-        <p:spPr>
-          <a:xfrm>
-            <a:off x="6217920" y="1463040"/>
-            <a:ext cx="2468880" cy="1508760"/>
-          </a:xfrm>
-          <a:prstGeom prst="rect">
-            <a:avLst/>
-          </a:prstGeom>
-          <a:solidFill>
-            <a:srgbClr val="FFFFFF"/>
-          </a:solidFill>
-          <a:ln w="6350">
-            <a:solidFill>
-              <a:srgbClr val="E2E8F0"/>
-            </a:solidFill>
-          </a:ln>
-        </p:spPr>
-        <p:style>
-          <a:lnRef idx="1">
-            <a:schemeClr val="accent1"/>
-          </a:lnRef>
-          <a:fillRef idx="3">
-            <a:schemeClr val="accent1"/>
-          </a:fillRef>
-          <a:effectRef idx="2">
-            <a:schemeClr val="accent1"/>
-          </a:effectRef>
-          <a:fontRef idx="minor">
-            <a:schemeClr val="lt1"/>
-          </a:fontRef>
-        </p:style>
-        <p:txBody>
-          <a:bodyPr rtlCol="0" anchor="ctr"/>
-          <a:lstStyle/>
-          <a:p>
-            <a:pPr algn="ctr"/>
-          </a:p>
-        </p:txBody>
-      </p:sp>
-      <p:sp>
-        <p:nvSpPr>
-          <p:cNvPr id="14" name="Rectangle 13"/>
-          <p:cNvSpPr/>
-          <p:nvPr/>
-        </p:nvSpPr>
-        <p:spPr>
-          <a:xfrm>
-            <a:off x="6217920" y="1463040"/>
-            <a:ext cx="2468880" cy="320040"/>
-          </a:xfrm>
-          <a:prstGeom prst="rect">
-            <a:avLst/>
-          </a:prstGeom>
-          <a:solidFill>
-            <a:srgbClr val="C53030"/>
-          </a:solidFill>
-          <a:ln>
-            <a:noFill/>
-          </a:ln>
-        </p:spPr>
-        <p:style>
-          <a:lnRef idx="1">
-            <a:schemeClr val="accent1"/>
-          </a:lnRef>
-          <a:fillRef idx="3">
-            <a:schemeClr val="accent1"/>
-          </a:fillRef>
-          <a:effectRef idx="2">
-            <a:schemeClr val="accent1"/>
-          </a:effectRef>
-          <a:fontRef idx="minor">
-            <a:schemeClr val="lt1"/>
-          </a:fontRef>
-        </p:style>
-        <p:txBody>
-          <a:bodyPr rtlCol="0" anchor="ctr"/>
-          <a:lstStyle/>
-          <a:p>
-            <a:pPr algn="ctr"/>
-          </a:p>
-        </p:txBody>
-      </p:sp>
-      <p:sp>
-        <p:nvSpPr>
-          <p:cNvPr id="15" name="TextBox 14"/>
-          <p:cNvSpPr txBox="1"/>
-          <p:nvPr/>
-        </p:nvSpPr>
-        <p:spPr>
-          <a:xfrm>
-            <a:off x="6400800" y="1508760"/>
-            <a:ext cx="2103120" cy="246888"/>
-          </a:xfrm>
-          <a:prstGeom prst="rect">
-            <a:avLst/>
-          </a:prstGeom>
-          <a:noFill/>
-        </p:spPr>
-        <p:txBody>
-          <a:bodyPr wrap="square" lIns="0" rIns="0" tIns="0" bIns="0">
-            <a:spAutoFit/>
-          </a:bodyPr>
-          <a:lstStyle/>
-          <a:p>
-            <a:pPr algn="l"/>
-            <a:r>
-              <a:rPr sz="1200" b="1">
-                <a:solidFill>
-                  <a:srgbClr val="FFFFFF"/>
-                </a:solidFill>
-                <a:latin typeface="Calibri"/>
-              </a:rPr>
-              <a:t>ADJUDICATOR</a:t>
-            </a:r>
-          </a:p>
-        </p:txBody>
-      </p:sp>
-      <p:sp>
-        <p:nvSpPr>
-          <p:cNvPr id="16" name="TextBox 15"/>
-          <p:cNvSpPr txBox="1"/>
-          <p:nvPr/>
-        </p:nvSpPr>
-        <p:spPr>
-          <a:xfrm>
-            <a:off x="6400800" y="1920240"/>
-            <a:ext cx="2103120" cy="960120"/>
-          </a:xfrm>
-          <a:prstGeom prst="rect">
-            <a:avLst/>
-          </a:prstGeom>
-          <a:noFill/>
-        </p:spPr>
-        <p:txBody>
-          <a:bodyPr wrap="square" lIns="0" rIns="0" tIns="0" bIns="0">
-            <a:spAutoFit/>
-          </a:bodyPr>
-          <a:lstStyle/>
-          <a:p>
-            <a:pPr algn="l"/>
-            <a:r>
-              <a:rPr sz="1050" b="0">
-                <a:solidFill>
-                  <a:srgbClr val="2D3748"/>
-                </a:solidFill>
-                <a:latin typeface="Calibri"/>
-              </a:rPr>
-              <a:t>Fires only on retry exhaustion. Reads the full history. Picks a winner or escalates to a human queue.</a:t>
-            </a:r>
-          </a:p>
-        </p:txBody>
-      </p:sp>
-      <p:sp>
-        <p:nvSpPr>
-          <p:cNvPr id="17" name="Right Arrow 16"/>
-          <p:cNvSpPr/>
-          <p:nvPr/>
-        </p:nvSpPr>
-        <p:spPr>
-          <a:xfrm>
-            <a:off x="2971800" y="2107692"/>
-            <a:ext cx="320040" cy="219456"/>
-          </a:xfrm>
-          <a:prstGeom prst="rightArrow">
-            <a:avLst/>
-          </a:prstGeom>
-          <a:solidFill>
-            <a:srgbClr val="718096"/>
-          </a:solidFill>
-          <a:ln>
-            <a:noFill/>
-          </a:ln>
-        </p:spPr>
-        <p:style>
-          <a:lnRef idx="1">
-            <a:schemeClr val="accent1"/>
-          </a:lnRef>
-          <a:fillRef idx="3">
-            <a:schemeClr val="accent1"/>
-          </a:fillRef>
-          <a:effectRef idx="2">
-            <a:schemeClr val="accent1"/>
-          </a:effectRef>
-          <a:fontRef idx="minor">
-            <a:schemeClr val="lt1"/>
-          </a:fontRef>
-        </p:style>
-        <p:txBody>
-          <a:bodyPr rtlCol="0" anchor="ctr"/>
-          <a:lstStyle/>
-          <a:p>
-            <a:pPr algn="ctr"/>
-          </a:p>
-        </p:txBody>
-      </p:sp>
-      <p:sp>
-        <p:nvSpPr>
-          <p:cNvPr id="18" name="Right Arrow 17"/>
-          <p:cNvSpPr/>
-          <p:nvPr/>
-        </p:nvSpPr>
-        <p:spPr>
-          <a:xfrm>
-            <a:off x="5852160" y="2107692"/>
-            <a:ext cx="320040" cy="219456"/>
-          </a:xfrm>
-          <a:prstGeom prst="rightArrow">
-            <a:avLst/>
-          </a:prstGeom>
-          <a:solidFill>
-            <a:srgbClr val="718096"/>
-          </a:solidFill>
-          <a:ln>
-            <a:noFill/>
-          </a:ln>
-        </p:spPr>
-        <p:style>
-          <a:lnRef idx="1">
-            <a:schemeClr val="accent1"/>
-          </a:lnRef>
-          <a:fillRef idx="3">
-            <a:schemeClr val="accent1"/>
-          </a:fillRef>
-          <a:effectRef idx="2">
-            <a:schemeClr val="accent1"/>
-          </a:effectRef>
-          <a:fontRef idx="minor">
-            <a:schemeClr val="lt1"/>
-          </a:fontRef>
-        </p:style>
-        <p:txBody>
-          <a:bodyPr rtlCol="0" anchor="ctr"/>
-          <a:lstStyle/>
-          <a:p>
-            <a:pPr algn="ctr"/>
-          </a:p>
-        </p:txBody>
-      </p:sp>
-      <p:sp>
-        <p:nvSpPr>
-          <p:cNvPr id="19" name="Rectangle 18"/>
-          <p:cNvSpPr/>
-          <p:nvPr/>
-        </p:nvSpPr>
-        <p:spPr>
-          <a:xfrm>
-            <a:off x="457200" y="3291840"/>
-            <a:ext cx="3977640" cy="868680"/>
-          </a:xfrm>
-          <a:prstGeom prst="rect">
-            <a:avLst/>
-          </a:prstGeom>
-          <a:solidFill>
-            <a:srgbClr val="F7FAFC"/>
-          </a:solidFill>
-          <a:ln w="6350">
-            <a:solidFill>
-              <a:srgbClr val="0D9488"/>
-            </a:solidFill>
-          </a:ln>
-        </p:spPr>
-        <p:style>
-          <a:lnRef idx="1">
-            <a:schemeClr val="accent1"/>
-          </a:lnRef>
-          <a:fillRef idx="3">
-            <a:schemeClr val="accent1"/>
-          </a:fillRef>
-          <a:effectRef idx="2">
-            <a:schemeClr val="accent1"/>
-          </a:effectRef>
-          <a:fontRef idx="minor">
-            <a:schemeClr val="lt1"/>
-          </a:fontRef>
-        </p:style>
-        <p:txBody>
-          <a:bodyPr rtlCol="0" anchor="ctr"/>
-          <a:lstStyle/>
-          <a:p>
-            <a:pPr algn="ctr"/>
-          </a:p>
-        </p:txBody>
-      </p:sp>
-      <p:sp>
-        <p:nvSpPr>
-          <p:cNvPr id="20" name="TextBox 19"/>
-          <p:cNvSpPr txBox="1"/>
-          <p:nvPr/>
-        </p:nvSpPr>
-        <p:spPr>
-          <a:xfrm>
-            <a:off x="640080" y="3401568"/>
-            <a:ext cx="3611880" cy="292608"/>
-          </a:xfrm>
-          <a:prstGeom prst="rect">
-            <a:avLst/>
-          </a:prstGeom>
-          <a:noFill/>
-        </p:spPr>
-        <p:txBody>
-          <a:bodyPr wrap="square" lIns="0" rIns="0" tIns="0" bIns="0">
-            <a:spAutoFit/>
-          </a:bodyPr>
-          <a:lstStyle/>
-          <a:p>
-            <a:pPr algn="l"/>
-            <a:r>
-              <a:rPr sz="900" b="1">
-                <a:solidFill>
-                  <a:srgbClr val="0D9488"/>
-                </a:solidFill>
-                <a:latin typeface="Calibri"/>
-              </a:rPr>
-              <a:t>TERMINATION RULE</a:t>
-            </a:r>
-          </a:p>
-        </p:txBody>
-      </p:sp>
-      <p:sp>
-        <p:nvSpPr>
-          <p:cNvPr id="21" name="TextBox 20"/>
-          <p:cNvSpPr txBox="1"/>
-          <p:nvPr/>
-        </p:nvSpPr>
-        <p:spPr>
-          <a:xfrm>
-            <a:off x="640080" y="3675888"/>
-            <a:ext cx="3611880" cy="457200"/>
-          </a:xfrm>
-          <a:prstGeom prst="rect">
-            <a:avLst/>
-          </a:prstGeom>
-          <a:noFill/>
-        </p:spPr>
-        <p:txBody>
-          <a:bodyPr wrap="square" lIns="0" rIns="0" tIns="0" bIns="0">
-            <a:spAutoFit/>
-          </a:bodyPr>
-          <a:lstStyle/>
-          <a:p>
-            <a:pPr algn="l"/>
-            <a:r>
-              <a:rPr sz="1000" b="0">
-                <a:solidFill>
-                  <a:srgbClr val="2D3748"/>
-                </a:solidFill>
-                <a:latin typeface="Calibri"/>
-              </a:rPr>
-              <a:t>Researcher retries up to 3× on Verifier rejection. After that, Adjudicator decides. Confidence below 0.6 escalates to a human queue.</a:t>
-            </a:r>
-          </a:p>
-        </p:txBody>
-      </p:sp>
-      <p:sp>
-        <p:nvSpPr>
-          <p:cNvPr id="22" name="Rectangle 21"/>
-          <p:cNvSpPr/>
-          <p:nvPr/>
-        </p:nvSpPr>
-        <p:spPr>
-          <a:xfrm>
-            <a:off x="4709160" y="3291840"/>
-            <a:ext cx="3977640" cy="868680"/>
-          </a:xfrm>
-          <a:prstGeom prst="rect">
-            <a:avLst/>
-          </a:prstGeom>
-          <a:solidFill>
-            <a:srgbClr val="F7FAFC"/>
-          </a:solidFill>
-          <a:ln w="6350">
-            <a:solidFill>
-              <a:srgbClr val="C53030"/>
-            </a:solidFill>
-          </a:ln>
-        </p:spPr>
-        <p:style>
-          <a:lnRef idx="1">
-            <a:schemeClr val="accent1"/>
-          </a:lnRef>
-          <a:fillRef idx="3">
-            <a:schemeClr val="accent1"/>
-          </a:fillRef>
-          <a:effectRef idx="2">
-            <a:schemeClr val="accent1"/>
-          </a:effectRef>
-          <a:fontRef idx="minor">
-            <a:schemeClr val="lt1"/>
-          </a:fontRef>
-        </p:style>
-        <p:txBody>
-          <a:bodyPr rtlCol="0" anchor="ctr"/>
-          <a:lstStyle/>
-          <a:p>
-            <a:pPr algn="ctr"/>
-          </a:p>
-        </p:txBody>
-      </p:sp>
-      <p:sp>
-        <p:nvSpPr>
-          <p:cNvPr id="23" name="TextBox 22"/>
-          <p:cNvSpPr txBox="1"/>
-          <p:nvPr/>
-        </p:nvSpPr>
-        <p:spPr>
-          <a:xfrm>
-            <a:off x="4892040" y="3401568"/>
-            <a:ext cx="3611880" cy="292608"/>
-          </a:xfrm>
-          <a:prstGeom prst="rect">
-            <a:avLst/>
-          </a:prstGeom>
-          <a:noFill/>
-        </p:spPr>
-        <p:txBody>
-          <a:bodyPr wrap="square" lIns="0" rIns="0" tIns="0" bIns="0">
-            <a:spAutoFit/>
-          </a:bodyPr>
-          <a:lstStyle/>
-          <a:p>
-            <a:pPr algn="l"/>
-            <a:r>
-              <a:rPr sz="900" b="1">
-                <a:solidFill>
-                  <a:srgbClr val="C53030"/>
-                </a:solidFill>
-                <a:latin typeface="Calibri"/>
-              </a:rPr>
-              <a:t>DATA-LEAKAGE GUARDRAIL (D24)</a:t>
-            </a:r>
-          </a:p>
-        </p:txBody>
-      </p:sp>
-      <p:sp>
-        <p:nvSpPr>
-          <p:cNvPr id="24" name="TextBox 23"/>
-          <p:cNvSpPr txBox="1"/>
-          <p:nvPr/>
-        </p:nvSpPr>
-        <p:spPr>
-          <a:xfrm>
-            <a:off x="4892040" y="3675888"/>
-            <a:ext cx="3611880" cy="457200"/>
-          </a:xfrm>
-          <a:prstGeom prst="rect">
-            <a:avLst/>
-          </a:prstGeom>
-          <a:noFill/>
-        </p:spPr>
-        <p:txBody>
-          <a:bodyPr wrap="square" lIns="0" rIns="0" tIns="0" bIns="0">
-            <a:spAutoFit/>
-          </a:bodyPr>
-          <a:lstStyle/>
-          <a:p>
-            <a:pPr algn="l"/>
-            <a:r>
-              <a:rPr sz="1000" b="0">
-                <a:solidFill>
-                  <a:srgbClr val="2D3748"/>
-                </a:solidFill>
-                <a:latin typeface="Calibri"/>
-              </a:rPr>
-              <a:t>ODMI publications (data.europa.eu and mirrors) banned at five layers: search, fetch, validator, prompts, audit. An audit script catches anything that slips through.</a:t>
-            </a:r>
-          </a:p>
-        </p:txBody>
-      </p:sp>
-      <p:sp>
-        <p:nvSpPr>
-          <p:cNvPr id="25" name="TextBox 24"/>
+              <a:t>Run Console — live view while the swarm runs</a:t>
+            </a:r>
+          </a:p>
+        </p:txBody>
+      </p:sp>
+      <p:pic>
+        <p:nvPicPr>
+          <p:cNvPr id="5" name="Picture 4" descr="swarm_in_action.png"/>
+          <p:cNvPicPr>
+            <a:picLocks noChangeAspect="1"/>
+          </p:cNvPicPr>
+          <p:nvPr/>
+        </p:nvPicPr>
+        <p:blipFill>
+          <a:blip r:embed="rId2"/>
+          <a:stretch>
+            <a:fillRect/>
+          </a:stretch>
+        </p:blipFill>
+        <p:spPr>
+          <a:xfrm>
+            <a:off x="457200" y="1051560"/>
+            <a:ext cx="8229600" cy="3794760"/>
+          </a:xfrm>
+          <a:prstGeom prst="rect">
+            <a:avLst/>
+          </a:prstGeom>
+        </p:spPr>
+      </p:pic>
+      <p:sp>
+        <p:nvSpPr>
+          <p:cNvPr id="6" name="TextBox 5"/>
           <p:cNvSpPr txBox="1"/>
           <p:nvPr/>
         </p:nvSpPr>
@@ -5534,7 +4799,7 @@
           <a:noFill/>
         </p:spPr>
         <p:txBody>
-          <a:bodyPr wrap="square" lIns="0" rIns="0" tIns="0" bIns="0">
+          <a:bodyPr wrap="square" lIns="0" tIns="0" rIns="0" bIns="0">
             <a:spAutoFit/>
           </a:bodyPr>
           <a:lstStyle/>
@@ -5547,7 +4812,7 @@
                 </a:solidFill>
                 <a:latin typeface="Calibri"/>
               </a:rPr>
-              <a:t>ODMI Agent Swarm  ·  Benjy Bream  ·  King's College London  ·  3 / 8</a:t>
+              <a:t>ODMI Agent Swarm  ·  Benjy Bream  ·  King's College London  ·  7 / 8</a:t>
             </a:r>
           </a:p>
         </p:txBody>
@@ -5561,7 +4826,7 @@
 </file>
 
 <file path=ppt/slides/slide4.xml><?xml version="1.0" encoding="utf-8"?>
-<p:sld xmlns:a="http://schemas.openxmlformats.org/drawingml/2006/main" xmlns:p="http://schemas.openxmlformats.org/presentationml/2006/main" xmlns:r="http://schemas.openxmlformats.org/officeDocument/2006/relationships">
+<p:sld xmlns:a="http://schemas.openxmlformats.org/drawingml/2006/main" xmlns:r="http://schemas.openxmlformats.org/officeDocument/2006/relationships" xmlns:p="http://schemas.openxmlformats.org/presentationml/2006/main">
   <p:cSld>
     <p:spTree>
       <p:nvGrpSpPr>
@@ -5569,7 +4834,14 @@
         <p:cNvGrpSpPr/>
         <p:nvPr/>
       </p:nvGrpSpPr>
-      <p:grpSpPr/>
+      <p:grpSpPr>
+        <a:xfrm>
+          <a:off x="0" y="0"/>
+          <a:ext cx="0" cy="0"/>
+          <a:chOff x="0" y="0"/>
+          <a:chExt cx="0" cy="0"/>
+        </a:xfrm>
+      </p:grpSpPr>
       <p:sp>
         <p:nvSpPr>
           <p:cNvPr id="2" name="Rectangle 1"/>
@@ -5610,6 +4882,7 @@
           <a:lstStyle/>
           <a:p>
             <a:pPr algn="ctr"/>
+            <a:endParaRPr/>
           </a:p>
         </p:txBody>
       </p:sp>
@@ -5630,7 +4903,7 @@
           <a:noFill/>
         </p:spPr>
         <p:txBody>
-          <a:bodyPr wrap="square" lIns="0" rIns="0" tIns="0" bIns="0">
+          <a:bodyPr wrap="square" lIns="0" tIns="0" rIns="0" bIns="0">
             <a:spAutoFit/>
           </a:bodyPr>
           <a:lstStyle/>
@@ -5643,7 +4916,7 @@
                 </a:solidFill>
                 <a:latin typeface="Calibri"/>
               </a:rPr>
-              <a:t>DATA-LEAKAGE CONTROLS · D24</a:t>
+              <a:t>COORDINATOR STATE MACHINE</a:t>
             </a:r>
           </a:p>
         </p:txBody>
@@ -5665,7 +4938,7 @@
           <a:noFill/>
         </p:spPr>
         <p:txBody>
-          <a:bodyPr wrap="square" lIns="0" rIns="0" tIns="0" bIns="0">
+          <a:bodyPr wrap="square" lIns="0" tIns="0" rIns="0" bIns="0">
             <a:spAutoFit/>
           </a:bodyPr>
           <a:lstStyle/>
@@ -5678,56 +4951,21 @@
                 </a:solidFill>
                 <a:latin typeface="Calibri"/>
               </a:rPr>
-              <a:t>Why ODMI publications are banned</a:t>
-            </a:r>
-          </a:p>
-        </p:txBody>
-      </p:sp>
-      <p:sp>
-        <p:nvSpPr>
-          <p:cNvPr id="5" name="TextBox 4"/>
-          <p:cNvSpPr txBox="1"/>
-          <p:nvPr/>
-        </p:nvSpPr>
-        <p:spPr>
-          <a:xfrm>
-            <a:off x="457200" y="1143000"/>
-            <a:ext cx="8229600" cy="411480"/>
-          </a:xfrm>
-          <a:prstGeom prst="rect">
-            <a:avLst/>
-          </a:prstGeom>
-          <a:noFill/>
-        </p:spPr>
-        <p:txBody>
-          <a:bodyPr wrap="square" lIns="0" rIns="0" tIns="0" bIns="0">
-            <a:spAutoFit/>
-          </a:bodyPr>
-          <a:lstStyle/>
-          <a:p>
-            <a:pPr algn="l"/>
-            <a:r>
-              <a:rPr sz="1100" b="0">
-                <a:solidFill>
-                  <a:srgbClr val="2D3748"/>
-                </a:solidFill>
-                <a:latin typeface="Calibri"/>
-              </a:rPr>
-              <a:t>The swarm is validated against ODMI's published merged_responses. Any URL that hosts, mirrors, or summarises ODMI's own answers leaks the signal we are predicting, so it must never reach the agents. Five layers enforce this:</a:t>
-            </a:r>
-          </a:p>
-        </p:txBody>
-      </p:sp>
-      <p:sp>
-        <p:nvSpPr>
-          <p:cNvPr id="6" name="Rectangle 5"/>
+              <a:t>How the swarm answers one question</a:t>
+            </a:r>
+          </a:p>
+        </p:txBody>
+      </p:sp>
+      <p:sp>
+        <p:nvSpPr>
+          <p:cNvPr id="5" name="Rectangle 4"/>
           <p:cNvSpPr/>
           <p:nvPr/>
         </p:nvSpPr>
         <p:spPr>
           <a:xfrm>
-            <a:off x="457200" y="1691640"/>
-            <a:ext cx="1514246" cy="2194560"/>
+            <a:off x="457200" y="1463040"/>
+            <a:ext cx="2468880" cy="1508760"/>
           </a:xfrm>
           <a:prstGeom prst="rect">
             <a:avLst/>
@@ -5760,19 +4998,20 @@
           <a:lstStyle/>
           <a:p>
             <a:pPr algn="ctr"/>
-          </a:p>
-        </p:txBody>
-      </p:sp>
-      <p:sp>
-        <p:nvSpPr>
-          <p:cNvPr id="7" name="Rectangle 6"/>
+            <a:endParaRPr/>
+          </a:p>
+        </p:txBody>
+      </p:sp>
+      <p:sp>
+        <p:nvSpPr>
+          <p:cNvPr id="6" name="Rectangle 5"/>
           <p:cNvSpPr/>
           <p:nvPr/>
         </p:nvSpPr>
         <p:spPr>
           <a:xfrm>
-            <a:off x="457200" y="1691640"/>
-            <a:ext cx="1514246" cy="320040"/>
+            <a:off x="457200" y="1463040"/>
+            <a:ext cx="2468880" cy="320040"/>
           </a:xfrm>
           <a:prstGeom prst="rect">
             <a:avLst/>
@@ -5803,6 +5042,42 @@
           <a:lstStyle/>
           <a:p>
             <a:pPr algn="ctr"/>
+            <a:endParaRPr/>
+          </a:p>
+        </p:txBody>
+      </p:sp>
+      <p:sp>
+        <p:nvSpPr>
+          <p:cNvPr id="7" name="TextBox 6"/>
+          <p:cNvSpPr txBox="1"/>
+          <p:nvPr/>
+        </p:nvSpPr>
+        <p:spPr>
+          <a:xfrm>
+            <a:off x="640080" y="1508760"/>
+            <a:ext cx="2103120" cy="246888"/>
+          </a:xfrm>
+          <a:prstGeom prst="rect">
+            <a:avLst/>
+          </a:prstGeom>
+          <a:noFill/>
+        </p:spPr>
+        <p:txBody>
+          <a:bodyPr wrap="square" lIns="0" tIns="0" rIns="0" bIns="0">
+            <a:spAutoFit/>
+          </a:bodyPr>
+          <a:lstStyle/>
+          <a:p>
+            <a:pPr algn="l"/>
+            <a:r>
+              <a:rPr sz="1200" b="1">
+                <a:solidFill>
+                  <a:srgbClr val="FFFFFF"/>
+                </a:solidFill>
+                <a:latin typeface="Calibri"/>
+              </a:rPr>
+              <a:t>RESEARCHER</a:t>
+            </a:r>
           </a:p>
         </p:txBody>
       </p:sp>
@@ -5814,78 +5089,43 @@
         </p:nvSpPr>
         <p:spPr>
           <a:xfrm>
-            <a:off x="640080" y="1737360"/>
-            <a:ext cx="1148486" cy="246888"/>
-          </a:xfrm>
-          <a:prstGeom prst="rect">
-            <a:avLst/>
-          </a:prstGeom>
-          <a:noFill/>
-        </p:spPr>
-        <p:txBody>
-          <a:bodyPr wrap="square" lIns="0" rIns="0" tIns="0" bIns="0">
+            <a:off x="640080" y="1920240"/>
+            <a:ext cx="2103120" cy="960120"/>
+          </a:xfrm>
+          <a:prstGeom prst="rect">
+            <a:avLst/>
+          </a:prstGeom>
+          <a:noFill/>
+        </p:spPr>
+        <p:txBody>
+          <a:bodyPr wrap="square" lIns="0" tIns="0" rIns="0" bIns="0">
             <a:spAutoFit/>
           </a:bodyPr>
           <a:lstStyle/>
           <a:p>
             <a:pPr algn="l"/>
             <a:r>
-              <a:rPr sz="1100" b="1">
-                <a:solidFill>
-                  <a:srgbClr val="FFFFFF"/>
-                </a:solidFill>
-                <a:latin typeface="Calibri"/>
-              </a:rPr>
-              <a:t>1.  SEARCH</a:t>
-            </a:r>
-          </a:p>
-        </p:txBody>
-      </p:sp>
-      <p:sp>
-        <p:nvSpPr>
-          <p:cNvPr id="9" name="TextBox 8"/>
-          <p:cNvSpPr txBox="1"/>
-          <p:nvPr/>
-        </p:nvSpPr>
-        <p:spPr>
-          <a:xfrm>
-            <a:off x="594360" y="2148840"/>
-            <a:ext cx="1239926" cy="1645920"/>
-          </a:xfrm>
-          <a:prstGeom prst="rect">
-            <a:avLst/>
-          </a:prstGeom>
-          <a:noFill/>
-        </p:spPr>
-        <p:txBody>
-          <a:bodyPr wrap="square" lIns="0" rIns="0" tIns="0" bIns="0">
-            <a:spAutoFit/>
-          </a:bodyPr>
-          <a:lstStyle/>
-          <a:p>
-            <a:pPr algn="l"/>
-            <a:r>
-              <a:rPr sz="950" b="0">
+              <a:rPr sz="1050" b="0">
                 <a:solidFill>
                   <a:srgbClr val="2D3748"/>
                 </a:solidFill>
                 <a:latin typeface="Calibri"/>
               </a:rPr>
-              <a:t>Tavily exclude_domains · Brave −site: · post-filter drops any blocked URL before it reaches an agent.</a:t>
-            </a:r>
-          </a:p>
-        </p:txBody>
-      </p:sp>
-      <p:sp>
-        <p:nvSpPr>
-          <p:cNvPr id="10" name="Rectangle 9"/>
+              <a:t>Tavily search → fetch URL → reason → return {answer, source_url, evidence_quote, confidence}.</a:t>
+            </a:r>
+          </a:p>
+        </p:txBody>
+      </p:sp>
+      <p:sp>
+        <p:nvSpPr>
+          <p:cNvPr id="9" name="Rectangle 8"/>
           <p:cNvSpPr/>
           <p:nvPr/>
         </p:nvSpPr>
         <p:spPr>
           <a:xfrm>
-            <a:off x="2136038" y="1691640"/>
-            <a:ext cx="1514246" cy="2194560"/>
+            <a:off x="3337560" y="1463040"/>
+            <a:ext cx="2468880" cy="1508760"/>
           </a:xfrm>
           <a:prstGeom prst="rect">
             <a:avLst/>
@@ -5918,25 +5158,26 @@
           <a:lstStyle/>
           <a:p>
             <a:pPr algn="ctr"/>
-          </a:p>
-        </p:txBody>
-      </p:sp>
-      <p:sp>
-        <p:nvSpPr>
-          <p:cNvPr id="11" name="Rectangle 10"/>
+            <a:endParaRPr/>
+          </a:p>
+        </p:txBody>
+      </p:sp>
+      <p:sp>
+        <p:nvSpPr>
+          <p:cNvPr id="10" name="Rectangle 9"/>
           <p:cNvSpPr/>
           <p:nvPr/>
         </p:nvSpPr>
         <p:spPr>
           <a:xfrm>
-            <a:off x="2136038" y="1691640"/>
-            <a:ext cx="1514246" cy="320040"/>
+            <a:off x="3337560" y="1463040"/>
+            <a:ext cx="2468880" cy="320040"/>
           </a:xfrm>
           <a:prstGeom prst="rect">
             <a:avLst/>
           </a:prstGeom>
           <a:solidFill>
-            <a:srgbClr val="0F766E"/>
+            <a:srgbClr val="1E3A5F"/>
           </a:solidFill>
           <a:ln>
             <a:noFill/>
@@ -5961,6 +5202,42 @@
           <a:lstStyle/>
           <a:p>
             <a:pPr algn="ctr"/>
+            <a:endParaRPr/>
+          </a:p>
+        </p:txBody>
+      </p:sp>
+      <p:sp>
+        <p:nvSpPr>
+          <p:cNvPr id="11" name="TextBox 10"/>
+          <p:cNvSpPr txBox="1"/>
+          <p:nvPr/>
+        </p:nvSpPr>
+        <p:spPr>
+          <a:xfrm>
+            <a:off x="3520440" y="1508760"/>
+            <a:ext cx="2103120" cy="246888"/>
+          </a:xfrm>
+          <a:prstGeom prst="rect">
+            <a:avLst/>
+          </a:prstGeom>
+          <a:noFill/>
+        </p:spPr>
+        <p:txBody>
+          <a:bodyPr wrap="square" lIns="0" tIns="0" rIns="0" bIns="0">
+            <a:spAutoFit/>
+          </a:bodyPr>
+          <a:lstStyle/>
+          <a:p>
+            <a:pPr algn="l"/>
+            <a:r>
+              <a:rPr sz="1200" b="1">
+                <a:solidFill>
+                  <a:srgbClr val="FFFFFF"/>
+                </a:solidFill>
+                <a:latin typeface="Calibri"/>
+              </a:rPr>
+              <a:t>VERIFIER</a:t>
+            </a:r>
           </a:p>
         </p:txBody>
       </p:sp>
@@ -5972,78 +5249,43 @@
         </p:nvSpPr>
         <p:spPr>
           <a:xfrm>
-            <a:off x="2318918" y="1737360"/>
-            <a:ext cx="1148486" cy="246888"/>
-          </a:xfrm>
-          <a:prstGeom prst="rect">
-            <a:avLst/>
-          </a:prstGeom>
-          <a:noFill/>
-        </p:spPr>
-        <p:txBody>
-          <a:bodyPr wrap="square" lIns="0" rIns="0" tIns="0" bIns="0">
+            <a:off x="3520440" y="1920240"/>
+            <a:ext cx="2103120" cy="960120"/>
+          </a:xfrm>
+          <a:prstGeom prst="rect">
+            <a:avLst/>
+          </a:prstGeom>
+          <a:noFill/>
+        </p:spPr>
+        <p:txBody>
+          <a:bodyPr wrap="square" lIns="0" tIns="0" rIns="0" bIns="0">
             <a:spAutoFit/>
           </a:bodyPr>
           <a:lstStyle/>
           <a:p>
             <a:pPr algn="l"/>
             <a:r>
-              <a:rPr sz="1100" b="1">
-                <a:solidFill>
-                  <a:srgbClr val="FFFFFF"/>
-                </a:solidFill>
-                <a:latin typeface="Calibri"/>
-              </a:rPr>
-              <a:t>2.  FETCH</a:t>
-            </a:r>
-          </a:p>
-        </p:txBody>
-      </p:sp>
-      <p:sp>
-        <p:nvSpPr>
-          <p:cNvPr id="13" name="TextBox 12"/>
-          <p:cNvSpPr txBox="1"/>
-          <p:nvPr/>
-        </p:nvSpPr>
-        <p:spPr>
-          <a:xfrm>
-            <a:off x="2273198" y="2148840"/>
-            <a:ext cx="1239926" cy="1645920"/>
-          </a:xfrm>
-          <a:prstGeom prst="rect">
-            <a:avLst/>
-          </a:prstGeom>
-          <a:noFill/>
-        </p:spPr>
-        <p:txBody>
-          <a:bodyPr wrap="square" lIns="0" rIns="0" tIns="0" bIns="0">
-            <a:spAutoFit/>
-          </a:bodyPr>
-          <a:lstStyle/>
-          <a:p>
-            <a:pPr algn="l"/>
-            <a:r>
-              <a:rPr sz="950" b="0">
+              <a:rPr sz="1050" b="0">
                 <a:solidFill>
                   <a:srgbClr val="2D3748"/>
                 </a:solidFill>
                 <a:latin typeface="Calibri"/>
               </a:rPr>
-              <a:t>fetch_text and head_ok refuse blocked URLs with failure_mode="blocked_data_leakage". No network call.</a:t>
-            </a:r>
-          </a:p>
-        </p:txBody>
-      </p:sp>
-      <p:sp>
-        <p:nvSpPr>
-          <p:cNvPr id="14" name="Rectangle 13"/>
+              <a:t>Substring-checks the Researcher's quote, runs an independent search, and reasons adversarially (default strategy: find a way to disprove the claim). Returns pass / fail with counter-evidence.</a:t>
+            </a:r>
+          </a:p>
+        </p:txBody>
+      </p:sp>
+      <p:sp>
+        <p:nvSpPr>
+          <p:cNvPr id="13" name="Rectangle 12"/>
           <p:cNvSpPr/>
           <p:nvPr/>
         </p:nvSpPr>
         <p:spPr>
           <a:xfrm>
-            <a:off x="3814876" y="1691640"/>
-            <a:ext cx="1514246" cy="2194560"/>
+            <a:off x="6217920" y="1463040"/>
+            <a:ext cx="2468880" cy="1508760"/>
           </a:xfrm>
           <a:prstGeom prst="rect">
             <a:avLst/>
@@ -6076,335 +5318,20 @@
           <a:lstStyle/>
           <a:p>
             <a:pPr algn="ctr"/>
-          </a:p>
-        </p:txBody>
-      </p:sp>
-      <p:sp>
-        <p:nvSpPr>
-          <p:cNvPr id="15" name="Rectangle 14"/>
+            <a:endParaRPr/>
+          </a:p>
+        </p:txBody>
+      </p:sp>
+      <p:sp>
+        <p:nvSpPr>
+          <p:cNvPr id="14" name="Rectangle 13"/>
           <p:cNvSpPr/>
           <p:nvPr/>
         </p:nvSpPr>
         <p:spPr>
           <a:xfrm>
-            <a:off x="3814876" y="1691640"/>
-            <a:ext cx="1514246" cy="320040"/>
-          </a:xfrm>
-          <a:prstGeom prst="rect">
-            <a:avLst/>
-          </a:prstGeom>
-          <a:solidFill>
-            <a:srgbClr val="1E3A5F"/>
-          </a:solidFill>
-          <a:ln>
-            <a:noFill/>
-          </a:ln>
-        </p:spPr>
-        <p:style>
-          <a:lnRef idx="1">
-            <a:schemeClr val="accent1"/>
-          </a:lnRef>
-          <a:fillRef idx="3">
-            <a:schemeClr val="accent1"/>
-          </a:fillRef>
-          <a:effectRef idx="2">
-            <a:schemeClr val="accent1"/>
-          </a:effectRef>
-          <a:fontRef idx="minor">
-            <a:schemeClr val="lt1"/>
-          </a:fontRef>
-        </p:style>
-        <p:txBody>
-          <a:bodyPr rtlCol="0" anchor="ctr"/>
-          <a:lstStyle/>
-          <a:p>
-            <a:pPr algn="ctr"/>
-          </a:p>
-        </p:txBody>
-      </p:sp>
-      <p:sp>
-        <p:nvSpPr>
-          <p:cNvPr id="16" name="TextBox 15"/>
-          <p:cNvSpPr txBox="1"/>
-          <p:nvPr/>
-        </p:nvSpPr>
-        <p:spPr>
-          <a:xfrm>
-            <a:off x="3997756" y="1737360"/>
-            <a:ext cx="1148486" cy="246888"/>
-          </a:xfrm>
-          <a:prstGeom prst="rect">
-            <a:avLst/>
-          </a:prstGeom>
-          <a:noFill/>
-        </p:spPr>
-        <p:txBody>
-          <a:bodyPr wrap="square" lIns="0" rIns="0" tIns="0" bIns="0">
-            <a:spAutoFit/>
-          </a:bodyPr>
-          <a:lstStyle/>
-          <a:p>
-            <a:pPr algn="l"/>
-            <a:r>
-              <a:rPr sz="1100" b="1">
-                <a:solidFill>
-                  <a:srgbClr val="FFFFFF"/>
-                </a:solidFill>
-                <a:latin typeface="Calibri"/>
-              </a:rPr>
-              <a:t>3.  VALIDATOR</a:t>
-            </a:r>
-          </a:p>
-        </p:txBody>
-      </p:sp>
-      <p:sp>
-        <p:nvSpPr>
-          <p:cNvPr id="17" name="TextBox 16"/>
-          <p:cNvSpPr txBox="1"/>
-          <p:nvPr/>
-        </p:nvSpPr>
-        <p:spPr>
-          <a:xfrm>
-            <a:off x="3952036" y="2148840"/>
-            <a:ext cx="1239926" cy="1645920"/>
-          </a:xfrm>
-          <a:prstGeom prst="rect">
-            <a:avLst/>
-          </a:prstGeom>
-          <a:noFill/>
-        </p:spPr>
-        <p:txBody>
-          <a:bodyPr wrap="square" lIns="0" rIns="0" tIns="0" bIns="0">
-            <a:spAutoFit/>
-          </a:bodyPr>
-          <a:lstStyle/>
-          <a:p>
-            <a:pPr algn="l"/>
-            <a:r>
-              <a:rPr sz="950" b="0">
-                <a:solidFill>
-                  <a:srgbClr val="2D3748"/>
-                </a:solidFill>
-                <a:latin typeface="Calibri"/>
-              </a:rPr>
-              <a:t>trust_score forced to 0.0 for blocked URLs. data.europa.eu removed from the trusted domain seed list.</a:t>
-            </a:r>
-          </a:p>
-        </p:txBody>
-      </p:sp>
-      <p:sp>
-        <p:nvSpPr>
-          <p:cNvPr id="18" name="Rectangle 17"/>
-          <p:cNvSpPr/>
-          <p:nvPr/>
-        </p:nvSpPr>
-        <p:spPr>
-          <a:xfrm>
-            <a:off x="5493714" y="1691640"/>
-            <a:ext cx="1514246" cy="2194560"/>
-          </a:xfrm>
-          <a:prstGeom prst="rect">
-            <a:avLst/>
-          </a:prstGeom>
-          <a:solidFill>
-            <a:srgbClr val="FFFFFF"/>
-          </a:solidFill>
-          <a:ln w="6350">
-            <a:solidFill>
-              <a:srgbClr val="E2E8F0"/>
-            </a:solidFill>
-          </a:ln>
-        </p:spPr>
-        <p:style>
-          <a:lnRef idx="1">
-            <a:schemeClr val="accent1"/>
-          </a:lnRef>
-          <a:fillRef idx="3">
-            <a:schemeClr val="accent1"/>
-          </a:fillRef>
-          <a:effectRef idx="2">
-            <a:schemeClr val="accent1"/>
-          </a:effectRef>
-          <a:fontRef idx="minor">
-            <a:schemeClr val="lt1"/>
-          </a:fontRef>
-        </p:style>
-        <p:txBody>
-          <a:bodyPr rtlCol="0" anchor="ctr"/>
-          <a:lstStyle/>
-          <a:p>
-            <a:pPr algn="ctr"/>
-          </a:p>
-        </p:txBody>
-      </p:sp>
-      <p:sp>
-        <p:nvSpPr>
-          <p:cNvPr id="19" name="Rectangle 18"/>
-          <p:cNvSpPr/>
-          <p:nvPr/>
-        </p:nvSpPr>
-        <p:spPr>
-          <a:xfrm>
-            <a:off x="5493714" y="1691640"/>
-            <a:ext cx="1514246" cy="320040"/>
-          </a:xfrm>
-          <a:prstGeom prst="rect">
-            <a:avLst/>
-          </a:prstGeom>
-          <a:solidFill>
-            <a:srgbClr val="D69E2E"/>
-          </a:solidFill>
-          <a:ln>
-            <a:noFill/>
-          </a:ln>
-        </p:spPr>
-        <p:style>
-          <a:lnRef idx="1">
-            <a:schemeClr val="accent1"/>
-          </a:lnRef>
-          <a:fillRef idx="3">
-            <a:schemeClr val="accent1"/>
-          </a:fillRef>
-          <a:effectRef idx="2">
-            <a:schemeClr val="accent1"/>
-          </a:effectRef>
-          <a:fontRef idx="minor">
-            <a:schemeClr val="lt1"/>
-          </a:fontRef>
-        </p:style>
-        <p:txBody>
-          <a:bodyPr rtlCol="0" anchor="ctr"/>
-          <a:lstStyle/>
-          <a:p>
-            <a:pPr algn="ctr"/>
-          </a:p>
-        </p:txBody>
-      </p:sp>
-      <p:sp>
-        <p:nvSpPr>
-          <p:cNvPr id="20" name="TextBox 19"/>
-          <p:cNvSpPr txBox="1"/>
-          <p:nvPr/>
-        </p:nvSpPr>
-        <p:spPr>
-          <a:xfrm>
-            <a:off x="5676594" y="1737360"/>
-            <a:ext cx="1148486" cy="246888"/>
-          </a:xfrm>
-          <a:prstGeom prst="rect">
-            <a:avLst/>
-          </a:prstGeom>
-          <a:noFill/>
-        </p:spPr>
-        <p:txBody>
-          <a:bodyPr wrap="square" lIns="0" rIns="0" tIns="0" bIns="0">
-            <a:spAutoFit/>
-          </a:bodyPr>
-          <a:lstStyle/>
-          <a:p>
-            <a:pPr algn="l"/>
-            <a:r>
-              <a:rPr sz="1100" b="1">
-                <a:solidFill>
-                  <a:srgbClr val="FFFFFF"/>
-                </a:solidFill>
-                <a:latin typeface="Calibri"/>
-              </a:rPr>
-              <a:t>4.  PROMPTS</a:t>
-            </a:r>
-          </a:p>
-        </p:txBody>
-      </p:sp>
-      <p:sp>
-        <p:nvSpPr>
-          <p:cNvPr id="21" name="TextBox 20"/>
-          <p:cNvSpPr txBox="1"/>
-          <p:nvPr/>
-        </p:nvSpPr>
-        <p:spPr>
-          <a:xfrm>
-            <a:off x="5630874" y="2148840"/>
-            <a:ext cx="1239926" cy="1645920"/>
-          </a:xfrm>
-          <a:prstGeom prst="rect">
-            <a:avLst/>
-          </a:prstGeom>
-          <a:noFill/>
-        </p:spPr>
-        <p:txBody>
-          <a:bodyPr wrap="square" lIns="0" rIns="0" tIns="0" bIns="0">
-            <a:spAutoFit/>
-          </a:bodyPr>
-          <a:lstStyle/>
-          <a:p>
-            <a:pPr algn="l"/>
-            <a:r>
-              <a:rPr sz="950" b="0">
-                <a:solidFill>
-                  <a:srgbClr val="2D3748"/>
-                </a:solidFill>
-                <a:latin typeface="Calibri"/>
-              </a:rPr>
-              <a:t>Researcher V2, all four Verifier V2 strategies, and Adjudicator V2 carry an explicit forbidden_odmi_source rule.</a:t>
-            </a:r>
-          </a:p>
-        </p:txBody>
-      </p:sp>
-      <p:sp>
-        <p:nvSpPr>
-          <p:cNvPr id="22" name="Rectangle 21"/>
-          <p:cNvSpPr/>
-          <p:nvPr/>
-        </p:nvSpPr>
-        <p:spPr>
-          <a:xfrm>
-            <a:off x="7172552" y="1691640"/>
-            <a:ext cx="1514246" cy="2194560"/>
-          </a:xfrm>
-          <a:prstGeom prst="rect">
-            <a:avLst/>
-          </a:prstGeom>
-          <a:solidFill>
-            <a:srgbClr val="FFFFFF"/>
-          </a:solidFill>
-          <a:ln w="6350">
-            <a:solidFill>
-              <a:srgbClr val="E2E8F0"/>
-            </a:solidFill>
-          </a:ln>
-        </p:spPr>
-        <p:style>
-          <a:lnRef idx="1">
-            <a:schemeClr val="accent1"/>
-          </a:lnRef>
-          <a:fillRef idx="3">
-            <a:schemeClr val="accent1"/>
-          </a:fillRef>
-          <a:effectRef idx="2">
-            <a:schemeClr val="accent1"/>
-          </a:effectRef>
-          <a:fontRef idx="minor">
-            <a:schemeClr val="lt1"/>
-          </a:fontRef>
-        </p:style>
-        <p:txBody>
-          <a:bodyPr rtlCol="0" anchor="ctr"/>
-          <a:lstStyle/>
-          <a:p>
-            <a:pPr algn="ctr"/>
-          </a:p>
-        </p:txBody>
-      </p:sp>
-      <p:sp>
-        <p:nvSpPr>
-          <p:cNvPr id="23" name="Rectangle 22"/>
-          <p:cNvSpPr/>
-          <p:nvPr/>
-        </p:nvSpPr>
-        <p:spPr>
-          <a:xfrm>
-            <a:off x="7172552" y="1691640"/>
-            <a:ext cx="1514246" cy="320040"/>
+            <a:off x="6217920" y="1463040"/>
+            <a:ext cx="2468880" cy="320040"/>
           </a:xfrm>
           <a:prstGeom prst="rect">
             <a:avLst/>
@@ -6435,89 +5362,294 @@
           <a:lstStyle/>
           <a:p>
             <a:pPr algn="ctr"/>
-          </a:p>
-        </p:txBody>
-      </p:sp>
-      <p:sp>
-        <p:nvSpPr>
-          <p:cNvPr id="24" name="TextBox 23"/>
-          <p:cNvSpPr txBox="1"/>
-          <p:nvPr/>
-        </p:nvSpPr>
-        <p:spPr>
-          <a:xfrm>
-            <a:off x="7355432" y="1737360"/>
-            <a:ext cx="1148486" cy="246888"/>
-          </a:xfrm>
-          <a:prstGeom prst="rect">
-            <a:avLst/>
-          </a:prstGeom>
-          <a:noFill/>
-        </p:spPr>
-        <p:txBody>
-          <a:bodyPr wrap="square" lIns="0" rIns="0" tIns="0" bIns="0">
+            <a:endParaRPr/>
+          </a:p>
+        </p:txBody>
+      </p:sp>
+      <p:sp>
+        <p:nvSpPr>
+          <p:cNvPr id="15" name="TextBox 14"/>
+          <p:cNvSpPr txBox="1"/>
+          <p:nvPr/>
+        </p:nvSpPr>
+        <p:spPr>
+          <a:xfrm>
+            <a:off x="6400800" y="1508760"/>
+            <a:ext cx="2103120" cy="246888"/>
+          </a:xfrm>
+          <a:prstGeom prst="rect">
+            <a:avLst/>
+          </a:prstGeom>
+          <a:noFill/>
+        </p:spPr>
+        <p:txBody>
+          <a:bodyPr wrap="square" lIns="0" tIns="0" rIns="0" bIns="0">
             <a:spAutoFit/>
           </a:bodyPr>
           <a:lstStyle/>
           <a:p>
             <a:pPr algn="l"/>
             <a:r>
-              <a:rPr sz="1100" b="1">
+              <a:rPr sz="1200" b="1">
                 <a:solidFill>
                   <a:srgbClr val="FFFFFF"/>
                 </a:solidFill>
                 <a:latin typeface="Calibri"/>
               </a:rPr>
-              <a:t>5.  AUDIT</a:t>
-            </a:r>
-          </a:p>
-        </p:txBody>
-      </p:sp>
-      <p:sp>
-        <p:nvSpPr>
-          <p:cNvPr id="25" name="TextBox 24"/>
-          <p:cNvSpPr txBox="1"/>
-          <p:nvPr/>
-        </p:nvSpPr>
-        <p:spPr>
-          <a:xfrm>
-            <a:off x="7309712" y="2148840"/>
-            <a:ext cx="1239926" cy="1645920"/>
-          </a:xfrm>
-          <a:prstGeom prst="rect">
-            <a:avLst/>
-          </a:prstGeom>
-          <a:noFill/>
-        </p:spPr>
-        <p:txBody>
-          <a:bodyPr wrap="square" lIns="0" rIns="0" tIns="0" bIns="0">
+              <a:t>ADJUDICATOR</a:t>
+            </a:r>
+          </a:p>
+        </p:txBody>
+      </p:sp>
+      <p:sp>
+        <p:nvSpPr>
+          <p:cNvPr id="16" name="TextBox 15"/>
+          <p:cNvSpPr txBox="1"/>
+          <p:nvPr/>
+        </p:nvSpPr>
+        <p:spPr>
+          <a:xfrm>
+            <a:off x="6400800" y="1920240"/>
+            <a:ext cx="2103120" cy="960120"/>
+          </a:xfrm>
+          <a:prstGeom prst="rect">
+            <a:avLst/>
+          </a:prstGeom>
+          <a:noFill/>
+        </p:spPr>
+        <p:txBody>
+          <a:bodyPr wrap="square" lIns="0" tIns="0" rIns="0" bIns="0">
             <a:spAutoFit/>
           </a:bodyPr>
           <a:lstStyle/>
           <a:p>
             <a:pPr algn="l"/>
             <a:r>
-              <a:rPr sz="950" b="0">
+              <a:rPr sz="1050" b="0">
                 <a:solidFill>
                   <a:srgbClr val="2D3748"/>
                 </a:solidFill>
                 <a:latin typeface="Calibri"/>
               </a:rPr>
-              <a:t>scripts/check_data_leakage.py scans every URL column in the swarm tables. Exits non-zero on any hit. --purge deletes tainted pair_runs.</a:t>
-            </a:r>
-          </a:p>
-        </p:txBody>
-      </p:sp>
-      <p:sp>
-        <p:nvSpPr>
-          <p:cNvPr id="26" name="Rectangle 25"/>
+              <a:t>Fires only on retry exhaustion. Reads the full history. Picks a winner or escalates to a human queue.</a:t>
+            </a:r>
+          </a:p>
+        </p:txBody>
+      </p:sp>
+      <p:sp>
+        <p:nvSpPr>
+          <p:cNvPr id="17" name="Right Arrow 16"/>
           <p:cNvSpPr/>
           <p:nvPr/>
         </p:nvSpPr>
         <p:spPr>
           <a:xfrm>
-            <a:off x="457200" y="4069080"/>
-            <a:ext cx="8229600" cy="502920"/>
+            <a:off x="2971800" y="2107692"/>
+            <a:ext cx="320040" cy="219456"/>
+          </a:xfrm>
+          <a:prstGeom prst="rightArrow">
+            <a:avLst/>
+          </a:prstGeom>
+          <a:solidFill>
+            <a:srgbClr val="718096"/>
+          </a:solidFill>
+          <a:ln>
+            <a:noFill/>
+          </a:ln>
+        </p:spPr>
+        <p:style>
+          <a:lnRef idx="1">
+            <a:schemeClr val="accent1"/>
+          </a:lnRef>
+          <a:fillRef idx="3">
+            <a:schemeClr val="accent1"/>
+          </a:fillRef>
+          <a:effectRef idx="2">
+            <a:schemeClr val="accent1"/>
+          </a:effectRef>
+          <a:fontRef idx="minor">
+            <a:schemeClr val="lt1"/>
+          </a:fontRef>
+        </p:style>
+        <p:txBody>
+          <a:bodyPr rtlCol="0" anchor="ctr"/>
+          <a:lstStyle/>
+          <a:p>
+            <a:pPr algn="ctr"/>
+            <a:endParaRPr/>
+          </a:p>
+        </p:txBody>
+      </p:sp>
+      <p:sp>
+        <p:nvSpPr>
+          <p:cNvPr id="18" name="Right Arrow 17"/>
+          <p:cNvSpPr/>
+          <p:nvPr/>
+        </p:nvSpPr>
+        <p:spPr>
+          <a:xfrm>
+            <a:off x="5852160" y="2107692"/>
+            <a:ext cx="320040" cy="219456"/>
+          </a:xfrm>
+          <a:prstGeom prst="rightArrow">
+            <a:avLst/>
+          </a:prstGeom>
+          <a:solidFill>
+            <a:srgbClr val="718096"/>
+          </a:solidFill>
+          <a:ln>
+            <a:noFill/>
+          </a:ln>
+        </p:spPr>
+        <p:style>
+          <a:lnRef idx="1">
+            <a:schemeClr val="accent1"/>
+          </a:lnRef>
+          <a:fillRef idx="3">
+            <a:schemeClr val="accent1"/>
+          </a:fillRef>
+          <a:effectRef idx="2">
+            <a:schemeClr val="accent1"/>
+          </a:effectRef>
+          <a:fontRef idx="minor">
+            <a:schemeClr val="lt1"/>
+          </a:fontRef>
+        </p:style>
+        <p:txBody>
+          <a:bodyPr rtlCol="0" anchor="ctr"/>
+          <a:lstStyle/>
+          <a:p>
+            <a:pPr algn="ctr"/>
+            <a:endParaRPr/>
+          </a:p>
+        </p:txBody>
+      </p:sp>
+      <p:sp>
+        <p:nvSpPr>
+          <p:cNvPr id="19" name="Rectangle 18"/>
+          <p:cNvSpPr/>
+          <p:nvPr/>
+        </p:nvSpPr>
+        <p:spPr>
+          <a:xfrm>
+            <a:off x="457200" y="3291840"/>
+            <a:ext cx="3977640" cy="868680"/>
+          </a:xfrm>
+          <a:prstGeom prst="rect">
+            <a:avLst/>
+          </a:prstGeom>
+          <a:solidFill>
+            <a:srgbClr val="F7FAFC"/>
+          </a:solidFill>
+          <a:ln w="6350">
+            <a:solidFill>
+              <a:srgbClr val="0D9488"/>
+            </a:solidFill>
+          </a:ln>
+        </p:spPr>
+        <p:style>
+          <a:lnRef idx="1">
+            <a:schemeClr val="accent1"/>
+          </a:lnRef>
+          <a:fillRef idx="3">
+            <a:schemeClr val="accent1"/>
+          </a:fillRef>
+          <a:effectRef idx="2">
+            <a:schemeClr val="accent1"/>
+          </a:effectRef>
+          <a:fontRef idx="minor">
+            <a:schemeClr val="lt1"/>
+          </a:fontRef>
+        </p:style>
+        <p:txBody>
+          <a:bodyPr rtlCol="0" anchor="ctr"/>
+          <a:lstStyle/>
+          <a:p>
+            <a:pPr algn="ctr"/>
+            <a:endParaRPr/>
+          </a:p>
+        </p:txBody>
+      </p:sp>
+      <p:sp>
+        <p:nvSpPr>
+          <p:cNvPr id="20" name="TextBox 19"/>
+          <p:cNvSpPr txBox="1"/>
+          <p:nvPr/>
+        </p:nvSpPr>
+        <p:spPr>
+          <a:xfrm>
+            <a:off x="640080" y="3401568"/>
+            <a:ext cx="3611880" cy="292608"/>
+          </a:xfrm>
+          <a:prstGeom prst="rect">
+            <a:avLst/>
+          </a:prstGeom>
+          <a:noFill/>
+        </p:spPr>
+        <p:txBody>
+          <a:bodyPr wrap="square" lIns="0" tIns="0" rIns="0" bIns="0">
+            <a:spAutoFit/>
+          </a:bodyPr>
+          <a:lstStyle/>
+          <a:p>
+            <a:pPr algn="l"/>
+            <a:r>
+              <a:rPr sz="900" b="1">
+                <a:solidFill>
+                  <a:srgbClr val="0D9488"/>
+                </a:solidFill>
+                <a:latin typeface="Calibri"/>
+              </a:rPr>
+              <a:t>TERMINATION RULE</a:t>
+            </a:r>
+          </a:p>
+        </p:txBody>
+      </p:sp>
+      <p:sp>
+        <p:nvSpPr>
+          <p:cNvPr id="21" name="TextBox 20"/>
+          <p:cNvSpPr txBox="1"/>
+          <p:nvPr/>
+        </p:nvSpPr>
+        <p:spPr>
+          <a:xfrm>
+            <a:off x="640080" y="3675888"/>
+            <a:ext cx="3611880" cy="457200"/>
+          </a:xfrm>
+          <a:prstGeom prst="rect">
+            <a:avLst/>
+          </a:prstGeom>
+          <a:noFill/>
+        </p:spPr>
+        <p:txBody>
+          <a:bodyPr wrap="square" lIns="0" tIns="0" rIns="0" bIns="0">
+            <a:spAutoFit/>
+          </a:bodyPr>
+          <a:lstStyle/>
+          <a:p>
+            <a:pPr algn="l"/>
+            <a:r>
+              <a:rPr sz="1000" b="0">
+                <a:solidFill>
+                  <a:srgbClr val="2D3748"/>
+                </a:solidFill>
+                <a:latin typeface="Calibri"/>
+              </a:rPr>
+              <a:t>Researcher retries up to 3× on Verifier rejection. After that, Adjudicator decides. Confidence below 0.6 escalates to a human queue.</a:t>
+            </a:r>
+          </a:p>
+        </p:txBody>
+      </p:sp>
+      <p:sp>
+        <p:nvSpPr>
+          <p:cNvPr id="22" name="Rectangle 21"/>
+          <p:cNvSpPr/>
+          <p:nvPr/>
+        </p:nvSpPr>
+        <p:spPr>
+          <a:xfrm>
+            <a:off x="4709160" y="3291840"/>
+            <a:ext cx="3977640" cy="868680"/>
           </a:xfrm>
           <a:prstGeom prst="rect">
             <a:avLst/>
@@ -6550,47 +5682,83 @@
           <a:lstStyle/>
           <a:p>
             <a:pPr algn="ctr"/>
-          </a:p>
-        </p:txBody>
-      </p:sp>
-      <p:sp>
-        <p:nvSpPr>
-          <p:cNvPr id="27" name="TextBox 26"/>
-          <p:cNvSpPr txBox="1"/>
-          <p:nvPr/>
-        </p:nvSpPr>
-        <p:spPr>
-          <a:xfrm>
-            <a:off x="640080" y="4160520"/>
-            <a:ext cx="7863840" cy="365760"/>
-          </a:xfrm>
-          <a:prstGeom prst="rect">
-            <a:avLst/>
-          </a:prstGeom>
-          <a:noFill/>
-        </p:spPr>
-        <p:txBody>
-          <a:bodyPr wrap="square" lIns="0" rIns="0" tIns="0" bIns="0">
+            <a:endParaRPr/>
+          </a:p>
+        </p:txBody>
+      </p:sp>
+      <p:sp>
+        <p:nvSpPr>
+          <p:cNvPr id="23" name="TextBox 22"/>
+          <p:cNvSpPr txBox="1"/>
+          <p:nvPr/>
+        </p:nvSpPr>
+        <p:spPr>
+          <a:xfrm>
+            <a:off x="4892040" y="3401568"/>
+            <a:ext cx="3611880" cy="292608"/>
+          </a:xfrm>
+          <a:prstGeom prst="rect">
+            <a:avLst/>
+          </a:prstGeom>
+          <a:noFill/>
+        </p:spPr>
+        <p:txBody>
+          <a:bodyPr wrap="square" lIns="0" tIns="0" rIns="0" bIns="0">
             <a:spAutoFit/>
           </a:bodyPr>
           <a:lstStyle/>
           <a:p>
             <a:pPr algn="l"/>
             <a:r>
-              <a:rPr sz="1050" b="0">
+              <a:rPr sz="900" b="1">
+                <a:solidFill>
+                  <a:srgbClr val="C53030"/>
+                </a:solidFill>
+                <a:latin typeface="Calibri"/>
+              </a:rPr>
+              <a:t>DATA-LEAKAGE GUARDRAIL (D24)</a:t>
+            </a:r>
+          </a:p>
+        </p:txBody>
+      </p:sp>
+      <p:sp>
+        <p:nvSpPr>
+          <p:cNvPr id="24" name="TextBox 23"/>
+          <p:cNvSpPr txBox="1"/>
+          <p:nvPr/>
+        </p:nvSpPr>
+        <p:spPr>
+          <a:xfrm>
+            <a:off x="4892040" y="3675888"/>
+            <a:ext cx="3611880" cy="457200"/>
+          </a:xfrm>
+          <a:prstGeom prst="rect">
+            <a:avLst/>
+          </a:prstGeom>
+          <a:noFill/>
+        </p:spPr>
+        <p:txBody>
+          <a:bodyPr wrap="square" lIns="0" tIns="0" rIns="0" bIns="0">
+            <a:spAutoFit/>
+          </a:bodyPr>
+          <a:lstStyle/>
+          <a:p>
+            <a:pPr algn="l"/>
+            <a:r>
+              <a:rPr sz="1000" b="0">
                 <a:solidFill>
                   <a:srgbClr val="2D3748"/>
                 </a:solidFill>
                 <a:latin typeface="Calibri"/>
               </a:rPr>
-              <a:t>Each layer fails in a different way. The audit catches whatever the four runtime layers miss; 30 historical violations were purged when D24 landed.</a:t>
-            </a:r>
-          </a:p>
-        </p:txBody>
-      </p:sp>
-      <p:sp>
-        <p:nvSpPr>
-          <p:cNvPr id="28" name="TextBox 27"/>
+              <a:t>ODMI publications (data.europa.eu and mirrors) banned at five layers: search, fetch, validator, prompts, audit. An audit script catches anything that slips through.</a:t>
+            </a:r>
+          </a:p>
+        </p:txBody>
+      </p:sp>
+      <p:sp>
+        <p:nvSpPr>
+          <p:cNvPr id="25" name="TextBox 24"/>
           <p:cNvSpPr txBox="1"/>
           <p:nvPr/>
         </p:nvSpPr>
@@ -6605,7 +5773,7 @@
           <a:noFill/>
         </p:spPr>
         <p:txBody>
-          <a:bodyPr wrap="square" lIns="0" rIns="0" tIns="0" bIns="0">
+          <a:bodyPr wrap="square" lIns="0" tIns="0" rIns="0" bIns="0">
             <a:spAutoFit/>
           </a:bodyPr>
           <a:lstStyle/>
@@ -6618,7 +5786,7 @@
                 </a:solidFill>
                 <a:latin typeface="Calibri"/>
               </a:rPr>
-              <a:t>ODMI Agent Swarm  ·  Benjy Bream  ·  King's College London  ·  4 / 8</a:t>
+              <a:t>ODMI Agent Swarm  ·  Benjy Bream  ·  King's College London  ·  3 / 8</a:t>
             </a:r>
           </a:p>
         </p:txBody>
@@ -6632,7 +5800,7 @@
 </file>
 
 <file path=ppt/slides/slide5.xml><?xml version="1.0" encoding="utf-8"?>
-<p:sld xmlns:a="http://schemas.openxmlformats.org/drawingml/2006/main" xmlns:p="http://schemas.openxmlformats.org/presentationml/2006/main" xmlns:r="http://schemas.openxmlformats.org/officeDocument/2006/relationships">
+<p:sld xmlns:a="http://schemas.openxmlformats.org/drawingml/2006/main" xmlns:r="http://schemas.openxmlformats.org/officeDocument/2006/relationships" xmlns:p="http://schemas.openxmlformats.org/presentationml/2006/main">
   <p:cSld>
     <p:spTree>
       <p:nvGrpSpPr>
@@ -6640,7 +5808,14 @@
         <p:cNvGrpSpPr/>
         <p:nvPr/>
       </p:nvGrpSpPr>
-      <p:grpSpPr/>
+      <p:grpSpPr>
+        <a:xfrm>
+          <a:off x="0" y="0"/>
+          <a:ext cx="0" cy="0"/>
+          <a:chOff x="0" y="0"/>
+          <a:chExt cx="0" cy="0"/>
+        </a:xfrm>
+      </p:grpSpPr>
       <p:sp>
         <p:nvSpPr>
           <p:cNvPr id="2" name="Rectangle 1"/>
@@ -6681,6 +5856,7 @@
           <a:lstStyle/>
           <a:p>
             <a:pPr algn="ctr"/>
+            <a:endParaRPr/>
           </a:p>
         </p:txBody>
       </p:sp>
@@ -6701,7 +5877,7 @@
           <a:noFill/>
         </p:spPr>
         <p:txBody>
-          <a:bodyPr wrap="square" lIns="0" rIns="0" tIns="0" bIns="0">
+          <a:bodyPr wrap="square" lIns="0" tIns="0" rIns="0" bIns="0">
             <a:spAutoFit/>
           </a:bodyPr>
           <a:lstStyle/>
@@ -6736,7 +5912,7 @@
           <a:noFill/>
         </p:spPr>
         <p:txBody>
-          <a:bodyPr wrap="square" lIns="0" rIns="0" tIns="0" bIns="0">
+          <a:bodyPr wrap="square" lIns="0" tIns="0" rIns="0" bIns="0">
             <a:spAutoFit/>
           </a:bodyPr>
           <a:lstStyle/>
@@ -6796,6 +5972,7 @@
           <a:lstStyle/>
           <a:p>
             <a:pPr algn="ctr"/>
+            <a:endParaRPr/>
           </a:p>
         </p:txBody>
       </p:sp>
@@ -6886,7 +6063,7 @@
           <a:noFill/>
         </p:spPr>
         <p:txBody>
-          <a:bodyPr wrap="square" lIns="0" rIns="0" tIns="0" bIns="0">
+          <a:bodyPr wrap="square" lIns="0" tIns="0" rIns="0" bIns="0">
             <a:spAutoFit/>
           </a:bodyPr>
           <a:lstStyle/>
@@ -6921,7 +6098,7 @@
           <a:noFill/>
         </p:spPr>
         <p:txBody>
-          <a:bodyPr wrap="square" lIns="0" rIns="0" tIns="0" bIns="0">
+          <a:bodyPr wrap="square" lIns="0" tIns="0" rIns="0" bIns="0">
             <a:spAutoFit/>
           </a:bodyPr>
           <a:lstStyle/>
@@ -6956,7 +6133,7 @@
           <a:noFill/>
         </p:spPr>
         <p:txBody>
-          <a:bodyPr wrap="square" lIns="0" rIns="0" tIns="0" bIns="0">
+          <a:bodyPr wrap="square" lIns="0" tIns="0" rIns="0" bIns="0">
             <a:spAutoFit/>
           </a:bodyPr>
           <a:lstStyle/>
@@ -6991,7 +6168,7 @@
           <a:noFill/>
         </p:spPr>
         <p:txBody>
-          <a:bodyPr wrap="square" lIns="0" rIns="0" tIns="0" bIns="0">
+          <a:bodyPr wrap="square" lIns="0" tIns="0" rIns="0" bIns="0">
             <a:spAutoFit/>
           </a:bodyPr>
           <a:lstStyle/>
@@ -7026,7 +6203,7 @@
           <a:noFill/>
         </p:spPr>
         <p:txBody>
-          <a:bodyPr wrap="square" lIns="0" rIns="0" tIns="0" bIns="0">
+          <a:bodyPr wrap="square" lIns="0" tIns="0" rIns="0" bIns="0">
             <a:spAutoFit/>
           </a:bodyPr>
           <a:lstStyle/>
@@ -7061,7 +6238,7 @@
           <a:noFill/>
         </p:spPr>
         <p:txBody>
-          <a:bodyPr wrap="square" lIns="0" rIns="0" tIns="0" bIns="0">
+          <a:bodyPr wrap="square" lIns="0" tIns="0" rIns="0" bIns="0">
             <a:spAutoFit/>
           </a:bodyPr>
           <a:lstStyle/>
@@ -7096,7 +6273,7 @@
           <a:noFill/>
         </p:spPr>
         <p:txBody>
-          <a:bodyPr wrap="square" lIns="0" rIns="0" tIns="0" bIns="0">
+          <a:bodyPr wrap="square" lIns="0" tIns="0" rIns="0" bIns="0">
             <a:spAutoFit/>
           </a:bodyPr>
           <a:lstStyle/>
@@ -7131,7 +6308,7 @@
           <a:noFill/>
         </p:spPr>
         <p:txBody>
-          <a:bodyPr wrap="square" lIns="0" rIns="0" tIns="0" bIns="0">
+          <a:bodyPr wrap="square" lIns="0" tIns="0" rIns="0" bIns="0">
             <a:spAutoFit/>
           </a:bodyPr>
           <a:lstStyle/>
@@ -7166,7 +6343,7 @@
           <a:noFill/>
         </p:spPr>
         <p:txBody>
-          <a:bodyPr wrap="square" lIns="0" rIns="0" tIns="0" bIns="0">
+          <a:bodyPr wrap="square" lIns="0" tIns="0" rIns="0" bIns="0">
             <a:spAutoFit/>
           </a:bodyPr>
           <a:lstStyle/>
@@ -7201,7 +6378,7 @@
           <a:noFill/>
         </p:spPr>
         <p:txBody>
-          <a:bodyPr wrap="square" lIns="0" rIns="0" tIns="0" bIns="0">
+          <a:bodyPr wrap="square" lIns="0" tIns="0" rIns="0" bIns="0">
             <a:spAutoFit/>
           </a:bodyPr>
           <a:lstStyle/>
@@ -7236,7 +6413,7 @@
           <a:noFill/>
         </p:spPr>
         <p:txBody>
-          <a:bodyPr wrap="square" lIns="0" rIns="0" tIns="0" bIns="0">
+          <a:bodyPr wrap="square" lIns="0" tIns="0" rIns="0" bIns="0">
             <a:spAutoFit/>
           </a:bodyPr>
           <a:lstStyle/>
@@ -7271,7 +6448,7 @@
           <a:noFill/>
         </p:spPr>
         <p:txBody>
-          <a:bodyPr wrap="square" lIns="0" rIns="0" tIns="0" bIns="0">
+          <a:bodyPr wrap="square" lIns="0" tIns="0" rIns="0" bIns="0">
             <a:spAutoFit/>
           </a:bodyPr>
           <a:lstStyle/>
@@ -7306,7 +6483,7 @@
           <a:noFill/>
         </p:spPr>
         <p:txBody>
-          <a:bodyPr wrap="square" lIns="0" rIns="0" tIns="0" bIns="0">
+          <a:bodyPr wrap="square" lIns="0" tIns="0" rIns="0" bIns="0">
             <a:spAutoFit/>
           </a:bodyPr>
           <a:lstStyle/>
@@ -7341,7 +6518,7 @@
           <a:noFill/>
         </p:spPr>
         <p:txBody>
-          <a:bodyPr wrap="square" lIns="0" rIns="0" tIns="0" bIns="0">
+          <a:bodyPr wrap="square" lIns="0" tIns="0" rIns="0" bIns="0">
             <a:spAutoFit/>
           </a:bodyPr>
           <a:lstStyle/>
@@ -7376,7 +6553,7 @@
           <a:noFill/>
         </p:spPr>
         <p:txBody>
-          <a:bodyPr wrap="square" lIns="0" rIns="0" tIns="0" bIns="0">
+          <a:bodyPr wrap="square" lIns="0" tIns="0" rIns="0" bIns="0">
             <a:spAutoFit/>
           </a:bodyPr>
           <a:lstStyle/>
@@ -7411,7 +6588,7 @@
           <a:noFill/>
         </p:spPr>
         <p:txBody>
-          <a:bodyPr wrap="square" lIns="0" rIns="0" tIns="0" bIns="0">
+          <a:bodyPr wrap="square" lIns="0" tIns="0" rIns="0" bIns="0">
             <a:spAutoFit/>
           </a:bodyPr>
           <a:lstStyle/>
@@ -7446,7 +6623,7 @@
           <a:noFill/>
         </p:spPr>
         <p:txBody>
-          <a:bodyPr wrap="square" lIns="0" rIns="0" tIns="0" bIns="0">
+          <a:bodyPr wrap="square" lIns="0" tIns="0" rIns="0" bIns="0">
             <a:spAutoFit/>
           </a:bodyPr>
           <a:lstStyle/>
@@ -7481,7 +6658,7 @@
           <a:noFill/>
         </p:spPr>
         <p:txBody>
-          <a:bodyPr wrap="square" lIns="0" rIns="0" tIns="0" bIns="0">
+          <a:bodyPr wrap="square" lIns="0" tIns="0" rIns="0" bIns="0">
             <a:spAutoFit/>
           </a:bodyPr>
           <a:lstStyle/>
@@ -7516,7 +6693,7 @@
           <a:noFill/>
         </p:spPr>
         <p:txBody>
-          <a:bodyPr wrap="square" lIns="0" rIns="0" tIns="0" bIns="0">
+          <a:bodyPr wrap="square" lIns="0" tIns="0" rIns="0" bIns="0">
             <a:spAutoFit/>
           </a:bodyPr>
           <a:lstStyle/>
@@ -7551,7 +6728,7 @@
           <a:noFill/>
         </p:spPr>
         <p:txBody>
-          <a:bodyPr wrap="square" lIns="0" rIns="0" tIns="0" bIns="0">
+          <a:bodyPr wrap="square" lIns="0" tIns="0" rIns="0" bIns="0">
             <a:spAutoFit/>
           </a:bodyPr>
           <a:lstStyle/>
@@ -7586,7 +6763,7 @@
           <a:noFill/>
         </p:spPr>
         <p:txBody>
-          <a:bodyPr wrap="square" lIns="0" rIns="0" tIns="0" bIns="0">
+          <a:bodyPr wrap="square" lIns="0" tIns="0" rIns="0" bIns="0">
             <a:spAutoFit/>
           </a:bodyPr>
           <a:lstStyle/>
@@ -7621,7 +6798,7 @@
           <a:noFill/>
         </p:spPr>
         <p:txBody>
-          <a:bodyPr wrap="square" lIns="0" rIns="0" tIns="0" bIns="0">
+          <a:bodyPr wrap="square" lIns="0" tIns="0" rIns="0" bIns="0">
             <a:spAutoFit/>
           </a:bodyPr>
           <a:lstStyle/>
@@ -7656,7 +6833,7 @@
           <a:noFill/>
         </p:spPr>
         <p:txBody>
-          <a:bodyPr wrap="square" lIns="0" rIns="0" tIns="0" bIns="0">
+          <a:bodyPr wrap="square" lIns="0" tIns="0" rIns="0" bIns="0">
             <a:spAutoFit/>
           </a:bodyPr>
           <a:lstStyle/>
@@ -7691,7 +6868,7 @@
           <a:noFill/>
         </p:spPr>
         <p:txBody>
-          <a:bodyPr wrap="square" lIns="0" rIns="0" tIns="0" bIns="0">
+          <a:bodyPr wrap="square" lIns="0" tIns="0" rIns="0" bIns="0">
             <a:spAutoFit/>
           </a:bodyPr>
           <a:lstStyle/>
@@ -7726,7 +6903,7 @@
           <a:noFill/>
         </p:spPr>
         <p:txBody>
-          <a:bodyPr wrap="square" lIns="0" rIns="0" tIns="0" bIns="0">
+          <a:bodyPr wrap="square" lIns="0" tIns="0" rIns="0" bIns="0">
             <a:spAutoFit/>
           </a:bodyPr>
           <a:lstStyle/>
@@ -7761,7 +6938,7 @@
           <a:noFill/>
         </p:spPr>
         <p:txBody>
-          <a:bodyPr wrap="square" lIns="0" rIns="0" tIns="0" bIns="0">
+          <a:bodyPr wrap="square" lIns="0" tIns="0" rIns="0" bIns="0">
             <a:spAutoFit/>
           </a:bodyPr>
           <a:lstStyle/>
@@ -7796,7 +6973,7 @@
           <a:noFill/>
         </p:spPr>
         <p:txBody>
-          <a:bodyPr wrap="square" lIns="0" rIns="0" tIns="0" bIns="0">
+          <a:bodyPr wrap="square" lIns="0" tIns="0" rIns="0" bIns="0">
             <a:spAutoFit/>
           </a:bodyPr>
           <a:lstStyle/>
@@ -7831,7 +7008,7 @@
           <a:noFill/>
         </p:spPr>
         <p:txBody>
-          <a:bodyPr wrap="square" lIns="0" rIns="0" tIns="0" bIns="0">
+          <a:bodyPr wrap="square" lIns="0" tIns="0" rIns="0" bIns="0">
             <a:spAutoFit/>
           </a:bodyPr>
           <a:lstStyle/>
@@ -7866,7 +7043,7 @@
           <a:noFill/>
         </p:spPr>
         <p:txBody>
-          <a:bodyPr wrap="square" lIns="0" rIns="0" tIns="0" bIns="0">
+          <a:bodyPr wrap="square" lIns="0" tIns="0" rIns="0" bIns="0">
             <a:spAutoFit/>
           </a:bodyPr>
           <a:lstStyle/>
@@ -7901,7 +7078,7 @@
           <a:noFill/>
         </p:spPr>
         <p:txBody>
-          <a:bodyPr wrap="square" lIns="0" rIns="0" tIns="0" bIns="0">
+          <a:bodyPr wrap="square" lIns="0" tIns="0" rIns="0" bIns="0">
             <a:spAutoFit/>
           </a:bodyPr>
           <a:lstStyle/>
@@ -7936,7 +7113,7 @@
           <a:noFill/>
         </p:spPr>
         <p:txBody>
-          <a:bodyPr wrap="square" lIns="0" rIns="0" tIns="0" bIns="0">
+          <a:bodyPr wrap="square" lIns="0" tIns="0" rIns="0" bIns="0">
             <a:spAutoFit/>
           </a:bodyPr>
           <a:lstStyle/>
@@ -7971,7 +7148,7 @@
           <a:noFill/>
         </p:spPr>
         <p:txBody>
-          <a:bodyPr wrap="square" lIns="0" rIns="0" tIns="0" bIns="0">
+          <a:bodyPr wrap="square" lIns="0" tIns="0" rIns="0" bIns="0">
             <a:spAutoFit/>
           </a:bodyPr>
           <a:lstStyle/>
@@ -8006,7 +7183,7 @@
           <a:noFill/>
         </p:spPr>
         <p:txBody>
-          <a:bodyPr wrap="square" lIns="0" rIns="0" tIns="0" bIns="0">
+          <a:bodyPr wrap="square" lIns="0" tIns="0" rIns="0" bIns="0">
             <a:spAutoFit/>
           </a:bodyPr>
           <a:lstStyle/>
@@ -8041,7 +7218,7 @@
           <a:noFill/>
         </p:spPr>
         <p:txBody>
-          <a:bodyPr wrap="square" lIns="0" rIns="0" tIns="0" bIns="0">
+          <a:bodyPr wrap="square" lIns="0" tIns="0" rIns="0" bIns="0">
             <a:spAutoFit/>
           </a:bodyPr>
           <a:lstStyle/>
@@ -8076,7 +7253,7 @@
           <a:noFill/>
         </p:spPr>
         <p:txBody>
-          <a:bodyPr wrap="square" lIns="0" rIns="0" tIns="0" bIns="0">
+          <a:bodyPr wrap="square" lIns="0" tIns="0" rIns="0" bIns="0">
             <a:spAutoFit/>
           </a:bodyPr>
           <a:lstStyle/>
@@ -8111,7 +7288,7 @@
           <a:noFill/>
         </p:spPr>
         <p:txBody>
-          <a:bodyPr wrap="square" lIns="0" rIns="0" tIns="0" bIns="0">
+          <a:bodyPr wrap="square" lIns="0" tIns="0" rIns="0" bIns="0">
             <a:spAutoFit/>
           </a:bodyPr>
           <a:lstStyle/>
@@ -8146,7 +7323,7 @@
           <a:noFill/>
         </p:spPr>
         <p:txBody>
-          <a:bodyPr wrap="square" lIns="0" rIns="0" tIns="0" bIns="0">
+          <a:bodyPr wrap="square" lIns="0" tIns="0" rIns="0" bIns="0">
             <a:spAutoFit/>
           </a:bodyPr>
           <a:lstStyle/>
@@ -8181,7 +7358,7 @@
           <a:noFill/>
         </p:spPr>
         <p:txBody>
-          <a:bodyPr wrap="square" lIns="0" rIns="0" tIns="0" bIns="0">
+          <a:bodyPr wrap="square" lIns="0" tIns="0" rIns="0" bIns="0">
             <a:spAutoFit/>
           </a:bodyPr>
           <a:lstStyle/>
@@ -8216,7 +7393,7 @@
           <a:noFill/>
         </p:spPr>
         <p:txBody>
-          <a:bodyPr wrap="square" lIns="0" rIns="0" tIns="0" bIns="0">
+          <a:bodyPr wrap="square" lIns="0" tIns="0" rIns="0" bIns="0">
             <a:spAutoFit/>
           </a:bodyPr>
           <a:lstStyle/>
@@ -8251,7 +7428,7 @@
           <a:noFill/>
         </p:spPr>
         <p:txBody>
-          <a:bodyPr wrap="square" lIns="0" rIns="0" tIns="0" bIns="0">
+          <a:bodyPr wrap="square" lIns="0" tIns="0" rIns="0" bIns="0">
             <a:spAutoFit/>
           </a:bodyPr>
           <a:lstStyle/>
@@ -8286,7 +7463,7 @@
           <a:noFill/>
         </p:spPr>
         <p:txBody>
-          <a:bodyPr wrap="square" lIns="0" rIns="0" tIns="0" bIns="0">
+          <a:bodyPr wrap="square" lIns="0" tIns="0" rIns="0" bIns="0">
             <a:spAutoFit/>
           </a:bodyPr>
           <a:lstStyle/>
@@ -8321,7 +7498,7 @@
           <a:noFill/>
         </p:spPr>
         <p:txBody>
-          <a:bodyPr wrap="square" lIns="0" rIns="0" tIns="0" bIns="0">
+          <a:bodyPr wrap="square" lIns="0" tIns="0" rIns="0" bIns="0">
             <a:spAutoFit/>
           </a:bodyPr>
           <a:lstStyle/>
@@ -8356,7 +7533,7 @@
           <a:noFill/>
         </p:spPr>
         <p:txBody>
-          <a:bodyPr wrap="square" lIns="0" rIns="0" tIns="0" bIns="0">
+          <a:bodyPr wrap="square" lIns="0" tIns="0" rIns="0" bIns="0">
             <a:spAutoFit/>
           </a:bodyPr>
           <a:lstStyle/>
@@ -8391,7 +7568,7 @@
           <a:noFill/>
         </p:spPr>
         <p:txBody>
-          <a:bodyPr wrap="square" lIns="0" rIns="0" tIns="0" bIns="0">
+          <a:bodyPr wrap="square" lIns="0" tIns="0" rIns="0" bIns="0">
             <a:spAutoFit/>
           </a:bodyPr>
           <a:lstStyle/>
@@ -8426,7 +7603,7 @@
           <a:noFill/>
         </p:spPr>
         <p:txBody>
-          <a:bodyPr wrap="square" lIns="0" rIns="0" tIns="0" bIns="0">
+          <a:bodyPr wrap="square" lIns="0" tIns="0" rIns="0" bIns="0">
             <a:spAutoFit/>
           </a:bodyPr>
           <a:lstStyle/>
@@ -8461,7 +7638,7 @@
           <a:noFill/>
         </p:spPr>
         <p:txBody>
-          <a:bodyPr wrap="square" lIns="0" rIns="0" tIns="0" bIns="0">
+          <a:bodyPr wrap="square" lIns="0" tIns="0" rIns="0" bIns="0">
             <a:spAutoFit/>
           </a:bodyPr>
           <a:lstStyle/>
@@ -8496,7 +7673,7 @@
           <a:noFill/>
         </p:spPr>
         <p:txBody>
-          <a:bodyPr wrap="square" lIns="0" rIns="0" tIns="0" bIns="0">
+          <a:bodyPr wrap="square" lIns="0" tIns="0" rIns="0" bIns="0">
             <a:spAutoFit/>
           </a:bodyPr>
           <a:lstStyle/>
@@ -8531,7 +7708,7 @@
           <a:noFill/>
         </p:spPr>
         <p:txBody>
-          <a:bodyPr wrap="square" lIns="0" rIns="0" tIns="0" bIns="0">
+          <a:bodyPr wrap="square" lIns="0" tIns="0" rIns="0" bIns="0">
             <a:spAutoFit/>
           </a:bodyPr>
           <a:lstStyle/>
@@ -8566,7 +7743,7 @@
           <a:noFill/>
         </p:spPr>
         <p:txBody>
-          <a:bodyPr wrap="square" lIns="0" rIns="0" tIns="0" bIns="0">
+          <a:bodyPr wrap="square" lIns="0" tIns="0" rIns="0" bIns="0">
             <a:spAutoFit/>
           </a:bodyPr>
           <a:lstStyle/>
@@ -8601,7 +7778,7 @@
           <a:noFill/>
         </p:spPr>
         <p:txBody>
-          <a:bodyPr wrap="square" lIns="0" rIns="0" tIns="0" bIns="0">
+          <a:bodyPr wrap="square" lIns="0" tIns="0" rIns="0" bIns="0">
             <a:spAutoFit/>
           </a:bodyPr>
           <a:lstStyle/>
@@ -8636,7 +7813,7 @@
           <a:noFill/>
         </p:spPr>
         <p:txBody>
-          <a:bodyPr wrap="square" lIns="0" rIns="0" tIns="0" bIns="0">
+          <a:bodyPr wrap="square" lIns="0" tIns="0" rIns="0" bIns="0">
             <a:spAutoFit/>
           </a:bodyPr>
           <a:lstStyle/>
@@ -8671,7 +7848,7 @@
           <a:noFill/>
         </p:spPr>
         <p:txBody>
-          <a:bodyPr wrap="square" lIns="0" rIns="0" tIns="0" bIns="0">
+          <a:bodyPr wrap="square" lIns="0" tIns="0" rIns="0" bIns="0">
             <a:spAutoFit/>
           </a:bodyPr>
           <a:lstStyle/>
@@ -8706,7 +7883,7 @@
           <a:noFill/>
         </p:spPr>
         <p:txBody>
-          <a:bodyPr wrap="square" lIns="0" rIns="0" tIns="0" bIns="0">
+          <a:bodyPr wrap="square" lIns="0" tIns="0" rIns="0" bIns="0">
             <a:spAutoFit/>
           </a:bodyPr>
           <a:lstStyle/>
@@ -8741,7 +7918,7 @@
           <a:noFill/>
         </p:spPr>
         <p:txBody>
-          <a:bodyPr wrap="square" lIns="0" rIns="0" tIns="0" bIns="0">
+          <a:bodyPr wrap="square" lIns="0" tIns="0" rIns="0" bIns="0">
             <a:spAutoFit/>
           </a:bodyPr>
           <a:lstStyle/>
@@ -8776,7 +7953,7 @@
           <a:noFill/>
         </p:spPr>
         <p:txBody>
-          <a:bodyPr wrap="square" lIns="0" rIns="0" tIns="0" bIns="0">
+          <a:bodyPr wrap="square" lIns="0" tIns="0" rIns="0" bIns="0">
             <a:spAutoFit/>
           </a:bodyPr>
           <a:lstStyle/>
@@ -8811,7 +7988,7 @@
           <a:noFill/>
         </p:spPr>
         <p:txBody>
-          <a:bodyPr wrap="square" lIns="0" rIns="0" tIns="0" bIns="0">
+          <a:bodyPr wrap="square" lIns="0" tIns="0" rIns="0" bIns="0">
             <a:spAutoFit/>
           </a:bodyPr>
           <a:lstStyle/>
@@ -8846,7 +8023,7 @@
           <a:noFill/>
         </p:spPr>
         <p:txBody>
-          <a:bodyPr wrap="square" lIns="0" rIns="0" tIns="0" bIns="0">
+          <a:bodyPr wrap="square" lIns="0" tIns="0" rIns="0" bIns="0">
             <a:spAutoFit/>
           </a:bodyPr>
           <a:lstStyle/>
@@ -8881,7 +8058,7 @@
           <a:noFill/>
         </p:spPr>
         <p:txBody>
-          <a:bodyPr wrap="square" lIns="0" rIns="0" tIns="0" bIns="0">
+          <a:bodyPr wrap="square" lIns="0" tIns="0" rIns="0" bIns="0">
             <a:spAutoFit/>
           </a:bodyPr>
           <a:lstStyle/>
@@ -8916,7 +8093,7 @@
           <a:noFill/>
         </p:spPr>
         <p:txBody>
-          <a:bodyPr wrap="square" lIns="0" rIns="0" tIns="0" bIns="0">
+          <a:bodyPr wrap="square" lIns="0" tIns="0" rIns="0" bIns="0">
             <a:spAutoFit/>
           </a:bodyPr>
           <a:lstStyle/>
@@ -8951,7 +8128,7 @@
           <a:noFill/>
         </p:spPr>
         <p:txBody>
-          <a:bodyPr wrap="square" lIns="0" rIns="0" tIns="0" bIns="0">
+          <a:bodyPr wrap="square" lIns="0" tIns="0" rIns="0" bIns="0">
             <a:spAutoFit/>
           </a:bodyPr>
           <a:lstStyle/>
@@ -8986,7 +8163,7 @@
           <a:noFill/>
         </p:spPr>
         <p:txBody>
-          <a:bodyPr wrap="square" lIns="0" rIns="0" tIns="0" bIns="0">
+          <a:bodyPr wrap="square" lIns="0" tIns="0" rIns="0" bIns="0">
             <a:spAutoFit/>
           </a:bodyPr>
           <a:lstStyle/>
@@ -9021,7 +8198,7 @@
           <a:noFill/>
         </p:spPr>
         <p:txBody>
-          <a:bodyPr wrap="square" lIns="0" rIns="0" tIns="0" bIns="0">
+          <a:bodyPr wrap="square" lIns="0" tIns="0" rIns="0" bIns="0">
             <a:spAutoFit/>
           </a:bodyPr>
           <a:lstStyle/>
@@ -9056,7 +8233,7 @@
           <a:noFill/>
         </p:spPr>
         <p:txBody>
-          <a:bodyPr wrap="square" lIns="0" rIns="0" tIns="0" bIns="0">
+          <a:bodyPr wrap="square" lIns="0" tIns="0" rIns="0" bIns="0">
             <a:spAutoFit/>
           </a:bodyPr>
           <a:lstStyle/>
@@ -9114,6 +8291,7 @@
           <a:lstStyle/>
           <a:p>
             <a:pPr algn="ctr"/>
+            <a:endParaRPr/>
           </a:p>
         </p:txBody>
       </p:sp>
@@ -9134,7 +8312,7 @@
           <a:noFill/>
         </p:spPr>
         <p:txBody>
-          <a:bodyPr wrap="square" lIns="0" rIns="0" tIns="0" bIns="0">
+          <a:bodyPr wrap="square" lIns="0" tIns="0" rIns="0" bIns="0">
             <a:spAutoFit/>
           </a:bodyPr>
           <a:lstStyle/>
@@ -9169,7 +8347,7 @@
           <a:noFill/>
         </p:spPr>
         <p:txBody>
-          <a:bodyPr wrap="square" lIns="0" rIns="0" tIns="0" bIns="0">
+          <a:bodyPr wrap="square" lIns="0" tIns="0" rIns="0" bIns="0">
             <a:spAutoFit/>
           </a:bodyPr>
           <a:lstStyle/>
@@ -9227,6 +8405,7 @@
           <a:lstStyle/>
           <a:p>
             <a:pPr algn="ctr"/>
+            <a:endParaRPr/>
           </a:p>
         </p:txBody>
       </p:sp>
@@ -9270,6 +8449,7 @@
           <a:lstStyle/>
           <a:p>
             <a:pPr algn="ctr"/>
+            <a:endParaRPr/>
           </a:p>
         </p:txBody>
       </p:sp>
@@ -9290,7 +8470,7 @@
           <a:noFill/>
         </p:spPr>
         <p:txBody>
-          <a:bodyPr wrap="square" lIns="0" rIns="0" tIns="0" bIns="0">
+          <a:bodyPr wrap="square" lIns="0" tIns="0" rIns="0" bIns="0">
             <a:spAutoFit/>
           </a:bodyPr>
           <a:lstStyle/>
@@ -9325,7 +8505,7 @@
           <a:noFill/>
         </p:spPr>
         <p:txBody>
-          <a:bodyPr wrap="square" lIns="0" rIns="0" tIns="0" bIns="0">
+          <a:bodyPr wrap="square" lIns="0" tIns="0" rIns="0" bIns="0">
             <a:spAutoFit/>
           </a:bodyPr>
           <a:lstStyle/>
@@ -9383,6 +8563,7 @@
           <a:lstStyle/>
           <a:p>
             <a:pPr algn="ctr"/>
+            <a:endParaRPr/>
           </a:p>
         </p:txBody>
       </p:sp>
@@ -9403,7 +8584,7 @@
           <a:noFill/>
         </p:spPr>
         <p:txBody>
-          <a:bodyPr wrap="square" lIns="0" rIns="0" tIns="0" bIns="0">
+          <a:bodyPr wrap="square" lIns="0" tIns="0" rIns="0" bIns="0">
             <a:spAutoFit/>
           </a:bodyPr>
           <a:lstStyle/>
@@ -9438,7 +8619,7 @@
           <a:noFill/>
         </p:spPr>
         <p:txBody>
-          <a:bodyPr wrap="square" lIns="0" rIns="0" tIns="0" bIns="0">
+          <a:bodyPr wrap="square" lIns="0" tIns="0" rIns="0" bIns="0">
             <a:spAutoFit/>
           </a:bodyPr>
           <a:lstStyle/>
@@ -9496,6 +8677,7 @@
           <a:lstStyle/>
           <a:p>
             <a:pPr algn="ctr"/>
+            <a:endParaRPr/>
           </a:p>
         </p:txBody>
       </p:sp>
@@ -9516,7 +8698,7 @@
           <a:noFill/>
         </p:spPr>
         <p:txBody>
-          <a:bodyPr wrap="square" lIns="0" rIns="0" tIns="0" bIns="0">
+          <a:bodyPr wrap="square" lIns="0" tIns="0" rIns="0" bIns="0">
             <a:spAutoFit/>
           </a:bodyPr>
           <a:lstStyle/>
@@ -9551,7 +8733,7 @@
           <a:noFill/>
         </p:spPr>
         <p:txBody>
-          <a:bodyPr wrap="square" lIns="0" rIns="0" tIns="0" bIns="0">
+          <a:bodyPr wrap="square" lIns="0" tIns="0" rIns="0" bIns="0">
             <a:spAutoFit/>
           </a:bodyPr>
           <a:lstStyle/>
@@ -9609,6 +8791,7 @@
           <a:lstStyle/>
           <a:p>
             <a:pPr algn="ctr"/>
+            <a:endParaRPr/>
           </a:p>
         </p:txBody>
       </p:sp>
@@ -9629,7 +8812,7 @@
           <a:noFill/>
         </p:spPr>
         <p:txBody>
-          <a:bodyPr wrap="square" lIns="0" rIns="0" tIns="0" bIns="0">
+          <a:bodyPr wrap="square" lIns="0" tIns="0" rIns="0" bIns="0">
             <a:spAutoFit/>
           </a:bodyPr>
           <a:lstStyle/>
@@ -9687,6 +8870,7 @@
           <a:lstStyle/>
           <a:p>
             <a:pPr algn="ctr"/>
+            <a:endParaRPr/>
           </a:p>
         </p:txBody>
       </p:sp>
@@ -9707,7 +8891,7 @@
           <a:noFill/>
         </p:spPr>
         <p:txBody>
-          <a:bodyPr wrap="square" lIns="0" rIns="0" tIns="0" bIns="0">
+          <a:bodyPr wrap="square" lIns="0" tIns="0" rIns="0" bIns="0">
             <a:spAutoFit/>
           </a:bodyPr>
           <a:lstStyle/>
@@ -9765,6 +8949,7 @@
           <a:lstStyle/>
           <a:p>
             <a:pPr algn="ctr"/>
+            <a:endParaRPr/>
           </a:p>
         </p:txBody>
       </p:sp>
@@ -9785,7 +8970,7 @@
           <a:noFill/>
         </p:spPr>
         <p:txBody>
-          <a:bodyPr wrap="square" lIns="0" rIns="0" tIns="0" bIns="0">
+          <a:bodyPr wrap="square" lIns="0" tIns="0" rIns="0" bIns="0">
             <a:spAutoFit/>
           </a:bodyPr>
           <a:lstStyle/>
@@ -9820,7 +9005,7 @@
           <a:noFill/>
         </p:spPr>
         <p:txBody>
-          <a:bodyPr wrap="square" lIns="0" rIns="0" tIns="0" bIns="0">
+          <a:bodyPr wrap="square" lIns="0" tIns="0" rIns="0" bIns="0">
             <a:spAutoFit/>
           </a:bodyPr>
           <a:lstStyle/>
@@ -9847,7 +9032,7 @@
 </file>
 
 <file path=ppt/slides/slide6.xml><?xml version="1.0" encoding="utf-8"?>
-<p:sld xmlns:a="http://schemas.openxmlformats.org/drawingml/2006/main" xmlns:p="http://schemas.openxmlformats.org/presentationml/2006/main" xmlns:r="http://schemas.openxmlformats.org/officeDocument/2006/relationships">
+<p:sld xmlns:a="http://schemas.openxmlformats.org/drawingml/2006/main" xmlns:r="http://schemas.openxmlformats.org/officeDocument/2006/relationships" xmlns:p="http://schemas.openxmlformats.org/presentationml/2006/main">
   <p:cSld>
     <p:spTree>
       <p:nvGrpSpPr>
@@ -9855,7 +9040,14 @@
         <p:cNvGrpSpPr/>
         <p:nvPr/>
       </p:nvGrpSpPr>
-      <p:grpSpPr/>
+      <p:grpSpPr>
+        <a:xfrm>
+          <a:off x="0" y="0"/>
+          <a:ext cx="0" cy="0"/>
+          <a:chOff x="0" y="0"/>
+          <a:chExt cx="0" cy="0"/>
+        </a:xfrm>
+      </p:grpSpPr>
       <p:sp>
         <p:nvSpPr>
           <p:cNvPr id="2" name="Rectangle 1"/>
@@ -9896,6 +9088,7 @@
           <a:lstStyle/>
           <a:p>
             <a:pPr algn="ctr"/>
+            <a:endParaRPr/>
           </a:p>
         </p:txBody>
       </p:sp>
@@ -9916,7 +9109,7 @@
           <a:noFill/>
         </p:spPr>
         <p:txBody>
-          <a:bodyPr wrap="square" lIns="0" rIns="0" tIns="0" bIns="0">
+          <a:bodyPr wrap="square" lIns="0" tIns="0" rIns="0" bIns="0">
             <a:spAutoFit/>
           </a:bodyPr>
           <a:lstStyle/>
@@ -9951,7 +9144,7 @@
           <a:noFill/>
         </p:spPr>
         <p:txBody>
-          <a:bodyPr wrap="square" lIns="0" rIns="0" tIns="0" bIns="0">
+          <a:bodyPr wrap="square" lIns="0" tIns="0" rIns="0" bIns="0">
             <a:spAutoFit/>
           </a:bodyPr>
           <a:lstStyle/>
@@ -10011,6 +9204,7 @@
           <a:lstStyle/>
           <a:p>
             <a:pPr algn="ctr"/>
+            <a:endParaRPr/>
           </a:p>
         </p:txBody>
       </p:sp>
@@ -10054,6 +9248,7 @@
           <a:lstStyle/>
           <a:p>
             <a:pPr algn="ctr"/>
+            <a:endParaRPr/>
           </a:p>
         </p:txBody>
       </p:sp>
@@ -10126,7 +9321,7 @@
           <a:noFill/>
         </p:spPr>
         <p:txBody>
-          <a:bodyPr wrap="square" lIns="0" rIns="0" tIns="0" bIns="0">
+          <a:bodyPr wrap="square" lIns="0" tIns="0" rIns="0" bIns="0">
             <a:spAutoFit/>
           </a:bodyPr>
           <a:lstStyle/>
@@ -10161,7 +9356,7 @@
           <a:noFill/>
         </p:spPr>
         <p:txBody>
-          <a:bodyPr wrap="square" lIns="0" rIns="0" tIns="0" bIns="0">
+          <a:bodyPr wrap="square" lIns="0" tIns="0" rIns="0" bIns="0">
             <a:spAutoFit/>
           </a:bodyPr>
           <a:lstStyle/>
@@ -10221,6 +9416,7 @@
           <a:lstStyle/>
           <a:p>
             <a:pPr algn="ctr"/>
+            <a:endParaRPr/>
           </a:p>
         </p:txBody>
       </p:sp>
@@ -10264,6 +9460,7 @@
           <a:lstStyle/>
           <a:p>
             <a:pPr algn="ctr"/>
+            <a:endParaRPr/>
           </a:p>
         </p:txBody>
       </p:sp>
@@ -10336,7 +9533,7 @@
           <a:noFill/>
         </p:spPr>
         <p:txBody>
-          <a:bodyPr wrap="square" lIns="0" rIns="0" tIns="0" bIns="0">
+          <a:bodyPr wrap="square" lIns="0" tIns="0" rIns="0" bIns="0">
             <a:spAutoFit/>
           </a:bodyPr>
           <a:lstStyle/>
@@ -10362,7 +9559,7 @@
         </p:nvSpPr>
         <p:spPr>
           <a:xfrm>
-            <a:off x="5669280" y="1874520"/>
+            <a:off x="5669280" y="1993392"/>
             <a:ext cx="3063240" cy="960120"/>
           </a:xfrm>
           <a:prstGeom prst="rect">
@@ -10371,20 +9568,38 @@
           <a:noFill/>
         </p:spPr>
         <p:txBody>
-          <a:bodyPr wrap="square" lIns="0" rIns="0" tIns="0" bIns="0">
+          <a:bodyPr wrap="square" lIns="0" tIns="0" rIns="0" bIns="0">
             <a:spAutoFit/>
           </a:bodyPr>
           <a:lstStyle/>
           <a:p>
             <a:pPr algn="l"/>
             <a:r>
-              <a:rPr sz="1050" b="0">
+              <a:rPr sz="1050" b="0" dirty="0">
                 <a:solidFill>
                   <a:srgbClr val="2D3748"/>
                 </a:solidFill>
                 <a:latin typeface="Calibri"/>
               </a:rPr>
-              <a:t>One card per finalised pair: question, swarm answer with evidence quote, clickable source URL, plus ODMI's recorded answer and explanation. Match / differ badge at a glance.</a:t>
+              <a:t>One card per </a:t>
+            </a:r>
+            <a:r>
+              <a:rPr sz="1050" b="0" dirty="0" err="1">
+                <a:solidFill>
+                  <a:srgbClr val="2D3748"/>
+                </a:solidFill>
+                <a:latin typeface="Calibri"/>
+              </a:rPr>
+              <a:t>finalised</a:t>
+            </a:r>
+            <a:r>
+              <a:rPr sz="1050" b="0" dirty="0">
+                <a:solidFill>
+                  <a:srgbClr val="2D3748"/>
+                </a:solidFill>
+                <a:latin typeface="Calibri"/>
+              </a:rPr>
+              <a:t> pair: question, swarm answer with evidence quote, clickable source URL, plus ODMI's recorded answer and explanation. Match / differ badge at a glance.</a:t>
             </a:r>
           </a:p>
         </p:txBody>
@@ -10431,6 +9646,7 @@
           <a:lstStyle/>
           <a:p>
             <a:pPr algn="ctr"/>
+            <a:endParaRPr/>
           </a:p>
         </p:txBody>
       </p:sp>
@@ -10474,6 +9690,7 @@
           <a:lstStyle/>
           <a:p>
             <a:pPr algn="ctr"/>
+            <a:endParaRPr/>
           </a:p>
         </p:txBody>
       </p:sp>
@@ -10546,7 +9763,7 @@
           <a:noFill/>
         </p:spPr>
         <p:txBody>
-          <a:bodyPr wrap="square" lIns="0" rIns="0" tIns="0" bIns="0">
+          <a:bodyPr wrap="square" lIns="0" tIns="0" rIns="0" bIns="0">
             <a:spAutoFit/>
           </a:bodyPr>
           <a:lstStyle/>
@@ -10581,7 +9798,7 @@
           <a:noFill/>
         </p:spPr>
         <p:txBody>
-          <a:bodyPr wrap="square" lIns="0" rIns="0" tIns="0" bIns="0">
+          <a:bodyPr wrap="square" lIns="0" tIns="0" rIns="0" bIns="0">
             <a:spAutoFit/>
           </a:bodyPr>
           <a:lstStyle/>
@@ -10641,6 +9858,7 @@
           <a:lstStyle/>
           <a:p>
             <a:pPr algn="ctr"/>
+            <a:endParaRPr/>
           </a:p>
         </p:txBody>
       </p:sp>
@@ -10684,6 +9902,7 @@
           <a:lstStyle/>
           <a:p>
             <a:pPr algn="ctr"/>
+            <a:endParaRPr/>
           </a:p>
         </p:txBody>
       </p:sp>
@@ -10756,7 +9975,7 @@
           <a:noFill/>
         </p:spPr>
         <p:txBody>
-          <a:bodyPr wrap="square" lIns="0" rIns="0" tIns="0" bIns="0">
+          <a:bodyPr wrap="square" lIns="0" tIns="0" rIns="0" bIns="0">
             <a:spAutoFit/>
           </a:bodyPr>
           <a:lstStyle/>
@@ -10791,7 +10010,7 @@
           <a:noFill/>
         </p:spPr>
         <p:txBody>
-          <a:bodyPr wrap="square" lIns="0" rIns="0" tIns="0" bIns="0">
+          <a:bodyPr wrap="square" lIns="0" tIns="0" rIns="0" bIns="0">
             <a:spAutoFit/>
           </a:bodyPr>
           <a:lstStyle/>
@@ -10826,7 +10045,7 @@
           <a:noFill/>
         </p:spPr>
         <p:txBody>
-          <a:bodyPr wrap="square" lIns="0" rIns="0" tIns="0" bIns="0">
+          <a:bodyPr wrap="square" lIns="0" tIns="0" rIns="0" bIns="0">
             <a:spAutoFit/>
           </a:bodyPr>
           <a:lstStyle/>
@@ -10853,7 +10072,7 @@
 </file>
 
 <file path=ppt/slides/slide7.xml><?xml version="1.0" encoding="utf-8"?>
-<p:sld xmlns:a="http://schemas.openxmlformats.org/drawingml/2006/main" xmlns:p="http://schemas.openxmlformats.org/presentationml/2006/main" xmlns:r="http://schemas.openxmlformats.org/officeDocument/2006/relationships">
+<p:sld xmlns:a="http://schemas.openxmlformats.org/drawingml/2006/main" xmlns:r="http://schemas.openxmlformats.org/officeDocument/2006/relationships" xmlns:p="http://schemas.openxmlformats.org/presentationml/2006/main">
   <p:cSld>
     <p:spTree>
       <p:nvGrpSpPr>
@@ -10861,7 +10080,14 @@
         <p:cNvGrpSpPr/>
         <p:nvPr/>
       </p:nvGrpSpPr>
-      <p:grpSpPr/>
+      <p:grpSpPr>
+        <a:xfrm>
+          <a:off x="0" y="0"/>
+          <a:ext cx="0" cy="0"/>
+          <a:chOff x="0" y="0"/>
+          <a:chExt cx="0" cy="0"/>
+        </a:xfrm>
+      </p:grpSpPr>
       <p:sp>
         <p:nvSpPr>
           <p:cNvPr id="2" name="Rectangle 1"/>
@@ -10902,6 +10128,7 @@
           <a:lstStyle/>
           <a:p>
             <a:pPr algn="ctr"/>
+            <a:endParaRPr/>
           </a:p>
         </p:txBody>
       </p:sp>
@@ -10922,7 +10149,7 @@
           <a:noFill/>
         </p:spPr>
         <p:txBody>
-          <a:bodyPr wrap="square" lIns="0" rIns="0" tIns="0" bIns="0">
+          <a:bodyPr wrap="square" lIns="0" tIns="0" rIns="0" bIns="0">
             <a:spAutoFit/>
           </a:bodyPr>
           <a:lstStyle/>
@@ -10935,7 +10162,7 @@
                 </a:solidFill>
                 <a:latin typeface="Calibri"/>
               </a:rPr>
-              <a:t>SWARM IN ACTION</a:t>
+              <a:t>SHORT TERM AND LONG TERM</a:t>
             </a:r>
           </a:p>
         </p:txBody>
@@ -10957,197 +10184,7 @@
           <a:noFill/>
         </p:spPr>
         <p:txBody>
-          <a:bodyPr wrap="square" lIns="0" rIns="0" tIns="0" bIns="0">
-            <a:spAutoFit/>
-          </a:bodyPr>
-          <a:lstStyle/>
-          <a:p>
-            <a:pPr algn="l"/>
-            <a:r>
-              <a:rPr sz="2400" b="1">
-                <a:solidFill>
-                  <a:srgbClr val="FFFFFF"/>
-                </a:solidFill>
-                <a:latin typeface="Calibri"/>
-              </a:rPr>
-              <a:t>Run Console — live view while the swarm runs</a:t>
-            </a:r>
-          </a:p>
-        </p:txBody>
-      </p:sp>
-      <p:pic>
-        <p:nvPicPr>
-          <p:cNvPr id="5" name="Picture 4" descr="swarm_in_action.png"/>
-          <p:cNvPicPr>
-            <a:picLocks noChangeAspect="1"/>
-          </p:cNvPicPr>
-          <p:nvPr/>
-        </p:nvPicPr>
-        <p:blipFill>
-          <a:blip r:embed="rId2"/>
-          <a:stretch>
-            <a:fillRect/>
-          </a:stretch>
-        </p:blipFill>
-        <p:spPr>
-          <a:xfrm>
-            <a:off x="457200" y="1051560"/>
-            <a:ext cx="8229600" cy="3794760"/>
-          </a:xfrm>
-          <a:prstGeom prst="rect">
-            <a:avLst/>
-          </a:prstGeom>
-        </p:spPr>
-      </p:pic>
-      <p:sp>
-        <p:nvSpPr>
-          <p:cNvPr id="6" name="TextBox 5"/>
-          <p:cNvSpPr txBox="1"/>
-          <p:nvPr/>
-        </p:nvSpPr>
-        <p:spPr>
-          <a:xfrm>
-            <a:off x="457200" y="4850892"/>
-            <a:ext cx="8229600" cy="182880"/>
-          </a:xfrm>
-          <a:prstGeom prst="rect">
-            <a:avLst/>
-          </a:prstGeom>
-          <a:noFill/>
-        </p:spPr>
-        <p:txBody>
-          <a:bodyPr wrap="square" lIns="0" rIns="0" tIns="0" bIns="0">
-            <a:spAutoFit/>
-          </a:bodyPr>
-          <a:lstStyle/>
-          <a:p>
-            <a:pPr algn="l"/>
-            <a:r>
-              <a:rPr sz="800" b="0">
-                <a:solidFill>
-                  <a:srgbClr val="718096"/>
-                </a:solidFill>
-                <a:latin typeface="Calibri"/>
-              </a:rPr>
-              <a:t>ODMI Agent Swarm  ·  Benjy Bream  ·  King's College London  ·  7 / 8</a:t>
-            </a:r>
-          </a:p>
-        </p:txBody>
-      </p:sp>
-    </p:spTree>
-  </p:cSld>
-  <p:clrMapOvr>
-    <a:masterClrMapping/>
-  </p:clrMapOvr>
-</p:sld>
-</file>
-
-<file path=ppt/slides/slide8.xml><?xml version="1.0" encoding="utf-8"?>
-<p:sld xmlns:a="http://schemas.openxmlformats.org/drawingml/2006/main" xmlns:p="http://schemas.openxmlformats.org/presentationml/2006/main" xmlns:r="http://schemas.openxmlformats.org/officeDocument/2006/relationships">
-  <p:cSld>
-    <p:spTree>
-      <p:nvGrpSpPr>
-        <p:cNvPr id="1" name=""/>
-        <p:cNvGrpSpPr/>
-        <p:nvPr/>
-      </p:nvGrpSpPr>
-      <p:grpSpPr/>
-      <p:sp>
-        <p:nvSpPr>
-          <p:cNvPr id="2" name="Rectangle 1"/>
-          <p:cNvSpPr/>
-          <p:nvPr/>
-        </p:nvSpPr>
-        <p:spPr>
-          <a:xfrm>
-            <a:off x="0" y="0"/>
-            <a:ext cx="9144000" cy="960120"/>
-          </a:xfrm>
-          <a:prstGeom prst="rect">
-            <a:avLst/>
-          </a:prstGeom>
-          <a:solidFill>
-            <a:srgbClr val="1A202C"/>
-          </a:solidFill>
-          <a:ln>
-            <a:noFill/>
-          </a:ln>
-        </p:spPr>
-        <p:style>
-          <a:lnRef idx="1">
-            <a:schemeClr val="accent1"/>
-          </a:lnRef>
-          <a:fillRef idx="3">
-            <a:schemeClr val="accent1"/>
-          </a:fillRef>
-          <a:effectRef idx="2">
-            <a:schemeClr val="accent1"/>
-          </a:effectRef>
-          <a:fontRef idx="minor">
-            <a:schemeClr val="lt1"/>
-          </a:fontRef>
-        </p:style>
-        <p:txBody>
-          <a:bodyPr rtlCol="0" anchor="ctr"/>
-          <a:lstStyle/>
-          <a:p>
-            <a:pPr algn="ctr"/>
-          </a:p>
-        </p:txBody>
-      </p:sp>
-      <p:sp>
-        <p:nvSpPr>
-          <p:cNvPr id="3" name="TextBox 2"/>
-          <p:cNvSpPr txBox="1"/>
-          <p:nvPr/>
-        </p:nvSpPr>
-        <p:spPr>
-          <a:xfrm>
-            <a:off x="457200" y="164592"/>
-            <a:ext cx="7772400" cy="228600"/>
-          </a:xfrm>
-          <a:prstGeom prst="rect">
-            <a:avLst/>
-          </a:prstGeom>
-          <a:noFill/>
-        </p:spPr>
-        <p:txBody>
-          <a:bodyPr wrap="square" lIns="0" rIns="0" tIns="0" bIns="0">
-            <a:spAutoFit/>
-          </a:bodyPr>
-          <a:lstStyle/>
-          <a:p>
-            <a:pPr algn="l"/>
-            <a:r>
-              <a:rPr sz="900" b="1">
-                <a:solidFill>
-                  <a:srgbClr val="14B8A6"/>
-                </a:solidFill>
-                <a:latin typeface="Calibri"/>
-              </a:rPr>
-              <a:t>SHORT TERM AND LONG TERM</a:t>
-            </a:r>
-          </a:p>
-        </p:txBody>
-      </p:sp>
-      <p:sp>
-        <p:nvSpPr>
-          <p:cNvPr id="4" name="TextBox 3"/>
-          <p:cNvSpPr txBox="1"/>
-          <p:nvPr/>
-        </p:nvSpPr>
-        <p:spPr>
-          <a:xfrm>
-            <a:off x="457200" y="384048"/>
-            <a:ext cx="7772400" cy="502920"/>
-          </a:xfrm>
-          <a:prstGeom prst="rect">
-            <a:avLst/>
-          </a:prstGeom>
-          <a:noFill/>
-        </p:spPr>
-        <p:txBody>
-          <a:bodyPr wrap="square" lIns="0" rIns="0" tIns="0" bIns="0">
+          <a:bodyPr wrap="square" lIns="0" tIns="0" rIns="0" bIns="0">
             <a:spAutoFit/>
           </a:bodyPr>
           <a:lstStyle/>
@@ -11207,6 +10244,7 @@
           <a:lstStyle/>
           <a:p>
             <a:pPr algn="ctr"/>
+            <a:endParaRPr/>
           </a:p>
         </p:txBody>
       </p:sp>
@@ -11250,6 +10288,7 @@
           <a:lstStyle/>
           <a:p>
             <a:pPr algn="ctr"/>
+            <a:endParaRPr/>
           </a:p>
         </p:txBody>
       </p:sp>
@@ -11270,7 +10309,7 @@
           <a:noFill/>
         </p:spPr>
         <p:txBody>
-          <a:bodyPr wrap="square" lIns="0" rIns="0" tIns="0" bIns="0">
+          <a:bodyPr wrap="square" lIns="0" tIns="0" rIns="0" bIns="0">
             <a:spAutoFit/>
           </a:bodyPr>
           <a:lstStyle/>
@@ -11305,7 +10344,7 @@
           <a:noFill/>
         </p:spPr>
         <p:txBody>
-          <a:bodyPr wrap="square" lIns="0" rIns="0" tIns="0" bIns="0">
+          <a:bodyPr wrap="square" lIns="0" tIns="0" rIns="0" bIns="0">
             <a:spAutoFit/>
           </a:bodyPr>
           <a:lstStyle/>
@@ -11340,7 +10379,7 @@
           <a:noFill/>
         </p:spPr>
         <p:txBody>
-          <a:bodyPr wrap="square" lIns="0" rIns="0" tIns="0" bIns="0">
+          <a:bodyPr wrap="square" lIns="0" tIns="0" rIns="0" bIns="0">
             <a:spAutoFit/>
           </a:bodyPr>
           <a:lstStyle/>
@@ -11398,6 +10437,7 @@
           <a:lstStyle/>
           <a:p>
             <a:pPr algn="ctr"/>
+            <a:endParaRPr/>
           </a:p>
         </p:txBody>
       </p:sp>
@@ -11418,7 +10458,7 @@
           <a:noFill/>
         </p:spPr>
         <p:txBody>
-          <a:bodyPr wrap="square" lIns="0" rIns="0" tIns="0" bIns="0">
+          <a:bodyPr wrap="square" lIns="0" tIns="0" rIns="0" bIns="0">
             <a:spAutoFit/>
           </a:bodyPr>
           <a:lstStyle/>
@@ -11453,7 +10493,7 @@
           <a:noFill/>
         </p:spPr>
         <p:txBody>
-          <a:bodyPr wrap="square" lIns="0" rIns="0" tIns="0" bIns="0">
+          <a:bodyPr wrap="square" lIns="0" tIns="0" rIns="0" bIns="0">
             <a:spAutoFit/>
           </a:bodyPr>
           <a:lstStyle/>
@@ -11511,6 +10551,7 @@
           <a:lstStyle/>
           <a:p>
             <a:pPr algn="ctr"/>
+            <a:endParaRPr/>
           </a:p>
         </p:txBody>
       </p:sp>
@@ -11531,7 +10572,7 @@
           <a:noFill/>
         </p:spPr>
         <p:txBody>
-          <a:bodyPr wrap="square" lIns="0" rIns="0" tIns="0" bIns="0">
+          <a:bodyPr wrap="square" lIns="0" tIns="0" rIns="0" bIns="0">
             <a:spAutoFit/>
           </a:bodyPr>
           <a:lstStyle/>
@@ -11558,28 +10599,76 @@
         <p:spPr>
           <a:xfrm>
             <a:off x="1051560" y="3944112"/>
-            <a:ext cx="3520440" cy="682752"/>
-          </a:xfrm>
-          <a:prstGeom prst="rect">
-            <a:avLst/>
-          </a:prstGeom>
-          <a:noFill/>
-        </p:spPr>
-        <p:txBody>
-          <a:bodyPr wrap="square" lIns="0" rIns="0" tIns="0" bIns="0">
+            <a:ext cx="3520440" cy="307777"/>
+          </a:xfrm>
+          <a:prstGeom prst="rect">
+            <a:avLst/>
+          </a:prstGeom>
+          <a:noFill/>
+        </p:spPr>
+        <p:txBody>
+          <a:bodyPr wrap="square" lIns="0" tIns="0" rIns="0" bIns="0">
             <a:spAutoFit/>
           </a:bodyPr>
           <a:lstStyle/>
           <a:p>
             <a:pPr algn="l"/>
             <a:r>
-              <a:rPr sz="1000" b="0">
+              <a:rPr lang="en-GB" sz="1000" b="0" dirty="0">
                 <a:solidFill>
                   <a:srgbClr val="2D3748"/>
                 </a:solidFill>
                 <a:latin typeface="Calibri"/>
               </a:rPr>
-              <a:t>Four strategies on the same Researcher rows. Hallucination catch rate, false rejection rate, tokens per Verifier run.</a:t>
+              <a:t>Run experiments on different adversarial verifier </a:t>
+            </a:r>
+            <a:r>
+              <a:rPr sz="1000" b="0" dirty="0">
+                <a:solidFill>
+                  <a:srgbClr val="2D3748"/>
+                </a:solidFill>
+                <a:latin typeface="Calibri"/>
+              </a:rPr>
+              <a:t>strategies</a:t>
+            </a:r>
+            <a:r>
+              <a:rPr lang="en-GB" sz="1000" b="0" dirty="0">
+                <a:solidFill>
+                  <a:srgbClr val="2D3748"/>
+                </a:solidFill>
+                <a:latin typeface="Calibri"/>
+              </a:rPr>
+              <a:t>, testing:</a:t>
+            </a:r>
+          </a:p>
+          <a:p>
+            <a:pPr algn="l"/>
+            <a:r>
+              <a:rPr lang="en-GB" sz="1000" b="0" dirty="0">
+                <a:solidFill>
+                  <a:srgbClr val="2D3748"/>
+                </a:solidFill>
+                <a:latin typeface="Calibri"/>
+              </a:rPr>
+              <a:t>H</a:t>
+            </a:r>
+            <a:r>
+              <a:rPr sz="1000" b="0" dirty="0" err="1">
+                <a:solidFill>
+                  <a:srgbClr val="2D3748"/>
+                </a:solidFill>
+                <a:latin typeface="Calibri"/>
+              </a:rPr>
+              <a:t>allucination</a:t>
+            </a:r>
+            <a:r>
+              <a:rPr sz="1000" b="0" dirty="0">
+                <a:solidFill>
+                  <a:srgbClr val="2D3748"/>
+                </a:solidFill>
+                <a:latin typeface="Calibri"/>
+              </a:rPr>
+              <a:t> catch rate, false rejection rate, tokens per Verifier run.</a:t>
             </a:r>
           </a:p>
         </p:txBody>
@@ -11624,6 +10713,7 @@
           <a:lstStyle/>
           <a:p>
             <a:pPr algn="ctr"/>
+            <a:endParaRPr/>
           </a:p>
         </p:txBody>
       </p:sp>
@@ -11669,6 +10759,7 @@
           <a:lstStyle/>
           <a:p>
             <a:pPr algn="ctr"/>
+            <a:endParaRPr/>
           </a:p>
         </p:txBody>
       </p:sp>
@@ -11712,6 +10803,7 @@
           <a:lstStyle/>
           <a:p>
             <a:pPr algn="ctr"/>
+            <a:endParaRPr/>
           </a:p>
         </p:txBody>
       </p:sp>
@@ -11732,7 +10824,7 @@
           <a:noFill/>
         </p:spPr>
         <p:txBody>
-          <a:bodyPr wrap="square" lIns="0" rIns="0" tIns="0" bIns="0">
+          <a:bodyPr wrap="square" lIns="0" tIns="0" rIns="0" bIns="0">
             <a:spAutoFit/>
           </a:bodyPr>
           <a:lstStyle/>
@@ -11767,7 +10859,7 @@
           <a:noFill/>
         </p:spPr>
         <p:txBody>
-          <a:bodyPr wrap="square" lIns="0" rIns="0" tIns="0" bIns="0">
+          <a:bodyPr wrap="square" lIns="0" tIns="0" rIns="0" bIns="0">
             <a:spAutoFit/>
           </a:bodyPr>
           <a:lstStyle/>
@@ -11802,7 +10894,7 @@
           <a:noFill/>
         </p:spPr>
         <p:txBody>
-          <a:bodyPr wrap="square" lIns="0" rIns="0" tIns="0" bIns="0">
+          <a:bodyPr wrap="square" lIns="0" tIns="0" rIns="0" bIns="0">
             <a:spAutoFit/>
           </a:bodyPr>
           <a:lstStyle/>
@@ -11860,6 +10952,7 @@
           <a:lstStyle/>
           <a:p>
             <a:pPr algn="ctr"/>
+            <a:endParaRPr/>
           </a:p>
         </p:txBody>
       </p:sp>
@@ -11880,7 +10973,7 @@
           <a:noFill/>
         </p:spPr>
         <p:txBody>
-          <a:bodyPr wrap="square" lIns="0" rIns="0" tIns="0" bIns="0">
+          <a:bodyPr wrap="square" lIns="0" tIns="0" rIns="0" bIns="0">
             <a:spAutoFit/>
           </a:bodyPr>
           <a:lstStyle/>
@@ -11915,7 +11008,7 @@
           <a:noFill/>
         </p:spPr>
         <p:txBody>
-          <a:bodyPr wrap="square" lIns="0" rIns="0" tIns="0" bIns="0">
+          <a:bodyPr wrap="square" lIns="0" tIns="0" rIns="0" bIns="0">
             <a:spAutoFit/>
           </a:bodyPr>
           <a:lstStyle/>
@@ -11973,6 +11066,7 @@
           <a:lstStyle/>
           <a:p>
             <a:pPr algn="ctr"/>
+            <a:endParaRPr/>
           </a:p>
         </p:txBody>
       </p:sp>
@@ -11993,7 +11087,7 @@
           <a:noFill/>
         </p:spPr>
         <p:txBody>
-          <a:bodyPr wrap="square" lIns="0" rIns="0" tIns="0" bIns="0">
+          <a:bodyPr wrap="square" lIns="0" tIns="0" rIns="0" bIns="0">
             <a:spAutoFit/>
           </a:bodyPr>
           <a:lstStyle/>
@@ -12028,7 +11122,7 @@
           <a:noFill/>
         </p:spPr>
         <p:txBody>
-          <a:bodyPr wrap="square" lIns="0" rIns="0" tIns="0" bIns="0">
+          <a:bodyPr wrap="square" lIns="0" tIns="0" rIns="0" bIns="0">
             <a:spAutoFit/>
           </a:bodyPr>
           <a:lstStyle/>
@@ -12086,6 +11180,7 @@
           <a:lstStyle/>
           <a:p>
             <a:pPr algn="ctr"/>
+            <a:endParaRPr/>
           </a:p>
         </p:txBody>
       </p:sp>
@@ -12106,7 +11201,7 @@
           <a:noFill/>
         </p:spPr>
         <p:txBody>
-          <a:bodyPr wrap="square" lIns="0" rIns="0" tIns="0" bIns="0">
+          <a:bodyPr wrap="square" lIns="0" tIns="0" rIns="0" bIns="0">
             <a:spAutoFit/>
           </a:bodyPr>
           <a:lstStyle/>

--- a/docs/PROGRESS_SLIDES_2026-05-14.pptx
+++ b/docs/PROGRESS_SLIDES_2026-05-14.pptx
@@ -4203,7 +4203,7 @@
         <p:spPr>
           <a:xfrm>
             <a:off x="6954012" y="1563624"/>
-            <a:ext cx="1632204" cy="548640"/>
+            <a:ext cx="1632204" cy="276999"/>
           </a:xfrm>
           <a:prstGeom prst="rect">
             <a:avLst/>
@@ -4218,7 +4218,7 @@
           <a:p>
             <a:pPr algn="l"/>
             <a:r>
-              <a:rPr sz="2200" b="1">
+              <a:rPr b="1" dirty="0">
                 <a:solidFill>
                   <a:srgbClr val="1A202C"/>
                 </a:solidFill>
@@ -4226,6 +4226,21 @@
               </a:rPr>
               <a:t>£8.11</a:t>
             </a:r>
+            <a:r>
+              <a:rPr lang="en-GB" b="1" dirty="0">
+                <a:solidFill>
+                  <a:srgbClr val="1A202C"/>
+                </a:solidFill>
+                <a:latin typeface="Calibri"/>
+              </a:rPr>
+              <a:t> Equivalent</a:t>
+            </a:r>
+            <a:endParaRPr b="1" dirty="0">
+              <a:solidFill>
+                <a:srgbClr val="1A202C"/>
+              </a:solidFill>
+              <a:latin typeface="Calibri"/>
+            </a:endParaRPr>
           </a:p>
         </p:txBody>
       </p:sp>
@@ -4238,7 +4253,7 @@
         <p:spPr>
           <a:xfrm>
             <a:off x="6954012" y="2148840"/>
-            <a:ext cx="1632204" cy="274320"/>
+            <a:ext cx="1632204" cy="146194"/>
           </a:xfrm>
           <a:prstGeom prst="rect">
             <a:avLst/>
@@ -4253,13 +4268,31 @@
           <a:p>
             <a:pPr algn="l"/>
             <a:r>
-              <a:rPr sz="950" b="0">
+              <a:rPr sz="950" b="0" dirty="0">
                 <a:solidFill>
                   <a:srgbClr val="2D3748"/>
                 </a:solidFill>
                 <a:latin typeface="Calibri"/>
               </a:rPr>
-              <a:t>Via CLIProxyAPI on Claude Max.</a:t>
+              <a:t>Via </a:t>
+            </a:r>
+            <a:r>
+              <a:rPr sz="950" b="0" dirty="0" err="1">
+                <a:solidFill>
+                  <a:srgbClr val="2D3748"/>
+                </a:solidFill>
+                <a:latin typeface="Calibri"/>
+              </a:rPr>
+              <a:t>CLIProxyAPI</a:t>
+            </a:r>
+            <a:r>
+              <a:rPr sz="950" b="0" dirty="0">
+                <a:solidFill>
+                  <a:srgbClr val="2D3748"/>
+                </a:solidFill>
+                <a:latin typeface="Calibri"/>
+              </a:rPr>
+              <a:t> on Claude Max.</a:t>
             </a:r>
           </a:p>
         </p:txBody>
